--- a/downloads/presentations/modules/lesson-50-community-oversight-and-participatory-governance.pptx
+++ b/downloads/presentations/modules/lesson-50-community-oversight-and-participatory-governance.pptx
@@ -24,9 +24,11 @@
     <p:sldId id="272" r:id="rId18"/>
     <p:sldId id="273" r:id="rId19"/>
     <p:sldId id="274" r:id="rId20"/>
+    <p:sldId id="275" r:id="rId21"/>
+    <p:sldId id="276" r:id="rId22"/>
   </p:sldIdLst>
   <p:notesMasterIdLst>
-    <p:notesMasterId r:id="rId21"/>
+    <p:notesMasterId r:id="rId23"/>
   </p:notesMasterIdLst>
   <p:sldSz cx="12192000" cy="6858000"/>
   <p:notesSz cx="6858000" cy="12192000"/>
@@ -609,8 +611,10 @@
           <a:p>
             <a:r>
               <a:rPr lang="en-US" dirty="0"/>
-              <a:t>Application to AI-Supported Workflows
-Generative AI tools that produce public messages may benefit from community review for tone, trust, accessibility, and language. Predictive models used for outreach or allocation should include review of data representativeness and potential stigma. Agentic tools that trigger actions affecting residents should have clear community-informed escalation and correction pathways.</a:t>
+              <a:t>Technical and Governance Deep Dive
+Participatory governance should be matched to the impact of the use case. Internal productivity tools may not require community oversight, although they still require policy and privacy review. Tools that influence public communication, service access, enforcement, prioritization, outreach, or resource allocation may require deeper engagement. The higher the impact on communities, the stronger the case for involving community perspectives early.
+Engagement should be designed with care. Agencies should provide plain-language descriptions, realistic examples, data-use explanations, and clear questions for feedback. Meetings should be accessible, compensated when appropriate, linguistically inclusive, and scheduled in ways that support participation. Agencies should also explain what decisions are open for influence and what constraints exist because of law, funding, or public health authority.
+Follow-through is essential. Community members should know how their input was used, what changed because of engagement, and how concerns will be monitored after launch. Participatory governance is not a single listening session. It is an ongoing relationship between the agency and affected communities, especially when the AI use is consequential or long-term.</a:t>
             </a:r>
             <a:endParaRPr lang="en-US" dirty="0"/>
           </a:p>
@@ -698,10 +702,9 @@
           <a:p>
             <a:r>
               <a:rPr lang="en-US" dirty="0"/>
-              <a:t>Reflection Questions
-Which current or proposed AI use case in your agency raises this leadership or governance issue most clearly?
-Who currently has authority to make decisions about this issue, and is that authority documented?
-What evidence would governance or leadership need before approving the use case?</a:t>
+              <a:t>Risks, Failure Modes, and Guardrails
+One risk is tokenistic engagement. Agencies may seek community input after key decisions have already been made. A guardrail is to engage before requirements, safeguards, and success measures are finalized.
+Another risk is technical opacity. Community participants may be asked to respond to vague or overly technical descriptions. A guardrail is to provide plain-language examples, visual workflows, and concrete descriptions of what the AI will and will not do.</a:t>
             </a:r>
             <a:endParaRPr lang="en-US" dirty="0"/>
           </a:p>
@@ -789,9 +792,8 @@
           <a:p>
             <a:r>
               <a:rPr lang="en-US" dirty="0"/>
-              <a:t>Reflection Questions
-Which staff, partners, or communities would be affected if this issue were handled poorly?
-What policy, process, or artifact should be created or updated after this module?</a:t>
+              <a:t>Application to AI-Supported Workflows
+Generative AI tools that produce public messages may benefit from community review for tone, trust, accessibility, and language. Predictive models used for outreach or allocation should include review of data representativeness and potential stigma. Agentic tools that trigger actions affecting residents should have clear community-informed escalation and correction pathways.</a:t>
             </a:r>
             <a:endParaRPr lang="en-US" dirty="0"/>
           </a:p>
@@ -879,8 +881,10 @@
           <a:p>
             <a:r>
               <a:rPr lang="en-US" dirty="0"/>
-              <a:t>Practical Exercise
-Develop a participatory governance plan for one AI use case. Include affected groups, engagement purpose, timing, materials, questions, accessibility supports, decision influence, feedback loop, and monitoring plan.</a:t>
+              <a:t>Reflection Questions
+Which current or proposed AI use case in your agency raises this leadership or governance issue most clearly?
+Who currently has authority to make decisions about this issue, and is that authority documented?
+What evidence would governance or leadership need before approving the use case?</a:t>
             </a:r>
             <a:endParaRPr lang="en-US" dirty="0"/>
           </a:p>
@@ -968,8 +972,9 @@
           <a:p>
             <a:r>
               <a:rPr lang="en-US" dirty="0"/>
-              <a:t>Before You Begin
-Choose a real or realistic public health AI use case. Document assumptions, unresolved questions, and which agency roles would need to review the artifact before it is adopted. The exercise should produce a work product that could support governance review, leadership discussion, implementation planning, or policy development.</a:t>
+              <a:t>Reflection Questions
+Which staff, partners, or communities would be affected if this issue were handled poorly?
+What policy, process, or artifact should be created or updated after this module?</a:t>
             </a:r>
             <a:endParaRPr lang="en-US" dirty="0"/>
           </a:p>
@@ -1057,8 +1062,8 @@
           <a:p>
             <a:r>
               <a:rPr lang="en-US" dirty="0"/>
-              <a:t>Expected Artifact or Evidence
-Participatory governance plan; community briefing outline; engagement questions; feedback response plan.</a:t>
+              <a:t>Practical Exercise
+Develop a participatory governance plan for one AI use case. Include affected groups, engagement purpose, timing, materials, questions, accessibility supports, decision influence, feedback loop, and monitoring plan.</a:t>
             </a:r>
             <a:endParaRPr lang="en-US" dirty="0"/>
           </a:p>
@@ -1146,8 +1151,8 @@
           <a:p>
             <a:r>
               <a:rPr lang="en-US" dirty="0"/>
-              <a:t>Expected Assignment
-Participatory governance plan; community briefing outline; engagement questions; feedback response plan.</a:t>
+              <a:t>Before You Begin
+Choose a real or realistic public health AI use case. Document assumptions, unresolved questions, and which agency roles would need to review the artifact before it is adopted. The exercise should produce a work product that could support governance review, leadership discussion, implementation planning, or policy development.</a:t>
             </a:r>
             <a:endParaRPr lang="en-US" dirty="0"/>
           </a:p>
@@ -1235,12 +1240,8 @@
           <a:p>
             <a:r>
               <a:rPr lang="en-US" dirty="0"/>
-              <a:t>Knowledge Check
-1. What is the strongest reason this module topic belongs in AI leadership and governance training?
-2. Which practice best supports accountable public health AI governance?
-3. When should an AI use case be escalated for leadership or governance review?
-4. What is weak evidence of completion for a leadership and governance module?
-5. What should leaders do when an AI use case has meaningful benefits but unresolved risks?</a:t>
+              <a:t>Expected Artifact or Evidence
+Participatory governance plan; community briefing outline; engagement questions; feedback response plan.</a:t>
             </a:r>
             <a:endParaRPr lang="en-US" dirty="0"/>
           </a:p>
@@ -1328,12 +1329,8 @@
           <a:p>
             <a:r>
               <a:rPr lang="en-US" dirty="0"/>
-              <a:t>References and Resources
-NIST Artificial Intelligence Risk Management Framework (AI RMF 1.0): https://www.nist.gov/itl/ai-risk-management-framework
-NIST Generative AI Profile: https://www.nist.gov/publications/artificial-intelligence-risk-management-framework-generative-artificial-intelligence
-NIST Privacy Framework
-CDC Public Health Data Strategy and Data Modernization resources: https://www.cdc.gov/public-health-data-strategy/php/about/index.html
-WHO Ethics and Governance of Artificial Intelligence for Health: https://www.who.int/publications/i/item/9789240029200</a:t>
+              <a:t>Expected Assignment
+Participatory governance plan; community briefing outline; engagement questions; feedback response plan.</a:t>
             </a:r>
             <a:endParaRPr lang="en-US" dirty="0"/>
           </a:p>
@@ -1421,9 +1418,12 @@
           <a:p>
             <a:r>
               <a:rPr lang="en-US" dirty="0"/>
-              <a:t>References and Resources
-OMB Memorandum M-24-10 on federal AI governance, risk management, and innovation, where relevant to public-sector governance models
-Agency strategic plans, procurement policies, privacy policies, cybersecurity policies, records policies, and equity plans</a:t>
+              <a:t>Knowledge Check
+1. What is the strongest reason this module topic belongs in AI leadership and governance training?
+2. Which practice best supports accountable public health AI governance?
+3. When should an AI use case be escalated for leadership or governance review?
+4. What is weak evidence of completion for a leadership and governance module?
+5. What should leaders do when an AI use case has meaningful benefits but unresolved risks?</a:t>
             </a:r>
             <a:endParaRPr lang="en-US" dirty="0"/>
           </a:p>
@@ -1557,6 +1557,189 @@
 </p:notes>
 </file>
 
+<file path=ppt/notesSlides/notesSlide20.xml><?xml version="1.0" encoding="utf-8"?>
+<p:notes xmlns:a="http://schemas.openxmlformats.org/drawingml/2006/main" xmlns:r="http://schemas.openxmlformats.org/officeDocument/2006/relationships" xmlns:p="http://schemas.openxmlformats.org/presentationml/2006/main">
+  <p:cSld>
+    <p:spTree>
+      <p:nvGrpSpPr>
+        <p:cNvPr id="1" name=""/>
+        <p:cNvGrpSpPr/>
+        <p:nvPr/>
+      </p:nvGrpSpPr>
+      <p:grpSpPr>
+        <a:xfrm>
+          <a:off x="0" y="0"/>
+          <a:ext cx="0" cy="0"/>
+          <a:chOff x="0" y="0"/>
+          <a:chExt cx="0" cy="0"/>
+        </a:xfrm>
+      </p:grpSpPr>
+      <p:sp>
+        <p:nvSpPr>
+          <p:cNvPr id="2" name="Slide Image Placeholder 1"/>
+          <p:cNvSpPr>
+            <a:spLocks noGrp="1" noRot="1" noChangeAspect="1"/>
+          </p:cNvSpPr>
+          <p:nvPr>
+            <p:ph type="sldImg"/>
+          </p:nvPr>
+        </p:nvSpPr>
+        <p:spPr/>
+      </p:sp>
+      <p:sp>
+        <p:nvSpPr>
+          <p:cNvPr id="3" name="Notes Placeholder 2"/>
+          <p:cNvSpPr>
+            <a:spLocks noGrp="1"/>
+          </p:cNvSpPr>
+          <p:nvPr>
+            <p:ph type="body" idx="1"/>
+          </p:nvPr>
+        </p:nvSpPr>
+        <p:spPr/>
+        <p:txBody>
+          <a:bodyPr/>
+          <a:lstStyle/>
+          <a:p>
+            <a:r>
+              <a:rPr lang="en-US" dirty="0"/>
+              <a:t>References and Resources
+NIST Artificial Intelligence Risk Management Framework (AI RMF 1.0): https://www.nist.gov/itl/ai-risk-management-framework
+NIST Generative AI Profile: https://www.nist.gov/publications/artificial-intelligence-risk-management-framework-generative-artificial-intelligence
+NIST Privacy Framework
+CDC Public Health Data Strategy and Data Modernization resources: https://www.cdc.gov/public-health-data-strategy/php/about/index.html
+WHO Ethics and Governance of Artificial Intelligence for Health: https://www.who.int/publications/i/item/9789240029200</a:t>
+            </a:r>
+            <a:endParaRPr lang="en-US" dirty="0"/>
+          </a:p>
+        </p:txBody>
+      </p:sp>
+      <p:sp>
+        <p:nvSpPr>
+          <p:cNvPr id="4" name="Slide Number Placeholder 3"/>
+          <p:cNvSpPr>
+            <a:spLocks noGrp="1"/>
+          </p:cNvSpPr>
+          <p:nvPr>
+            <p:ph type="sldNum" sz="quarter" idx="10"/>
+          </p:nvPr>
+        </p:nvSpPr>
+        <p:spPr/>
+        <p:txBody>
+          <a:bodyPr/>
+          <a:lstStyle/>
+          <a:p>
+            <a:fld id="{F7021451-1387-4CA6-816F-3879F97B5CBC}" type="slidenum">
+              <a:rPr lang="en-US"/>
+              <a:t>20</a:t>
+            </a:fld>
+            <a:endParaRPr lang="en-US"/>
+          </a:p>
+        </p:txBody>
+      </p:sp>
+    </p:spTree>
+    <p:extLst>
+      <p:ext uri="{BB962C8B-B14F-4D97-AF65-F5344CB8AC3E}">
+        <p14:creationId xmlns:p14="http://schemas.microsoft.com/office/powerpoint/2010/main" val="1024086991"/>
+      </p:ext>
+    </p:extLst>
+  </p:cSld>
+  <p:clrMapOvr>
+    <a:masterClrMapping/>
+  </p:clrMapOvr>
+</p:notes>
+</file>
+
+<file path=ppt/notesSlides/notesSlide21.xml><?xml version="1.0" encoding="utf-8"?>
+<p:notes xmlns:a="http://schemas.openxmlformats.org/drawingml/2006/main" xmlns:r="http://schemas.openxmlformats.org/officeDocument/2006/relationships" xmlns:p="http://schemas.openxmlformats.org/presentationml/2006/main">
+  <p:cSld>
+    <p:spTree>
+      <p:nvGrpSpPr>
+        <p:cNvPr id="1" name=""/>
+        <p:cNvGrpSpPr/>
+        <p:nvPr/>
+      </p:nvGrpSpPr>
+      <p:grpSpPr>
+        <a:xfrm>
+          <a:off x="0" y="0"/>
+          <a:ext cx="0" cy="0"/>
+          <a:chOff x="0" y="0"/>
+          <a:chExt cx="0" cy="0"/>
+        </a:xfrm>
+      </p:grpSpPr>
+      <p:sp>
+        <p:nvSpPr>
+          <p:cNvPr id="2" name="Slide Image Placeholder 1"/>
+          <p:cNvSpPr>
+            <a:spLocks noGrp="1" noRot="1" noChangeAspect="1"/>
+          </p:cNvSpPr>
+          <p:nvPr>
+            <p:ph type="sldImg"/>
+          </p:nvPr>
+        </p:nvSpPr>
+        <p:spPr/>
+      </p:sp>
+      <p:sp>
+        <p:nvSpPr>
+          <p:cNvPr id="3" name="Notes Placeholder 2"/>
+          <p:cNvSpPr>
+            <a:spLocks noGrp="1"/>
+          </p:cNvSpPr>
+          <p:nvPr>
+            <p:ph type="body" idx="1"/>
+          </p:nvPr>
+        </p:nvSpPr>
+        <p:spPr/>
+        <p:txBody>
+          <a:bodyPr/>
+          <a:lstStyle/>
+          <a:p>
+            <a:r>
+              <a:rPr lang="en-US" dirty="0"/>
+              <a:t>References and Resources
+OMB Memorandum M-24-10 on federal AI governance, risk management, and innovation, where relevant to public-sector governance models
+Agency strategic plans, procurement policies, privacy policies, cybersecurity policies, records policies, and equity plans</a:t>
+            </a:r>
+            <a:endParaRPr lang="en-US" dirty="0"/>
+          </a:p>
+        </p:txBody>
+      </p:sp>
+      <p:sp>
+        <p:nvSpPr>
+          <p:cNvPr id="4" name="Slide Number Placeholder 3"/>
+          <p:cNvSpPr>
+            <a:spLocks noGrp="1"/>
+          </p:cNvSpPr>
+          <p:nvPr>
+            <p:ph type="sldNum" sz="quarter" idx="10"/>
+          </p:nvPr>
+        </p:nvSpPr>
+        <p:spPr/>
+        <p:txBody>
+          <a:bodyPr/>
+          <a:lstStyle/>
+          <a:p>
+            <a:fld id="{F7021451-1387-4CA6-816F-3879F97B5CBC}" type="slidenum">
+              <a:rPr lang="en-US"/>
+              <a:t>21</a:t>
+            </a:fld>
+            <a:endParaRPr lang="en-US"/>
+          </a:p>
+        </p:txBody>
+      </p:sp>
+    </p:spTree>
+    <p:extLst>
+      <p:ext uri="{BB962C8B-B14F-4D97-AF65-F5344CB8AC3E}">
+        <p14:creationId xmlns:p14="http://schemas.microsoft.com/office/powerpoint/2010/main" val="1024086991"/>
+      </p:ext>
+    </p:extLst>
+  </p:cSld>
+  <p:clrMapOvr>
+    <a:masterClrMapping/>
+  </p:clrMapOvr>
+</p:notes>
+</file>
+
 <file path=ppt/notesSlides/notesSlide3.xml><?xml version="1.0" encoding="utf-8"?>
 <p:notes xmlns:a="http://schemas.openxmlformats.org/drawingml/2006/main" xmlns:r="http://schemas.openxmlformats.org/officeDocument/2006/relationships" xmlns:p="http://schemas.openxmlformats.org/presentationml/2006/main">
   <p:cSld>
@@ -1603,12 +1786,11 @@
           <a:p>
             <a:r>
               <a:rPr lang="en-US" dirty="0"/>
-              <a:t>Learning Objectives
-Explain why community oversight matters for public health AI.
-Identify AI use cases that warrant community engagement or participatory governance.
-Design a community engagement approach matched to risk, impact, and community context.
-Recognize risks of tokenism, extractive engagement, and inaccessible technical language.
-Produce a participatory governance plan for one AI use case.</a:t>
+              <a:t>Related Playbook Plays
+Play 7: Prioritize Use Cases - This lesson informs Play 7 by helping learners connect the lesson topic to prioritize use cases work in the AI Playbook sequence.
+Play 11: Build and Deploy AI Solutions - This lesson informs Play 11 by helping learners connect the lesson topic to build and deploy ai solutions work in the AI Playbook.
+Play 1: Vision &amp; Guardrails - This lesson informs Play 1 by helping learners connect the lesson topic to vision &amp; guardrails work in the AI Playbook sequence.
+Play 3: Establish AI Governance - This lesson informs Play 3 by helping learners connect the lesson topic to establish ai governance work in the AI Playbook sequence.</a:t>
             </a:r>
             <a:endParaRPr lang="en-US" dirty="0"/>
           </a:p>
@@ -1696,9 +1878,13 @@
           <a:p>
             <a:r>
               <a:rPr lang="en-US" dirty="0"/>
-              <a:t>Module Overview
-Public health AI governance should not be limited to internal agency review. When AI affects communities, services, surveillance, communication, prioritization, or resource allocation, agencies should consider how community perspectives will inform design, review, implementation, and monitoring. Participatory governance creates structured ways for affected people and community partners to shape AI use.
-This module helps leaders distinguish between informing the public, consulting communities, involving partners, and sharing oversight. It emphasizes that community oversight must be meaningful and appropriately supported. Agencies should not ask communities to approve technical systems without plain-language information, time, context, and a clear explanation of how input will influence decisions.</a:t>
+              <a:t>Related Toolkit Resources
+Tool 3: Equity Impact Assessment Checklist (Checklist) - Use this tool to complete or strengthen the practical exercise for the module using fictional, de-identified, or generalized.
+Tool 47: Equity &amp; Disparity Impact Monitoring (Dashboard) - Use this tool to complete or strengthen the practical exercise for the module using fictional, de-identified, or generalized.
+Tool 4: AI Policy Landscape Scan (Worksheet) - Use AI Policy Landscape Scan to translate this lesson into a documented public health AI planning, governance, implementation,.
+Tool 5: AI Environmental and Resource Impact Review (Checklist) - Use AI Environmental and Resource Impact Review to translate this lesson into a documented public health AI planning,.
+Tool 6: Human-Centered AI Decision Rule Checklist (Checklist) - Use Human-Centered AI Decision Rule Checklist to translate this lesson into a documented public health AI planning, governance,.
+Tool 8: AI Project Charter (Planning) - Use AI Project Charter to translate this lesson into a documented public health AI planning, governance, implementation, or.</a:t>
             </a:r>
             <a:endParaRPr lang="en-US" dirty="0"/>
           </a:p>
@@ -1786,8 +1972,12 @@
           <a:p>
             <a:r>
               <a:rPr lang="en-US" dirty="0"/>
-              <a:t>Jurisdiction and Agency Policy Note
-This module provides national-level training guidance for public health agencies and partners. It is not legal advice and does not replace review by agency legal counsel, privacy officers, procurement officials, civil rights staff, records officers, or other authorized decision-makers. Requirements may vary by state, locality, territory, Tribe, agency, funding source, data-sharing agreement, emergency authority, and organizational policy. Learners should use this module to identify the issues that require review and should confirm applicable requirements before approving, procuring, deploying, or publicly communicating about AI-supported work.</a:t>
+              <a:t>Learning Objectives
+Explain why community oversight matters for public health AI.
+Identify AI use cases that warrant community engagement or participatory governance.
+Design a community engagement approach matched to risk, impact, and community context.
+Recognize risks of tokenism, extractive engagement, and inaccessible technical language.
+Produce a participatory governance plan for one AI use case.</a:t>
             </a:r>
             <a:endParaRPr lang="en-US" dirty="0"/>
           </a:p>
@@ -1875,9 +2065,9 @@
           <a:p>
             <a:r>
               <a:rPr lang="en-US" dirty="0"/>
-              <a:t>Why This Topic Matters for Public Health AI
-Public health agencies make decisions that affect communities, often using data collected through clinical care, surveillance, service systems, public programs, and emergency response. AI can intensify concerns about surveillance, bias, exclusion, language access, disability access, and government trust. Community oversight helps agencies identify concerns that may not be visible through technical review alone.
-Participatory governance can also improve AI quality and usefulness. Community partners may identify missing context, harmful assumptions, access barriers, communication needs, and unintended consequences. Their input can help agencies design safer workflows, clearer notices, better escalation pathways, and more meaningful impact measures.</a:t>
+              <a:t>Module Overview
+Public health AI governance should not be limited to internal agency review. When AI affects communities, services, surveillance, communication, prioritization, or resource allocation, agencies should consider how community perspectives will inform design, review, implementation, and monitoring. Participatory governance creates structured ways for affected people and community partners to shape AI use.
+This module helps leaders distinguish between informing the public, consulting communities, involving partners, and sharing oversight. It emphasizes that community oversight must be meaningful and appropriately supported. Agencies should not ask communities to approve technical systems without plain-language information, time, context, and a clear explanation of how input will influence decisions.</a:t>
             </a:r>
             <a:endParaRPr lang="en-US" dirty="0"/>
           </a:p>
@@ -1965,9 +2155,8 @@
           <a:p>
             <a:r>
               <a:rPr lang="en-US" dirty="0"/>
-              <a:t>Public Health Example
-A city health department considers using an AI tool to help prioritize outreach for maternal and child health services. The model would use program, demographic, and service utilization data to identify neighborhoods where outreach may be needed. Although the goal is supportive, communities may worry that the tool could stigmatize neighborhoods, miss families not represented in data, or direct resources away from groups with less complete records.
-A participatory governance plan would involve community-based organizations, maternal health advocates, service users, and equity staff before the tool is finalized. The agency would explain the intended use, data limitations, safeguards, and decision points in plain language. Community input could shape the variables used, how results are communicated, what services are offered, and how harm or misclassification concerns are handled.</a:t>
+              <a:t>Jurisdiction and Agency Policy Note
+This module provides national-level training guidance for public health agencies and partners. It is not legal advice and does not replace review by agency legal counsel, privacy officers, procurement officials, civil rights staff, records officers, or other authorized decision-makers. Requirements may vary by state, locality, territory, Tribe, agency, funding source, data-sharing agreement, emergency authority, and organizational policy. Learners should use this module to identify the issues that require review and should confirm applicable requirements before approving, procuring, deploying, or publicly communicating about AI-supported work.</a:t>
             </a:r>
             <a:endParaRPr lang="en-US" dirty="0"/>
           </a:p>
@@ -2055,10 +2244,9 @@
           <a:p>
             <a:r>
               <a:rPr lang="en-US" dirty="0"/>
-              <a:t>Technical and Governance Deep Dive
-Participatory governance should be matched to the impact of the use case. Internal productivity tools may not require community oversight, although they still require policy and privacy review. Tools that influence public communication, service access, enforcement, prioritization, outreach, or resource allocation may require deeper engagement. The higher the impact on communities, the stronger the case for involving community perspectives early.
-Engagement should be designed with care. Agencies should provide plain-language descriptions, realistic examples, data-use explanations, and clear questions for feedback. Meetings should be accessible, compensated when appropriate, linguistically inclusive, and scheduled in ways that support participation. Agencies should also explain what decisions are open for influence and what constraints exist because of law, funding, or public health authority.
-Follow-through is essential. Community members should know how their input was used, what changed because of engagement, and how concerns will be monitored after launch. Participatory governance is not a single listening session. It is an ongoing relationship between the agency and affected communities, especially when the AI use is consequential or long-term.</a:t>
+              <a:t>Why This Topic Matters for Public Health AI
+Public health agencies make decisions that affect communities, often using data collected through clinical care, surveillance, service systems, public programs, and emergency response. AI can intensify concerns about surveillance, bias, exclusion, language access, disability access, and government trust. Community oversight helps agencies identify concerns that may not be visible through technical review alone.
+Participatory governance can also improve AI quality and usefulness. Community partners may identify missing context, harmful assumptions, access barriers, communication needs, and unintended consequences. Their input can help agencies design safer workflows, clearer notices, better escalation pathways, and more meaningful impact measures.</a:t>
             </a:r>
             <a:endParaRPr lang="en-US" dirty="0"/>
           </a:p>
@@ -2146,9 +2334,9 @@
           <a:p>
             <a:r>
               <a:rPr lang="en-US" dirty="0"/>
-              <a:t>Risks, Failure Modes, and Guardrails
-One risk is tokenistic engagement. Agencies may seek community input after key decisions have already been made. A guardrail is to engage before requirements, safeguards, and success measures are finalized.
-Another risk is technical opacity. Community participants may be asked to respond to vague or overly technical descriptions. A guardrail is to provide plain-language examples, visual workflows, and concrete descriptions of what the AI will and will not do.</a:t>
+              <a:t>Public Health Example
+A city health department considers using an AI tool to help prioritize outreach for maternal and child health services. The model would use program, demographic, and service utilization data to identify neighborhoods where outreach may be needed. Although the goal is supportive, communities may worry that the tool could stigmatize neighborhoods, miss families not represented in data, or direct resources away from groups with less complete records.
+A participatory governance plan would involve community-based organizations, maternal health advocates, service users, and equity staff before the tool is finalized. The agency would explain the intended use, data limitations, safeguards, and decision points in plain language. Community input could shape the variables used, how results are communicated, what services are offered, and how harm or misclassification concerns are handled.</a:t>
             </a:r>
             <a:endParaRPr lang="en-US" dirty="0"/>
           </a:p>
@@ -2771,7 +2959,32 @@
       </p:sp>
       <p:sp>
         <p:nvSpPr>
-          <p:cNvPr id="3" name="Text 1"/>
+          <p:cNvPr id="3" name="Shape 1"/>
+          <p:cNvSpPr/>
+          <p:nvPr/>
+        </p:nvSpPr>
+        <p:spPr>
+          <a:xfrm>
+            <a:off x="0" y="164592"/>
+            <a:ext cx="146304" cy="6693408"/>
+          </a:xfrm>
+          <a:prstGeom prst="rect">
+            <a:avLst/>
+          </a:prstGeom>
+          <a:solidFill>
+            <a:srgbClr val="2F8A28"/>
+          </a:solidFill>
+          <a:ln w="12700">
+            <a:solidFill>
+              <a:srgbClr val="2F8A28"/>
+            </a:solidFill>
+            <a:prstDash val="solid"/>
+          </a:ln>
+        </p:spPr>
+      </p:sp>
+      <p:sp>
+        <p:nvSpPr>
+          <p:cNvPr id="4" name="Text 2"/>
           <p:cNvSpPr/>
           <p:nvPr/>
         </p:nvSpPr>
@@ -2810,7 +3023,7 @@
       </p:sp>
       <p:sp>
         <p:nvSpPr>
-          <p:cNvPr id="4" name="Text 2"/>
+          <p:cNvPr id="5" name="Text 3"/>
           <p:cNvSpPr/>
           <p:nvPr/>
         </p:nvSpPr>
@@ -2849,7 +3062,7 @@
       </p:sp>
       <p:sp>
         <p:nvSpPr>
-          <p:cNvPr id="5" name="Text 3"/>
+          <p:cNvPr id="6" name="Text 4"/>
           <p:cNvSpPr/>
           <p:nvPr/>
         </p:nvSpPr>
@@ -2888,13 +3101,77 @@
       </p:sp>
       <p:sp>
         <p:nvSpPr>
-          <p:cNvPr id="6" name="Text 4"/>
+          <p:cNvPr id="7" name="Shape 5"/>
           <p:cNvSpPr/>
           <p:nvPr/>
         </p:nvSpPr>
         <p:spPr>
           <a:xfrm>
             <a:off x="640080" y="658368"/>
+            <a:ext cx="420624" cy="420624"/>
+          </a:xfrm>
+          <a:prstGeom prst="ellipse">
+            <a:avLst/>
+          </a:prstGeom>
+          <a:solidFill>
+            <a:srgbClr val="0068B7"/>
+          </a:solidFill>
+          <a:ln w="12700">
+            <a:solidFill>
+              <a:srgbClr val="0068B7"/>
+            </a:solidFill>
+            <a:prstDash val="solid"/>
+          </a:ln>
+        </p:spPr>
+      </p:sp>
+      <p:sp>
+        <p:nvSpPr>
+          <p:cNvPr id="8" name="Text 6"/>
+          <p:cNvSpPr/>
+          <p:nvPr/>
+        </p:nvSpPr>
+        <p:spPr>
+          <a:xfrm>
+            <a:off x="640080" y="731520"/>
+            <a:ext cx="420624" cy="164592"/>
+          </a:xfrm>
+          <a:prstGeom prst="rect">
+            <a:avLst/>
+          </a:prstGeom>
+          <a:noFill/>
+          <a:ln/>
+        </p:spPr>
+        <p:txBody>
+          <a:bodyPr wrap="square" lIns="0" tIns="0" rIns="0" bIns="0" rtlCol="0" anchor="ctr"/>
+          <a:lstStyle/>
+          <a:p>
+            <a:pPr algn="ctr" indent="0" marL="0">
+              <a:buNone/>
+            </a:pPr>
+            <a:r>
+              <a:rPr lang="en-US" sz="1100" b="1" dirty="0">
+                <a:solidFill>
+                  <a:srgbClr val="FFFFFF"/>
+                </a:solidFill>
+                <a:latin typeface="Aptos" pitchFamily="34" charset="0"/>
+                <a:ea typeface="Aptos" pitchFamily="34" charset="-122"/>
+                <a:cs typeface="Aptos" pitchFamily="34" charset="-120"/>
+              </a:rPr>
+              <a:t>6</a:t>
+            </a:r>
+            <a:endParaRPr lang="en-US" sz="1100" dirty="0"/>
+          </a:p>
+        </p:txBody>
+      </p:sp>
+      <p:sp>
+        <p:nvSpPr>
+          <p:cNvPr id="9" name="Text 7"/>
+          <p:cNvSpPr/>
+          <p:nvPr/>
+        </p:nvSpPr>
+        <p:spPr>
+          <a:xfrm>
+            <a:off x="640080" y="621792"/>
             <a:ext cx="10881360" cy="566928"/>
           </a:xfrm>
           <a:prstGeom prst="rect">
@@ -2921,7 +3198,7 @@
                 <a:ea typeface="Aptos Display" pitchFamily="34" charset="-122"/>
                 <a:cs typeface="Aptos Display" pitchFamily="34" charset="-120"/>
               </a:rPr>
-              <a:t>Application to AI-Supported Workflows</a:t>
+              <a:t>Technical and Governance Deep Dive</a:t>
             </a:r>
             <a:endParaRPr lang="en-US" sz="2700" dirty="0"/>
           </a:p>
@@ -2929,32 +3206,178 @@
       </p:sp>
       <p:sp>
         <p:nvSpPr>
-          <p:cNvPr id="7" name="Text 5"/>
-          <p:cNvSpPr/>
-          <p:nvPr/>
-        </p:nvSpPr>
-        <p:spPr>
-          <a:xfrm>
-            <a:off x="822960" y="1325880"/>
-            <a:ext cx="10378440" cy="4800600"/>
-          </a:xfrm>
-          <a:prstGeom prst="rect">
-            <a:avLst/>
-          </a:prstGeom>
-          <a:noFill/>
-          <a:ln/>
-        </p:spPr>
-        <p:txBody>
-          <a:bodyPr wrap="square" lIns="1016" tIns="1016" rIns="1016" bIns="1016" rtlCol="0" anchor="t">
+          <p:cNvPr id="10" name="Text 8"/>
+          <p:cNvSpPr/>
+          <p:nvPr/>
+        </p:nvSpPr>
+        <p:spPr>
+          <a:xfrm>
+            <a:off x="868680" y="1417320"/>
+            <a:ext cx="6675120" cy="4434840"/>
+          </a:xfrm>
+          <a:prstGeom prst="rect">
+            <a:avLst/>
+          </a:prstGeom>
+          <a:noFill/>
+          <a:ln/>
+        </p:spPr>
+        <p:txBody>
+          <a:bodyPr wrap="square" lIns="635" tIns="635" rIns="635" bIns="635" rtlCol="0" anchor="t">
             <a:normAutofit/>
           </a:bodyPr>
           <a:lstStyle/>
           <a:p>
+            <a:r>
+              <a:rPr lang="en-US" sz="1700" dirty="0">
+                <a:solidFill>
+                  <a:srgbClr val="17364A"/>
+                </a:solidFill>
+                <a:latin typeface="Aptos" pitchFamily="34" charset="0"/>
+                <a:ea typeface="Aptos" pitchFamily="34" charset="-122"/>
+                <a:cs typeface="Aptos" pitchFamily="34" charset="-120"/>
+              </a:rPr>
+              <a:t>Participatory governance should be matched to the impact of the use case.</a:t>
+            </a:r>
+            <a:endParaRPr lang="en-US" sz="1700" dirty="0"/>
+          </a:p>
+          <a:p>
+            <a:r>
+              <a:rPr lang="en-US" sz="1700" dirty="0">
+                <a:solidFill>
+                  <a:srgbClr val="17364A"/>
+                </a:solidFill>
+                <a:latin typeface="Aptos" pitchFamily="34" charset="0"/>
+                <a:ea typeface="Aptos" pitchFamily="34" charset="-122"/>
+                <a:cs typeface="Aptos" pitchFamily="34" charset="-120"/>
+              </a:rPr>
+              <a:t>Internal productivity tools may not require community oversight, although they still require policy and privacy review.</a:t>
+            </a:r>
+            <a:endParaRPr lang="en-US" sz="1700" dirty="0"/>
+          </a:p>
+          <a:p>
+            <a:r>
+              <a:rPr lang="en-US" sz="1700" dirty="0">
+                <a:solidFill>
+                  <a:srgbClr val="17364A"/>
+                </a:solidFill>
+                <a:latin typeface="Aptos" pitchFamily="34" charset="0"/>
+                <a:ea typeface="Aptos" pitchFamily="34" charset="-122"/>
+                <a:cs typeface="Aptos" pitchFamily="34" charset="-120"/>
+              </a:rPr>
+              <a:t>Tools that influence public communication, service access, enforcement, prioritization, outreach, or resource allocation.</a:t>
+            </a:r>
+            <a:endParaRPr lang="en-US" sz="1700" dirty="0"/>
+          </a:p>
+          <a:p>
+            <a:r>
+              <a:rPr lang="en-US" sz="1700" dirty="0">
+                <a:solidFill>
+                  <a:srgbClr val="17364A"/>
+                </a:solidFill>
+                <a:latin typeface="Aptos" pitchFamily="34" charset="0"/>
+                <a:ea typeface="Aptos" pitchFamily="34" charset="-122"/>
+                <a:cs typeface="Aptos" pitchFamily="34" charset="-120"/>
+              </a:rPr>
+              <a:t>The higher the impact on communities, the stronger the case for involving community perspectives early.</a:t>
+            </a:r>
+            <a:endParaRPr lang="en-US" sz="1700" dirty="0"/>
+          </a:p>
+        </p:txBody>
+      </p:sp>
+      <p:sp>
+        <p:nvSpPr>
+          <p:cNvPr id="11" name="Shape 9"/>
+          <p:cNvSpPr/>
+          <p:nvPr/>
+        </p:nvSpPr>
+        <p:spPr>
+          <a:xfrm>
+            <a:off x="7909560" y="1417320"/>
+            <a:ext cx="3154680" cy="1828800"/>
+          </a:xfrm>
+          <a:prstGeom prst="roundRect">
+            <a:avLst>
+              <a:gd name="adj" fmla="val 6000"/>
+            </a:avLst>
+          </a:prstGeom>
+          <a:solidFill>
+            <a:srgbClr val="EEF8ED"/>
+          </a:solidFill>
+          <a:ln w="12700">
+            <a:solidFill>
+              <a:srgbClr val="B9D7E6"/>
+            </a:solidFill>
+            <a:prstDash val="solid"/>
+          </a:ln>
+        </p:spPr>
+      </p:sp>
+      <p:sp>
+        <p:nvSpPr>
+          <p:cNvPr id="12" name="Text 10"/>
+          <p:cNvSpPr/>
+          <p:nvPr/>
+        </p:nvSpPr>
+        <p:spPr>
+          <a:xfrm>
+            <a:off x="8074152" y="1563624"/>
+            <a:ext cx="2825496" cy="201168"/>
+          </a:xfrm>
+          <a:prstGeom prst="rect">
+            <a:avLst/>
+          </a:prstGeom>
+          <a:noFill/>
+          <a:ln/>
+        </p:spPr>
+        <p:txBody>
+          <a:bodyPr wrap="square" lIns="0" tIns="0" rIns="0" bIns="0" rtlCol="0" anchor="ctr"/>
+          <a:lstStyle/>
+          <a:p>
             <a:pPr indent="0" marL="0">
               <a:buNone/>
             </a:pPr>
             <a:r>
-              <a:rPr lang="en-US" sz="1420" dirty="0">
+              <a:rPr lang="en-US" sz="950" b="1" dirty="0">
+                <a:solidFill>
+                  <a:srgbClr val="0068B7"/>
+                </a:solidFill>
+                <a:latin typeface="Aptos" pitchFamily="34" charset="0"/>
+                <a:ea typeface="Aptos" pitchFamily="34" charset="-122"/>
+                <a:cs typeface="Aptos" pitchFamily="34" charset="-120"/>
+              </a:rPr>
+              <a:t>Key idea</a:t>
+            </a:r>
+            <a:endParaRPr lang="en-US" sz="950" dirty="0"/>
+          </a:p>
+        </p:txBody>
+      </p:sp>
+      <p:sp>
+        <p:nvSpPr>
+          <p:cNvPr id="13" name="Text 11"/>
+          <p:cNvSpPr/>
+          <p:nvPr/>
+        </p:nvSpPr>
+        <p:spPr>
+          <a:xfrm>
+            <a:off x="8074152" y="1856232"/>
+            <a:ext cx="2825496" cy="1261872"/>
+          </a:xfrm>
+          <a:prstGeom prst="rect">
+            <a:avLst/>
+          </a:prstGeom>
+          <a:noFill/>
+          <a:ln/>
+        </p:spPr>
+        <p:txBody>
+          <a:bodyPr wrap="square" lIns="0" tIns="0" rIns="0" bIns="0" rtlCol="0" anchor="t">
+            <a:normAutofit/>
+          </a:bodyPr>
+          <a:lstStyle/>
+          <a:p>
+            <a:pPr indent="0" marL="0">
+              <a:buNone/>
+            </a:pPr>
+            <a:r>
+              <a:rPr lang="en-US" sz="1250" dirty="0">
                 <a:solidFill>
                   <a:srgbClr val="17364A"/>
                 </a:solidFill>
@@ -2962,9 +3385,116 @@
                 <a:ea typeface="Aptos" pitchFamily="34" charset="-122"/>
                 <a:cs typeface="Aptos" pitchFamily="34" charset="-120"/>
               </a:rPr>
-              <a:t>Generative AI tools that produce public messages may benefit from community review for tone, trust, accessibility, and language. Predictive models used for outreach or allocation should include review of data representativeness and potential stigma. Agentic tools that trigger actions affecting residents should have clear community-informed escalation and correction pathways.</a:t>
-            </a:r>
-            <a:endParaRPr lang="en-US" sz="1420" dirty="0"/>
+              <a:t>Participatory governance should be matched to the impact of the use case.</a:t>
+            </a:r>
+            <a:endParaRPr lang="en-US" sz="1250" dirty="0"/>
+          </a:p>
+        </p:txBody>
+      </p:sp>
+      <p:sp>
+        <p:nvSpPr>
+          <p:cNvPr id="14" name="Shape 12"/>
+          <p:cNvSpPr/>
+          <p:nvPr/>
+        </p:nvSpPr>
+        <p:spPr>
+          <a:xfrm>
+            <a:off x="7909560" y="3520440"/>
+            <a:ext cx="3154680" cy="1737360"/>
+          </a:xfrm>
+          <a:prstGeom prst="roundRect">
+            <a:avLst>
+              <a:gd name="adj" fmla="val 6316"/>
+            </a:avLst>
+          </a:prstGeom>
+          <a:solidFill>
+            <a:srgbClr val="EAF6F8"/>
+          </a:solidFill>
+          <a:ln w="12700">
+            <a:solidFill>
+              <a:srgbClr val="B9D7E6"/>
+            </a:solidFill>
+            <a:prstDash val="solid"/>
+          </a:ln>
+        </p:spPr>
+      </p:sp>
+      <p:sp>
+        <p:nvSpPr>
+          <p:cNvPr id="15" name="Text 13"/>
+          <p:cNvSpPr/>
+          <p:nvPr/>
+        </p:nvSpPr>
+        <p:spPr>
+          <a:xfrm>
+            <a:off x="8074152" y="3666744"/>
+            <a:ext cx="2825496" cy="201168"/>
+          </a:xfrm>
+          <a:prstGeom prst="rect">
+            <a:avLst/>
+          </a:prstGeom>
+          <a:noFill/>
+          <a:ln/>
+        </p:spPr>
+        <p:txBody>
+          <a:bodyPr wrap="square" lIns="0" tIns="0" rIns="0" bIns="0" rtlCol="0" anchor="ctr"/>
+          <a:lstStyle/>
+          <a:p>
+            <a:pPr indent="0" marL="0">
+              <a:buNone/>
+            </a:pPr>
+            <a:r>
+              <a:rPr lang="en-US" sz="950" b="1" dirty="0">
+                <a:solidFill>
+                  <a:srgbClr val="0068B7"/>
+                </a:solidFill>
+                <a:latin typeface="Aptos" pitchFamily="34" charset="0"/>
+                <a:ea typeface="Aptos" pitchFamily="34" charset="-122"/>
+                <a:cs typeface="Aptos" pitchFamily="34" charset="-120"/>
+              </a:rPr>
+              <a:t>Use this for</a:t>
+            </a:r>
+            <a:endParaRPr lang="en-US" sz="950" dirty="0"/>
+          </a:p>
+        </p:txBody>
+      </p:sp>
+      <p:sp>
+        <p:nvSpPr>
+          <p:cNvPr id="16" name="Text 14"/>
+          <p:cNvSpPr/>
+          <p:nvPr/>
+        </p:nvSpPr>
+        <p:spPr>
+          <a:xfrm>
+            <a:off x="8074152" y="3959352"/>
+            <a:ext cx="2825496" cy="1170432"/>
+          </a:xfrm>
+          <a:prstGeom prst="rect">
+            <a:avLst/>
+          </a:prstGeom>
+          <a:noFill/>
+          <a:ln/>
+        </p:spPr>
+        <p:txBody>
+          <a:bodyPr wrap="square" lIns="0" tIns="0" rIns="0" bIns="0" rtlCol="0" anchor="t">
+            <a:normAutofit/>
+          </a:bodyPr>
+          <a:lstStyle/>
+          <a:p>
+            <a:pPr indent="0" marL="0">
+              <a:buNone/>
+            </a:pPr>
+            <a:r>
+              <a:rPr lang="en-US" sz="1250" dirty="0">
+                <a:solidFill>
+                  <a:srgbClr val="17364A"/>
+                </a:solidFill>
+                <a:latin typeface="Aptos" pitchFamily="34" charset="0"/>
+                <a:ea typeface="Aptos" pitchFamily="34" charset="-122"/>
+                <a:cs typeface="Aptos" pitchFamily="34" charset="-120"/>
+              </a:rPr>
+              <a:t>Connect the concept to public health decisions, safeguards, documentation, or implementation work.</a:t>
+            </a:r>
+            <a:endParaRPr lang="en-US" sz="1250" dirty="0"/>
           </a:p>
         </p:txBody>
       </p:sp>
@@ -3027,7 +3557,32 @@
       </p:sp>
       <p:sp>
         <p:nvSpPr>
-          <p:cNvPr id="3" name="Text 1"/>
+          <p:cNvPr id="3" name="Shape 1"/>
+          <p:cNvSpPr/>
+          <p:nvPr/>
+        </p:nvSpPr>
+        <p:spPr>
+          <a:xfrm>
+            <a:off x="0" y="164592"/>
+            <a:ext cx="146304" cy="6693408"/>
+          </a:xfrm>
+          <a:prstGeom prst="rect">
+            <a:avLst/>
+          </a:prstGeom>
+          <a:solidFill>
+            <a:srgbClr val="2F8A28"/>
+          </a:solidFill>
+          <a:ln w="12700">
+            <a:solidFill>
+              <a:srgbClr val="2F8A28"/>
+            </a:solidFill>
+            <a:prstDash val="solid"/>
+          </a:ln>
+        </p:spPr>
+      </p:sp>
+      <p:sp>
+        <p:nvSpPr>
+          <p:cNvPr id="4" name="Text 2"/>
           <p:cNvSpPr/>
           <p:nvPr/>
         </p:nvSpPr>
@@ -3066,7 +3621,7 @@
       </p:sp>
       <p:sp>
         <p:nvSpPr>
-          <p:cNvPr id="4" name="Text 2"/>
+          <p:cNvPr id="5" name="Text 3"/>
           <p:cNvSpPr/>
           <p:nvPr/>
         </p:nvSpPr>
@@ -3105,7 +3660,7 @@
       </p:sp>
       <p:sp>
         <p:nvSpPr>
-          <p:cNvPr id="5" name="Text 3"/>
+          <p:cNvPr id="6" name="Text 4"/>
           <p:cNvSpPr/>
           <p:nvPr/>
         </p:nvSpPr>
@@ -3144,13 +3699,77 @@
       </p:sp>
       <p:sp>
         <p:nvSpPr>
-          <p:cNvPr id="6" name="Text 4"/>
+          <p:cNvPr id="7" name="Shape 5"/>
           <p:cNvSpPr/>
           <p:nvPr/>
         </p:nvSpPr>
         <p:spPr>
           <a:xfrm>
             <a:off x="640080" y="658368"/>
+            <a:ext cx="420624" cy="420624"/>
+          </a:xfrm>
+          <a:prstGeom prst="ellipse">
+            <a:avLst/>
+          </a:prstGeom>
+          <a:solidFill>
+            <a:srgbClr val="0068B7"/>
+          </a:solidFill>
+          <a:ln w="12700">
+            <a:solidFill>
+              <a:srgbClr val="0068B7"/>
+            </a:solidFill>
+            <a:prstDash val="solid"/>
+          </a:ln>
+        </p:spPr>
+      </p:sp>
+      <p:sp>
+        <p:nvSpPr>
+          <p:cNvPr id="8" name="Text 6"/>
+          <p:cNvSpPr/>
+          <p:nvPr/>
+        </p:nvSpPr>
+        <p:spPr>
+          <a:xfrm>
+            <a:off x="640080" y="731520"/>
+            <a:ext cx="420624" cy="164592"/>
+          </a:xfrm>
+          <a:prstGeom prst="rect">
+            <a:avLst/>
+          </a:prstGeom>
+          <a:noFill/>
+          <a:ln/>
+        </p:spPr>
+        <p:txBody>
+          <a:bodyPr wrap="square" lIns="0" tIns="0" rIns="0" bIns="0" rtlCol="0" anchor="ctr"/>
+          <a:lstStyle/>
+          <a:p>
+            <a:pPr algn="ctr" indent="0" marL="0">
+              <a:buNone/>
+            </a:pPr>
+            <a:r>
+              <a:rPr lang="en-US" sz="1100" b="1" dirty="0">
+                <a:solidFill>
+                  <a:srgbClr val="FFFFFF"/>
+                </a:solidFill>
+                <a:latin typeface="Aptos" pitchFamily="34" charset="0"/>
+                <a:ea typeface="Aptos" pitchFamily="34" charset="-122"/>
+                <a:cs typeface="Aptos" pitchFamily="34" charset="-120"/>
+              </a:rPr>
+              <a:t>7</a:t>
+            </a:r>
+            <a:endParaRPr lang="en-US" sz="1100" dirty="0"/>
+          </a:p>
+        </p:txBody>
+      </p:sp>
+      <p:sp>
+        <p:nvSpPr>
+          <p:cNvPr id="9" name="Text 7"/>
+          <p:cNvSpPr/>
+          <p:nvPr/>
+        </p:nvSpPr>
+        <p:spPr>
+          <a:xfrm>
+            <a:off x="640080" y="621792"/>
             <a:ext cx="10881360" cy="566928"/>
           </a:xfrm>
           <a:prstGeom prst="rect">
@@ -3177,7 +3796,7 @@
                 <a:ea typeface="Aptos Display" pitchFamily="34" charset="-122"/>
                 <a:cs typeface="Aptos Display" pitchFamily="34" charset="-120"/>
               </a:rPr>
-              <a:t>Reflection Questions</a:t>
+              <a:t>Risks, Failure Modes, and Guardrails</a:t>
             </a:r>
             <a:endParaRPr lang="en-US" sz="2700" dirty="0"/>
           </a:p>
@@ -3185,32 +3804,178 @@
       </p:sp>
       <p:sp>
         <p:nvSpPr>
-          <p:cNvPr id="7" name="Text 5"/>
-          <p:cNvSpPr/>
-          <p:nvPr/>
-        </p:nvSpPr>
-        <p:spPr>
-          <a:xfrm>
-            <a:off x="822960" y="1325880"/>
-            <a:ext cx="10378440" cy="4800600"/>
-          </a:xfrm>
-          <a:prstGeom prst="rect">
-            <a:avLst/>
-          </a:prstGeom>
-          <a:noFill/>
-          <a:ln/>
-        </p:spPr>
-        <p:txBody>
-          <a:bodyPr wrap="square" lIns="1016" tIns="1016" rIns="1016" bIns="1016" rtlCol="0" anchor="t">
+          <p:cNvPr id="10" name="Text 8"/>
+          <p:cNvSpPr/>
+          <p:nvPr/>
+        </p:nvSpPr>
+        <p:spPr>
+          <a:xfrm>
+            <a:off x="868680" y="1417320"/>
+            <a:ext cx="6675120" cy="4434840"/>
+          </a:xfrm>
+          <a:prstGeom prst="rect">
+            <a:avLst/>
+          </a:prstGeom>
+          <a:noFill/>
+          <a:ln/>
+        </p:spPr>
+        <p:txBody>
+          <a:bodyPr wrap="square" lIns="635" tIns="635" rIns="635" bIns="635" rtlCol="0" anchor="t">
             <a:normAutofit/>
           </a:bodyPr>
           <a:lstStyle/>
           <a:p>
+            <a:r>
+              <a:rPr lang="en-US" sz="1700" dirty="0">
+                <a:solidFill>
+                  <a:srgbClr val="17364A"/>
+                </a:solidFill>
+                <a:latin typeface="Aptos" pitchFamily="34" charset="0"/>
+                <a:ea typeface="Aptos" pitchFamily="34" charset="-122"/>
+                <a:cs typeface="Aptos" pitchFamily="34" charset="-120"/>
+              </a:rPr>
+              <a:t>One risk is tokenistic engagement.</a:t>
+            </a:r>
+            <a:endParaRPr lang="en-US" sz="1700" dirty="0"/>
+          </a:p>
+          <a:p>
+            <a:r>
+              <a:rPr lang="en-US" sz="1700" dirty="0">
+                <a:solidFill>
+                  <a:srgbClr val="17364A"/>
+                </a:solidFill>
+                <a:latin typeface="Aptos" pitchFamily="34" charset="0"/>
+                <a:ea typeface="Aptos" pitchFamily="34" charset="-122"/>
+                <a:cs typeface="Aptos" pitchFamily="34" charset="-120"/>
+              </a:rPr>
+              <a:t>Agencies may seek community input after key decisions have already been made.</a:t>
+            </a:r>
+            <a:endParaRPr lang="en-US" sz="1700" dirty="0"/>
+          </a:p>
+          <a:p>
+            <a:r>
+              <a:rPr lang="en-US" sz="1700" dirty="0">
+                <a:solidFill>
+                  <a:srgbClr val="17364A"/>
+                </a:solidFill>
+                <a:latin typeface="Aptos" pitchFamily="34" charset="0"/>
+                <a:ea typeface="Aptos" pitchFamily="34" charset="-122"/>
+                <a:cs typeface="Aptos" pitchFamily="34" charset="-120"/>
+              </a:rPr>
+              <a:t>A guardrail is to engage before requirements, safeguards, and success measures are finalized.</a:t>
+            </a:r>
+            <a:endParaRPr lang="en-US" sz="1700" dirty="0"/>
+          </a:p>
+          <a:p>
+            <a:r>
+              <a:rPr lang="en-US" sz="1700" dirty="0">
+                <a:solidFill>
+                  <a:srgbClr val="17364A"/>
+                </a:solidFill>
+                <a:latin typeface="Aptos" pitchFamily="34" charset="0"/>
+                <a:ea typeface="Aptos" pitchFamily="34" charset="-122"/>
+                <a:cs typeface="Aptos" pitchFamily="34" charset="-120"/>
+              </a:rPr>
+              <a:t>Another risk is technical opacity.</a:t>
+            </a:r>
+            <a:endParaRPr lang="en-US" sz="1700" dirty="0"/>
+          </a:p>
+        </p:txBody>
+      </p:sp>
+      <p:sp>
+        <p:nvSpPr>
+          <p:cNvPr id="11" name="Shape 9"/>
+          <p:cNvSpPr/>
+          <p:nvPr/>
+        </p:nvSpPr>
+        <p:spPr>
+          <a:xfrm>
+            <a:off x="7909560" y="1417320"/>
+            <a:ext cx="3154680" cy="1828800"/>
+          </a:xfrm>
+          <a:prstGeom prst="roundRect">
+            <a:avLst>
+              <a:gd name="adj" fmla="val 6000"/>
+            </a:avLst>
+          </a:prstGeom>
+          <a:solidFill>
+            <a:srgbClr val="EEF8ED"/>
+          </a:solidFill>
+          <a:ln w="12700">
+            <a:solidFill>
+              <a:srgbClr val="B9D7E6"/>
+            </a:solidFill>
+            <a:prstDash val="solid"/>
+          </a:ln>
+        </p:spPr>
+      </p:sp>
+      <p:sp>
+        <p:nvSpPr>
+          <p:cNvPr id="12" name="Text 10"/>
+          <p:cNvSpPr/>
+          <p:nvPr/>
+        </p:nvSpPr>
+        <p:spPr>
+          <a:xfrm>
+            <a:off x="8074152" y="1563624"/>
+            <a:ext cx="2825496" cy="201168"/>
+          </a:xfrm>
+          <a:prstGeom prst="rect">
+            <a:avLst/>
+          </a:prstGeom>
+          <a:noFill/>
+          <a:ln/>
+        </p:spPr>
+        <p:txBody>
+          <a:bodyPr wrap="square" lIns="0" tIns="0" rIns="0" bIns="0" rtlCol="0" anchor="ctr"/>
+          <a:lstStyle/>
+          <a:p>
             <a:pPr indent="0" marL="0">
               <a:buNone/>
             </a:pPr>
             <a:r>
-              <a:rPr lang="en-US" sz="1420" dirty="0">
+              <a:rPr lang="en-US" sz="950" b="1" dirty="0">
+                <a:solidFill>
+                  <a:srgbClr val="0068B7"/>
+                </a:solidFill>
+                <a:latin typeface="Aptos" pitchFamily="34" charset="0"/>
+                <a:ea typeface="Aptos" pitchFamily="34" charset="-122"/>
+                <a:cs typeface="Aptos" pitchFamily="34" charset="-120"/>
+              </a:rPr>
+              <a:t>Key idea</a:t>
+            </a:r>
+            <a:endParaRPr lang="en-US" sz="950" dirty="0"/>
+          </a:p>
+        </p:txBody>
+      </p:sp>
+      <p:sp>
+        <p:nvSpPr>
+          <p:cNvPr id="13" name="Text 11"/>
+          <p:cNvSpPr/>
+          <p:nvPr/>
+        </p:nvSpPr>
+        <p:spPr>
+          <a:xfrm>
+            <a:off x="8074152" y="1856232"/>
+            <a:ext cx="2825496" cy="1261872"/>
+          </a:xfrm>
+          <a:prstGeom prst="rect">
+            <a:avLst/>
+          </a:prstGeom>
+          <a:noFill/>
+          <a:ln/>
+        </p:spPr>
+        <p:txBody>
+          <a:bodyPr wrap="square" lIns="0" tIns="0" rIns="0" bIns="0" rtlCol="0" anchor="t">
+            <a:normAutofit/>
+          </a:bodyPr>
+          <a:lstStyle/>
+          <a:p>
+            <a:pPr indent="0" marL="0">
+              <a:buNone/>
+            </a:pPr>
+            <a:r>
+              <a:rPr lang="en-US" sz="1250" dirty="0">
                 <a:solidFill>
                   <a:srgbClr val="17364A"/>
                 </a:solidFill>
@@ -3218,9 +3983,116 @@
                 <a:ea typeface="Aptos" pitchFamily="34" charset="-122"/>
                 <a:cs typeface="Aptos" pitchFamily="34" charset="-120"/>
               </a:rPr>
-              <a:t>Which current or proposed AI use case in your agency raises this leadership or governance issue most clearly? Who currently has authority to make decisions about this issue, and is that authority documented? What evidence would governance or leadership need before approving the use case?</a:t>
-            </a:r>
-            <a:endParaRPr lang="en-US" sz="1420" dirty="0"/>
+              <a:t>One risk is tokenistic engagement.</a:t>
+            </a:r>
+            <a:endParaRPr lang="en-US" sz="1250" dirty="0"/>
+          </a:p>
+        </p:txBody>
+      </p:sp>
+      <p:sp>
+        <p:nvSpPr>
+          <p:cNvPr id="14" name="Shape 12"/>
+          <p:cNvSpPr/>
+          <p:nvPr/>
+        </p:nvSpPr>
+        <p:spPr>
+          <a:xfrm>
+            <a:off x="7909560" y="3520440"/>
+            <a:ext cx="3154680" cy="1737360"/>
+          </a:xfrm>
+          <a:prstGeom prst="roundRect">
+            <a:avLst>
+              <a:gd name="adj" fmla="val 6316"/>
+            </a:avLst>
+          </a:prstGeom>
+          <a:solidFill>
+            <a:srgbClr val="EAF6F8"/>
+          </a:solidFill>
+          <a:ln w="12700">
+            <a:solidFill>
+              <a:srgbClr val="B9D7E6"/>
+            </a:solidFill>
+            <a:prstDash val="solid"/>
+          </a:ln>
+        </p:spPr>
+      </p:sp>
+      <p:sp>
+        <p:nvSpPr>
+          <p:cNvPr id="15" name="Text 13"/>
+          <p:cNvSpPr/>
+          <p:nvPr/>
+        </p:nvSpPr>
+        <p:spPr>
+          <a:xfrm>
+            <a:off x="8074152" y="3666744"/>
+            <a:ext cx="2825496" cy="201168"/>
+          </a:xfrm>
+          <a:prstGeom prst="rect">
+            <a:avLst/>
+          </a:prstGeom>
+          <a:noFill/>
+          <a:ln/>
+        </p:spPr>
+        <p:txBody>
+          <a:bodyPr wrap="square" lIns="0" tIns="0" rIns="0" bIns="0" rtlCol="0" anchor="ctr"/>
+          <a:lstStyle/>
+          <a:p>
+            <a:pPr indent="0" marL="0">
+              <a:buNone/>
+            </a:pPr>
+            <a:r>
+              <a:rPr lang="en-US" sz="950" b="1" dirty="0">
+                <a:solidFill>
+                  <a:srgbClr val="0068B7"/>
+                </a:solidFill>
+                <a:latin typeface="Aptos" pitchFamily="34" charset="0"/>
+                <a:ea typeface="Aptos" pitchFamily="34" charset="-122"/>
+                <a:cs typeface="Aptos" pitchFamily="34" charset="-120"/>
+              </a:rPr>
+              <a:t>Use this for</a:t>
+            </a:r>
+            <a:endParaRPr lang="en-US" sz="950" dirty="0"/>
+          </a:p>
+        </p:txBody>
+      </p:sp>
+      <p:sp>
+        <p:nvSpPr>
+          <p:cNvPr id="16" name="Text 14"/>
+          <p:cNvSpPr/>
+          <p:nvPr/>
+        </p:nvSpPr>
+        <p:spPr>
+          <a:xfrm>
+            <a:off x="8074152" y="3959352"/>
+            <a:ext cx="2825496" cy="1170432"/>
+          </a:xfrm>
+          <a:prstGeom prst="rect">
+            <a:avLst/>
+          </a:prstGeom>
+          <a:noFill/>
+          <a:ln/>
+        </p:spPr>
+        <p:txBody>
+          <a:bodyPr wrap="square" lIns="0" tIns="0" rIns="0" bIns="0" rtlCol="0" anchor="t">
+            <a:normAutofit/>
+          </a:bodyPr>
+          <a:lstStyle/>
+          <a:p>
+            <a:pPr indent="0" marL="0">
+              <a:buNone/>
+            </a:pPr>
+            <a:r>
+              <a:rPr lang="en-US" sz="1250" dirty="0">
+                <a:solidFill>
+                  <a:srgbClr val="17364A"/>
+                </a:solidFill>
+                <a:latin typeface="Aptos" pitchFamily="34" charset="0"/>
+                <a:ea typeface="Aptos" pitchFamily="34" charset="-122"/>
+                <a:cs typeface="Aptos" pitchFamily="34" charset="-120"/>
+              </a:rPr>
+              <a:t>Connect the concept to public health decisions, safeguards, documentation, or implementation work.</a:t>
+            </a:r>
+            <a:endParaRPr lang="en-US" sz="1250" dirty="0"/>
           </a:p>
         </p:txBody>
       </p:sp>
@@ -3283,7 +4155,32 @@
       </p:sp>
       <p:sp>
         <p:nvSpPr>
-          <p:cNvPr id="3" name="Text 1"/>
+          <p:cNvPr id="3" name="Shape 1"/>
+          <p:cNvSpPr/>
+          <p:nvPr/>
+        </p:nvSpPr>
+        <p:spPr>
+          <a:xfrm>
+            <a:off x="0" y="164592"/>
+            <a:ext cx="146304" cy="6693408"/>
+          </a:xfrm>
+          <a:prstGeom prst="rect">
+            <a:avLst/>
+          </a:prstGeom>
+          <a:solidFill>
+            <a:srgbClr val="2F8A28"/>
+          </a:solidFill>
+          <a:ln w="12700">
+            <a:solidFill>
+              <a:srgbClr val="2F8A28"/>
+            </a:solidFill>
+            <a:prstDash val="solid"/>
+          </a:ln>
+        </p:spPr>
+      </p:sp>
+      <p:sp>
+        <p:nvSpPr>
+          <p:cNvPr id="4" name="Text 2"/>
           <p:cNvSpPr/>
           <p:nvPr/>
         </p:nvSpPr>
@@ -3322,7 +4219,7 @@
       </p:sp>
       <p:sp>
         <p:nvSpPr>
-          <p:cNvPr id="4" name="Text 2"/>
+          <p:cNvPr id="5" name="Text 3"/>
           <p:cNvSpPr/>
           <p:nvPr/>
         </p:nvSpPr>
@@ -3361,7 +4258,7 @@
       </p:sp>
       <p:sp>
         <p:nvSpPr>
-          <p:cNvPr id="5" name="Text 3"/>
+          <p:cNvPr id="6" name="Text 4"/>
           <p:cNvSpPr/>
           <p:nvPr/>
         </p:nvSpPr>
@@ -3400,13 +4297,77 @@
       </p:sp>
       <p:sp>
         <p:nvSpPr>
-          <p:cNvPr id="6" name="Text 4"/>
+          <p:cNvPr id="7" name="Shape 5"/>
           <p:cNvSpPr/>
           <p:nvPr/>
         </p:nvSpPr>
         <p:spPr>
           <a:xfrm>
             <a:off x="640080" y="658368"/>
+            <a:ext cx="420624" cy="420624"/>
+          </a:xfrm>
+          <a:prstGeom prst="ellipse">
+            <a:avLst/>
+          </a:prstGeom>
+          <a:solidFill>
+            <a:srgbClr val="0068B7"/>
+          </a:solidFill>
+          <a:ln w="12700">
+            <a:solidFill>
+              <a:srgbClr val="0068B7"/>
+            </a:solidFill>
+            <a:prstDash val="solid"/>
+          </a:ln>
+        </p:spPr>
+      </p:sp>
+      <p:sp>
+        <p:nvSpPr>
+          <p:cNvPr id="8" name="Text 6"/>
+          <p:cNvSpPr/>
+          <p:nvPr/>
+        </p:nvSpPr>
+        <p:spPr>
+          <a:xfrm>
+            <a:off x="640080" y="731520"/>
+            <a:ext cx="420624" cy="164592"/>
+          </a:xfrm>
+          <a:prstGeom prst="rect">
+            <a:avLst/>
+          </a:prstGeom>
+          <a:noFill/>
+          <a:ln/>
+        </p:spPr>
+        <p:txBody>
+          <a:bodyPr wrap="square" lIns="0" tIns="0" rIns="0" bIns="0" rtlCol="0" anchor="ctr"/>
+          <a:lstStyle/>
+          <a:p>
+            <a:pPr algn="ctr" indent="0" marL="0">
+              <a:buNone/>
+            </a:pPr>
+            <a:r>
+              <a:rPr lang="en-US" sz="1100" b="1" dirty="0">
+                <a:solidFill>
+                  <a:srgbClr val="FFFFFF"/>
+                </a:solidFill>
+                <a:latin typeface="Aptos" pitchFamily="34" charset="0"/>
+                <a:ea typeface="Aptos" pitchFamily="34" charset="-122"/>
+                <a:cs typeface="Aptos" pitchFamily="34" charset="-120"/>
+              </a:rPr>
+              <a:t>8</a:t>
+            </a:r>
+            <a:endParaRPr lang="en-US" sz="1100" dirty="0"/>
+          </a:p>
+        </p:txBody>
+      </p:sp>
+      <p:sp>
+        <p:nvSpPr>
+          <p:cNvPr id="9" name="Text 7"/>
+          <p:cNvSpPr/>
+          <p:nvPr/>
+        </p:nvSpPr>
+        <p:spPr>
+          <a:xfrm>
+            <a:off x="640080" y="621792"/>
             <a:ext cx="10881360" cy="566928"/>
           </a:xfrm>
           <a:prstGeom prst="rect">
@@ -3433,7 +4394,7 @@
                 <a:ea typeface="Aptos Display" pitchFamily="34" charset="-122"/>
                 <a:cs typeface="Aptos Display" pitchFamily="34" charset="-120"/>
               </a:rPr>
-              <a:t>Reflection Questions Continued</a:t>
+              <a:t>Application to AI-Supported Workflows</a:t>
             </a:r>
             <a:endParaRPr lang="en-US" sz="2700" dirty="0"/>
           </a:p>
@@ -3441,32 +4402,164 @@
       </p:sp>
       <p:sp>
         <p:nvSpPr>
-          <p:cNvPr id="7" name="Text 5"/>
-          <p:cNvSpPr/>
-          <p:nvPr/>
-        </p:nvSpPr>
-        <p:spPr>
-          <a:xfrm>
-            <a:off x="822960" y="1325880"/>
-            <a:ext cx="10378440" cy="4800600"/>
-          </a:xfrm>
-          <a:prstGeom prst="rect">
-            <a:avLst/>
-          </a:prstGeom>
-          <a:noFill/>
-          <a:ln/>
-        </p:spPr>
-        <p:txBody>
-          <a:bodyPr wrap="square" lIns="1016" tIns="1016" rIns="1016" bIns="1016" rtlCol="0" anchor="t">
+          <p:cNvPr id="10" name="Text 8"/>
+          <p:cNvSpPr/>
+          <p:nvPr/>
+        </p:nvSpPr>
+        <p:spPr>
+          <a:xfrm>
+            <a:off x="868680" y="1417320"/>
+            <a:ext cx="6675120" cy="4434840"/>
+          </a:xfrm>
+          <a:prstGeom prst="rect">
+            <a:avLst/>
+          </a:prstGeom>
+          <a:noFill/>
+          <a:ln/>
+        </p:spPr>
+        <p:txBody>
+          <a:bodyPr wrap="square" lIns="635" tIns="635" rIns="635" bIns="635" rtlCol="0" anchor="t">
             <a:normAutofit/>
           </a:bodyPr>
           <a:lstStyle/>
           <a:p>
+            <a:r>
+              <a:rPr lang="en-US" sz="1700" dirty="0">
+                <a:solidFill>
+                  <a:srgbClr val="17364A"/>
+                </a:solidFill>
+                <a:latin typeface="Aptos" pitchFamily="34" charset="0"/>
+                <a:ea typeface="Aptos" pitchFamily="34" charset="-122"/>
+                <a:cs typeface="Aptos" pitchFamily="34" charset="-120"/>
+              </a:rPr>
+              <a:t>Generative AI tools that produce public messages may benefit from community review for tone, trust, accessibility, and.</a:t>
+            </a:r>
+            <a:endParaRPr lang="en-US" sz="1700" dirty="0"/>
+          </a:p>
+          <a:p>
+            <a:r>
+              <a:rPr lang="en-US" sz="1700" dirty="0">
+                <a:solidFill>
+                  <a:srgbClr val="17364A"/>
+                </a:solidFill>
+                <a:latin typeface="Aptos" pitchFamily="34" charset="0"/>
+                <a:ea typeface="Aptos" pitchFamily="34" charset="-122"/>
+                <a:cs typeface="Aptos" pitchFamily="34" charset="-120"/>
+              </a:rPr>
+              <a:t>Predictive models used for outreach or allocation should include review of data representativeness and potential stigma.</a:t>
+            </a:r>
+            <a:endParaRPr lang="en-US" sz="1700" dirty="0"/>
+          </a:p>
+          <a:p>
+            <a:r>
+              <a:rPr lang="en-US" sz="1700" dirty="0">
+                <a:solidFill>
+                  <a:srgbClr val="17364A"/>
+                </a:solidFill>
+                <a:latin typeface="Aptos" pitchFamily="34" charset="0"/>
+                <a:ea typeface="Aptos" pitchFamily="34" charset="-122"/>
+                <a:cs typeface="Aptos" pitchFamily="34" charset="-120"/>
+              </a:rPr>
+              <a:t>Agentic tools that trigger actions affecting residents should have clear community-informed escalation and correction.</a:t>
+            </a:r>
+            <a:endParaRPr lang="en-US" sz="1700" dirty="0"/>
+          </a:p>
+        </p:txBody>
+      </p:sp>
+      <p:sp>
+        <p:nvSpPr>
+          <p:cNvPr id="11" name="Shape 9"/>
+          <p:cNvSpPr/>
+          <p:nvPr/>
+        </p:nvSpPr>
+        <p:spPr>
+          <a:xfrm>
+            <a:off x="7909560" y="1417320"/>
+            <a:ext cx="3154680" cy="1828800"/>
+          </a:xfrm>
+          <a:prstGeom prst="roundRect">
+            <a:avLst>
+              <a:gd name="adj" fmla="val 6000"/>
+            </a:avLst>
+          </a:prstGeom>
+          <a:solidFill>
+            <a:srgbClr val="EEF8ED"/>
+          </a:solidFill>
+          <a:ln w="12700">
+            <a:solidFill>
+              <a:srgbClr val="B9D7E6"/>
+            </a:solidFill>
+            <a:prstDash val="solid"/>
+          </a:ln>
+        </p:spPr>
+      </p:sp>
+      <p:sp>
+        <p:nvSpPr>
+          <p:cNvPr id="12" name="Text 10"/>
+          <p:cNvSpPr/>
+          <p:nvPr/>
+        </p:nvSpPr>
+        <p:spPr>
+          <a:xfrm>
+            <a:off x="8074152" y="1563624"/>
+            <a:ext cx="2825496" cy="201168"/>
+          </a:xfrm>
+          <a:prstGeom prst="rect">
+            <a:avLst/>
+          </a:prstGeom>
+          <a:noFill/>
+          <a:ln/>
+        </p:spPr>
+        <p:txBody>
+          <a:bodyPr wrap="square" lIns="0" tIns="0" rIns="0" bIns="0" rtlCol="0" anchor="ctr"/>
+          <a:lstStyle/>
+          <a:p>
             <a:pPr indent="0" marL="0">
               <a:buNone/>
             </a:pPr>
             <a:r>
-              <a:rPr lang="en-US" sz="1420" dirty="0">
+              <a:rPr lang="en-US" sz="950" b="1" dirty="0">
+                <a:solidFill>
+                  <a:srgbClr val="0068B7"/>
+                </a:solidFill>
+                <a:latin typeface="Aptos" pitchFamily="34" charset="0"/>
+                <a:ea typeface="Aptos" pitchFamily="34" charset="-122"/>
+                <a:cs typeface="Aptos" pitchFamily="34" charset="-120"/>
+              </a:rPr>
+              <a:t>Key idea</a:t>
+            </a:r>
+            <a:endParaRPr lang="en-US" sz="950" dirty="0"/>
+          </a:p>
+        </p:txBody>
+      </p:sp>
+      <p:sp>
+        <p:nvSpPr>
+          <p:cNvPr id="13" name="Text 11"/>
+          <p:cNvSpPr/>
+          <p:nvPr/>
+        </p:nvSpPr>
+        <p:spPr>
+          <a:xfrm>
+            <a:off x="8074152" y="1856232"/>
+            <a:ext cx="2825496" cy="1261872"/>
+          </a:xfrm>
+          <a:prstGeom prst="rect">
+            <a:avLst/>
+          </a:prstGeom>
+          <a:noFill/>
+          <a:ln/>
+        </p:spPr>
+        <p:txBody>
+          <a:bodyPr wrap="square" lIns="0" tIns="0" rIns="0" bIns="0" rtlCol="0" anchor="t">
+            <a:normAutofit/>
+          </a:bodyPr>
+          <a:lstStyle/>
+          <a:p>
+            <a:pPr indent="0" marL="0">
+              <a:buNone/>
+            </a:pPr>
+            <a:r>
+              <a:rPr lang="en-US" sz="1250" dirty="0">
                 <a:solidFill>
                   <a:srgbClr val="17364A"/>
                 </a:solidFill>
@@ -3474,9 +4567,116 @@
                 <a:ea typeface="Aptos" pitchFamily="34" charset="-122"/>
                 <a:cs typeface="Aptos" pitchFamily="34" charset="-120"/>
               </a:rPr>
-              <a:t>Which staff, partners, or communities would be affected if this issue were handled poorly? What policy, process, or artifact should be created or updated after this module?</a:t>
-            </a:r>
-            <a:endParaRPr lang="en-US" sz="1420" dirty="0"/>
+              <a:t>Generative AI tools that produce public messages may benefit from community review for tone, trust, accessibility, and.</a:t>
+            </a:r>
+            <a:endParaRPr lang="en-US" sz="1250" dirty="0"/>
+          </a:p>
+        </p:txBody>
+      </p:sp>
+      <p:sp>
+        <p:nvSpPr>
+          <p:cNvPr id="14" name="Shape 12"/>
+          <p:cNvSpPr/>
+          <p:nvPr/>
+        </p:nvSpPr>
+        <p:spPr>
+          <a:xfrm>
+            <a:off x="7909560" y="3520440"/>
+            <a:ext cx="3154680" cy="1737360"/>
+          </a:xfrm>
+          <a:prstGeom prst="roundRect">
+            <a:avLst>
+              <a:gd name="adj" fmla="val 6316"/>
+            </a:avLst>
+          </a:prstGeom>
+          <a:solidFill>
+            <a:srgbClr val="EAF6F8"/>
+          </a:solidFill>
+          <a:ln w="12700">
+            <a:solidFill>
+              <a:srgbClr val="B9D7E6"/>
+            </a:solidFill>
+            <a:prstDash val="solid"/>
+          </a:ln>
+        </p:spPr>
+      </p:sp>
+      <p:sp>
+        <p:nvSpPr>
+          <p:cNvPr id="15" name="Text 13"/>
+          <p:cNvSpPr/>
+          <p:nvPr/>
+        </p:nvSpPr>
+        <p:spPr>
+          <a:xfrm>
+            <a:off x="8074152" y="3666744"/>
+            <a:ext cx="2825496" cy="201168"/>
+          </a:xfrm>
+          <a:prstGeom prst="rect">
+            <a:avLst/>
+          </a:prstGeom>
+          <a:noFill/>
+          <a:ln/>
+        </p:spPr>
+        <p:txBody>
+          <a:bodyPr wrap="square" lIns="0" tIns="0" rIns="0" bIns="0" rtlCol="0" anchor="ctr"/>
+          <a:lstStyle/>
+          <a:p>
+            <a:pPr indent="0" marL="0">
+              <a:buNone/>
+            </a:pPr>
+            <a:r>
+              <a:rPr lang="en-US" sz="950" b="1" dirty="0">
+                <a:solidFill>
+                  <a:srgbClr val="0068B7"/>
+                </a:solidFill>
+                <a:latin typeface="Aptos" pitchFamily="34" charset="0"/>
+                <a:ea typeface="Aptos" pitchFamily="34" charset="-122"/>
+                <a:cs typeface="Aptos" pitchFamily="34" charset="-120"/>
+              </a:rPr>
+              <a:t>Use this for</a:t>
+            </a:r>
+            <a:endParaRPr lang="en-US" sz="950" dirty="0"/>
+          </a:p>
+        </p:txBody>
+      </p:sp>
+      <p:sp>
+        <p:nvSpPr>
+          <p:cNvPr id="16" name="Text 14"/>
+          <p:cNvSpPr/>
+          <p:nvPr/>
+        </p:nvSpPr>
+        <p:spPr>
+          <a:xfrm>
+            <a:off x="8074152" y="3959352"/>
+            <a:ext cx="2825496" cy="1170432"/>
+          </a:xfrm>
+          <a:prstGeom prst="rect">
+            <a:avLst/>
+          </a:prstGeom>
+          <a:noFill/>
+          <a:ln/>
+        </p:spPr>
+        <p:txBody>
+          <a:bodyPr wrap="square" lIns="0" tIns="0" rIns="0" bIns="0" rtlCol="0" anchor="t">
+            <a:normAutofit/>
+          </a:bodyPr>
+          <a:lstStyle/>
+          <a:p>
+            <a:pPr indent="0" marL="0">
+              <a:buNone/>
+            </a:pPr>
+            <a:r>
+              <a:rPr lang="en-US" sz="1250" dirty="0">
+                <a:solidFill>
+                  <a:srgbClr val="17364A"/>
+                </a:solidFill>
+                <a:latin typeface="Aptos" pitchFamily="34" charset="0"/>
+                <a:ea typeface="Aptos" pitchFamily="34" charset="-122"/>
+                <a:cs typeface="Aptos" pitchFamily="34" charset="-120"/>
+              </a:rPr>
+              <a:t>Connect the concept to public health decisions, safeguards, documentation, or implementation work.</a:t>
+            </a:r>
+            <a:endParaRPr lang="en-US" sz="1250" dirty="0"/>
           </a:p>
         </p:txBody>
       </p:sp>
@@ -3539,7 +4739,32 @@
       </p:sp>
       <p:sp>
         <p:nvSpPr>
-          <p:cNvPr id="3" name="Text 1"/>
+          <p:cNvPr id="3" name="Shape 1"/>
+          <p:cNvSpPr/>
+          <p:nvPr/>
+        </p:nvSpPr>
+        <p:spPr>
+          <a:xfrm>
+            <a:off x="0" y="164592"/>
+            <a:ext cx="146304" cy="6693408"/>
+          </a:xfrm>
+          <a:prstGeom prst="rect">
+            <a:avLst/>
+          </a:prstGeom>
+          <a:solidFill>
+            <a:srgbClr val="2F8A28"/>
+          </a:solidFill>
+          <a:ln w="12700">
+            <a:solidFill>
+              <a:srgbClr val="2F8A28"/>
+            </a:solidFill>
+            <a:prstDash val="solid"/>
+          </a:ln>
+        </p:spPr>
+      </p:sp>
+      <p:sp>
+        <p:nvSpPr>
+          <p:cNvPr id="4" name="Text 2"/>
           <p:cNvSpPr/>
           <p:nvPr/>
         </p:nvSpPr>
@@ -3578,7 +4803,7 @@
       </p:sp>
       <p:sp>
         <p:nvSpPr>
-          <p:cNvPr id="4" name="Text 2"/>
+          <p:cNvPr id="5" name="Text 3"/>
           <p:cNvSpPr/>
           <p:nvPr/>
         </p:nvSpPr>
@@ -3617,7 +4842,7 @@
       </p:sp>
       <p:sp>
         <p:nvSpPr>
-          <p:cNvPr id="5" name="Text 3"/>
+          <p:cNvPr id="6" name="Text 4"/>
           <p:cNvSpPr/>
           <p:nvPr/>
         </p:nvSpPr>
@@ -3656,13 +4881,77 @@
       </p:sp>
       <p:sp>
         <p:nvSpPr>
-          <p:cNvPr id="6" name="Text 4"/>
+          <p:cNvPr id="7" name="Shape 5"/>
           <p:cNvSpPr/>
           <p:nvPr/>
         </p:nvSpPr>
         <p:spPr>
           <a:xfrm>
             <a:off x="640080" y="658368"/>
+            <a:ext cx="420624" cy="420624"/>
+          </a:xfrm>
+          <a:prstGeom prst="ellipse">
+            <a:avLst/>
+          </a:prstGeom>
+          <a:solidFill>
+            <a:srgbClr val="0068B7"/>
+          </a:solidFill>
+          <a:ln w="12700">
+            <a:solidFill>
+              <a:srgbClr val="0068B7"/>
+            </a:solidFill>
+            <a:prstDash val="solid"/>
+          </a:ln>
+        </p:spPr>
+      </p:sp>
+      <p:sp>
+        <p:nvSpPr>
+          <p:cNvPr id="8" name="Text 6"/>
+          <p:cNvSpPr/>
+          <p:nvPr/>
+        </p:nvSpPr>
+        <p:spPr>
+          <a:xfrm>
+            <a:off x="640080" y="731520"/>
+            <a:ext cx="420624" cy="164592"/>
+          </a:xfrm>
+          <a:prstGeom prst="rect">
+            <a:avLst/>
+          </a:prstGeom>
+          <a:noFill/>
+          <a:ln/>
+        </p:spPr>
+        <p:txBody>
+          <a:bodyPr wrap="square" lIns="0" tIns="0" rIns="0" bIns="0" rtlCol="0" anchor="ctr"/>
+          <a:lstStyle/>
+          <a:p>
+            <a:pPr algn="ctr" indent="0" marL="0">
+              <a:buNone/>
+            </a:pPr>
+            <a:r>
+              <a:rPr lang="en-US" sz="1100" b="1" dirty="0">
+                <a:solidFill>
+                  <a:srgbClr val="FFFFFF"/>
+                </a:solidFill>
+                <a:latin typeface="Aptos" pitchFamily="34" charset="0"/>
+                <a:ea typeface="Aptos" pitchFamily="34" charset="-122"/>
+                <a:cs typeface="Aptos" pitchFamily="34" charset="-120"/>
+              </a:rPr>
+              <a:t>9</a:t>
+            </a:r>
+            <a:endParaRPr lang="en-US" sz="1100" dirty="0"/>
+          </a:p>
+        </p:txBody>
+      </p:sp>
+      <p:sp>
+        <p:nvSpPr>
+          <p:cNvPr id="9" name="Text 7"/>
+          <p:cNvSpPr/>
+          <p:nvPr/>
+        </p:nvSpPr>
+        <p:spPr>
+          <a:xfrm>
+            <a:off x="640080" y="621792"/>
             <a:ext cx="10881360" cy="566928"/>
           </a:xfrm>
           <a:prstGeom prst="rect">
@@ -3689,7 +4978,7 @@
                 <a:ea typeface="Aptos Display" pitchFamily="34" charset="-122"/>
                 <a:cs typeface="Aptos Display" pitchFamily="34" charset="-120"/>
               </a:rPr>
-              <a:t>Practical Exercise</a:t>
+              <a:t>Reflection Questions</a:t>
             </a:r>
             <a:endParaRPr lang="en-US" sz="2700" dirty="0"/>
           </a:p>
@@ -3697,32 +4986,164 @@
       </p:sp>
       <p:sp>
         <p:nvSpPr>
-          <p:cNvPr id="7" name="Text 5"/>
-          <p:cNvSpPr/>
-          <p:nvPr/>
-        </p:nvSpPr>
-        <p:spPr>
-          <a:xfrm>
-            <a:off x="822960" y="1325880"/>
-            <a:ext cx="10378440" cy="4800600"/>
-          </a:xfrm>
-          <a:prstGeom prst="rect">
-            <a:avLst/>
-          </a:prstGeom>
-          <a:noFill/>
-          <a:ln/>
-        </p:spPr>
-        <p:txBody>
-          <a:bodyPr wrap="square" lIns="1016" tIns="1016" rIns="1016" bIns="1016" rtlCol="0" anchor="t">
+          <p:cNvPr id="10" name="Text 8"/>
+          <p:cNvSpPr/>
+          <p:nvPr/>
+        </p:nvSpPr>
+        <p:spPr>
+          <a:xfrm>
+            <a:off x="868680" y="1417320"/>
+            <a:ext cx="6675120" cy="4434840"/>
+          </a:xfrm>
+          <a:prstGeom prst="rect">
+            <a:avLst/>
+          </a:prstGeom>
+          <a:noFill/>
+          <a:ln/>
+        </p:spPr>
+        <p:txBody>
+          <a:bodyPr wrap="square" lIns="635" tIns="635" rIns="635" bIns="635" rtlCol="0" anchor="t">
             <a:normAutofit/>
           </a:bodyPr>
           <a:lstStyle/>
           <a:p>
+            <a:r>
+              <a:rPr lang="en-US" sz="1700" dirty="0">
+                <a:solidFill>
+                  <a:srgbClr val="17364A"/>
+                </a:solidFill>
+                <a:latin typeface="Aptos" pitchFamily="34" charset="0"/>
+                <a:ea typeface="Aptos" pitchFamily="34" charset="-122"/>
+                <a:cs typeface="Aptos" pitchFamily="34" charset="-120"/>
+              </a:rPr>
+              <a:t>Which current or proposed AI use case in your agency raises this leadership or governance issue most clearly?</a:t>
+            </a:r>
+            <a:endParaRPr lang="en-US" sz="1700" dirty="0"/>
+          </a:p>
+          <a:p>
+            <a:r>
+              <a:rPr lang="en-US" sz="1700" dirty="0">
+                <a:solidFill>
+                  <a:srgbClr val="17364A"/>
+                </a:solidFill>
+                <a:latin typeface="Aptos" pitchFamily="34" charset="0"/>
+                <a:ea typeface="Aptos" pitchFamily="34" charset="-122"/>
+                <a:cs typeface="Aptos" pitchFamily="34" charset="-120"/>
+              </a:rPr>
+              <a:t>Who currently has authority to make decisions about this issue, and is that authority documented?</a:t>
+            </a:r>
+            <a:endParaRPr lang="en-US" sz="1700" dirty="0"/>
+          </a:p>
+          <a:p>
+            <a:r>
+              <a:rPr lang="en-US" sz="1700" dirty="0">
+                <a:solidFill>
+                  <a:srgbClr val="17364A"/>
+                </a:solidFill>
+                <a:latin typeface="Aptos" pitchFamily="34" charset="0"/>
+                <a:ea typeface="Aptos" pitchFamily="34" charset="-122"/>
+                <a:cs typeface="Aptos" pitchFamily="34" charset="-120"/>
+              </a:rPr>
+              <a:t>What evidence would governance or leadership need before approving the use case?</a:t>
+            </a:r>
+            <a:endParaRPr lang="en-US" sz="1700" dirty="0"/>
+          </a:p>
+        </p:txBody>
+      </p:sp>
+      <p:sp>
+        <p:nvSpPr>
+          <p:cNvPr id="11" name="Shape 9"/>
+          <p:cNvSpPr/>
+          <p:nvPr/>
+        </p:nvSpPr>
+        <p:spPr>
+          <a:xfrm>
+            <a:off x="7909560" y="1417320"/>
+            <a:ext cx="3154680" cy="1828800"/>
+          </a:xfrm>
+          <a:prstGeom prst="roundRect">
+            <a:avLst>
+              <a:gd name="adj" fmla="val 6000"/>
+            </a:avLst>
+          </a:prstGeom>
+          <a:solidFill>
+            <a:srgbClr val="EEF8ED"/>
+          </a:solidFill>
+          <a:ln w="12700">
+            <a:solidFill>
+              <a:srgbClr val="B9D7E6"/>
+            </a:solidFill>
+            <a:prstDash val="solid"/>
+          </a:ln>
+        </p:spPr>
+      </p:sp>
+      <p:sp>
+        <p:nvSpPr>
+          <p:cNvPr id="12" name="Text 10"/>
+          <p:cNvSpPr/>
+          <p:nvPr/>
+        </p:nvSpPr>
+        <p:spPr>
+          <a:xfrm>
+            <a:off x="8074152" y="1563624"/>
+            <a:ext cx="2825496" cy="201168"/>
+          </a:xfrm>
+          <a:prstGeom prst="rect">
+            <a:avLst/>
+          </a:prstGeom>
+          <a:noFill/>
+          <a:ln/>
+        </p:spPr>
+        <p:txBody>
+          <a:bodyPr wrap="square" lIns="0" tIns="0" rIns="0" bIns="0" rtlCol="0" anchor="ctr"/>
+          <a:lstStyle/>
+          <a:p>
             <a:pPr indent="0" marL="0">
               <a:buNone/>
             </a:pPr>
             <a:r>
-              <a:rPr lang="en-US" sz="1420" dirty="0">
+              <a:rPr lang="en-US" sz="950" b="1" dirty="0">
+                <a:solidFill>
+                  <a:srgbClr val="0068B7"/>
+                </a:solidFill>
+                <a:latin typeface="Aptos" pitchFamily="34" charset="0"/>
+                <a:ea typeface="Aptos" pitchFamily="34" charset="-122"/>
+                <a:cs typeface="Aptos" pitchFamily="34" charset="-120"/>
+              </a:rPr>
+              <a:t>Key idea</a:t>
+            </a:r>
+            <a:endParaRPr lang="en-US" sz="950" dirty="0"/>
+          </a:p>
+        </p:txBody>
+      </p:sp>
+      <p:sp>
+        <p:nvSpPr>
+          <p:cNvPr id="13" name="Text 11"/>
+          <p:cNvSpPr/>
+          <p:nvPr/>
+        </p:nvSpPr>
+        <p:spPr>
+          <a:xfrm>
+            <a:off x="8074152" y="1856232"/>
+            <a:ext cx="2825496" cy="1261872"/>
+          </a:xfrm>
+          <a:prstGeom prst="rect">
+            <a:avLst/>
+          </a:prstGeom>
+          <a:noFill/>
+          <a:ln/>
+        </p:spPr>
+        <p:txBody>
+          <a:bodyPr wrap="square" lIns="0" tIns="0" rIns="0" bIns="0" rtlCol="0" anchor="t">
+            <a:normAutofit/>
+          </a:bodyPr>
+          <a:lstStyle/>
+          <a:p>
+            <a:pPr indent="0" marL="0">
+              <a:buNone/>
+            </a:pPr>
+            <a:r>
+              <a:rPr lang="en-US" sz="1250" dirty="0">
                 <a:solidFill>
                   <a:srgbClr val="17364A"/>
                 </a:solidFill>
@@ -3730,9 +5151,116 @@
                 <a:ea typeface="Aptos" pitchFamily="34" charset="-122"/>
                 <a:cs typeface="Aptos" pitchFamily="34" charset="-120"/>
               </a:rPr>
-              <a:t>Develop a participatory governance plan for one AI use case. Include affected groups, engagement purpose, timing, materials, questions, accessibility supports, decision influence, feedback loop, and monitoring plan.</a:t>
-            </a:r>
-            <a:endParaRPr lang="en-US" sz="1420" dirty="0"/>
+              <a:t>Which current or proposed AI use case in your agency raises this leadership or governance issue most clearly?</a:t>
+            </a:r>
+            <a:endParaRPr lang="en-US" sz="1250" dirty="0"/>
+          </a:p>
+        </p:txBody>
+      </p:sp>
+      <p:sp>
+        <p:nvSpPr>
+          <p:cNvPr id="14" name="Shape 12"/>
+          <p:cNvSpPr/>
+          <p:nvPr/>
+        </p:nvSpPr>
+        <p:spPr>
+          <a:xfrm>
+            <a:off x="7909560" y="3520440"/>
+            <a:ext cx="3154680" cy="1737360"/>
+          </a:xfrm>
+          <a:prstGeom prst="roundRect">
+            <a:avLst>
+              <a:gd name="adj" fmla="val 6316"/>
+            </a:avLst>
+          </a:prstGeom>
+          <a:solidFill>
+            <a:srgbClr val="EAF6F8"/>
+          </a:solidFill>
+          <a:ln w="12700">
+            <a:solidFill>
+              <a:srgbClr val="B9D7E6"/>
+            </a:solidFill>
+            <a:prstDash val="solid"/>
+          </a:ln>
+        </p:spPr>
+      </p:sp>
+      <p:sp>
+        <p:nvSpPr>
+          <p:cNvPr id="15" name="Text 13"/>
+          <p:cNvSpPr/>
+          <p:nvPr/>
+        </p:nvSpPr>
+        <p:spPr>
+          <a:xfrm>
+            <a:off x="8074152" y="3666744"/>
+            <a:ext cx="2825496" cy="201168"/>
+          </a:xfrm>
+          <a:prstGeom prst="rect">
+            <a:avLst/>
+          </a:prstGeom>
+          <a:noFill/>
+          <a:ln/>
+        </p:spPr>
+        <p:txBody>
+          <a:bodyPr wrap="square" lIns="0" tIns="0" rIns="0" bIns="0" rtlCol="0" anchor="ctr"/>
+          <a:lstStyle/>
+          <a:p>
+            <a:pPr indent="0" marL="0">
+              <a:buNone/>
+            </a:pPr>
+            <a:r>
+              <a:rPr lang="en-US" sz="950" b="1" dirty="0">
+                <a:solidFill>
+                  <a:srgbClr val="0068B7"/>
+                </a:solidFill>
+                <a:latin typeface="Aptos" pitchFamily="34" charset="0"/>
+                <a:ea typeface="Aptos" pitchFamily="34" charset="-122"/>
+                <a:cs typeface="Aptos" pitchFamily="34" charset="-120"/>
+              </a:rPr>
+              <a:t>Use this for</a:t>
+            </a:r>
+            <a:endParaRPr lang="en-US" sz="950" dirty="0"/>
+          </a:p>
+        </p:txBody>
+      </p:sp>
+      <p:sp>
+        <p:nvSpPr>
+          <p:cNvPr id="16" name="Text 14"/>
+          <p:cNvSpPr/>
+          <p:nvPr/>
+        </p:nvSpPr>
+        <p:spPr>
+          <a:xfrm>
+            <a:off x="8074152" y="3959352"/>
+            <a:ext cx="2825496" cy="1170432"/>
+          </a:xfrm>
+          <a:prstGeom prst="rect">
+            <a:avLst/>
+          </a:prstGeom>
+          <a:noFill/>
+          <a:ln/>
+        </p:spPr>
+        <p:txBody>
+          <a:bodyPr wrap="square" lIns="0" tIns="0" rIns="0" bIns="0" rtlCol="0" anchor="t">
+            <a:normAutofit/>
+          </a:bodyPr>
+          <a:lstStyle/>
+          <a:p>
+            <a:pPr indent="0" marL="0">
+              <a:buNone/>
+            </a:pPr>
+            <a:r>
+              <a:rPr lang="en-US" sz="1250" dirty="0">
+                <a:solidFill>
+                  <a:srgbClr val="17364A"/>
+                </a:solidFill>
+                <a:latin typeface="Aptos" pitchFamily="34" charset="0"/>
+                <a:ea typeface="Aptos" pitchFamily="34" charset="-122"/>
+                <a:cs typeface="Aptos" pitchFamily="34" charset="-120"/>
+              </a:rPr>
+              <a:t>Connect the concept to public health decisions, safeguards, documentation, or implementation work.</a:t>
+            </a:r>
+            <a:endParaRPr lang="en-US" sz="1250" dirty="0"/>
           </a:p>
         </p:txBody>
       </p:sp>
@@ -3795,7 +5323,32 @@
       </p:sp>
       <p:sp>
         <p:nvSpPr>
-          <p:cNvPr id="3" name="Text 1"/>
+          <p:cNvPr id="3" name="Shape 1"/>
+          <p:cNvSpPr/>
+          <p:nvPr/>
+        </p:nvSpPr>
+        <p:spPr>
+          <a:xfrm>
+            <a:off x="0" y="164592"/>
+            <a:ext cx="146304" cy="6693408"/>
+          </a:xfrm>
+          <a:prstGeom prst="rect">
+            <a:avLst/>
+          </a:prstGeom>
+          <a:solidFill>
+            <a:srgbClr val="2F8A28"/>
+          </a:solidFill>
+          <a:ln w="12700">
+            <a:solidFill>
+              <a:srgbClr val="2F8A28"/>
+            </a:solidFill>
+            <a:prstDash val="solid"/>
+          </a:ln>
+        </p:spPr>
+      </p:sp>
+      <p:sp>
+        <p:nvSpPr>
+          <p:cNvPr id="4" name="Text 2"/>
           <p:cNvSpPr/>
           <p:nvPr/>
         </p:nvSpPr>
@@ -3834,7 +5387,7 @@
       </p:sp>
       <p:sp>
         <p:nvSpPr>
-          <p:cNvPr id="4" name="Text 2"/>
+          <p:cNvPr id="5" name="Text 3"/>
           <p:cNvSpPr/>
           <p:nvPr/>
         </p:nvSpPr>
@@ -3873,7 +5426,7 @@
       </p:sp>
       <p:sp>
         <p:nvSpPr>
-          <p:cNvPr id="5" name="Text 3"/>
+          <p:cNvPr id="6" name="Text 4"/>
           <p:cNvSpPr/>
           <p:nvPr/>
         </p:nvSpPr>
@@ -3912,7 +5465,7 @@
       </p:sp>
       <p:sp>
         <p:nvSpPr>
-          <p:cNvPr id="6" name="Text 4"/>
+          <p:cNvPr id="7" name="Text 5"/>
           <p:cNvSpPr/>
           <p:nvPr/>
         </p:nvSpPr>
@@ -3945,7 +5498,7 @@
                 <a:ea typeface="Aptos Display" pitchFamily="34" charset="-122"/>
                 <a:cs typeface="Aptos Display" pitchFamily="34" charset="-120"/>
               </a:rPr>
-              <a:t>Before You Begin</a:t>
+              <a:t>Reflection Questions Continued</a:t>
             </a:r>
             <a:endParaRPr lang="en-US" sz="2700" dirty="0"/>
           </a:p>
@@ -3953,32 +5506,150 @@
       </p:sp>
       <p:sp>
         <p:nvSpPr>
-          <p:cNvPr id="7" name="Text 5"/>
-          <p:cNvSpPr/>
-          <p:nvPr/>
-        </p:nvSpPr>
-        <p:spPr>
-          <a:xfrm>
-            <a:off x="822960" y="1325880"/>
-            <a:ext cx="10378440" cy="4800600"/>
-          </a:xfrm>
-          <a:prstGeom prst="rect">
-            <a:avLst/>
-          </a:prstGeom>
-          <a:noFill/>
-          <a:ln/>
-        </p:spPr>
-        <p:txBody>
-          <a:bodyPr wrap="square" lIns="1016" tIns="1016" rIns="1016" bIns="1016" rtlCol="0" anchor="t">
+          <p:cNvPr id="8" name="Text 6"/>
+          <p:cNvSpPr/>
+          <p:nvPr/>
+        </p:nvSpPr>
+        <p:spPr>
+          <a:xfrm>
+            <a:off x="868680" y="1417320"/>
+            <a:ext cx="6675120" cy="4434840"/>
+          </a:xfrm>
+          <a:prstGeom prst="rect">
+            <a:avLst/>
+          </a:prstGeom>
+          <a:noFill/>
+          <a:ln/>
+        </p:spPr>
+        <p:txBody>
+          <a:bodyPr wrap="square" lIns="635" tIns="635" rIns="635" bIns="635" rtlCol="0" anchor="t">
             <a:normAutofit/>
           </a:bodyPr>
           <a:lstStyle/>
           <a:p>
+            <a:r>
+              <a:rPr lang="en-US" sz="1700" dirty="0">
+                <a:solidFill>
+                  <a:srgbClr val="17364A"/>
+                </a:solidFill>
+                <a:latin typeface="Aptos" pitchFamily="34" charset="0"/>
+                <a:ea typeface="Aptos" pitchFamily="34" charset="-122"/>
+                <a:cs typeface="Aptos" pitchFamily="34" charset="-120"/>
+              </a:rPr>
+              <a:t>Which staff, partners, or communities would be affected if this issue were handled poorly?</a:t>
+            </a:r>
+            <a:endParaRPr lang="en-US" sz="1700" dirty="0"/>
+          </a:p>
+          <a:p>
+            <a:r>
+              <a:rPr lang="en-US" sz="1700" dirty="0">
+                <a:solidFill>
+                  <a:srgbClr val="17364A"/>
+                </a:solidFill>
+                <a:latin typeface="Aptos" pitchFamily="34" charset="0"/>
+                <a:ea typeface="Aptos" pitchFamily="34" charset="-122"/>
+                <a:cs typeface="Aptos" pitchFamily="34" charset="-120"/>
+              </a:rPr>
+              <a:t>What policy, process, or artifact should be created or updated after this module?</a:t>
+            </a:r>
+            <a:endParaRPr lang="en-US" sz="1700" dirty="0"/>
+          </a:p>
+        </p:txBody>
+      </p:sp>
+      <p:sp>
+        <p:nvSpPr>
+          <p:cNvPr id="9" name="Shape 7"/>
+          <p:cNvSpPr/>
+          <p:nvPr/>
+        </p:nvSpPr>
+        <p:spPr>
+          <a:xfrm>
+            <a:off x="7909560" y="1417320"/>
+            <a:ext cx="3154680" cy="1828800"/>
+          </a:xfrm>
+          <a:prstGeom prst="roundRect">
+            <a:avLst>
+              <a:gd name="adj" fmla="val 6000"/>
+            </a:avLst>
+          </a:prstGeom>
+          <a:solidFill>
+            <a:srgbClr val="EEF8ED"/>
+          </a:solidFill>
+          <a:ln w="12700">
+            <a:solidFill>
+              <a:srgbClr val="B9D7E6"/>
+            </a:solidFill>
+            <a:prstDash val="solid"/>
+          </a:ln>
+        </p:spPr>
+      </p:sp>
+      <p:sp>
+        <p:nvSpPr>
+          <p:cNvPr id="10" name="Text 8"/>
+          <p:cNvSpPr/>
+          <p:nvPr/>
+        </p:nvSpPr>
+        <p:spPr>
+          <a:xfrm>
+            <a:off x="8074152" y="1563624"/>
+            <a:ext cx="2825496" cy="201168"/>
+          </a:xfrm>
+          <a:prstGeom prst="rect">
+            <a:avLst/>
+          </a:prstGeom>
+          <a:noFill/>
+          <a:ln/>
+        </p:spPr>
+        <p:txBody>
+          <a:bodyPr wrap="square" lIns="0" tIns="0" rIns="0" bIns="0" rtlCol="0" anchor="ctr"/>
+          <a:lstStyle/>
+          <a:p>
             <a:pPr indent="0" marL="0">
               <a:buNone/>
             </a:pPr>
             <a:r>
-              <a:rPr lang="en-US" sz="1420" dirty="0">
+              <a:rPr lang="en-US" sz="950" b="1" dirty="0">
+                <a:solidFill>
+                  <a:srgbClr val="0068B7"/>
+                </a:solidFill>
+                <a:latin typeface="Aptos" pitchFamily="34" charset="0"/>
+                <a:ea typeface="Aptos" pitchFamily="34" charset="-122"/>
+                <a:cs typeface="Aptos" pitchFamily="34" charset="-120"/>
+              </a:rPr>
+              <a:t>Key idea</a:t>
+            </a:r>
+            <a:endParaRPr lang="en-US" sz="950" dirty="0"/>
+          </a:p>
+        </p:txBody>
+      </p:sp>
+      <p:sp>
+        <p:nvSpPr>
+          <p:cNvPr id="11" name="Text 9"/>
+          <p:cNvSpPr/>
+          <p:nvPr/>
+        </p:nvSpPr>
+        <p:spPr>
+          <a:xfrm>
+            <a:off x="8074152" y="1856232"/>
+            <a:ext cx="2825496" cy="1261872"/>
+          </a:xfrm>
+          <a:prstGeom prst="rect">
+            <a:avLst/>
+          </a:prstGeom>
+          <a:noFill/>
+          <a:ln/>
+        </p:spPr>
+        <p:txBody>
+          <a:bodyPr wrap="square" lIns="0" tIns="0" rIns="0" bIns="0" rtlCol="0" anchor="t">
+            <a:normAutofit/>
+          </a:bodyPr>
+          <a:lstStyle/>
+          <a:p>
+            <a:pPr indent="0" marL="0">
+              <a:buNone/>
+            </a:pPr>
+            <a:r>
+              <a:rPr lang="en-US" sz="1250" dirty="0">
                 <a:solidFill>
                   <a:srgbClr val="17364A"/>
                 </a:solidFill>
@@ -3986,9 +5657,116 @@
                 <a:ea typeface="Aptos" pitchFamily="34" charset="-122"/>
                 <a:cs typeface="Aptos" pitchFamily="34" charset="-120"/>
               </a:rPr>
-              <a:t>Choose a real or realistic public health AI use case. Document assumptions, unresolved questions, and which agency roles would need to review the artifact before it is adopted. The exercise should produce a work product that could support governance review, leadership discussion, implementation planning, or policy development.</a:t>
-            </a:r>
-            <a:endParaRPr lang="en-US" sz="1420" dirty="0"/>
+              <a:t>Which staff, partners, or communities would be affected if this issue were handled poorly?</a:t>
+            </a:r>
+            <a:endParaRPr lang="en-US" sz="1250" dirty="0"/>
+          </a:p>
+        </p:txBody>
+      </p:sp>
+      <p:sp>
+        <p:nvSpPr>
+          <p:cNvPr id="12" name="Shape 10"/>
+          <p:cNvSpPr/>
+          <p:nvPr/>
+        </p:nvSpPr>
+        <p:spPr>
+          <a:xfrm>
+            <a:off x="7909560" y="3520440"/>
+            <a:ext cx="3154680" cy="1737360"/>
+          </a:xfrm>
+          <a:prstGeom prst="roundRect">
+            <a:avLst>
+              <a:gd name="adj" fmla="val 6316"/>
+            </a:avLst>
+          </a:prstGeom>
+          <a:solidFill>
+            <a:srgbClr val="EAF6F8"/>
+          </a:solidFill>
+          <a:ln w="12700">
+            <a:solidFill>
+              <a:srgbClr val="B9D7E6"/>
+            </a:solidFill>
+            <a:prstDash val="solid"/>
+          </a:ln>
+        </p:spPr>
+      </p:sp>
+      <p:sp>
+        <p:nvSpPr>
+          <p:cNvPr id="13" name="Text 11"/>
+          <p:cNvSpPr/>
+          <p:nvPr/>
+        </p:nvSpPr>
+        <p:spPr>
+          <a:xfrm>
+            <a:off x="8074152" y="3666744"/>
+            <a:ext cx="2825496" cy="201168"/>
+          </a:xfrm>
+          <a:prstGeom prst="rect">
+            <a:avLst/>
+          </a:prstGeom>
+          <a:noFill/>
+          <a:ln/>
+        </p:spPr>
+        <p:txBody>
+          <a:bodyPr wrap="square" lIns="0" tIns="0" rIns="0" bIns="0" rtlCol="0" anchor="ctr"/>
+          <a:lstStyle/>
+          <a:p>
+            <a:pPr indent="0" marL="0">
+              <a:buNone/>
+            </a:pPr>
+            <a:r>
+              <a:rPr lang="en-US" sz="950" b="1" dirty="0">
+                <a:solidFill>
+                  <a:srgbClr val="0068B7"/>
+                </a:solidFill>
+                <a:latin typeface="Aptos" pitchFamily="34" charset="0"/>
+                <a:ea typeface="Aptos" pitchFamily="34" charset="-122"/>
+                <a:cs typeface="Aptos" pitchFamily="34" charset="-120"/>
+              </a:rPr>
+              <a:t>Use this for</a:t>
+            </a:r>
+            <a:endParaRPr lang="en-US" sz="950" dirty="0"/>
+          </a:p>
+        </p:txBody>
+      </p:sp>
+      <p:sp>
+        <p:nvSpPr>
+          <p:cNvPr id="14" name="Text 12"/>
+          <p:cNvSpPr/>
+          <p:nvPr/>
+        </p:nvSpPr>
+        <p:spPr>
+          <a:xfrm>
+            <a:off x="8074152" y="3959352"/>
+            <a:ext cx="2825496" cy="1170432"/>
+          </a:xfrm>
+          <a:prstGeom prst="rect">
+            <a:avLst/>
+          </a:prstGeom>
+          <a:noFill/>
+          <a:ln/>
+        </p:spPr>
+        <p:txBody>
+          <a:bodyPr wrap="square" lIns="0" tIns="0" rIns="0" bIns="0" rtlCol="0" anchor="t">
+            <a:normAutofit/>
+          </a:bodyPr>
+          <a:lstStyle/>
+          <a:p>
+            <a:pPr indent="0" marL="0">
+              <a:buNone/>
+            </a:pPr>
+            <a:r>
+              <a:rPr lang="en-US" sz="1250" dirty="0">
+                <a:solidFill>
+                  <a:srgbClr val="17364A"/>
+                </a:solidFill>
+                <a:latin typeface="Aptos" pitchFamily="34" charset="0"/>
+                <a:ea typeface="Aptos" pitchFamily="34" charset="-122"/>
+                <a:cs typeface="Aptos" pitchFamily="34" charset="-120"/>
+              </a:rPr>
+              <a:t>Connect the concept to public health decisions, safeguards, documentation, or implementation work.</a:t>
+            </a:r>
+            <a:endParaRPr lang="en-US" sz="1250" dirty="0"/>
           </a:p>
         </p:txBody>
       </p:sp>
@@ -4051,7 +5829,32 @@
       </p:sp>
       <p:sp>
         <p:nvSpPr>
-          <p:cNvPr id="3" name="Text 1"/>
+          <p:cNvPr id="3" name="Shape 1"/>
+          <p:cNvSpPr/>
+          <p:nvPr/>
+        </p:nvSpPr>
+        <p:spPr>
+          <a:xfrm>
+            <a:off x="0" y="164592"/>
+            <a:ext cx="146304" cy="6693408"/>
+          </a:xfrm>
+          <a:prstGeom prst="rect">
+            <a:avLst/>
+          </a:prstGeom>
+          <a:solidFill>
+            <a:srgbClr val="2F8A28"/>
+          </a:solidFill>
+          <a:ln w="12700">
+            <a:solidFill>
+              <a:srgbClr val="2F8A28"/>
+            </a:solidFill>
+            <a:prstDash val="solid"/>
+          </a:ln>
+        </p:spPr>
+      </p:sp>
+      <p:sp>
+        <p:nvSpPr>
+          <p:cNvPr id="4" name="Text 2"/>
           <p:cNvSpPr/>
           <p:nvPr/>
         </p:nvSpPr>
@@ -4090,7 +5893,7 @@
       </p:sp>
       <p:sp>
         <p:nvSpPr>
-          <p:cNvPr id="4" name="Text 2"/>
+          <p:cNvPr id="5" name="Text 3"/>
           <p:cNvSpPr/>
           <p:nvPr/>
         </p:nvSpPr>
@@ -4129,7 +5932,7 @@
       </p:sp>
       <p:sp>
         <p:nvSpPr>
-          <p:cNvPr id="5" name="Text 3"/>
+          <p:cNvPr id="6" name="Text 4"/>
           <p:cNvSpPr/>
           <p:nvPr/>
         </p:nvSpPr>
@@ -4168,13 +5971,77 @@
       </p:sp>
       <p:sp>
         <p:nvSpPr>
-          <p:cNvPr id="6" name="Text 4"/>
+          <p:cNvPr id="7" name="Shape 5"/>
           <p:cNvSpPr/>
           <p:nvPr/>
         </p:nvSpPr>
         <p:spPr>
           <a:xfrm>
             <a:off x="640080" y="658368"/>
+            <a:ext cx="420624" cy="420624"/>
+          </a:xfrm>
+          <a:prstGeom prst="ellipse">
+            <a:avLst/>
+          </a:prstGeom>
+          <a:solidFill>
+            <a:srgbClr val="0068B7"/>
+          </a:solidFill>
+          <a:ln w="12700">
+            <a:solidFill>
+              <a:srgbClr val="0068B7"/>
+            </a:solidFill>
+            <a:prstDash val="solid"/>
+          </a:ln>
+        </p:spPr>
+      </p:sp>
+      <p:sp>
+        <p:nvSpPr>
+          <p:cNvPr id="8" name="Text 6"/>
+          <p:cNvSpPr/>
+          <p:nvPr/>
+        </p:nvSpPr>
+        <p:spPr>
+          <a:xfrm>
+            <a:off x="640080" y="731520"/>
+            <a:ext cx="420624" cy="164592"/>
+          </a:xfrm>
+          <a:prstGeom prst="rect">
+            <a:avLst/>
+          </a:prstGeom>
+          <a:noFill/>
+          <a:ln/>
+        </p:spPr>
+        <p:txBody>
+          <a:bodyPr wrap="square" lIns="0" tIns="0" rIns="0" bIns="0" rtlCol="0" anchor="ctr"/>
+          <a:lstStyle/>
+          <a:p>
+            <a:pPr algn="ctr" indent="0" marL="0">
+              <a:buNone/>
+            </a:pPr>
+            <a:r>
+              <a:rPr lang="en-US" sz="1100" b="1" dirty="0">
+                <a:solidFill>
+                  <a:srgbClr val="FFFFFF"/>
+                </a:solidFill>
+                <a:latin typeface="Aptos" pitchFamily="34" charset="0"/>
+                <a:ea typeface="Aptos" pitchFamily="34" charset="-122"/>
+                <a:cs typeface="Aptos" pitchFamily="34" charset="-120"/>
+              </a:rPr>
+              <a:t>10</a:t>
+            </a:r>
+            <a:endParaRPr lang="en-US" sz="1100" dirty="0"/>
+          </a:p>
+        </p:txBody>
+      </p:sp>
+      <p:sp>
+        <p:nvSpPr>
+          <p:cNvPr id="9" name="Text 7"/>
+          <p:cNvSpPr/>
+          <p:nvPr/>
+        </p:nvSpPr>
+        <p:spPr>
+          <a:xfrm>
+            <a:off x="640080" y="621792"/>
             <a:ext cx="10881360" cy="566928"/>
           </a:xfrm>
           <a:prstGeom prst="rect">
@@ -4201,7 +6068,7 @@
                 <a:ea typeface="Aptos Display" pitchFamily="34" charset="-122"/>
                 <a:cs typeface="Aptos Display" pitchFamily="34" charset="-120"/>
               </a:rPr>
-              <a:t>Expected Artifact or Evidence</a:t>
+              <a:t>Practical Exercise</a:t>
             </a:r>
             <a:endParaRPr lang="en-US" sz="2700" dirty="0"/>
           </a:p>
@@ -4209,32 +6076,150 @@
       </p:sp>
       <p:sp>
         <p:nvSpPr>
-          <p:cNvPr id="7" name="Text 5"/>
-          <p:cNvSpPr/>
-          <p:nvPr/>
-        </p:nvSpPr>
-        <p:spPr>
-          <a:xfrm>
-            <a:off x="822960" y="1325880"/>
-            <a:ext cx="10378440" cy="4800600"/>
-          </a:xfrm>
-          <a:prstGeom prst="rect">
-            <a:avLst/>
-          </a:prstGeom>
-          <a:noFill/>
-          <a:ln/>
-        </p:spPr>
-        <p:txBody>
-          <a:bodyPr wrap="square" lIns="1016" tIns="1016" rIns="1016" bIns="1016" rtlCol="0" anchor="t">
+          <p:cNvPr id="10" name="Text 8"/>
+          <p:cNvSpPr/>
+          <p:nvPr/>
+        </p:nvSpPr>
+        <p:spPr>
+          <a:xfrm>
+            <a:off x="868680" y="1417320"/>
+            <a:ext cx="6675120" cy="4434840"/>
+          </a:xfrm>
+          <a:prstGeom prst="rect">
+            <a:avLst/>
+          </a:prstGeom>
+          <a:noFill/>
+          <a:ln/>
+        </p:spPr>
+        <p:txBody>
+          <a:bodyPr wrap="square" lIns="635" tIns="635" rIns="635" bIns="635" rtlCol="0" anchor="t">
             <a:normAutofit/>
           </a:bodyPr>
           <a:lstStyle/>
           <a:p>
+            <a:r>
+              <a:rPr lang="en-US" sz="1700" dirty="0">
+                <a:solidFill>
+                  <a:srgbClr val="17364A"/>
+                </a:solidFill>
+                <a:latin typeface="Aptos" pitchFamily="34" charset="0"/>
+                <a:ea typeface="Aptos" pitchFamily="34" charset="-122"/>
+                <a:cs typeface="Aptos" pitchFamily="34" charset="-120"/>
+              </a:rPr>
+              <a:t>Develop a participatory governance plan for one AI use case.</a:t>
+            </a:r>
+            <a:endParaRPr lang="en-US" sz="1700" dirty="0"/>
+          </a:p>
+          <a:p>
+            <a:r>
+              <a:rPr lang="en-US" sz="1700" dirty="0">
+                <a:solidFill>
+                  <a:srgbClr val="17364A"/>
+                </a:solidFill>
+                <a:latin typeface="Aptos" pitchFamily="34" charset="0"/>
+                <a:ea typeface="Aptos" pitchFamily="34" charset="-122"/>
+                <a:cs typeface="Aptos" pitchFamily="34" charset="-120"/>
+              </a:rPr>
+              <a:t>Include affected groups, engagement purpose, timing, materials, questions, accessibility supports, decision influence,.</a:t>
+            </a:r>
+            <a:endParaRPr lang="en-US" sz="1700" dirty="0"/>
+          </a:p>
+        </p:txBody>
+      </p:sp>
+      <p:sp>
+        <p:nvSpPr>
+          <p:cNvPr id="11" name="Shape 9"/>
+          <p:cNvSpPr/>
+          <p:nvPr/>
+        </p:nvSpPr>
+        <p:spPr>
+          <a:xfrm>
+            <a:off x="7909560" y="1417320"/>
+            <a:ext cx="3154680" cy="1828800"/>
+          </a:xfrm>
+          <a:prstGeom prst="roundRect">
+            <a:avLst>
+              <a:gd name="adj" fmla="val 6000"/>
+            </a:avLst>
+          </a:prstGeom>
+          <a:solidFill>
+            <a:srgbClr val="EEF8ED"/>
+          </a:solidFill>
+          <a:ln w="12700">
+            <a:solidFill>
+              <a:srgbClr val="B9D7E6"/>
+            </a:solidFill>
+            <a:prstDash val="solid"/>
+          </a:ln>
+        </p:spPr>
+      </p:sp>
+      <p:sp>
+        <p:nvSpPr>
+          <p:cNvPr id="12" name="Text 10"/>
+          <p:cNvSpPr/>
+          <p:nvPr/>
+        </p:nvSpPr>
+        <p:spPr>
+          <a:xfrm>
+            <a:off x="8074152" y="1563624"/>
+            <a:ext cx="2825496" cy="201168"/>
+          </a:xfrm>
+          <a:prstGeom prst="rect">
+            <a:avLst/>
+          </a:prstGeom>
+          <a:noFill/>
+          <a:ln/>
+        </p:spPr>
+        <p:txBody>
+          <a:bodyPr wrap="square" lIns="0" tIns="0" rIns="0" bIns="0" rtlCol="0" anchor="ctr"/>
+          <a:lstStyle/>
+          <a:p>
             <a:pPr indent="0" marL="0">
               <a:buNone/>
             </a:pPr>
             <a:r>
-              <a:rPr lang="en-US" sz="1420" dirty="0">
+              <a:rPr lang="en-US" sz="950" b="1" dirty="0">
+                <a:solidFill>
+                  <a:srgbClr val="0068B7"/>
+                </a:solidFill>
+                <a:latin typeface="Aptos" pitchFamily="34" charset="0"/>
+                <a:ea typeface="Aptos" pitchFamily="34" charset="-122"/>
+                <a:cs typeface="Aptos" pitchFamily="34" charset="-120"/>
+              </a:rPr>
+              <a:t>Key idea</a:t>
+            </a:r>
+            <a:endParaRPr lang="en-US" sz="950" dirty="0"/>
+          </a:p>
+        </p:txBody>
+      </p:sp>
+      <p:sp>
+        <p:nvSpPr>
+          <p:cNvPr id="13" name="Text 11"/>
+          <p:cNvSpPr/>
+          <p:nvPr/>
+        </p:nvSpPr>
+        <p:spPr>
+          <a:xfrm>
+            <a:off x="8074152" y="1856232"/>
+            <a:ext cx="2825496" cy="1261872"/>
+          </a:xfrm>
+          <a:prstGeom prst="rect">
+            <a:avLst/>
+          </a:prstGeom>
+          <a:noFill/>
+          <a:ln/>
+        </p:spPr>
+        <p:txBody>
+          <a:bodyPr wrap="square" lIns="0" tIns="0" rIns="0" bIns="0" rtlCol="0" anchor="t">
+            <a:normAutofit/>
+          </a:bodyPr>
+          <a:lstStyle/>
+          <a:p>
+            <a:pPr indent="0" marL="0">
+              <a:buNone/>
+            </a:pPr>
+            <a:r>
+              <a:rPr lang="en-US" sz="1250" dirty="0">
                 <a:solidFill>
                   <a:srgbClr val="17364A"/>
                 </a:solidFill>
@@ -4242,9 +6227,116 @@
                 <a:ea typeface="Aptos" pitchFamily="34" charset="-122"/>
                 <a:cs typeface="Aptos" pitchFamily="34" charset="-120"/>
               </a:rPr>
-              <a:t>Participatory governance plan; community briefing outline; engagement questions; feedback response plan.</a:t>
-            </a:r>
-            <a:endParaRPr lang="en-US" sz="1420" dirty="0"/>
+              <a:t>Develop a participatory governance plan for one AI use case.</a:t>
+            </a:r>
+            <a:endParaRPr lang="en-US" sz="1250" dirty="0"/>
+          </a:p>
+        </p:txBody>
+      </p:sp>
+      <p:sp>
+        <p:nvSpPr>
+          <p:cNvPr id="14" name="Shape 12"/>
+          <p:cNvSpPr/>
+          <p:nvPr/>
+        </p:nvSpPr>
+        <p:spPr>
+          <a:xfrm>
+            <a:off x="7909560" y="3520440"/>
+            <a:ext cx="3154680" cy="1737360"/>
+          </a:xfrm>
+          <a:prstGeom prst="roundRect">
+            <a:avLst>
+              <a:gd name="adj" fmla="val 6316"/>
+            </a:avLst>
+          </a:prstGeom>
+          <a:solidFill>
+            <a:srgbClr val="EAF6F8"/>
+          </a:solidFill>
+          <a:ln w="12700">
+            <a:solidFill>
+              <a:srgbClr val="B9D7E6"/>
+            </a:solidFill>
+            <a:prstDash val="solid"/>
+          </a:ln>
+        </p:spPr>
+      </p:sp>
+      <p:sp>
+        <p:nvSpPr>
+          <p:cNvPr id="15" name="Text 13"/>
+          <p:cNvSpPr/>
+          <p:nvPr/>
+        </p:nvSpPr>
+        <p:spPr>
+          <a:xfrm>
+            <a:off x="8074152" y="3666744"/>
+            <a:ext cx="2825496" cy="201168"/>
+          </a:xfrm>
+          <a:prstGeom prst="rect">
+            <a:avLst/>
+          </a:prstGeom>
+          <a:noFill/>
+          <a:ln/>
+        </p:spPr>
+        <p:txBody>
+          <a:bodyPr wrap="square" lIns="0" tIns="0" rIns="0" bIns="0" rtlCol="0" anchor="ctr"/>
+          <a:lstStyle/>
+          <a:p>
+            <a:pPr indent="0" marL="0">
+              <a:buNone/>
+            </a:pPr>
+            <a:r>
+              <a:rPr lang="en-US" sz="950" b="1" dirty="0">
+                <a:solidFill>
+                  <a:srgbClr val="0068B7"/>
+                </a:solidFill>
+                <a:latin typeface="Aptos" pitchFamily="34" charset="0"/>
+                <a:ea typeface="Aptos" pitchFamily="34" charset="-122"/>
+                <a:cs typeface="Aptos" pitchFamily="34" charset="-120"/>
+              </a:rPr>
+              <a:t>Use this for</a:t>
+            </a:r>
+            <a:endParaRPr lang="en-US" sz="950" dirty="0"/>
+          </a:p>
+        </p:txBody>
+      </p:sp>
+      <p:sp>
+        <p:nvSpPr>
+          <p:cNvPr id="16" name="Text 14"/>
+          <p:cNvSpPr/>
+          <p:nvPr/>
+        </p:nvSpPr>
+        <p:spPr>
+          <a:xfrm>
+            <a:off x="8074152" y="3959352"/>
+            <a:ext cx="2825496" cy="1170432"/>
+          </a:xfrm>
+          <a:prstGeom prst="rect">
+            <a:avLst/>
+          </a:prstGeom>
+          <a:noFill/>
+          <a:ln/>
+        </p:spPr>
+        <p:txBody>
+          <a:bodyPr wrap="square" lIns="0" tIns="0" rIns="0" bIns="0" rtlCol="0" anchor="t">
+            <a:normAutofit/>
+          </a:bodyPr>
+          <a:lstStyle/>
+          <a:p>
+            <a:pPr indent="0" marL="0">
+              <a:buNone/>
+            </a:pPr>
+            <a:r>
+              <a:rPr lang="en-US" sz="1250" dirty="0">
+                <a:solidFill>
+                  <a:srgbClr val="17364A"/>
+                </a:solidFill>
+                <a:latin typeface="Aptos" pitchFamily="34" charset="0"/>
+                <a:ea typeface="Aptos" pitchFamily="34" charset="-122"/>
+                <a:cs typeface="Aptos" pitchFamily="34" charset="-120"/>
+              </a:rPr>
+              <a:t>Connect the concept to public health decisions, safeguards, documentation, or implementation work.</a:t>
+            </a:r>
+            <a:endParaRPr lang="en-US" sz="1250" dirty="0"/>
           </a:p>
         </p:txBody>
       </p:sp>
@@ -4307,7 +6399,32 @@
       </p:sp>
       <p:sp>
         <p:nvSpPr>
-          <p:cNvPr id="3" name="Text 1"/>
+          <p:cNvPr id="3" name="Shape 1"/>
+          <p:cNvSpPr/>
+          <p:nvPr/>
+        </p:nvSpPr>
+        <p:spPr>
+          <a:xfrm>
+            <a:off x="0" y="164592"/>
+            <a:ext cx="146304" cy="6693408"/>
+          </a:xfrm>
+          <a:prstGeom prst="rect">
+            <a:avLst/>
+          </a:prstGeom>
+          <a:solidFill>
+            <a:srgbClr val="2F8A28"/>
+          </a:solidFill>
+          <a:ln w="12700">
+            <a:solidFill>
+              <a:srgbClr val="2F8A28"/>
+            </a:solidFill>
+            <a:prstDash val="solid"/>
+          </a:ln>
+        </p:spPr>
+      </p:sp>
+      <p:sp>
+        <p:nvSpPr>
+          <p:cNvPr id="4" name="Text 2"/>
           <p:cNvSpPr/>
           <p:nvPr/>
         </p:nvSpPr>
@@ -4346,7 +6463,7 @@
       </p:sp>
       <p:sp>
         <p:nvSpPr>
-          <p:cNvPr id="4" name="Text 2"/>
+          <p:cNvPr id="5" name="Text 3"/>
           <p:cNvSpPr/>
           <p:nvPr/>
         </p:nvSpPr>
@@ -4385,7 +6502,7 @@
       </p:sp>
       <p:sp>
         <p:nvSpPr>
-          <p:cNvPr id="5" name="Text 3"/>
+          <p:cNvPr id="6" name="Text 4"/>
           <p:cNvSpPr/>
           <p:nvPr/>
         </p:nvSpPr>
@@ -4424,13 +6541,77 @@
       </p:sp>
       <p:sp>
         <p:nvSpPr>
-          <p:cNvPr id="6" name="Text 4"/>
+          <p:cNvPr id="7" name="Shape 5"/>
           <p:cNvSpPr/>
           <p:nvPr/>
         </p:nvSpPr>
         <p:spPr>
           <a:xfrm>
             <a:off x="640080" y="658368"/>
+            <a:ext cx="420624" cy="420624"/>
+          </a:xfrm>
+          <a:prstGeom prst="ellipse">
+            <a:avLst/>
+          </a:prstGeom>
+          <a:solidFill>
+            <a:srgbClr val="0068B7"/>
+          </a:solidFill>
+          <a:ln w="12700">
+            <a:solidFill>
+              <a:srgbClr val="0068B7"/>
+            </a:solidFill>
+            <a:prstDash val="solid"/>
+          </a:ln>
+        </p:spPr>
+      </p:sp>
+      <p:sp>
+        <p:nvSpPr>
+          <p:cNvPr id="8" name="Text 6"/>
+          <p:cNvSpPr/>
+          <p:nvPr/>
+        </p:nvSpPr>
+        <p:spPr>
+          <a:xfrm>
+            <a:off x="640080" y="731520"/>
+            <a:ext cx="420624" cy="164592"/>
+          </a:xfrm>
+          <a:prstGeom prst="rect">
+            <a:avLst/>
+          </a:prstGeom>
+          <a:noFill/>
+          <a:ln/>
+        </p:spPr>
+        <p:txBody>
+          <a:bodyPr wrap="square" lIns="0" tIns="0" rIns="0" bIns="0" rtlCol="0" anchor="ctr"/>
+          <a:lstStyle/>
+          <a:p>
+            <a:pPr algn="ctr" indent="0" marL="0">
+              <a:buNone/>
+            </a:pPr>
+            <a:r>
+              <a:rPr lang="en-US" sz="1100" b="1" dirty="0">
+                <a:solidFill>
+                  <a:srgbClr val="FFFFFF"/>
+                </a:solidFill>
+                <a:latin typeface="Aptos" pitchFamily="34" charset="0"/>
+                <a:ea typeface="Aptos" pitchFamily="34" charset="-122"/>
+                <a:cs typeface="Aptos" pitchFamily="34" charset="-120"/>
+              </a:rPr>
+              <a:t>11</a:t>
+            </a:r>
+            <a:endParaRPr lang="en-US" sz="1100" dirty="0"/>
+          </a:p>
+        </p:txBody>
+      </p:sp>
+      <p:sp>
+        <p:nvSpPr>
+          <p:cNvPr id="9" name="Text 7"/>
+          <p:cNvSpPr/>
+          <p:nvPr/>
+        </p:nvSpPr>
+        <p:spPr>
+          <a:xfrm>
+            <a:off x="640080" y="621792"/>
             <a:ext cx="10881360" cy="566928"/>
           </a:xfrm>
           <a:prstGeom prst="rect">
@@ -4457,7 +6638,7 @@
                 <a:ea typeface="Aptos Display" pitchFamily="34" charset="-122"/>
                 <a:cs typeface="Aptos Display" pitchFamily="34" charset="-120"/>
               </a:rPr>
-              <a:t>Expected Assignment</a:t>
+              <a:t>Before You Begin</a:t>
             </a:r>
             <a:endParaRPr lang="en-US" sz="2700" dirty="0"/>
           </a:p>
@@ -4465,14 +6646,14 @@
       </p:sp>
       <p:sp>
         <p:nvSpPr>
-          <p:cNvPr id="7" name="Text 5"/>
-          <p:cNvSpPr/>
-          <p:nvPr/>
-        </p:nvSpPr>
-        <p:spPr>
-          <a:xfrm>
-            <a:off x="822960" y="1325880"/>
-            <a:ext cx="10378440" cy="4800600"/>
+          <p:cNvPr id="10" name="Text 8"/>
+          <p:cNvSpPr/>
+          <p:nvPr/>
+        </p:nvSpPr>
+        <p:spPr>
+          <a:xfrm>
+            <a:off x="868680" y="1417320"/>
+            <a:ext cx="6675120" cy="4434840"/>
           </a:xfrm>
           <a:prstGeom prst="rect">
             <a:avLst/>
@@ -4487,7 +6668,7 @@
           <a:lstStyle/>
           <a:p>
             <a:r>
-              <a:rPr lang="en-US" sz="1450" dirty="0">
+              <a:rPr lang="en-US" sz="1700" dirty="0">
                 <a:solidFill>
                   <a:srgbClr val="17364A"/>
                 </a:solidFill>
@@ -4495,9 +6676,251 @@
                 <a:ea typeface="Aptos" pitchFamily="34" charset="-122"/>
                 <a:cs typeface="Aptos" pitchFamily="34" charset="-120"/>
               </a:rPr>
-              <a:t>Participatory governance plan; community briefing outline; engagement questions; feedback response plan.</a:t>
-            </a:r>
-            <a:endParaRPr lang="en-US" sz="1450" dirty="0"/>
+              <a:t>Choose a real or realistic public health AI use case.</a:t>
+            </a:r>
+            <a:endParaRPr lang="en-US" sz="1700" dirty="0"/>
+          </a:p>
+          <a:p>
+            <a:r>
+              <a:rPr lang="en-US" sz="1700" dirty="0">
+                <a:solidFill>
+                  <a:srgbClr val="17364A"/>
+                </a:solidFill>
+                <a:latin typeface="Aptos" pitchFamily="34" charset="0"/>
+                <a:ea typeface="Aptos" pitchFamily="34" charset="-122"/>
+                <a:cs typeface="Aptos" pitchFamily="34" charset="-120"/>
+              </a:rPr>
+              <a:t>Document assumptions, unresolved questions, and which agency roles would need to review the artifact before it is adopted.</a:t>
+            </a:r>
+            <a:endParaRPr lang="en-US" sz="1700" dirty="0"/>
+          </a:p>
+          <a:p>
+            <a:r>
+              <a:rPr lang="en-US" sz="1700" dirty="0">
+                <a:solidFill>
+                  <a:srgbClr val="17364A"/>
+                </a:solidFill>
+                <a:latin typeface="Aptos" pitchFamily="34" charset="0"/>
+                <a:ea typeface="Aptos" pitchFamily="34" charset="-122"/>
+                <a:cs typeface="Aptos" pitchFamily="34" charset="-120"/>
+              </a:rPr>
+              <a:t>The exercise should produce a work product that could support governance review, leadership discussion, implementation.</a:t>
+            </a:r>
+            <a:endParaRPr lang="en-US" sz="1700" dirty="0"/>
+          </a:p>
+        </p:txBody>
+      </p:sp>
+      <p:sp>
+        <p:nvSpPr>
+          <p:cNvPr id="11" name="Shape 9"/>
+          <p:cNvSpPr/>
+          <p:nvPr/>
+        </p:nvSpPr>
+        <p:spPr>
+          <a:xfrm>
+            <a:off x="7909560" y="1417320"/>
+            <a:ext cx="3154680" cy="1828800"/>
+          </a:xfrm>
+          <a:prstGeom prst="roundRect">
+            <a:avLst>
+              <a:gd name="adj" fmla="val 6000"/>
+            </a:avLst>
+          </a:prstGeom>
+          <a:solidFill>
+            <a:srgbClr val="EEF8ED"/>
+          </a:solidFill>
+          <a:ln w="12700">
+            <a:solidFill>
+              <a:srgbClr val="B9D7E6"/>
+            </a:solidFill>
+            <a:prstDash val="solid"/>
+          </a:ln>
+        </p:spPr>
+      </p:sp>
+      <p:sp>
+        <p:nvSpPr>
+          <p:cNvPr id="12" name="Text 10"/>
+          <p:cNvSpPr/>
+          <p:nvPr/>
+        </p:nvSpPr>
+        <p:spPr>
+          <a:xfrm>
+            <a:off x="8074152" y="1563624"/>
+            <a:ext cx="2825496" cy="201168"/>
+          </a:xfrm>
+          <a:prstGeom prst="rect">
+            <a:avLst/>
+          </a:prstGeom>
+          <a:noFill/>
+          <a:ln/>
+        </p:spPr>
+        <p:txBody>
+          <a:bodyPr wrap="square" lIns="0" tIns="0" rIns="0" bIns="0" rtlCol="0" anchor="ctr"/>
+          <a:lstStyle/>
+          <a:p>
+            <a:pPr indent="0" marL="0">
+              <a:buNone/>
+            </a:pPr>
+            <a:r>
+              <a:rPr lang="en-US" sz="950" b="1" dirty="0">
+                <a:solidFill>
+                  <a:srgbClr val="0068B7"/>
+                </a:solidFill>
+                <a:latin typeface="Aptos" pitchFamily="34" charset="0"/>
+                <a:ea typeface="Aptos" pitchFamily="34" charset="-122"/>
+                <a:cs typeface="Aptos" pitchFamily="34" charset="-120"/>
+              </a:rPr>
+              <a:t>Key idea</a:t>
+            </a:r>
+            <a:endParaRPr lang="en-US" sz="950" dirty="0"/>
+          </a:p>
+        </p:txBody>
+      </p:sp>
+      <p:sp>
+        <p:nvSpPr>
+          <p:cNvPr id="13" name="Text 11"/>
+          <p:cNvSpPr/>
+          <p:nvPr/>
+        </p:nvSpPr>
+        <p:spPr>
+          <a:xfrm>
+            <a:off x="8074152" y="1856232"/>
+            <a:ext cx="2825496" cy="1261872"/>
+          </a:xfrm>
+          <a:prstGeom prst="rect">
+            <a:avLst/>
+          </a:prstGeom>
+          <a:noFill/>
+          <a:ln/>
+        </p:spPr>
+        <p:txBody>
+          <a:bodyPr wrap="square" lIns="0" tIns="0" rIns="0" bIns="0" rtlCol="0" anchor="t">
+            <a:normAutofit/>
+          </a:bodyPr>
+          <a:lstStyle/>
+          <a:p>
+            <a:pPr indent="0" marL="0">
+              <a:buNone/>
+            </a:pPr>
+            <a:r>
+              <a:rPr lang="en-US" sz="1250" dirty="0">
+                <a:solidFill>
+                  <a:srgbClr val="17364A"/>
+                </a:solidFill>
+                <a:latin typeface="Aptos" pitchFamily="34" charset="0"/>
+                <a:ea typeface="Aptos" pitchFamily="34" charset="-122"/>
+                <a:cs typeface="Aptos" pitchFamily="34" charset="-120"/>
+              </a:rPr>
+              <a:t>Choose a real or realistic public health AI use case.</a:t>
+            </a:r>
+            <a:endParaRPr lang="en-US" sz="1250" dirty="0"/>
+          </a:p>
+        </p:txBody>
+      </p:sp>
+      <p:sp>
+        <p:nvSpPr>
+          <p:cNvPr id="14" name="Shape 12"/>
+          <p:cNvSpPr/>
+          <p:nvPr/>
+        </p:nvSpPr>
+        <p:spPr>
+          <a:xfrm>
+            <a:off x="7909560" y="3520440"/>
+            <a:ext cx="3154680" cy="1737360"/>
+          </a:xfrm>
+          <a:prstGeom prst="roundRect">
+            <a:avLst>
+              <a:gd name="adj" fmla="val 6316"/>
+            </a:avLst>
+          </a:prstGeom>
+          <a:solidFill>
+            <a:srgbClr val="EAF6F8"/>
+          </a:solidFill>
+          <a:ln w="12700">
+            <a:solidFill>
+              <a:srgbClr val="B9D7E6"/>
+            </a:solidFill>
+            <a:prstDash val="solid"/>
+          </a:ln>
+        </p:spPr>
+      </p:sp>
+      <p:sp>
+        <p:nvSpPr>
+          <p:cNvPr id="15" name="Text 13"/>
+          <p:cNvSpPr/>
+          <p:nvPr/>
+        </p:nvSpPr>
+        <p:spPr>
+          <a:xfrm>
+            <a:off x="8074152" y="3666744"/>
+            <a:ext cx="2825496" cy="201168"/>
+          </a:xfrm>
+          <a:prstGeom prst="rect">
+            <a:avLst/>
+          </a:prstGeom>
+          <a:noFill/>
+          <a:ln/>
+        </p:spPr>
+        <p:txBody>
+          <a:bodyPr wrap="square" lIns="0" tIns="0" rIns="0" bIns="0" rtlCol="0" anchor="ctr"/>
+          <a:lstStyle/>
+          <a:p>
+            <a:pPr indent="0" marL="0">
+              <a:buNone/>
+            </a:pPr>
+            <a:r>
+              <a:rPr lang="en-US" sz="950" b="1" dirty="0">
+                <a:solidFill>
+                  <a:srgbClr val="0068B7"/>
+                </a:solidFill>
+                <a:latin typeface="Aptos" pitchFamily="34" charset="0"/>
+                <a:ea typeface="Aptos" pitchFamily="34" charset="-122"/>
+                <a:cs typeface="Aptos" pitchFamily="34" charset="-120"/>
+              </a:rPr>
+              <a:t>Use this for</a:t>
+            </a:r>
+            <a:endParaRPr lang="en-US" sz="950" dirty="0"/>
+          </a:p>
+        </p:txBody>
+      </p:sp>
+      <p:sp>
+        <p:nvSpPr>
+          <p:cNvPr id="16" name="Text 14"/>
+          <p:cNvSpPr/>
+          <p:nvPr/>
+        </p:nvSpPr>
+        <p:spPr>
+          <a:xfrm>
+            <a:off x="8074152" y="3959352"/>
+            <a:ext cx="2825496" cy="1170432"/>
+          </a:xfrm>
+          <a:prstGeom prst="rect">
+            <a:avLst/>
+          </a:prstGeom>
+          <a:noFill/>
+          <a:ln/>
+        </p:spPr>
+        <p:txBody>
+          <a:bodyPr wrap="square" lIns="0" tIns="0" rIns="0" bIns="0" rtlCol="0" anchor="t">
+            <a:normAutofit/>
+          </a:bodyPr>
+          <a:lstStyle/>
+          <a:p>
+            <a:pPr indent="0" marL="0">
+              <a:buNone/>
+            </a:pPr>
+            <a:r>
+              <a:rPr lang="en-US" sz="1250" dirty="0">
+                <a:solidFill>
+                  <a:srgbClr val="17364A"/>
+                </a:solidFill>
+                <a:latin typeface="Aptos" pitchFamily="34" charset="0"/>
+                <a:ea typeface="Aptos" pitchFamily="34" charset="-122"/>
+                <a:cs typeface="Aptos" pitchFamily="34" charset="-120"/>
+              </a:rPr>
+              <a:t>Connect the concept to public health decisions, safeguards, documentation, or implementation work.</a:t>
+            </a:r>
+            <a:endParaRPr lang="en-US" sz="1250" dirty="0"/>
           </a:p>
         </p:txBody>
       </p:sp>
@@ -4560,7 +6983,32 @@
       </p:sp>
       <p:sp>
         <p:nvSpPr>
-          <p:cNvPr id="3" name="Text 1"/>
+          <p:cNvPr id="3" name="Shape 1"/>
+          <p:cNvSpPr/>
+          <p:nvPr/>
+        </p:nvSpPr>
+        <p:spPr>
+          <a:xfrm>
+            <a:off x="0" y="164592"/>
+            <a:ext cx="146304" cy="6693408"/>
+          </a:xfrm>
+          <a:prstGeom prst="rect">
+            <a:avLst/>
+          </a:prstGeom>
+          <a:solidFill>
+            <a:srgbClr val="2F8A28"/>
+          </a:solidFill>
+          <a:ln w="12700">
+            <a:solidFill>
+              <a:srgbClr val="2F8A28"/>
+            </a:solidFill>
+            <a:prstDash val="solid"/>
+          </a:ln>
+        </p:spPr>
+      </p:sp>
+      <p:sp>
+        <p:nvSpPr>
+          <p:cNvPr id="4" name="Text 2"/>
           <p:cNvSpPr/>
           <p:nvPr/>
         </p:nvSpPr>
@@ -4599,7 +7047,7 @@
       </p:sp>
       <p:sp>
         <p:nvSpPr>
-          <p:cNvPr id="4" name="Text 2"/>
+          <p:cNvPr id="5" name="Text 3"/>
           <p:cNvSpPr/>
           <p:nvPr/>
         </p:nvSpPr>
@@ -4638,7 +7086,7 @@
       </p:sp>
       <p:sp>
         <p:nvSpPr>
-          <p:cNvPr id="5" name="Text 3"/>
+          <p:cNvPr id="6" name="Text 4"/>
           <p:cNvSpPr/>
           <p:nvPr/>
         </p:nvSpPr>
@@ -4677,13 +7125,77 @@
       </p:sp>
       <p:sp>
         <p:nvSpPr>
-          <p:cNvPr id="6" name="Text 4"/>
+          <p:cNvPr id="7" name="Shape 5"/>
           <p:cNvSpPr/>
           <p:nvPr/>
         </p:nvSpPr>
         <p:spPr>
           <a:xfrm>
             <a:off x="640080" y="658368"/>
+            <a:ext cx="420624" cy="420624"/>
+          </a:xfrm>
+          <a:prstGeom prst="ellipse">
+            <a:avLst/>
+          </a:prstGeom>
+          <a:solidFill>
+            <a:srgbClr val="0068B7"/>
+          </a:solidFill>
+          <a:ln w="12700">
+            <a:solidFill>
+              <a:srgbClr val="0068B7"/>
+            </a:solidFill>
+            <a:prstDash val="solid"/>
+          </a:ln>
+        </p:spPr>
+      </p:sp>
+      <p:sp>
+        <p:nvSpPr>
+          <p:cNvPr id="8" name="Text 6"/>
+          <p:cNvSpPr/>
+          <p:nvPr/>
+        </p:nvSpPr>
+        <p:spPr>
+          <a:xfrm>
+            <a:off x="640080" y="731520"/>
+            <a:ext cx="420624" cy="164592"/>
+          </a:xfrm>
+          <a:prstGeom prst="rect">
+            <a:avLst/>
+          </a:prstGeom>
+          <a:noFill/>
+          <a:ln/>
+        </p:spPr>
+        <p:txBody>
+          <a:bodyPr wrap="square" lIns="0" tIns="0" rIns="0" bIns="0" rtlCol="0" anchor="ctr"/>
+          <a:lstStyle/>
+          <a:p>
+            <a:pPr algn="ctr" indent="0" marL="0">
+              <a:buNone/>
+            </a:pPr>
+            <a:r>
+              <a:rPr lang="en-US" sz="1100" b="1" dirty="0">
+                <a:solidFill>
+                  <a:srgbClr val="FFFFFF"/>
+                </a:solidFill>
+                <a:latin typeface="Aptos" pitchFamily="34" charset="0"/>
+                <a:ea typeface="Aptos" pitchFamily="34" charset="-122"/>
+                <a:cs typeface="Aptos" pitchFamily="34" charset="-120"/>
+              </a:rPr>
+              <a:t>12</a:t>
+            </a:r>
+            <a:endParaRPr lang="en-US" sz="1100" dirty="0"/>
+          </a:p>
+        </p:txBody>
+      </p:sp>
+      <p:sp>
+        <p:nvSpPr>
+          <p:cNvPr id="9" name="Text 7"/>
+          <p:cNvSpPr/>
+          <p:nvPr/>
+        </p:nvSpPr>
+        <p:spPr>
+          <a:xfrm>
+            <a:off x="640080" y="621792"/>
             <a:ext cx="10881360" cy="566928"/>
           </a:xfrm>
           <a:prstGeom prst="rect">
@@ -4710,7 +7222,7 @@
                 <a:ea typeface="Aptos Display" pitchFamily="34" charset="-122"/>
                 <a:cs typeface="Aptos Display" pitchFamily="34" charset="-120"/>
               </a:rPr>
-              <a:t>Knowledge Check</a:t>
+              <a:t>Expected Artifact or Evidence</a:t>
             </a:r>
             <a:endParaRPr lang="en-US" sz="2700" dirty="0"/>
           </a:p>
@@ -4718,14 +7230,14 @@
       </p:sp>
       <p:sp>
         <p:nvSpPr>
-          <p:cNvPr id="7" name="Text 5"/>
-          <p:cNvSpPr/>
-          <p:nvPr/>
-        </p:nvSpPr>
-        <p:spPr>
-          <a:xfrm>
-            <a:off x="822960" y="1325880"/>
-            <a:ext cx="10378440" cy="4800600"/>
+          <p:cNvPr id="10" name="Text 8"/>
+          <p:cNvSpPr/>
+          <p:nvPr/>
+        </p:nvSpPr>
+        <p:spPr>
+          <a:xfrm>
+            <a:off x="868680" y="1417320"/>
+            <a:ext cx="6675120" cy="4434840"/>
           </a:xfrm>
           <a:prstGeom prst="rect">
             <a:avLst/>
@@ -4740,7 +7252,7 @@
           <a:lstStyle/>
           <a:p>
             <a:r>
-              <a:rPr lang="en-US" sz="1450" dirty="0">
+              <a:rPr lang="en-US" sz="1700" dirty="0">
                 <a:solidFill>
                   <a:srgbClr val="17364A"/>
                 </a:solidFill>
@@ -4748,13 +7260,106 @@
                 <a:ea typeface="Aptos" pitchFamily="34" charset="-122"/>
                 <a:cs typeface="Aptos" pitchFamily="34" charset="-120"/>
               </a:rPr>
-              <a:t>1. What is the strongest reason this module topic belongs in AI leadership and governance training?</a:t>
-            </a:r>
-            <a:endParaRPr lang="en-US" sz="1450" dirty="0"/>
-          </a:p>
-          <a:p>
-            <a:r>
-              <a:rPr lang="en-US" sz="1450" dirty="0">
+              <a:t>Participatory governance plan; community briefing outline; engagement questions; feedback response plan.</a:t>
+            </a:r>
+            <a:endParaRPr lang="en-US" sz="1700" dirty="0"/>
+          </a:p>
+        </p:txBody>
+      </p:sp>
+      <p:sp>
+        <p:nvSpPr>
+          <p:cNvPr id="11" name="Shape 9"/>
+          <p:cNvSpPr/>
+          <p:nvPr/>
+        </p:nvSpPr>
+        <p:spPr>
+          <a:xfrm>
+            <a:off x="7909560" y="1417320"/>
+            <a:ext cx="3154680" cy="1828800"/>
+          </a:xfrm>
+          <a:prstGeom prst="roundRect">
+            <a:avLst>
+              <a:gd name="adj" fmla="val 6000"/>
+            </a:avLst>
+          </a:prstGeom>
+          <a:solidFill>
+            <a:srgbClr val="EEF8ED"/>
+          </a:solidFill>
+          <a:ln w="12700">
+            <a:solidFill>
+              <a:srgbClr val="B9D7E6"/>
+            </a:solidFill>
+            <a:prstDash val="solid"/>
+          </a:ln>
+        </p:spPr>
+      </p:sp>
+      <p:sp>
+        <p:nvSpPr>
+          <p:cNvPr id="12" name="Text 10"/>
+          <p:cNvSpPr/>
+          <p:nvPr/>
+        </p:nvSpPr>
+        <p:spPr>
+          <a:xfrm>
+            <a:off x="8074152" y="1563624"/>
+            <a:ext cx="2825496" cy="201168"/>
+          </a:xfrm>
+          <a:prstGeom prst="rect">
+            <a:avLst/>
+          </a:prstGeom>
+          <a:noFill/>
+          <a:ln/>
+        </p:spPr>
+        <p:txBody>
+          <a:bodyPr wrap="square" lIns="0" tIns="0" rIns="0" bIns="0" rtlCol="0" anchor="ctr"/>
+          <a:lstStyle/>
+          <a:p>
+            <a:pPr indent="0" marL="0">
+              <a:buNone/>
+            </a:pPr>
+            <a:r>
+              <a:rPr lang="en-US" sz="950" b="1" dirty="0">
+                <a:solidFill>
+                  <a:srgbClr val="0068B7"/>
+                </a:solidFill>
+                <a:latin typeface="Aptos" pitchFamily="34" charset="0"/>
+                <a:ea typeface="Aptos" pitchFamily="34" charset="-122"/>
+                <a:cs typeface="Aptos" pitchFamily="34" charset="-120"/>
+              </a:rPr>
+              <a:t>Key idea</a:t>
+            </a:r>
+            <a:endParaRPr lang="en-US" sz="950" dirty="0"/>
+          </a:p>
+        </p:txBody>
+      </p:sp>
+      <p:sp>
+        <p:nvSpPr>
+          <p:cNvPr id="13" name="Text 11"/>
+          <p:cNvSpPr/>
+          <p:nvPr/>
+        </p:nvSpPr>
+        <p:spPr>
+          <a:xfrm>
+            <a:off x="8074152" y="1856232"/>
+            <a:ext cx="2825496" cy="1261872"/>
+          </a:xfrm>
+          <a:prstGeom prst="rect">
+            <a:avLst/>
+          </a:prstGeom>
+          <a:noFill/>
+          <a:ln/>
+        </p:spPr>
+        <p:txBody>
+          <a:bodyPr wrap="square" lIns="0" tIns="0" rIns="0" bIns="0" rtlCol="0" anchor="t">
+            <a:normAutofit/>
+          </a:bodyPr>
+          <a:lstStyle/>
+          <a:p>
+            <a:pPr indent="0" marL="0">
+              <a:buNone/>
+            </a:pPr>
+            <a:r>
+              <a:rPr lang="en-US" sz="1250" dirty="0">
                 <a:solidFill>
                   <a:srgbClr val="17364A"/>
                 </a:solidFill>
@@ -4762,13 +7367,106 @@
                 <a:ea typeface="Aptos" pitchFamily="34" charset="-122"/>
                 <a:cs typeface="Aptos" pitchFamily="34" charset="-120"/>
               </a:rPr>
-              <a:t>2. Which practice best supports accountable public health AI governance?</a:t>
-            </a:r>
-            <a:endParaRPr lang="en-US" sz="1450" dirty="0"/>
-          </a:p>
-          <a:p>
-            <a:r>
-              <a:rPr lang="en-US" sz="1450" dirty="0">
+              <a:t>Participatory governance plan; community briefing outline; engagement questions; feedback response plan.</a:t>
+            </a:r>
+            <a:endParaRPr lang="en-US" sz="1250" dirty="0"/>
+          </a:p>
+        </p:txBody>
+      </p:sp>
+      <p:sp>
+        <p:nvSpPr>
+          <p:cNvPr id="14" name="Shape 12"/>
+          <p:cNvSpPr/>
+          <p:nvPr/>
+        </p:nvSpPr>
+        <p:spPr>
+          <a:xfrm>
+            <a:off x="7909560" y="3520440"/>
+            <a:ext cx="3154680" cy="1737360"/>
+          </a:xfrm>
+          <a:prstGeom prst="roundRect">
+            <a:avLst>
+              <a:gd name="adj" fmla="val 6316"/>
+            </a:avLst>
+          </a:prstGeom>
+          <a:solidFill>
+            <a:srgbClr val="EAF6F8"/>
+          </a:solidFill>
+          <a:ln w="12700">
+            <a:solidFill>
+              <a:srgbClr val="B9D7E6"/>
+            </a:solidFill>
+            <a:prstDash val="solid"/>
+          </a:ln>
+        </p:spPr>
+      </p:sp>
+      <p:sp>
+        <p:nvSpPr>
+          <p:cNvPr id="15" name="Text 13"/>
+          <p:cNvSpPr/>
+          <p:nvPr/>
+        </p:nvSpPr>
+        <p:spPr>
+          <a:xfrm>
+            <a:off x="8074152" y="3666744"/>
+            <a:ext cx="2825496" cy="201168"/>
+          </a:xfrm>
+          <a:prstGeom prst="rect">
+            <a:avLst/>
+          </a:prstGeom>
+          <a:noFill/>
+          <a:ln/>
+        </p:spPr>
+        <p:txBody>
+          <a:bodyPr wrap="square" lIns="0" tIns="0" rIns="0" bIns="0" rtlCol="0" anchor="ctr"/>
+          <a:lstStyle/>
+          <a:p>
+            <a:pPr indent="0" marL="0">
+              <a:buNone/>
+            </a:pPr>
+            <a:r>
+              <a:rPr lang="en-US" sz="950" b="1" dirty="0">
+                <a:solidFill>
+                  <a:srgbClr val="0068B7"/>
+                </a:solidFill>
+                <a:latin typeface="Aptos" pitchFamily="34" charset="0"/>
+                <a:ea typeface="Aptos" pitchFamily="34" charset="-122"/>
+                <a:cs typeface="Aptos" pitchFamily="34" charset="-120"/>
+              </a:rPr>
+              <a:t>Use this for</a:t>
+            </a:r>
+            <a:endParaRPr lang="en-US" sz="950" dirty="0"/>
+          </a:p>
+        </p:txBody>
+      </p:sp>
+      <p:sp>
+        <p:nvSpPr>
+          <p:cNvPr id="16" name="Text 14"/>
+          <p:cNvSpPr/>
+          <p:nvPr/>
+        </p:nvSpPr>
+        <p:spPr>
+          <a:xfrm>
+            <a:off x="8074152" y="3959352"/>
+            <a:ext cx="2825496" cy="1170432"/>
+          </a:xfrm>
+          <a:prstGeom prst="rect">
+            <a:avLst/>
+          </a:prstGeom>
+          <a:noFill/>
+          <a:ln/>
+        </p:spPr>
+        <p:txBody>
+          <a:bodyPr wrap="square" lIns="0" tIns="0" rIns="0" bIns="0" rtlCol="0" anchor="t">
+            <a:normAutofit/>
+          </a:bodyPr>
+          <a:lstStyle/>
+          <a:p>
+            <a:pPr indent="0" marL="0">
+              <a:buNone/>
+            </a:pPr>
+            <a:r>
+              <a:rPr lang="en-US" sz="1250" dirty="0">
                 <a:solidFill>
                   <a:srgbClr val="17364A"/>
                 </a:solidFill>
@@ -4776,37 +7474,9 @@
                 <a:ea typeface="Aptos" pitchFamily="34" charset="-122"/>
                 <a:cs typeface="Aptos" pitchFamily="34" charset="-120"/>
               </a:rPr>
-              <a:t>3. When should an AI use case be escalated for leadership or governance review?</a:t>
-            </a:r>
-            <a:endParaRPr lang="en-US" sz="1450" dirty="0"/>
-          </a:p>
-          <a:p>
-            <a:r>
-              <a:rPr lang="en-US" sz="1450" dirty="0">
-                <a:solidFill>
-                  <a:srgbClr val="17364A"/>
-                </a:solidFill>
-                <a:latin typeface="Aptos" pitchFamily="34" charset="0"/>
-                <a:ea typeface="Aptos" pitchFamily="34" charset="-122"/>
-                <a:cs typeface="Aptos" pitchFamily="34" charset="-120"/>
-              </a:rPr>
-              <a:t>4. What is weak evidence of completion for a leadership and governance module?</a:t>
-            </a:r>
-            <a:endParaRPr lang="en-US" sz="1450" dirty="0"/>
-          </a:p>
-          <a:p>
-            <a:r>
-              <a:rPr lang="en-US" sz="1450" dirty="0">
-                <a:solidFill>
-                  <a:srgbClr val="17364A"/>
-                </a:solidFill>
-                <a:latin typeface="Aptos" pitchFamily="34" charset="0"/>
-                <a:ea typeface="Aptos" pitchFamily="34" charset="-122"/>
-                <a:cs typeface="Aptos" pitchFamily="34" charset="-120"/>
-              </a:rPr>
-              <a:t>5. What should leaders do when an AI use case has meaningful benefits but unresolved risks?</a:t>
-            </a:r>
-            <a:endParaRPr lang="en-US" sz="1450" dirty="0"/>
+              <a:t>Connect the concept to public health decisions, safeguards, documentation, or implementation work.</a:t>
+            </a:r>
+            <a:endParaRPr lang="en-US" sz="1250" dirty="0"/>
           </a:p>
         </p:txBody>
       </p:sp>
@@ -4869,7 +7539,32 @@
       </p:sp>
       <p:sp>
         <p:nvSpPr>
-          <p:cNvPr id="3" name="Text 1"/>
+          <p:cNvPr id="3" name="Shape 1"/>
+          <p:cNvSpPr/>
+          <p:nvPr/>
+        </p:nvSpPr>
+        <p:spPr>
+          <a:xfrm>
+            <a:off x="0" y="164592"/>
+            <a:ext cx="146304" cy="6693408"/>
+          </a:xfrm>
+          <a:prstGeom prst="rect">
+            <a:avLst/>
+          </a:prstGeom>
+          <a:solidFill>
+            <a:srgbClr val="2F8A28"/>
+          </a:solidFill>
+          <a:ln w="12700">
+            <a:solidFill>
+              <a:srgbClr val="2F8A28"/>
+            </a:solidFill>
+            <a:prstDash val="solid"/>
+          </a:ln>
+        </p:spPr>
+      </p:sp>
+      <p:sp>
+        <p:nvSpPr>
+          <p:cNvPr id="4" name="Text 2"/>
           <p:cNvSpPr/>
           <p:nvPr/>
         </p:nvSpPr>
@@ -4908,7 +7603,7 @@
       </p:sp>
       <p:sp>
         <p:nvSpPr>
-          <p:cNvPr id="4" name="Text 2"/>
+          <p:cNvPr id="5" name="Text 3"/>
           <p:cNvSpPr/>
           <p:nvPr/>
         </p:nvSpPr>
@@ -4947,7 +7642,7 @@
       </p:sp>
       <p:sp>
         <p:nvSpPr>
-          <p:cNvPr id="5" name="Text 3"/>
+          <p:cNvPr id="6" name="Text 4"/>
           <p:cNvSpPr/>
           <p:nvPr/>
         </p:nvSpPr>
@@ -4986,13 +7681,77 @@
       </p:sp>
       <p:sp>
         <p:nvSpPr>
-          <p:cNvPr id="6" name="Text 4"/>
+          <p:cNvPr id="7" name="Shape 5"/>
           <p:cNvSpPr/>
           <p:nvPr/>
         </p:nvSpPr>
         <p:spPr>
           <a:xfrm>
             <a:off x="640080" y="658368"/>
+            <a:ext cx="420624" cy="420624"/>
+          </a:xfrm>
+          <a:prstGeom prst="ellipse">
+            <a:avLst/>
+          </a:prstGeom>
+          <a:solidFill>
+            <a:srgbClr val="0068B7"/>
+          </a:solidFill>
+          <a:ln w="12700">
+            <a:solidFill>
+              <a:srgbClr val="0068B7"/>
+            </a:solidFill>
+            <a:prstDash val="solid"/>
+          </a:ln>
+        </p:spPr>
+      </p:sp>
+      <p:sp>
+        <p:nvSpPr>
+          <p:cNvPr id="8" name="Text 6"/>
+          <p:cNvSpPr/>
+          <p:nvPr/>
+        </p:nvSpPr>
+        <p:spPr>
+          <a:xfrm>
+            <a:off x="640080" y="731520"/>
+            <a:ext cx="420624" cy="164592"/>
+          </a:xfrm>
+          <a:prstGeom prst="rect">
+            <a:avLst/>
+          </a:prstGeom>
+          <a:noFill/>
+          <a:ln/>
+        </p:spPr>
+        <p:txBody>
+          <a:bodyPr wrap="square" lIns="0" tIns="0" rIns="0" bIns="0" rtlCol="0" anchor="ctr"/>
+          <a:lstStyle/>
+          <a:p>
+            <a:pPr algn="ctr" indent="0" marL="0">
+              <a:buNone/>
+            </a:pPr>
+            <a:r>
+              <a:rPr lang="en-US" sz="1100" b="1" dirty="0">
+                <a:solidFill>
+                  <a:srgbClr val="FFFFFF"/>
+                </a:solidFill>
+                <a:latin typeface="Aptos" pitchFamily="34" charset="0"/>
+                <a:ea typeface="Aptos" pitchFamily="34" charset="-122"/>
+                <a:cs typeface="Aptos" pitchFamily="34" charset="-120"/>
+              </a:rPr>
+              <a:t>13</a:t>
+            </a:r>
+            <a:endParaRPr lang="en-US" sz="1100" dirty="0"/>
+          </a:p>
+        </p:txBody>
+      </p:sp>
+      <p:sp>
+        <p:nvSpPr>
+          <p:cNvPr id="9" name="Text 7"/>
+          <p:cNvSpPr/>
+          <p:nvPr/>
+        </p:nvSpPr>
+        <p:spPr>
+          <a:xfrm>
+            <a:off x="640080" y="621792"/>
             <a:ext cx="10881360" cy="566928"/>
           </a:xfrm>
           <a:prstGeom prst="rect">
@@ -5019,7 +7778,7 @@
                 <a:ea typeface="Aptos Display" pitchFamily="34" charset="-122"/>
                 <a:cs typeface="Aptos Display" pitchFamily="34" charset="-120"/>
               </a:rPr>
-              <a:t>References and Resources</a:t>
+              <a:t>Expected Assignment</a:t>
             </a:r>
             <a:endParaRPr lang="en-US" sz="2700" dirty="0"/>
           </a:p>
@@ -5027,14 +7786,14 @@
       </p:sp>
       <p:sp>
         <p:nvSpPr>
-          <p:cNvPr id="7" name="Text 5"/>
-          <p:cNvSpPr/>
-          <p:nvPr/>
-        </p:nvSpPr>
-        <p:spPr>
-          <a:xfrm>
-            <a:off x="822960" y="1325880"/>
-            <a:ext cx="10378440" cy="4800600"/>
+          <p:cNvPr id="10" name="Text 8"/>
+          <p:cNvSpPr/>
+          <p:nvPr/>
+        </p:nvSpPr>
+        <p:spPr>
+          <a:xfrm>
+            <a:off x="868680" y="1417320"/>
+            <a:ext cx="6675120" cy="4434840"/>
           </a:xfrm>
           <a:prstGeom prst="rect">
             <a:avLst/>
@@ -5049,7 +7808,7 @@
           <a:lstStyle/>
           <a:p>
             <a:r>
-              <a:rPr lang="en-US" sz="1450" dirty="0">
+              <a:rPr lang="en-US" sz="1700" dirty="0">
                 <a:solidFill>
                   <a:srgbClr val="17364A"/>
                 </a:solidFill>
@@ -5057,13 +7816,106 @@
                 <a:ea typeface="Aptos" pitchFamily="34" charset="-122"/>
                 <a:cs typeface="Aptos" pitchFamily="34" charset="-120"/>
               </a:rPr>
-              <a:t>NIST Artificial Intelligence Risk Management Framework (AI RMF 1.0): https://www.nist.gov/itl/ai-risk-management-framework</a:t>
-            </a:r>
-            <a:endParaRPr lang="en-US" sz="1450" dirty="0"/>
-          </a:p>
-          <a:p>
-            <a:r>
-              <a:rPr lang="en-US" sz="1450" dirty="0">
+              <a:t>Participatory governance plan; community briefing outline; engagement questions; feedback response plan.</a:t>
+            </a:r>
+            <a:endParaRPr lang="en-US" sz="1700" dirty="0"/>
+          </a:p>
+        </p:txBody>
+      </p:sp>
+      <p:sp>
+        <p:nvSpPr>
+          <p:cNvPr id="11" name="Shape 9"/>
+          <p:cNvSpPr/>
+          <p:nvPr/>
+        </p:nvSpPr>
+        <p:spPr>
+          <a:xfrm>
+            <a:off x="7909560" y="1417320"/>
+            <a:ext cx="3154680" cy="1828800"/>
+          </a:xfrm>
+          <a:prstGeom prst="roundRect">
+            <a:avLst>
+              <a:gd name="adj" fmla="val 6000"/>
+            </a:avLst>
+          </a:prstGeom>
+          <a:solidFill>
+            <a:srgbClr val="EEF8ED"/>
+          </a:solidFill>
+          <a:ln w="12700">
+            <a:solidFill>
+              <a:srgbClr val="B9D7E6"/>
+            </a:solidFill>
+            <a:prstDash val="solid"/>
+          </a:ln>
+        </p:spPr>
+      </p:sp>
+      <p:sp>
+        <p:nvSpPr>
+          <p:cNvPr id="12" name="Text 10"/>
+          <p:cNvSpPr/>
+          <p:nvPr/>
+        </p:nvSpPr>
+        <p:spPr>
+          <a:xfrm>
+            <a:off x="8074152" y="1563624"/>
+            <a:ext cx="2825496" cy="201168"/>
+          </a:xfrm>
+          <a:prstGeom prst="rect">
+            <a:avLst/>
+          </a:prstGeom>
+          <a:noFill/>
+          <a:ln/>
+        </p:spPr>
+        <p:txBody>
+          <a:bodyPr wrap="square" lIns="0" tIns="0" rIns="0" bIns="0" rtlCol="0" anchor="ctr"/>
+          <a:lstStyle/>
+          <a:p>
+            <a:pPr indent="0" marL="0">
+              <a:buNone/>
+            </a:pPr>
+            <a:r>
+              <a:rPr lang="en-US" sz="950" b="1" dirty="0">
+                <a:solidFill>
+                  <a:srgbClr val="0068B7"/>
+                </a:solidFill>
+                <a:latin typeface="Aptos" pitchFamily="34" charset="0"/>
+                <a:ea typeface="Aptos" pitchFamily="34" charset="-122"/>
+                <a:cs typeface="Aptos" pitchFamily="34" charset="-120"/>
+              </a:rPr>
+              <a:t>Key idea</a:t>
+            </a:r>
+            <a:endParaRPr lang="en-US" sz="950" dirty="0"/>
+          </a:p>
+        </p:txBody>
+      </p:sp>
+      <p:sp>
+        <p:nvSpPr>
+          <p:cNvPr id="13" name="Text 11"/>
+          <p:cNvSpPr/>
+          <p:nvPr/>
+        </p:nvSpPr>
+        <p:spPr>
+          <a:xfrm>
+            <a:off x="8074152" y="1856232"/>
+            <a:ext cx="2825496" cy="1261872"/>
+          </a:xfrm>
+          <a:prstGeom prst="rect">
+            <a:avLst/>
+          </a:prstGeom>
+          <a:noFill/>
+          <a:ln/>
+        </p:spPr>
+        <p:txBody>
+          <a:bodyPr wrap="square" lIns="0" tIns="0" rIns="0" bIns="0" rtlCol="0" anchor="t">
+            <a:normAutofit/>
+          </a:bodyPr>
+          <a:lstStyle/>
+          <a:p>
+            <a:pPr indent="0" marL="0">
+              <a:buNone/>
+            </a:pPr>
+            <a:r>
+              <a:rPr lang="en-US" sz="1250" dirty="0">
                 <a:solidFill>
                   <a:srgbClr val="17364A"/>
                 </a:solidFill>
@@ -5071,13 +7923,106 @@
                 <a:ea typeface="Aptos" pitchFamily="34" charset="-122"/>
                 <a:cs typeface="Aptos" pitchFamily="34" charset="-120"/>
               </a:rPr>
-              <a:t>NIST Generative AI Profile: https://www.nist.gov/publications/artificial-intelligence-risk-management-framework-generative-artificial-intelligence</a:t>
-            </a:r>
-            <a:endParaRPr lang="en-US" sz="1450" dirty="0"/>
-          </a:p>
-          <a:p>
-            <a:r>
-              <a:rPr lang="en-US" sz="1450" dirty="0">
+              <a:t>Participatory governance plan; community briefing outline; engagement questions; feedback response plan.</a:t>
+            </a:r>
+            <a:endParaRPr lang="en-US" sz="1250" dirty="0"/>
+          </a:p>
+        </p:txBody>
+      </p:sp>
+      <p:sp>
+        <p:nvSpPr>
+          <p:cNvPr id="14" name="Shape 12"/>
+          <p:cNvSpPr/>
+          <p:nvPr/>
+        </p:nvSpPr>
+        <p:spPr>
+          <a:xfrm>
+            <a:off x="7909560" y="3520440"/>
+            <a:ext cx="3154680" cy="1737360"/>
+          </a:xfrm>
+          <a:prstGeom prst="roundRect">
+            <a:avLst>
+              <a:gd name="adj" fmla="val 6316"/>
+            </a:avLst>
+          </a:prstGeom>
+          <a:solidFill>
+            <a:srgbClr val="EAF6F8"/>
+          </a:solidFill>
+          <a:ln w="12700">
+            <a:solidFill>
+              <a:srgbClr val="B9D7E6"/>
+            </a:solidFill>
+            <a:prstDash val="solid"/>
+          </a:ln>
+        </p:spPr>
+      </p:sp>
+      <p:sp>
+        <p:nvSpPr>
+          <p:cNvPr id="15" name="Text 13"/>
+          <p:cNvSpPr/>
+          <p:nvPr/>
+        </p:nvSpPr>
+        <p:spPr>
+          <a:xfrm>
+            <a:off x="8074152" y="3666744"/>
+            <a:ext cx="2825496" cy="201168"/>
+          </a:xfrm>
+          <a:prstGeom prst="rect">
+            <a:avLst/>
+          </a:prstGeom>
+          <a:noFill/>
+          <a:ln/>
+        </p:spPr>
+        <p:txBody>
+          <a:bodyPr wrap="square" lIns="0" tIns="0" rIns="0" bIns="0" rtlCol="0" anchor="ctr"/>
+          <a:lstStyle/>
+          <a:p>
+            <a:pPr indent="0" marL="0">
+              <a:buNone/>
+            </a:pPr>
+            <a:r>
+              <a:rPr lang="en-US" sz="950" b="1" dirty="0">
+                <a:solidFill>
+                  <a:srgbClr val="0068B7"/>
+                </a:solidFill>
+                <a:latin typeface="Aptos" pitchFamily="34" charset="0"/>
+                <a:ea typeface="Aptos" pitchFamily="34" charset="-122"/>
+                <a:cs typeface="Aptos" pitchFamily="34" charset="-120"/>
+              </a:rPr>
+              <a:t>Use this for</a:t>
+            </a:r>
+            <a:endParaRPr lang="en-US" sz="950" dirty="0"/>
+          </a:p>
+        </p:txBody>
+      </p:sp>
+      <p:sp>
+        <p:nvSpPr>
+          <p:cNvPr id="16" name="Text 14"/>
+          <p:cNvSpPr/>
+          <p:nvPr/>
+        </p:nvSpPr>
+        <p:spPr>
+          <a:xfrm>
+            <a:off x="8074152" y="3959352"/>
+            <a:ext cx="2825496" cy="1170432"/>
+          </a:xfrm>
+          <a:prstGeom prst="rect">
+            <a:avLst/>
+          </a:prstGeom>
+          <a:noFill/>
+          <a:ln/>
+        </p:spPr>
+        <p:txBody>
+          <a:bodyPr wrap="square" lIns="0" tIns="0" rIns="0" bIns="0" rtlCol="0" anchor="t">
+            <a:normAutofit/>
+          </a:bodyPr>
+          <a:lstStyle/>
+          <a:p>
+            <a:pPr indent="0" marL="0">
+              <a:buNone/>
+            </a:pPr>
+            <a:r>
+              <a:rPr lang="en-US" sz="1250" dirty="0">
                 <a:solidFill>
                   <a:srgbClr val="17364A"/>
                 </a:solidFill>
@@ -5085,37 +8030,9 @@
                 <a:ea typeface="Aptos" pitchFamily="34" charset="-122"/>
                 <a:cs typeface="Aptos" pitchFamily="34" charset="-120"/>
               </a:rPr>
-              <a:t>NIST Privacy Framework</a:t>
-            </a:r>
-            <a:endParaRPr lang="en-US" sz="1450" dirty="0"/>
-          </a:p>
-          <a:p>
-            <a:r>
-              <a:rPr lang="en-US" sz="1450" dirty="0">
-                <a:solidFill>
-                  <a:srgbClr val="17364A"/>
-                </a:solidFill>
-                <a:latin typeface="Aptos" pitchFamily="34" charset="0"/>
-                <a:ea typeface="Aptos" pitchFamily="34" charset="-122"/>
-                <a:cs typeface="Aptos" pitchFamily="34" charset="-120"/>
-              </a:rPr>
-              <a:t>CDC Public Health Data Strategy and Data Modernization resources: https://www.cdc.gov/public-health-data-strategy/php/about/index.html</a:t>
-            </a:r>
-            <a:endParaRPr lang="en-US" sz="1450" dirty="0"/>
-          </a:p>
-          <a:p>
-            <a:r>
-              <a:rPr lang="en-US" sz="1450" dirty="0">
-                <a:solidFill>
-                  <a:srgbClr val="17364A"/>
-                </a:solidFill>
-                <a:latin typeface="Aptos" pitchFamily="34" charset="0"/>
-                <a:ea typeface="Aptos" pitchFamily="34" charset="-122"/>
-                <a:cs typeface="Aptos" pitchFamily="34" charset="-120"/>
-              </a:rPr>
-              <a:t>WHO Ethics and Governance of Artificial Intelligence for Health: https://www.who.int/publications/i/item/9789240029200</a:t>
-            </a:r>
-            <a:endParaRPr lang="en-US" sz="1450" dirty="0"/>
+              <a:t>Connect the concept to public health decisions, safeguards, documentation, or implementation work.</a:t>
+            </a:r>
+            <a:endParaRPr lang="en-US" sz="1250" dirty="0"/>
           </a:p>
         </p:txBody>
       </p:sp>
@@ -5178,7 +8095,32 @@
       </p:sp>
       <p:sp>
         <p:nvSpPr>
-          <p:cNvPr id="3" name="Text 1"/>
+          <p:cNvPr id="3" name="Shape 1"/>
+          <p:cNvSpPr/>
+          <p:nvPr/>
+        </p:nvSpPr>
+        <p:spPr>
+          <a:xfrm>
+            <a:off x="0" y="164592"/>
+            <a:ext cx="146304" cy="6693408"/>
+          </a:xfrm>
+          <a:prstGeom prst="rect">
+            <a:avLst/>
+          </a:prstGeom>
+          <a:solidFill>
+            <a:srgbClr val="2F8A28"/>
+          </a:solidFill>
+          <a:ln w="12700">
+            <a:solidFill>
+              <a:srgbClr val="2F8A28"/>
+            </a:solidFill>
+            <a:prstDash val="solid"/>
+          </a:ln>
+        </p:spPr>
+      </p:sp>
+      <p:sp>
+        <p:nvSpPr>
+          <p:cNvPr id="4" name="Text 2"/>
           <p:cNvSpPr/>
           <p:nvPr/>
         </p:nvSpPr>
@@ -5217,7 +8159,7 @@
       </p:sp>
       <p:sp>
         <p:nvSpPr>
-          <p:cNvPr id="4" name="Text 2"/>
+          <p:cNvPr id="5" name="Text 3"/>
           <p:cNvSpPr/>
           <p:nvPr/>
         </p:nvSpPr>
@@ -5256,7 +8198,7 @@
       </p:sp>
       <p:sp>
         <p:nvSpPr>
-          <p:cNvPr id="5" name="Text 3"/>
+          <p:cNvPr id="6" name="Text 4"/>
           <p:cNvSpPr/>
           <p:nvPr/>
         </p:nvSpPr>
@@ -5295,13 +8237,77 @@
       </p:sp>
       <p:sp>
         <p:nvSpPr>
-          <p:cNvPr id="6" name="Text 4"/>
+          <p:cNvPr id="7" name="Shape 5"/>
           <p:cNvSpPr/>
           <p:nvPr/>
         </p:nvSpPr>
         <p:spPr>
           <a:xfrm>
             <a:off x="640080" y="658368"/>
+            <a:ext cx="420624" cy="420624"/>
+          </a:xfrm>
+          <a:prstGeom prst="ellipse">
+            <a:avLst/>
+          </a:prstGeom>
+          <a:solidFill>
+            <a:srgbClr val="0068B7"/>
+          </a:solidFill>
+          <a:ln w="12700">
+            <a:solidFill>
+              <a:srgbClr val="0068B7"/>
+            </a:solidFill>
+            <a:prstDash val="solid"/>
+          </a:ln>
+        </p:spPr>
+      </p:sp>
+      <p:sp>
+        <p:nvSpPr>
+          <p:cNvPr id="8" name="Text 6"/>
+          <p:cNvSpPr/>
+          <p:nvPr/>
+        </p:nvSpPr>
+        <p:spPr>
+          <a:xfrm>
+            <a:off x="640080" y="731520"/>
+            <a:ext cx="420624" cy="164592"/>
+          </a:xfrm>
+          <a:prstGeom prst="rect">
+            <a:avLst/>
+          </a:prstGeom>
+          <a:noFill/>
+          <a:ln/>
+        </p:spPr>
+        <p:txBody>
+          <a:bodyPr wrap="square" lIns="0" tIns="0" rIns="0" bIns="0" rtlCol="0" anchor="ctr"/>
+          <a:lstStyle/>
+          <a:p>
+            <a:pPr algn="ctr" indent="0" marL="0">
+              <a:buNone/>
+            </a:pPr>
+            <a:r>
+              <a:rPr lang="en-US" sz="1100" b="1" dirty="0">
+                <a:solidFill>
+                  <a:srgbClr val="FFFFFF"/>
+                </a:solidFill>
+                <a:latin typeface="Aptos" pitchFamily="34" charset="0"/>
+                <a:ea typeface="Aptos" pitchFamily="34" charset="-122"/>
+                <a:cs typeface="Aptos" pitchFamily="34" charset="-120"/>
+              </a:rPr>
+              <a:t>14</a:t>
+            </a:r>
+            <a:endParaRPr lang="en-US" sz="1100" dirty="0"/>
+          </a:p>
+        </p:txBody>
+      </p:sp>
+      <p:sp>
+        <p:nvSpPr>
+          <p:cNvPr id="9" name="Text 7"/>
+          <p:cNvSpPr/>
+          <p:nvPr/>
+        </p:nvSpPr>
+        <p:spPr>
+          <a:xfrm>
+            <a:off x="640080" y="621792"/>
             <a:ext cx="10881360" cy="566928"/>
           </a:xfrm>
           <a:prstGeom prst="rect">
@@ -5328,7 +8334,7 @@
                 <a:ea typeface="Aptos Display" pitchFamily="34" charset="-122"/>
                 <a:cs typeface="Aptos Display" pitchFamily="34" charset="-120"/>
               </a:rPr>
-              <a:t>References and Resources Continued</a:t>
+              <a:t>Knowledge Check</a:t>
             </a:r>
             <a:endParaRPr lang="en-US" sz="2700" dirty="0"/>
           </a:p>
@@ -5336,14 +8342,14 @@
       </p:sp>
       <p:sp>
         <p:nvSpPr>
-          <p:cNvPr id="7" name="Text 5"/>
-          <p:cNvSpPr/>
-          <p:nvPr/>
-        </p:nvSpPr>
-        <p:spPr>
-          <a:xfrm>
-            <a:off x="822960" y="1325880"/>
-            <a:ext cx="10378440" cy="4800600"/>
+          <p:cNvPr id="10" name="Text 8"/>
+          <p:cNvSpPr/>
+          <p:nvPr/>
+        </p:nvSpPr>
+        <p:spPr>
+          <a:xfrm>
+            <a:off x="868680" y="1417320"/>
+            <a:ext cx="6675120" cy="4434840"/>
           </a:xfrm>
           <a:prstGeom prst="rect">
             <a:avLst/>
@@ -5358,7 +8364,7 @@
           <a:lstStyle/>
           <a:p>
             <a:r>
-              <a:rPr lang="en-US" sz="1450" dirty="0">
+              <a:rPr lang="en-US" sz="1700" dirty="0">
                 <a:solidFill>
                   <a:srgbClr val="17364A"/>
                 </a:solidFill>
@@ -5366,13 +8372,13 @@
                 <a:ea typeface="Aptos" pitchFamily="34" charset="-122"/>
                 <a:cs typeface="Aptos" pitchFamily="34" charset="-120"/>
               </a:rPr>
-              <a:t>OMB Memorandum M-24-10 on federal AI governance, risk management, and innovation, where relevant to public-sector governance models</a:t>
-            </a:r>
-            <a:endParaRPr lang="en-US" sz="1450" dirty="0"/>
-          </a:p>
-          <a:p>
-            <a:r>
-              <a:rPr lang="en-US" sz="1450" dirty="0">
+              <a:t>1. What is the strongest reason this module topic belongs in AI leadership and governance training?</a:t>
+            </a:r>
+            <a:endParaRPr lang="en-US" sz="1700" dirty="0"/>
+          </a:p>
+          <a:p>
+            <a:r>
+              <a:rPr lang="en-US" sz="1700" dirty="0">
                 <a:solidFill>
                   <a:srgbClr val="17364A"/>
                 </a:solidFill>
@@ -5380,9 +8386,251 @@
                 <a:ea typeface="Aptos" pitchFamily="34" charset="-122"/>
                 <a:cs typeface="Aptos" pitchFamily="34" charset="-120"/>
               </a:rPr>
-              <a:t>Agency strategic plans, procurement policies, privacy policies, cybersecurity policies, records policies, and equity plans</a:t>
-            </a:r>
-            <a:endParaRPr lang="en-US" sz="1450" dirty="0"/>
+              <a:t>2. Which practice best supports accountable public health AI governance?</a:t>
+            </a:r>
+            <a:endParaRPr lang="en-US" sz="1700" dirty="0"/>
+          </a:p>
+          <a:p>
+            <a:r>
+              <a:rPr lang="en-US" sz="1700" dirty="0">
+                <a:solidFill>
+                  <a:srgbClr val="17364A"/>
+                </a:solidFill>
+                <a:latin typeface="Aptos" pitchFamily="34" charset="0"/>
+                <a:ea typeface="Aptos" pitchFamily="34" charset="-122"/>
+                <a:cs typeface="Aptos" pitchFamily="34" charset="-120"/>
+              </a:rPr>
+              <a:t>3. When should an AI use case be escalated for leadership or governance review?</a:t>
+            </a:r>
+            <a:endParaRPr lang="en-US" sz="1700" dirty="0"/>
+          </a:p>
+          <a:p>
+            <a:r>
+              <a:rPr lang="en-US" sz="1700" dirty="0">
+                <a:solidFill>
+                  <a:srgbClr val="17364A"/>
+                </a:solidFill>
+                <a:latin typeface="Aptos" pitchFamily="34" charset="0"/>
+                <a:ea typeface="Aptos" pitchFamily="34" charset="-122"/>
+                <a:cs typeface="Aptos" pitchFamily="34" charset="-120"/>
+              </a:rPr>
+              <a:t>4. What is weak evidence of completion for a leadership and governance module?</a:t>
+            </a:r>
+            <a:endParaRPr lang="en-US" sz="1700" dirty="0"/>
+          </a:p>
+        </p:txBody>
+      </p:sp>
+      <p:sp>
+        <p:nvSpPr>
+          <p:cNvPr id="11" name="Shape 9"/>
+          <p:cNvSpPr/>
+          <p:nvPr/>
+        </p:nvSpPr>
+        <p:spPr>
+          <a:xfrm>
+            <a:off x="7909560" y="1417320"/>
+            <a:ext cx="3154680" cy="1828800"/>
+          </a:xfrm>
+          <a:prstGeom prst="roundRect">
+            <a:avLst>
+              <a:gd name="adj" fmla="val 6000"/>
+            </a:avLst>
+          </a:prstGeom>
+          <a:solidFill>
+            <a:srgbClr val="EEF8ED"/>
+          </a:solidFill>
+          <a:ln w="12700">
+            <a:solidFill>
+              <a:srgbClr val="B9D7E6"/>
+            </a:solidFill>
+            <a:prstDash val="solid"/>
+          </a:ln>
+        </p:spPr>
+      </p:sp>
+      <p:sp>
+        <p:nvSpPr>
+          <p:cNvPr id="12" name="Text 10"/>
+          <p:cNvSpPr/>
+          <p:nvPr/>
+        </p:nvSpPr>
+        <p:spPr>
+          <a:xfrm>
+            <a:off x="8074152" y="1563624"/>
+            <a:ext cx="2825496" cy="201168"/>
+          </a:xfrm>
+          <a:prstGeom prst="rect">
+            <a:avLst/>
+          </a:prstGeom>
+          <a:noFill/>
+          <a:ln/>
+        </p:spPr>
+        <p:txBody>
+          <a:bodyPr wrap="square" lIns="0" tIns="0" rIns="0" bIns="0" rtlCol="0" anchor="ctr"/>
+          <a:lstStyle/>
+          <a:p>
+            <a:pPr indent="0" marL="0">
+              <a:buNone/>
+            </a:pPr>
+            <a:r>
+              <a:rPr lang="en-US" sz="950" b="1" dirty="0">
+                <a:solidFill>
+                  <a:srgbClr val="0068B7"/>
+                </a:solidFill>
+                <a:latin typeface="Aptos" pitchFamily="34" charset="0"/>
+                <a:ea typeface="Aptos" pitchFamily="34" charset="-122"/>
+                <a:cs typeface="Aptos" pitchFamily="34" charset="-120"/>
+              </a:rPr>
+              <a:t>Key idea</a:t>
+            </a:r>
+            <a:endParaRPr lang="en-US" sz="950" dirty="0"/>
+          </a:p>
+        </p:txBody>
+      </p:sp>
+      <p:sp>
+        <p:nvSpPr>
+          <p:cNvPr id="13" name="Text 11"/>
+          <p:cNvSpPr/>
+          <p:nvPr/>
+        </p:nvSpPr>
+        <p:spPr>
+          <a:xfrm>
+            <a:off x="8074152" y="1856232"/>
+            <a:ext cx="2825496" cy="1261872"/>
+          </a:xfrm>
+          <a:prstGeom prst="rect">
+            <a:avLst/>
+          </a:prstGeom>
+          <a:noFill/>
+          <a:ln/>
+        </p:spPr>
+        <p:txBody>
+          <a:bodyPr wrap="square" lIns="0" tIns="0" rIns="0" bIns="0" rtlCol="0" anchor="t">
+            <a:normAutofit/>
+          </a:bodyPr>
+          <a:lstStyle/>
+          <a:p>
+            <a:pPr indent="0" marL="0">
+              <a:buNone/>
+            </a:pPr>
+            <a:r>
+              <a:rPr lang="en-US" sz="1250" dirty="0">
+                <a:solidFill>
+                  <a:srgbClr val="17364A"/>
+                </a:solidFill>
+                <a:latin typeface="Aptos" pitchFamily="34" charset="0"/>
+                <a:ea typeface="Aptos" pitchFamily="34" charset="-122"/>
+                <a:cs typeface="Aptos" pitchFamily="34" charset="-120"/>
+              </a:rPr>
+              <a:t>1. What is the strongest reason this module topic belongs in AI leadership and governance training?</a:t>
+            </a:r>
+            <a:endParaRPr lang="en-US" sz="1250" dirty="0"/>
+          </a:p>
+        </p:txBody>
+      </p:sp>
+      <p:sp>
+        <p:nvSpPr>
+          <p:cNvPr id="14" name="Shape 12"/>
+          <p:cNvSpPr/>
+          <p:nvPr/>
+        </p:nvSpPr>
+        <p:spPr>
+          <a:xfrm>
+            <a:off x="7909560" y="3520440"/>
+            <a:ext cx="3154680" cy="1737360"/>
+          </a:xfrm>
+          <a:prstGeom prst="roundRect">
+            <a:avLst>
+              <a:gd name="adj" fmla="val 6316"/>
+            </a:avLst>
+          </a:prstGeom>
+          <a:solidFill>
+            <a:srgbClr val="EAF6F8"/>
+          </a:solidFill>
+          <a:ln w="12700">
+            <a:solidFill>
+              <a:srgbClr val="B9D7E6"/>
+            </a:solidFill>
+            <a:prstDash val="solid"/>
+          </a:ln>
+        </p:spPr>
+      </p:sp>
+      <p:sp>
+        <p:nvSpPr>
+          <p:cNvPr id="15" name="Text 13"/>
+          <p:cNvSpPr/>
+          <p:nvPr/>
+        </p:nvSpPr>
+        <p:spPr>
+          <a:xfrm>
+            <a:off x="8074152" y="3666744"/>
+            <a:ext cx="2825496" cy="201168"/>
+          </a:xfrm>
+          <a:prstGeom prst="rect">
+            <a:avLst/>
+          </a:prstGeom>
+          <a:noFill/>
+          <a:ln/>
+        </p:spPr>
+        <p:txBody>
+          <a:bodyPr wrap="square" lIns="0" tIns="0" rIns="0" bIns="0" rtlCol="0" anchor="ctr"/>
+          <a:lstStyle/>
+          <a:p>
+            <a:pPr indent="0" marL="0">
+              <a:buNone/>
+            </a:pPr>
+            <a:r>
+              <a:rPr lang="en-US" sz="950" b="1" dirty="0">
+                <a:solidFill>
+                  <a:srgbClr val="0068B7"/>
+                </a:solidFill>
+                <a:latin typeface="Aptos" pitchFamily="34" charset="0"/>
+                <a:ea typeface="Aptos" pitchFamily="34" charset="-122"/>
+                <a:cs typeface="Aptos" pitchFamily="34" charset="-120"/>
+              </a:rPr>
+              <a:t>Use this for</a:t>
+            </a:r>
+            <a:endParaRPr lang="en-US" sz="950" dirty="0"/>
+          </a:p>
+        </p:txBody>
+      </p:sp>
+      <p:sp>
+        <p:nvSpPr>
+          <p:cNvPr id="16" name="Text 14"/>
+          <p:cNvSpPr/>
+          <p:nvPr/>
+        </p:nvSpPr>
+        <p:spPr>
+          <a:xfrm>
+            <a:off x="8074152" y="3959352"/>
+            <a:ext cx="2825496" cy="1170432"/>
+          </a:xfrm>
+          <a:prstGeom prst="rect">
+            <a:avLst/>
+          </a:prstGeom>
+          <a:noFill/>
+          <a:ln/>
+        </p:spPr>
+        <p:txBody>
+          <a:bodyPr wrap="square" lIns="0" tIns="0" rIns="0" bIns="0" rtlCol="0" anchor="t">
+            <a:normAutofit/>
+          </a:bodyPr>
+          <a:lstStyle/>
+          <a:p>
+            <a:pPr indent="0" marL="0">
+              <a:buNone/>
+            </a:pPr>
+            <a:r>
+              <a:rPr lang="en-US" sz="1250" dirty="0">
+                <a:solidFill>
+                  <a:srgbClr val="17364A"/>
+                </a:solidFill>
+                <a:latin typeface="Aptos" pitchFamily="34" charset="0"/>
+                <a:ea typeface="Aptos" pitchFamily="34" charset="-122"/>
+                <a:cs typeface="Aptos" pitchFamily="34" charset="-120"/>
+              </a:rPr>
+              <a:t>Connect the concept to public health decisions, safeguards, documentation, or implementation work.</a:t>
+            </a:r>
+            <a:endParaRPr lang="en-US" sz="1250" dirty="0"/>
           </a:p>
         </p:txBody>
       </p:sp>
@@ -5445,7 +8693,32 @@
       </p:sp>
       <p:sp>
         <p:nvSpPr>
-          <p:cNvPr id="3" name="Text 1"/>
+          <p:cNvPr id="3" name="Shape 1"/>
+          <p:cNvSpPr/>
+          <p:nvPr/>
+        </p:nvSpPr>
+        <p:spPr>
+          <a:xfrm>
+            <a:off x="0" y="164592"/>
+            <a:ext cx="146304" cy="6693408"/>
+          </a:xfrm>
+          <a:prstGeom prst="rect">
+            <a:avLst/>
+          </a:prstGeom>
+          <a:solidFill>
+            <a:srgbClr val="2F8A28"/>
+          </a:solidFill>
+          <a:ln w="12700">
+            <a:solidFill>
+              <a:srgbClr val="2F8A28"/>
+            </a:solidFill>
+            <a:prstDash val="solid"/>
+          </a:ln>
+        </p:spPr>
+      </p:sp>
+      <p:sp>
+        <p:nvSpPr>
+          <p:cNvPr id="4" name="Text 2"/>
           <p:cNvSpPr/>
           <p:nvPr/>
         </p:nvSpPr>
@@ -5484,7 +8757,7 @@
       </p:sp>
       <p:sp>
         <p:nvSpPr>
-          <p:cNvPr id="4" name="Text 2"/>
+          <p:cNvPr id="5" name="Text 3"/>
           <p:cNvSpPr/>
           <p:nvPr/>
         </p:nvSpPr>
@@ -5523,7 +8796,7 @@
       </p:sp>
       <p:sp>
         <p:nvSpPr>
-          <p:cNvPr id="5" name="Text 3"/>
+          <p:cNvPr id="6" name="Text 4"/>
           <p:cNvSpPr/>
           <p:nvPr/>
         </p:nvSpPr>
@@ -5562,7 +8835,7 @@
       </p:sp>
       <p:sp>
         <p:nvSpPr>
-          <p:cNvPr id="6" name="Text 4"/>
+          <p:cNvPr id="7" name="Text 5"/>
           <p:cNvSpPr/>
           <p:nvPr/>
         </p:nvSpPr>
@@ -5595,7 +8868,7 @@
                 <a:ea typeface="Aptos Display" pitchFamily="34" charset="-122"/>
                 <a:cs typeface="Aptos Display" pitchFamily="34" charset="-120"/>
               </a:rPr>
-              <a:t>Module Context</a:t>
+              <a:t>What this module helps you do</a:t>
             </a:r>
             <a:endParaRPr lang="en-US" sz="2700" dirty="0"/>
           </a:p>
@@ -5603,14 +8876,14 @@
       </p:sp>
       <p:sp>
         <p:nvSpPr>
-          <p:cNvPr id="7" name="Text 5"/>
-          <p:cNvSpPr/>
-          <p:nvPr/>
-        </p:nvSpPr>
-        <p:spPr>
-          <a:xfrm>
-            <a:off x="822960" y="1325880"/>
-            <a:ext cx="10378440" cy="1371600"/>
+          <p:cNvPr id="8" name="Text 6"/>
+          <p:cNvSpPr/>
+          <p:nvPr/>
+        </p:nvSpPr>
+        <p:spPr>
+          <a:xfrm>
+            <a:off x="868680" y="1417320"/>
+            <a:ext cx="6675120" cy="3291840"/>
           </a:xfrm>
           <a:prstGeom prst="rect">
             <a:avLst/>
@@ -5625,7 +8898,7 @@
           <a:lstStyle/>
           <a:p>
             <a:r>
-              <a:rPr lang="en-US" sz="1600" dirty="0">
+              <a:rPr lang="en-US" sz="1700" dirty="0">
                 <a:solidFill>
                   <a:srgbClr val="17364A"/>
                 </a:solidFill>
@@ -5633,13 +8906,13 @@
                 <a:ea typeface="Aptos" pitchFamily="34" charset="-122"/>
                 <a:cs typeface="Aptos" pitchFamily="34" charset="-120"/>
               </a:rPr>
-              <a:t>Level: advanced/leadership</a:t>
-            </a:r>
-            <a:endParaRPr lang="en-US" sz="1600" dirty="0"/>
-          </a:p>
-          <a:p>
-            <a:r>
-              <a:rPr lang="en-US" sz="1600" dirty="0">
+              <a:t>Public health AI governance should not be limited to internal agency review.</a:t>
+            </a:r>
+            <a:endParaRPr lang="en-US" sz="1700" dirty="0"/>
+          </a:p>
+          <a:p>
+            <a:r>
+              <a:rPr lang="en-US" sz="1700" dirty="0">
                 <a:solidFill>
                   <a:srgbClr val="17364A"/>
                 </a:solidFill>
@@ -5647,13 +8920,13 @@
                 <a:ea typeface="Aptos" pitchFamily="34" charset="-122"/>
                 <a:cs typeface="Aptos" pitchFamily="34" charset="-120"/>
               </a:rPr>
-              <a:t>Primary track: Governance and Security Track</a:t>
-            </a:r>
-            <a:endParaRPr lang="en-US" sz="1600" dirty="0"/>
-          </a:p>
-          <a:p>
-            <a:r>
-              <a:rPr lang="en-US" sz="1600" dirty="0">
+              <a:t>When AI affects communities, services, surveillance, communication, prioritization, or resource allocation, agencies should consider how community.</a:t>
+            </a:r>
+            <a:endParaRPr lang="en-US" sz="1700" dirty="0"/>
+          </a:p>
+          <a:p>
+            <a:r>
+              <a:rPr lang="en-US" sz="1700" dirty="0">
                 <a:solidFill>
                   <a:srgbClr val="17364A"/>
                 </a:solidFill>
@@ -5661,31 +8934,111 @@
                 <a:ea typeface="Aptos" pitchFamily="34" charset="-122"/>
                 <a:cs typeface="Aptos" pitchFamily="34" charset="-120"/>
               </a:rPr>
-              <a:t>Appears in tracks: governance-security</a:t>
-            </a:r>
-            <a:endParaRPr lang="en-US" sz="1600" dirty="0"/>
-          </a:p>
-        </p:txBody>
-      </p:sp>
-      <p:sp>
-        <p:nvSpPr>
-          <p:cNvPr id="8" name="Text 6"/>
-          <p:cNvSpPr/>
-          <p:nvPr/>
-        </p:nvSpPr>
-        <p:spPr>
-          <a:xfrm>
-            <a:off x="822960" y="2743200"/>
-            <a:ext cx="10378440" cy="2834640"/>
-          </a:xfrm>
-          <a:prstGeom prst="rect">
-            <a:avLst/>
-          </a:prstGeom>
-          <a:noFill/>
-          <a:ln/>
-        </p:spPr>
-        <p:txBody>
-          <a:bodyPr wrap="square" lIns="1016" tIns="1016" rIns="1016" bIns="1016" rtlCol="0" anchor="t">
+              <a:t>Participatory governance creates structured ways for affected people and community partners to shape AI use.</a:t>
+            </a:r>
+            <a:endParaRPr lang="en-US" sz="1700" dirty="0"/>
+          </a:p>
+          <a:p>
+            <a:r>
+              <a:rPr lang="en-US" sz="1700" dirty="0">
+                <a:solidFill>
+                  <a:srgbClr val="17364A"/>
+                </a:solidFill>
+                <a:latin typeface="Aptos" pitchFamily="34" charset="0"/>
+                <a:ea typeface="Aptos" pitchFamily="34" charset="-122"/>
+                <a:cs typeface="Aptos" pitchFamily="34" charset="-120"/>
+              </a:rPr>
+              <a:t>This module helps leaders distinguish between informing the public, consulting communities, involving partners, and sharing oversight.</a:t>
+            </a:r>
+            <a:endParaRPr lang="en-US" sz="1700" dirty="0"/>
+          </a:p>
+        </p:txBody>
+      </p:sp>
+      <p:sp>
+        <p:nvSpPr>
+          <p:cNvPr id="9" name="Shape 7"/>
+          <p:cNvSpPr/>
+          <p:nvPr/>
+        </p:nvSpPr>
+        <p:spPr>
+          <a:xfrm>
+            <a:off x="7909560" y="1417320"/>
+            <a:ext cx="3154680" cy="1920240"/>
+          </a:xfrm>
+          <a:prstGeom prst="roundRect">
+            <a:avLst>
+              <a:gd name="adj" fmla="val 5714"/>
+            </a:avLst>
+          </a:prstGeom>
+          <a:solidFill>
+            <a:srgbClr val="EAF6F8"/>
+          </a:solidFill>
+          <a:ln w="12700">
+            <a:solidFill>
+              <a:srgbClr val="B9D7E6"/>
+            </a:solidFill>
+            <a:prstDash val="solid"/>
+          </a:ln>
+        </p:spPr>
+      </p:sp>
+      <p:sp>
+        <p:nvSpPr>
+          <p:cNvPr id="10" name="Text 8"/>
+          <p:cNvSpPr/>
+          <p:nvPr/>
+        </p:nvSpPr>
+        <p:spPr>
+          <a:xfrm>
+            <a:off x="8074152" y="1563624"/>
+            <a:ext cx="2825496" cy="201168"/>
+          </a:xfrm>
+          <a:prstGeom prst="rect">
+            <a:avLst/>
+          </a:prstGeom>
+          <a:noFill/>
+          <a:ln/>
+        </p:spPr>
+        <p:txBody>
+          <a:bodyPr wrap="square" lIns="0" tIns="0" rIns="0" bIns="0" rtlCol="0" anchor="ctr"/>
+          <a:lstStyle/>
+          <a:p>
+            <a:pPr indent="0" marL="0">
+              <a:buNone/>
+            </a:pPr>
+            <a:r>
+              <a:rPr lang="en-US" sz="950" b="1" dirty="0">
+                <a:solidFill>
+                  <a:srgbClr val="0068B7"/>
+                </a:solidFill>
+                <a:latin typeface="Aptos" pitchFamily="34" charset="0"/>
+                <a:ea typeface="Aptos" pitchFamily="34" charset="-122"/>
+                <a:cs typeface="Aptos" pitchFamily="34" charset="-120"/>
+              </a:rPr>
+              <a:t>Module details</a:t>
+            </a:r>
+            <a:endParaRPr lang="en-US" sz="950" dirty="0"/>
+          </a:p>
+        </p:txBody>
+      </p:sp>
+      <p:sp>
+        <p:nvSpPr>
+          <p:cNvPr id="11" name="Text 9"/>
+          <p:cNvSpPr/>
+          <p:nvPr/>
+        </p:nvSpPr>
+        <p:spPr>
+          <a:xfrm>
+            <a:off x="8074152" y="1856232"/>
+            <a:ext cx="2825496" cy="1353312"/>
+          </a:xfrm>
+          <a:prstGeom prst="rect">
+            <a:avLst/>
+          </a:prstGeom>
+          <a:noFill/>
+          <a:ln/>
+        </p:spPr>
+        <p:txBody>
+          <a:bodyPr wrap="square" lIns="0" tIns="0" rIns="0" bIns="0" rtlCol="0" anchor="t">
             <a:normAutofit/>
           </a:bodyPr>
           <a:lstStyle/>
@@ -5694,7 +9047,7 @@
               <a:buNone/>
             </a:pPr>
             <a:r>
-              <a:rPr lang="en-US" sz="1400" dirty="0">
+              <a:rPr lang="en-US" sz="1250" dirty="0">
                 <a:solidFill>
                   <a:srgbClr val="17364A"/>
                 </a:solidFill>
@@ -5702,9 +9055,1254 @@
                 <a:ea typeface="Aptos" pitchFamily="34" charset="-122"/>
                 <a:cs typeface="Aptos" pitchFamily="34" charset="-120"/>
               </a:rPr>
-              <a:t>Public health AI governance should not be limited to internal agency review. When AI affects communities, services, surveillance, communication, prioritization, or resource allocation, agencies should consider how community perspectives will inform design, review, implementation, and monitoring. Participatory governance creates structured ways for affected people and community partners to shape AI use. This module helps leaders distinguish between informing the public, consulting communities, involving partners, and sharing oversight. It emphasizes that community oversight must be meaningful and appropriately supported. Agencies should not ask communities to approve technical systems without plain-language information, time, context, and a clear explanation of how input will influence decisions.</a:t>
-            </a:r>
-            <a:endParaRPr lang="en-US" sz="1400" dirty="0"/>
+              <a:t>Level: advanced/leadership</a:t>
+            </a:r>
+            <a:endParaRPr lang="en-US" sz="1250" dirty="0"/>
+          </a:p>
+          <a:p>
+            <a:pPr indent="0" marL="0">
+              <a:buNone/>
+            </a:pPr>
+            <a:r>
+              <a:rPr lang="en-US" sz="1250" dirty="0">
+                <a:solidFill>
+                  <a:srgbClr val="17364A"/>
+                </a:solidFill>
+                <a:latin typeface="Aptos" pitchFamily="34" charset="0"/>
+                <a:ea typeface="Aptos" pitchFamily="34" charset="-122"/>
+                <a:cs typeface="Aptos" pitchFamily="34" charset="-120"/>
+              </a:rPr>
+              <a:t>Primary track: Governance and Security Track</a:t>
+            </a:r>
+            <a:endParaRPr lang="en-US" sz="1250" dirty="0"/>
+          </a:p>
+          <a:p>
+            <a:pPr indent="0" marL="0">
+              <a:buNone/>
+            </a:pPr>
+            <a:r>
+              <a:rPr lang="en-US" sz="1250" dirty="0">
+                <a:solidFill>
+                  <a:srgbClr val="17364A"/>
+                </a:solidFill>
+                <a:latin typeface="Aptos" pitchFamily="34" charset="0"/>
+                <a:ea typeface="Aptos" pitchFamily="34" charset="-122"/>
+                <a:cs typeface="Aptos" pitchFamily="34" charset="-120"/>
+              </a:rPr>
+              <a:t>Appears in tracks: governance-security</a:t>
+            </a:r>
+            <a:endParaRPr lang="en-US" sz="1250" dirty="0"/>
+          </a:p>
+        </p:txBody>
+      </p:sp>
+      <p:sp>
+        <p:nvSpPr>
+          <p:cNvPr id="12" name="Shape 10"/>
+          <p:cNvSpPr/>
+          <p:nvPr/>
+        </p:nvSpPr>
+        <p:spPr>
+          <a:xfrm>
+            <a:off x="7909560" y="3611880"/>
+            <a:ext cx="3154680" cy="1783080"/>
+          </a:xfrm>
+          <a:prstGeom prst="roundRect">
+            <a:avLst>
+              <a:gd name="adj" fmla="val 6154"/>
+            </a:avLst>
+          </a:prstGeom>
+          <a:solidFill>
+            <a:srgbClr val="EEF8ED"/>
+          </a:solidFill>
+          <a:ln w="12700">
+            <a:solidFill>
+              <a:srgbClr val="B9D7E6"/>
+            </a:solidFill>
+            <a:prstDash val="solid"/>
+          </a:ln>
+        </p:spPr>
+      </p:sp>
+      <p:sp>
+        <p:nvSpPr>
+          <p:cNvPr id="13" name="Text 11"/>
+          <p:cNvSpPr/>
+          <p:nvPr/>
+        </p:nvSpPr>
+        <p:spPr>
+          <a:xfrm>
+            <a:off x="8074152" y="3758184"/>
+            <a:ext cx="2825496" cy="201168"/>
+          </a:xfrm>
+          <a:prstGeom prst="rect">
+            <a:avLst/>
+          </a:prstGeom>
+          <a:noFill/>
+          <a:ln/>
+        </p:spPr>
+        <p:txBody>
+          <a:bodyPr wrap="square" lIns="0" tIns="0" rIns="0" bIns="0" rtlCol="0" anchor="ctr"/>
+          <a:lstStyle/>
+          <a:p>
+            <a:pPr indent="0" marL="0">
+              <a:buNone/>
+            </a:pPr>
+            <a:r>
+              <a:rPr lang="en-US" sz="950" b="1" dirty="0">
+                <a:solidFill>
+                  <a:srgbClr val="0068B7"/>
+                </a:solidFill>
+                <a:latin typeface="Aptos" pitchFamily="34" charset="0"/>
+                <a:ea typeface="Aptos" pitchFamily="34" charset="-122"/>
+                <a:cs typeface="Aptos" pitchFamily="34" charset="-120"/>
+              </a:rPr>
+              <a:t>Learning approach</a:t>
+            </a:r>
+            <a:endParaRPr lang="en-US" sz="950" dirty="0"/>
+          </a:p>
+        </p:txBody>
+      </p:sp>
+      <p:sp>
+        <p:nvSpPr>
+          <p:cNvPr id="14" name="Text 12"/>
+          <p:cNvSpPr/>
+          <p:nvPr/>
+        </p:nvSpPr>
+        <p:spPr>
+          <a:xfrm>
+            <a:off x="8074152" y="4050792"/>
+            <a:ext cx="2825496" cy="1216152"/>
+          </a:xfrm>
+          <a:prstGeom prst="rect">
+            <a:avLst/>
+          </a:prstGeom>
+          <a:noFill/>
+          <a:ln/>
+        </p:spPr>
+        <p:txBody>
+          <a:bodyPr wrap="square" lIns="0" tIns="0" rIns="0" bIns="0" rtlCol="0" anchor="t">
+            <a:normAutofit/>
+          </a:bodyPr>
+          <a:lstStyle/>
+          <a:p>
+            <a:pPr indent="0" marL="0">
+              <a:buNone/>
+            </a:pPr>
+            <a:r>
+              <a:rPr lang="en-US" sz="1250" dirty="0">
+                <a:solidFill>
+                  <a:srgbClr val="17364A"/>
+                </a:solidFill>
+                <a:latin typeface="Aptos" pitchFamily="34" charset="0"/>
+                <a:ea typeface="Aptos" pitchFamily="34" charset="-122"/>
+                <a:cs typeface="Aptos" pitchFamily="34" charset="-120"/>
+              </a:rPr>
+              <a:t>Review the core ideas, complete the practical exercise, check your understanding, and use the related plays and tools to apply the lesson.</a:t>
+            </a:r>
+            <a:endParaRPr lang="en-US" sz="1250" dirty="0"/>
+          </a:p>
+        </p:txBody>
+      </p:sp>
+    </p:spTree>
+  </p:cSld>
+  <p:clrMapOvr>
+    <a:masterClrMapping/>
+  </p:clrMapOvr>
+</p:sld>
+</file>
+
+<file path=ppt/slides/slide20.xml><?xml version="1.0" encoding="utf-8"?>
+<p:sld xmlns:a="http://schemas.openxmlformats.org/drawingml/2006/main" xmlns:r="http://schemas.openxmlformats.org/officeDocument/2006/relationships" xmlns:p="http://schemas.openxmlformats.org/presentationml/2006/main">
+  <p:cSld name="Slide 20">
+    <p:bg>
+      <p:bgPr>
+        <a:solidFill>
+          <a:srgbClr val="F7FBFD"/>
+        </a:solidFill>
+      </p:bgPr>
+    </p:bg>
+    <p:spTree>
+      <p:nvGrpSpPr>
+        <p:cNvPr id="1" name=""/>
+        <p:cNvGrpSpPr/>
+        <p:nvPr/>
+      </p:nvGrpSpPr>
+      <p:grpSpPr>
+        <a:xfrm>
+          <a:off x="0" y="0"/>
+          <a:ext cx="0" cy="0"/>
+          <a:chOff x="0" y="0"/>
+          <a:chExt cx="0" cy="0"/>
+        </a:xfrm>
+      </p:grpSpPr>
+      <p:sp>
+        <p:nvSpPr>
+          <p:cNvPr id="2" name="Shape 0"/>
+          <p:cNvSpPr/>
+          <p:nvPr/>
+        </p:nvSpPr>
+        <p:spPr>
+          <a:xfrm>
+            <a:off x="0" y="0"/>
+            <a:ext cx="12191695" cy="164592"/>
+          </a:xfrm>
+          <a:prstGeom prst="rect">
+            <a:avLst/>
+          </a:prstGeom>
+          <a:solidFill>
+            <a:srgbClr val="0068B7"/>
+          </a:solidFill>
+          <a:ln w="12700">
+            <a:solidFill>
+              <a:srgbClr val="0068B7"/>
+            </a:solidFill>
+            <a:prstDash val="solid"/>
+          </a:ln>
+        </p:spPr>
+      </p:sp>
+      <p:sp>
+        <p:nvSpPr>
+          <p:cNvPr id="3" name="Shape 1"/>
+          <p:cNvSpPr/>
+          <p:nvPr/>
+        </p:nvSpPr>
+        <p:spPr>
+          <a:xfrm>
+            <a:off x="0" y="164592"/>
+            <a:ext cx="146304" cy="6693408"/>
+          </a:xfrm>
+          <a:prstGeom prst="rect">
+            <a:avLst/>
+          </a:prstGeom>
+          <a:solidFill>
+            <a:srgbClr val="2F8A28"/>
+          </a:solidFill>
+          <a:ln w="12700">
+            <a:solidFill>
+              <a:srgbClr val="2F8A28"/>
+            </a:solidFill>
+            <a:prstDash val="solid"/>
+          </a:ln>
+        </p:spPr>
+      </p:sp>
+      <p:sp>
+        <p:nvSpPr>
+          <p:cNvPr id="4" name="Text 2"/>
+          <p:cNvSpPr/>
+          <p:nvPr/>
+        </p:nvSpPr>
+        <p:spPr>
+          <a:xfrm>
+            <a:off x="502920" y="292608"/>
+            <a:ext cx="10149840" cy="256032"/>
+          </a:xfrm>
+          <a:prstGeom prst="rect">
+            <a:avLst/>
+          </a:prstGeom>
+          <a:noFill/>
+          <a:ln/>
+        </p:spPr>
+        <p:txBody>
+          <a:bodyPr wrap="square" lIns="0" tIns="0" rIns="0" bIns="0" rtlCol="0" anchor="ctr"/>
+          <a:lstStyle/>
+          <a:p>
+            <a:pPr indent="0" marL="0">
+              <a:buNone/>
+            </a:pPr>
+            <a:r>
+              <a:rPr lang="en-US" sz="900" b="1" dirty="0">
+                <a:solidFill>
+                  <a:srgbClr val="5F7181"/>
+                </a:solidFill>
+                <a:latin typeface="Aptos" pitchFamily="34" charset="0"/>
+                <a:ea typeface="Aptos" pitchFamily="34" charset="-122"/>
+                <a:cs typeface="Aptos" pitchFamily="34" charset="-120"/>
+              </a:rPr>
+              <a:t>Community Oversight and Participatory Governance</a:t>
+            </a:r>
+            <a:endParaRPr lang="en-US" sz="900" dirty="0"/>
+          </a:p>
+        </p:txBody>
+      </p:sp>
+      <p:sp>
+        <p:nvSpPr>
+          <p:cNvPr id="5" name="Text 3"/>
+          <p:cNvSpPr/>
+          <p:nvPr/>
+        </p:nvSpPr>
+        <p:spPr>
+          <a:xfrm>
+            <a:off x="502920" y="6537960"/>
+            <a:ext cx="7772400" cy="201168"/>
+          </a:xfrm>
+          <a:prstGeom prst="rect">
+            <a:avLst/>
+          </a:prstGeom>
+          <a:noFill/>
+          <a:ln/>
+        </p:spPr>
+        <p:txBody>
+          <a:bodyPr wrap="square" lIns="0" tIns="0" rIns="0" bIns="0" rtlCol="0" anchor="ctr"/>
+          <a:lstStyle/>
+          <a:p>
+            <a:pPr indent="0" marL="0">
+              <a:buNone/>
+            </a:pPr>
+            <a:r>
+              <a:rPr lang="en-US" sz="800" dirty="0">
+                <a:solidFill>
+                  <a:srgbClr val="5F7181"/>
+                </a:solidFill>
+                <a:latin typeface="Aptos" pitchFamily="34" charset="0"/>
+                <a:ea typeface="Aptos" pitchFamily="34" charset="-122"/>
+                <a:cs typeface="Aptos" pitchFamily="34" charset="-120"/>
+              </a:rPr>
+              <a:t>AI Playbook and Toolkit for Public Health Departments</a:t>
+            </a:r>
+            <a:endParaRPr lang="en-US" sz="800" dirty="0"/>
+          </a:p>
+        </p:txBody>
+      </p:sp>
+      <p:sp>
+        <p:nvSpPr>
+          <p:cNvPr id="6" name="Text 4"/>
+          <p:cNvSpPr/>
+          <p:nvPr/>
+        </p:nvSpPr>
+        <p:spPr>
+          <a:xfrm>
+            <a:off x="9966960" y="6537960"/>
+            <a:ext cx="1645920" cy="201168"/>
+          </a:xfrm>
+          <a:prstGeom prst="rect">
+            <a:avLst/>
+          </a:prstGeom>
+          <a:noFill/>
+          <a:ln/>
+        </p:spPr>
+        <p:txBody>
+          <a:bodyPr wrap="square" lIns="0" tIns="0" rIns="0" bIns="0" rtlCol="0" anchor="ctr"/>
+          <a:lstStyle/>
+          <a:p>
+            <a:pPr algn="r" indent="0" marL="0">
+              <a:buNone/>
+            </a:pPr>
+            <a:r>
+              <a:rPr lang="en-US" sz="800" dirty="0">
+                <a:solidFill>
+                  <a:srgbClr val="5F7181"/>
+                </a:solidFill>
+                <a:latin typeface="Aptos" pitchFamily="34" charset="0"/>
+                <a:ea typeface="Aptos" pitchFamily="34" charset="-122"/>
+                <a:cs typeface="Aptos" pitchFamily="34" charset="-120"/>
+              </a:rPr>
+              <a:t>© Paula Soper</a:t>
+            </a:r>
+            <a:endParaRPr lang="en-US" sz="800" dirty="0"/>
+          </a:p>
+        </p:txBody>
+      </p:sp>
+      <p:sp>
+        <p:nvSpPr>
+          <p:cNvPr id="7" name="Shape 5"/>
+          <p:cNvSpPr/>
+          <p:nvPr/>
+        </p:nvSpPr>
+        <p:spPr>
+          <a:xfrm>
+            <a:off x="640080" y="658368"/>
+            <a:ext cx="420624" cy="420624"/>
+          </a:xfrm>
+          <a:prstGeom prst="ellipse">
+            <a:avLst/>
+          </a:prstGeom>
+          <a:solidFill>
+            <a:srgbClr val="0068B7"/>
+          </a:solidFill>
+          <a:ln w="12700">
+            <a:solidFill>
+              <a:srgbClr val="0068B7"/>
+            </a:solidFill>
+            <a:prstDash val="solid"/>
+          </a:ln>
+        </p:spPr>
+      </p:sp>
+      <p:sp>
+        <p:nvSpPr>
+          <p:cNvPr id="8" name="Text 6"/>
+          <p:cNvSpPr/>
+          <p:nvPr/>
+        </p:nvSpPr>
+        <p:spPr>
+          <a:xfrm>
+            <a:off x="640080" y="731520"/>
+            <a:ext cx="420624" cy="164592"/>
+          </a:xfrm>
+          <a:prstGeom prst="rect">
+            <a:avLst/>
+          </a:prstGeom>
+          <a:noFill/>
+          <a:ln/>
+        </p:spPr>
+        <p:txBody>
+          <a:bodyPr wrap="square" lIns="0" tIns="0" rIns="0" bIns="0" rtlCol="0" anchor="ctr"/>
+          <a:lstStyle/>
+          <a:p>
+            <a:pPr algn="ctr" indent="0" marL="0">
+              <a:buNone/>
+            </a:pPr>
+            <a:r>
+              <a:rPr lang="en-US" sz="1100" b="1" dirty="0">
+                <a:solidFill>
+                  <a:srgbClr val="FFFFFF"/>
+                </a:solidFill>
+                <a:latin typeface="Aptos" pitchFamily="34" charset="0"/>
+                <a:ea typeface="Aptos" pitchFamily="34" charset="-122"/>
+                <a:cs typeface="Aptos" pitchFamily="34" charset="-120"/>
+              </a:rPr>
+              <a:t>15</a:t>
+            </a:r>
+            <a:endParaRPr lang="en-US" sz="1100" dirty="0"/>
+          </a:p>
+        </p:txBody>
+      </p:sp>
+      <p:sp>
+        <p:nvSpPr>
+          <p:cNvPr id="9" name="Text 7"/>
+          <p:cNvSpPr/>
+          <p:nvPr/>
+        </p:nvSpPr>
+        <p:spPr>
+          <a:xfrm>
+            <a:off x="640080" y="621792"/>
+            <a:ext cx="10881360" cy="566928"/>
+          </a:xfrm>
+          <a:prstGeom prst="rect">
+            <a:avLst/>
+          </a:prstGeom>
+          <a:noFill/>
+          <a:ln/>
+        </p:spPr>
+        <p:txBody>
+          <a:bodyPr wrap="square" lIns="0" tIns="0" rIns="0" bIns="0" rtlCol="0" anchor="ctr">
+            <a:normAutofit/>
+          </a:bodyPr>
+          <a:lstStyle/>
+          <a:p>
+            <a:pPr indent="0" marL="0">
+              <a:buNone/>
+            </a:pPr>
+            <a:r>
+              <a:rPr lang="en-US" sz="2700" b="1" dirty="0">
+                <a:solidFill>
+                  <a:srgbClr val="003A63"/>
+                </a:solidFill>
+                <a:latin typeface="Aptos Display" pitchFamily="34" charset="0"/>
+                <a:ea typeface="Aptos Display" pitchFamily="34" charset="-122"/>
+                <a:cs typeface="Aptos Display" pitchFamily="34" charset="-120"/>
+              </a:rPr>
+              <a:t>References and Resources</a:t>
+            </a:r>
+            <a:endParaRPr lang="en-US" sz="2700" dirty="0"/>
+          </a:p>
+        </p:txBody>
+      </p:sp>
+      <p:sp>
+        <p:nvSpPr>
+          <p:cNvPr id="10" name="Text 8"/>
+          <p:cNvSpPr/>
+          <p:nvPr/>
+        </p:nvSpPr>
+        <p:spPr>
+          <a:xfrm>
+            <a:off x="868680" y="1417320"/>
+            <a:ext cx="6675120" cy="4434840"/>
+          </a:xfrm>
+          <a:prstGeom prst="rect">
+            <a:avLst/>
+          </a:prstGeom>
+          <a:noFill/>
+          <a:ln/>
+        </p:spPr>
+        <p:txBody>
+          <a:bodyPr wrap="square" lIns="635" tIns="635" rIns="635" bIns="635" rtlCol="0" anchor="t">
+            <a:normAutofit/>
+          </a:bodyPr>
+          <a:lstStyle/>
+          <a:p>
+            <a:r>
+              <a:rPr lang="en-US" sz="1700" dirty="0">
+                <a:solidFill>
+                  <a:srgbClr val="17364A"/>
+                </a:solidFill>
+                <a:latin typeface="Aptos" pitchFamily="34" charset="0"/>
+                <a:ea typeface="Aptos" pitchFamily="34" charset="-122"/>
+                <a:cs typeface="Aptos" pitchFamily="34" charset="-120"/>
+              </a:rPr>
+              <a:t>NIST Artificial Intelligence Risk Management Framework (AI RMF 1.0): https://www.nist.gov/itl/ai-risk-management-framework</a:t>
+            </a:r>
+            <a:endParaRPr lang="en-US" sz="1700" dirty="0"/>
+          </a:p>
+          <a:p>
+            <a:r>
+              <a:rPr lang="en-US" sz="1700" dirty="0">
+                <a:solidFill>
+                  <a:srgbClr val="17364A"/>
+                </a:solidFill>
+                <a:latin typeface="Aptos" pitchFamily="34" charset="0"/>
+                <a:ea typeface="Aptos" pitchFamily="34" charset="-122"/>
+                <a:cs typeface="Aptos" pitchFamily="34" charset="-120"/>
+              </a:rPr>
+              <a:t>NIST Generative AI Profile:.</a:t>
+            </a:r>
+            <a:endParaRPr lang="en-US" sz="1700" dirty="0"/>
+          </a:p>
+          <a:p>
+            <a:r>
+              <a:rPr lang="en-US" sz="1700" dirty="0">
+                <a:solidFill>
+                  <a:srgbClr val="17364A"/>
+                </a:solidFill>
+                <a:latin typeface="Aptos" pitchFamily="34" charset="0"/>
+                <a:ea typeface="Aptos" pitchFamily="34" charset="-122"/>
+                <a:cs typeface="Aptos" pitchFamily="34" charset="-120"/>
+              </a:rPr>
+              <a:t>NIST Privacy Framework</a:t>
+            </a:r>
+            <a:endParaRPr lang="en-US" sz="1700" dirty="0"/>
+          </a:p>
+          <a:p>
+            <a:r>
+              <a:rPr lang="en-US" sz="1700" dirty="0">
+                <a:solidFill>
+                  <a:srgbClr val="17364A"/>
+                </a:solidFill>
+                <a:latin typeface="Aptos" pitchFamily="34" charset="0"/>
+                <a:ea typeface="Aptos" pitchFamily="34" charset="-122"/>
+                <a:cs typeface="Aptos" pitchFamily="34" charset="-120"/>
+              </a:rPr>
+              <a:t>CDC Public Health Data Strategy and Data Modernization resources:.</a:t>
+            </a:r>
+            <a:endParaRPr lang="en-US" sz="1700" dirty="0"/>
+          </a:p>
+        </p:txBody>
+      </p:sp>
+      <p:sp>
+        <p:nvSpPr>
+          <p:cNvPr id="11" name="Shape 9"/>
+          <p:cNvSpPr/>
+          <p:nvPr/>
+        </p:nvSpPr>
+        <p:spPr>
+          <a:xfrm>
+            <a:off x="7909560" y="1417320"/>
+            <a:ext cx="3154680" cy="1828800"/>
+          </a:xfrm>
+          <a:prstGeom prst="roundRect">
+            <a:avLst>
+              <a:gd name="adj" fmla="val 6000"/>
+            </a:avLst>
+          </a:prstGeom>
+          <a:solidFill>
+            <a:srgbClr val="EEF8ED"/>
+          </a:solidFill>
+          <a:ln w="12700">
+            <a:solidFill>
+              <a:srgbClr val="B9D7E6"/>
+            </a:solidFill>
+            <a:prstDash val="solid"/>
+          </a:ln>
+        </p:spPr>
+      </p:sp>
+      <p:sp>
+        <p:nvSpPr>
+          <p:cNvPr id="12" name="Text 10"/>
+          <p:cNvSpPr/>
+          <p:nvPr/>
+        </p:nvSpPr>
+        <p:spPr>
+          <a:xfrm>
+            <a:off x="8074152" y="1563624"/>
+            <a:ext cx="2825496" cy="201168"/>
+          </a:xfrm>
+          <a:prstGeom prst="rect">
+            <a:avLst/>
+          </a:prstGeom>
+          <a:noFill/>
+          <a:ln/>
+        </p:spPr>
+        <p:txBody>
+          <a:bodyPr wrap="square" lIns="0" tIns="0" rIns="0" bIns="0" rtlCol="0" anchor="ctr"/>
+          <a:lstStyle/>
+          <a:p>
+            <a:pPr indent="0" marL="0">
+              <a:buNone/>
+            </a:pPr>
+            <a:r>
+              <a:rPr lang="en-US" sz="950" b="1" dirty="0">
+                <a:solidFill>
+                  <a:srgbClr val="0068B7"/>
+                </a:solidFill>
+                <a:latin typeface="Aptos" pitchFamily="34" charset="0"/>
+                <a:ea typeface="Aptos" pitchFamily="34" charset="-122"/>
+                <a:cs typeface="Aptos" pitchFamily="34" charset="-120"/>
+              </a:rPr>
+              <a:t>Key idea</a:t>
+            </a:r>
+            <a:endParaRPr lang="en-US" sz="950" dirty="0"/>
+          </a:p>
+        </p:txBody>
+      </p:sp>
+      <p:sp>
+        <p:nvSpPr>
+          <p:cNvPr id="13" name="Text 11"/>
+          <p:cNvSpPr/>
+          <p:nvPr/>
+        </p:nvSpPr>
+        <p:spPr>
+          <a:xfrm>
+            <a:off x="8074152" y="1856232"/>
+            <a:ext cx="2825496" cy="1261872"/>
+          </a:xfrm>
+          <a:prstGeom prst="rect">
+            <a:avLst/>
+          </a:prstGeom>
+          <a:noFill/>
+          <a:ln/>
+        </p:spPr>
+        <p:txBody>
+          <a:bodyPr wrap="square" lIns="0" tIns="0" rIns="0" bIns="0" rtlCol="0" anchor="t">
+            <a:normAutofit/>
+          </a:bodyPr>
+          <a:lstStyle/>
+          <a:p>
+            <a:pPr indent="0" marL="0">
+              <a:buNone/>
+            </a:pPr>
+            <a:r>
+              <a:rPr lang="en-US" sz="1250" dirty="0">
+                <a:solidFill>
+                  <a:srgbClr val="17364A"/>
+                </a:solidFill>
+                <a:latin typeface="Aptos" pitchFamily="34" charset="0"/>
+                <a:ea typeface="Aptos" pitchFamily="34" charset="-122"/>
+                <a:cs typeface="Aptos" pitchFamily="34" charset="-120"/>
+              </a:rPr>
+              <a:t>NIST Artificial Intelligence Risk Management Framework (AI RMF 1.0): https://www.nist.gov/itl/ai-risk-management-framework</a:t>
+            </a:r>
+            <a:endParaRPr lang="en-US" sz="1250" dirty="0"/>
+          </a:p>
+        </p:txBody>
+      </p:sp>
+      <p:sp>
+        <p:nvSpPr>
+          <p:cNvPr id="14" name="Shape 12"/>
+          <p:cNvSpPr/>
+          <p:nvPr/>
+        </p:nvSpPr>
+        <p:spPr>
+          <a:xfrm>
+            <a:off x="7909560" y="3520440"/>
+            <a:ext cx="3154680" cy="1737360"/>
+          </a:xfrm>
+          <a:prstGeom prst="roundRect">
+            <a:avLst>
+              <a:gd name="adj" fmla="val 6316"/>
+            </a:avLst>
+          </a:prstGeom>
+          <a:solidFill>
+            <a:srgbClr val="EAF6F8"/>
+          </a:solidFill>
+          <a:ln w="12700">
+            <a:solidFill>
+              <a:srgbClr val="B9D7E6"/>
+            </a:solidFill>
+            <a:prstDash val="solid"/>
+          </a:ln>
+        </p:spPr>
+      </p:sp>
+      <p:sp>
+        <p:nvSpPr>
+          <p:cNvPr id="15" name="Text 13"/>
+          <p:cNvSpPr/>
+          <p:nvPr/>
+        </p:nvSpPr>
+        <p:spPr>
+          <a:xfrm>
+            <a:off x="8074152" y="3666744"/>
+            <a:ext cx="2825496" cy="201168"/>
+          </a:xfrm>
+          <a:prstGeom prst="rect">
+            <a:avLst/>
+          </a:prstGeom>
+          <a:noFill/>
+          <a:ln/>
+        </p:spPr>
+        <p:txBody>
+          <a:bodyPr wrap="square" lIns="0" tIns="0" rIns="0" bIns="0" rtlCol="0" anchor="ctr"/>
+          <a:lstStyle/>
+          <a:p>
+            <a:pPr indent="0" marL="0">
+              <a:buNone/>
+            </a:pPr>
+            <a:r>
+              <a:rPr lang="en-US" sz="950" b="1" dirty="0">
+                <a:solidFill>
+                  <a:srgbClr val="0068B7"/>
+                </a:solidFill>
+                <a:latin typeface="Aptos" pitchFamily="34" charset="0"/>
+                <a:ea typeface="Aptos" pitchFamily="34" charset="-122"/>
+                <a:cs typeface="Aptos" pitchFamily="34" charset="-120"/>
+              </a:rPr>
+              <a:t>Use this for</a:t>
+            </a:r>
+            <a:endParaRPr lang="en-US" sz="950" dirty="0"/>
+          </a:p>
+        </p:txBody>
+      </p:sp>
+      <p:sp>
+        <p:nvSpPr>
+          <p:cNvPr id="16" name="Text 14"/>
+          <p:cNvSpPr/>
+          <p:nvPr/>
+        </p:nvSpPr>
+        <p:spPr>
+          <a:xfrm>
+            <a:off x="8074152" y="3959352"/>
+            <a:ext cx="2825496" cy="1170432"/>
+          </a:xfrm>
+          <a:prstGeom prst="rect">
+            <a:avLst/>
+          </a:prstGeom>
+          <a:noFill/>
+          <a:ln/>
+        </p:spPr>
+        <p:txBody>
+          <a:bodyPr wrap="square" lIns="0" tIns="0" rIns="0" bIns="0" rtlCol="0" anchor="t">
+            <a:normAutofit/>
+          </a:bodyPr>
+          <a:lstStyle/>
+          <a:p>
+            <a:pPr indent="0" marL="0">
+              <a:buNone/>
+            </a:pPr>
+            <a:r>
+              <a:rPr lang="en-US" sz="1250" dirty="0">
+                <a:solidFill>
+                  <a:srgbClr val="17364A"/>
+                </a:solidFill>
+                <a:latin typeface="Aptos" pitchFamily="34" charset="0"/>
+                <a:ea typeface="Aptos" pitchFamily="34" charset="-122"/>
+                <a:cs typeface="Aptos" pitchFamily="34" charset="-120"/>
+              </a:rPr>
+              <a:t>Connect the concept to public health decisions, safeguards, documentation, or implementation work.</a:t>
+            </a:r>
+            <a:endParaRPr lang="en-US" sz="1250" dirty="0"/>
+          </a:p>
+        </p:txBody>
+      </p:sp>
+    </p:spTree>
+  </p:cSld>
+  <p:clrMapOvr>
+    <a:masterClrMapping/>
+  </p:clrMapOvr>
+</p:sld>
+</file>
+
+<file path=ppt/slides/slide21.xml><?xml version="1.0" encoding="utf-8"?>
+<p:sld xmlns:a="http://schemas.openxmlformats.org/drawingml/2006/main" xmlns:r="http://schemas.openxmlformats.org/officeDocument/2006/relationships" xmlns:p="http://schemas.openxmlformats.org/presentationml/2006/main">
+  <p:cSld name="Slide 21">
+    <p:bg>
+      <p:bgPr>
+        <a:solidFill>
+          <a:srgbClr val="F7FBFD"/>
+        </a:solidFill>
+      </p:bgPr>
+    </p:bg>
+    <p:spTree>
+      <p:nvGrpSpPr>
+        <p:cNvPr id="1" name=""/>
+        <p:cNvGrpSpPr/>
+        <p:nvPr/>
+      </p:nvGrpSpPr>
+      <p:grpSpPr>
+        <a:xfrm>
+          <a:off x="0" y="0"/>
+          <a:ext cx="0" cy="0"/>
+          <a:chOff x="0" y="0"/>
+          <a:chExt cx="0" cy="0"/>
+        </a:xfrm>
+      </p:grpSpPr>
+      <p:sp>
+        <p:nvSpPr>
+          <p:cNvPr id="2" name="Shape 0"/>
+          <p:cNvSpPr/>
+          <p:nvPr/>
+        </p:nvSpPr>
+        <p:spPr>
+          <a:xfrm>
+            <a:off x="0" y="0"/>
+            <a:ext cx="12191695" cy="164592"/>
+          </a:xfrm>
+          <a:prstGeom prst="rect">
+            <a:avLst/>
+          </a:prstGeom>
+          <a:solidFill>
+            <a:srgbClr val="0068B7"/>
+          </a:solidFill>
+          <a:ln w="12700">
+            <a:solidFill>
+              <a:srgbClr val="0068B7"/>
+            </a:solidFill>
+            <a:prstDash val="solid"/>
+          </a:ln>
+        </p:spPr>
+      </p:sp>
+      <p:sp>
+        <p:nvSpPr>
+          <p:cNvPr id="3" name="Shape 1"/>
+          <p:cNvSpPr/>
+          <p:nvPr/>
+        </p:nvSpPr>
+        <p:spPr>
+          <a:xfrm>
+            <a:off x="0" y="164592"/>
+            <a:ext cx="146304" cy="6693408"/>
+          </a:xfrm>
+          <a:prstGeom prst="rect">
+            <a:avLst/>
+          </a:prstGeom>
+          <a:solidFill>
+            <a:srgbClr val="2F8A28"/>
+          </a:solidFill>
+          <a:ln w="12700">
+            <a:solidFill>
+              <a:srgbClr val="2F8A28"/>
+            </a:solidFill>
+            <a:prstDash val="solid"/>
+          </a:ln>
+        </p:spPr>
+      </p:sp>
+      <p:sp>
+        <p:nvSpPr>
+          <p:cNvPr id="4" name="Text 2"/>
+          <p:cNvSpPr/>
+          <p:nvPr/>
+        </p:nvSpPr>
+        <p:spPr>
+          <a:xfrm>
+            <a:off x="502920" y="292608"/>
+            <a:ext cx="10149840" cy="256032"/>
+          </a:xfrm>
+          <a:prstGeom prst="rect">
+            <a:avLst/>
+          </a:prstGeom>
+          <a:noFill/>
+          <a:ln/>
+        </p:spPr>
+        <p:txBody>
+          <a:bodyPr wrap="square" lIns="0" tIns="0" rIns="0" bIns="0" rtlCol="0" anchor="ctr"/>
+          <a:lstStyle/>
+          <a:p>
+            <a:pPr indent="0" marL="0">
+              <a:buNone/>
+            </a:pPr>
+            <a:r>
+              <a:rPr lang="en-US" sz="900" b="1" dirty="0">
+                <a:solidFill>
+                  <a:srgbClr val="5F7181"/>
+                </a:solidFill>
+                <a:latin typeface="Aptos" pitchFamily="34" charset="0"/>
+                <a:ea typeface="Aptos" pitchFamily="34" charset="-122"/>
+                <a:cs typeface="Aptos" pitchFamily="34" charset="-120"/>
+              </a:rPr>
+              <a:t>Community Oversight and Participatory Governance</a:t>
+            </a:r>
+            <a:endParaRPr lang="en-US" sz="900" dirty="0"/>
+          </a:p>
+        </p:txBody>
+      </p:sp>
+      <p:sp>
+        <p:nvSpPr>
+          <p:cNvPr id="5" name="Text 3"/>
+          <p:cNvSpPr/>
+          <p:nvPr/>
+        </p:nvSpPr>
+        <p:spPr>
+          <a:xfrm>
+            <a:off x="502920" y="6537960"/>
+            <a:ext cx="7772400" cy="201168"/>
+          </a:xfrm>
+          <a:prstGeom prst="rect">
+            <a:avLst/>
+          </a:prstGeom>
+          <a:noFill/>
+          <a:ln/>
+        </p:spPr>
+        <p:txBody>
+          <a:bodyPr wrap="square" lIns="0" tIns="0" rIns="0" bIns="0" rtlCol="0" anchor="ctr"/>
+          <a:lstStyle/>
+          <a:p>
+            <a:pPr indent="0" marL="0">
+              <a:buNone/>
+            </a:pPr>
+            <a:r>
+              <a:rPr lang="en-US" sz="800" dirty="0">
+                <a:solidFill>
+                  <a:srgbClr val="5F7181"/>
+                </a:solidFill>
+                <a:latin typeface="Aptos" pitchFamily="34" charset="0"/>
+                <a:ea typeface="Aptos" pitchFamily="34" charset="-122"/>
+                <a:cs typeface="Aptos" pitchFamily="34" charset="-120"/>
+              </a:rPr>
+              <a:t>AI Playbook and Toolkit for Public Health Departments</a:t>
+            </a:r>
+            <a:endParaRPr lang="en-US" sz="800" dirty="0"/>
+          </a:p>
+        </p:txBody>
+      </p:sp>
+      <p:sp>
+        <p:nvSpPr>
+          <p:cNvPr id="6" name="Text 4"/>
+          <p:cNvSpPr/>
+          <p:nvPr/>
+        </p:nvSpPr>
+        <p:spPr>
+          <a:xfrm>
+            <a:off x="9966960" y="6537960"/>
+            <a:ext cx="1645920" cy="201168"/>
+          </a:xfrm>
+          <a:prstGeom prst="rect">
+            <a:avLst/>
+          </a:prstGeom>
+          <a:noFill/>
+          <a:ln/>
+        </p:spPr>
+        <p:txBody>
+          <a:bodyPr wrap="square" lIns="0" tIns="0" rIns="0" bIns="0" rtlCol="0" anchor="ctr"/>
+          <a:lstStyle/>
+          <a:p>
+            <a:pPr algn="r" indent="0" marL="0">
+              <a:buNone/>
+            </a:pPr>
+            <a:r>
+              <a:rPr lang="en-US" sz="800" dirty="0">
+                <a:solidFill>
+                  <a:srgbClr val="5F7181"/>
+                </a:solidFill>
+                <a:latin typeface="Aptos" pitchFamily="34" charset="0"/>
+                <a:ea typeface="Aptos" pitchFamily="34" charset="-122"/>
+                <a:cs typeface="Aptos" pitchFamily="34" charset="-120"/>
+              </a:rPr>
+              <a:t>© Paula Soper</a:t>
+            </a:r>
+            <a:endParaRPr lang="en-US" sz="800" dirty="0"/>
+          </a:p>
+        </p:txBody>
+      </p:sp>
+      <p:sp>
+        <p:nvSpPr>
+          <p:cNvPr id="7" name="Text 5"/>
+          <p:cNvSpPr/>
+          <p:nvPr/>
+        </p:nvSpPr>
+        <p:spPr>
+          <a:xfrm>
+            <a:off x="640080" y="658368"/>
+            <a:ext cx="10881360" cy="566928"/>
+          </a:xfrm>
+          <a:prstGeom prst="rect">
+            <a:avLst/>
+          </a:prstGeom>
+          <a:noFill/>
+          <a:ln/>
+        </p:spPr>
+        <p:txBody>
+          <a:bodyPr wrap="square" lIns="0" tIns="0" rIns="0" bIns="0" rtlCol="0" anchor="ctr">
+            <a:normAutofit/>
+          </a:bodyPr>
+          <a:lstStyle/>
+          <a:p>
+            <a:pPr indent="0" marL="0">
+              <a:buNone/>
+            </a:pPr>
+            <a:r>
+              <a:rPr lang="en-US" sz="2700" b="1" dirty="0">
+                <a:solidFill>
+                  <a:srgbClr val="003A63"/>
+                </a:solidFill>
+                <a:latin typeface="Aptos Display" pitchFamily="34" charset="0"/>
+                <a:ea typeface="Aptos Display" pitchFamily="34" charset="-122"/>
+                <a:cs typeface="Aptos Display" pitchFamily="34" charset="-120"/>
+              </a:rPr>
+              <a:t>References and Resources Continued</a:t>
+            </a:r>
+            <a:endParaRPr lang="en-US" sz="2700" dirty="0"/>
+          </a:p>
+        </p:txBody>
+      </p:sp>
+      <p:sp>
+        <p:nvSpPr>
+          <p:cNvPr id="8" name="Text 6"/>
+          <p:cNvSpPr/>
+          <p:nvPr/>
+        </p:nvSpPr>
+        <p:spPr>
+          <a:xfrm>
+            <a:off x="868680" y="1417320"/>
+            <a:ext cx="6675120" cy="4434840"/>
+          </a:xfrm>
+          <a:prstGeom prst="rect">
+            <a:avLst/>
+          </a:prstGeom>
+          <a:noFill/>
+          <a:ln/>
+        </p:spPr>
+        <p:txBody>
+          <a:bodyPr wrap="square" lIns="635" tIns="635" rIns="635" bIns="635" rtlCol="0" anchor="t">
+            <a:normAutofit/>
+          </a:bodyPr>
+          <a:lstStyle/>
+          <a:p>
+            <a:r>
+              <a:rPr lang="en-US" sz="1700" dirty="0">
+                <a:solidFill>
+                  <a:srgbClr val="17364A"/>
+                </a:solidFill>
+                <a:latin typeface="Aptos" pitchFamily="34" charset="0"/>
+                <a:ea typeface="Aptos" pitchFamily="34" charset="-122"/>
+                <a:cs typeface="Aptos" pitchFamily="34" charset="-120"/>
+              </a:rPr>
+              <a:t>OMB Memorandum M-24-10 on federal AI governance, risk management, and innovation, where relevant to public-sector governance.</a:t>
+            </a:r>
+            <a:endParaRPr lang="en-US" sz="1700" dirty="0"/>
+          </a:p>
+          <a:p>
+            <a:r>
+              <a:rPr lang="en-US" sz="1700" dirty="0">
+                <a:solidFill>
+                  <a:srgbClr val="17364A"/>
+                </a:solidFill>
+                <a:latin typeface="Aptos" pitchFamily="34" charset="0"/>
+                <a:ea typeface="Aptos" pitchFamily="34" charset="-122"/>
+                <a:cs typeface="Aptos" pitchFamily="34" charset="-120"/>
+              </a:rPr>
+              <a:t>Agency strategic plans, procurement policies, privacy policies, cybersecurity policies, records policies, and equity plans</a:t>
+            </a:r>
+            <a:endParaRPr lang="en-US" sz="1700" dirty="0"/>
+          </a:p>
+        </p:txBody>
+      </p:sp>
+      <p:sp>
+        <p:nvSpPr>
+          <p:cNvPr id="9" name="Shape 7"/>
+          <p:cNvSpPr/>
+          <p:nvPr/>
+        </p:nvSpPr>
+        <p:spPr>
+          <a:xfrm>
+            <a:off x="7909560" y="1417320"/>
+            <a:ext cx="3154680" cy="1828800"/>
+          </a:xfrm>
+          <a:prstGeom prst="roundRect">
+            <a:avLst>
+              <a:gd name="adj" fmla="val 6000"/>
+            </a:avLst>
+          </a:prstGeom>
+          <a:solidFill>
+            <a:srgbClr val="EEF8ED"/>
+          </a:solidFill>
+          <a:ln w="12700">
+            <a:solidFill>
+              <a:srgbClr val="B9D7E6"/>
+            </a:solidFill>
+            <a:prstDash val="solid"/>
+          </a:ln>
+        </p:spPr>
+      </p:sp>
+      <p:sp>
+        <p:nvSpPr>
+          <p:cNvPr id="10" name="Text 8"/>
+          <p:cNvSpPr/>
+          <p:nvPr/>
+        </p:nvSpPr>
+        <p:spPr>
+          <a:xfrm>
+            <a:off x="8074152" y="1563624"/>
+            <a:ext cx="2825496" cy="201168"/>
+          </a:xfrm>
+          <a:prstGeom prst="rect">
+            <a:avLst/>
+          </a:prstGeom>
+          <a:noFill/>
+          <a:ln/>
+        </p:spPr>
+        <p:txBody>
+          <a:bodyPr wrap="square" lIns="0" tIns="0" rIns="0" bIns="0" rtlCol="0" anchor="ctr"/>
+          <a:lstStyle/>
+          <a:p>
+            <a:pPr indent="0" marL="0">
+              <a:buNone/>
+            </a:pPr>
+            <a:r>
+              <a:rPr lang="en-US" sz="950" b="1" dirty="0">
+                <a:solidFill>
+                  <a:srgbClr val="0068B7"/>
+                </a:solidFill>
+                <a:latin typeface="Aptos" pitchFamily="34" charset="0"/>
+                <a:ea typeface="Aptos" pitchFamily="34" charset="-122"/>
+                <a:cs typeface="Aptos" pitchFamily="34" charset="-120"/>
+              </a:rPr>
+              <a:t>Key idea</a:t>
+            </a:r>
+            <a:endParaRPr lang="en-US" sz="950" dirty="0"/>
+          </a:p>
+        </p:txBody>
+      </p:sp>
+      <p:sp>
+        <p:nvSpPr>
+          <p:cNvPr id="11" name="Text 9"/>
+          <p:cNvSpPr/>
+          <p:nvPr/>
+        </p:nvSpPr>
+        <p:spPr>
+          <a:xfrm>
+            <a:off x="8074152" y="1856232"/>
+            <a:ext cx="2825496" cy="1261872"/>
+          </a:xfrm>
+          <a:prstGeom prst="rect">
+            <a:avLst/>
+          </a:prstGeom>
+          <a:noFill/>
+          <a:ln/>
+        </p:spPr>
+        <p:txBody>
+          <a:bodyPr wrap="square" lIns="0" tIns="0" rIns="0" bIns="0" rtlCol="0" anchor="t">
+            <a:normAutofit/>
+          </a:bodyPr>
+          <a:lstStyle/>
+          <a:p>
+            <a:pPr indent="0" marL="0">
+              <a:buNone/>
+            </a:pPr>
+            <a:r>
+              <a:rPr lang="en-US" sz="1250" dirty="0">
+                <a:solidFill>
+                  <a:srgbClr val="17364A"/>
+                </a:solidFill>
+                <a:latin typeface="Aptos" pitchFamily="34" charset="0"/>
+                <a:ea typeface="Aptos" pitchFamily="34" charset="-122"/>
+                <a:cs typeface="Aptos" pitchFamily="34" charset="-120"/>
+              </a:rPr>
+              <a:t>OMB Memorandum M-24-10 on federal AI governance, risk management, and innovation, where relevant to public-sector governance.</a:t>
+            </a:r>
+            <a:endParaRPr lang="en-US" sz="1250" dirty="0"/>
+          </a:p>
+        </p:txBody>
+      </p:sp>
+      <p:sp>
+        <p:nvSpPr>
+          <p:cNvPr id="12" name="Shape 10"/>
+          <p:cNvSpPr/>
+          <p:nvPr/>
+        </p:nvSpPr>
+        <p:spPr>
+          <a:xfrm>
+            <a:off x="7909560" y="3520440"/>
+            <a:ext cx="3154680" cy="1737360"/>
+          </a:xfrm>
+          <a:prstGeom prst="roundRect">
+            <a:avLst>
+              <a:gd name="adj" fmla="val 6316"/>
+            </a:avLst>
+          </a:prstGeom>
+          <a:solidFill>
+            <a:srgbClr val="EAF6F8"/>
+          </a:solidFill>
+          <a:ln w="12700">
+            <a:solidFill>
+              <a:srgbClr val="B9D7E6"/>
+            </a:solidFill>
+            <a:prstDash val="solid"/>
+          </a:ln>
+        </p:spPr>
+      </p:sp>
+      <p:sp>
+        <p:nvSpPr>
+          <p:cNvPr id="13" name="Text 11"/>
+          <p:cNvSpPr/>
+          <p:nvPr/>
+        </p:nvSpPr>
+        <p:spPr>
+          <a:xfrm>
+            <a:off x="8074152" y="3666744"/>
+            <a:ext cx="2825496" cy="201168"/>
+          </a:xfrm>
+          <a:prstGeom prst="rect">
+            <a:avLst/>
+          </a:prstGeom>
+          <a:noFill/>
+          <a:ln/>
+        </p:spPr>
+        <p:txBody>
+          <a:bodyPr wrap="square" lIns="0" tIns="0" rIns="0" bIns="0" rtlCol="0" anchor="ctr"/>
+          <a:lstStyle/>
+          <a:p>
+            <a:pPr indent="0" marL="0">
+              <a:buNone/>
+            </a:pPr>
+            <a:r>
+              <a:rPr lang="en-US" sz="950" b="1" dirty="0">
+                <a:solidFill>
+                  <a:srgbClr val="0068B7"/>
+                </a:solidFill>
+                <a:latin typeface="Aptos" pitchFamily="34" charset="0"/>
+                <a:ea typeface="Aptos" pitchFamily="34" charset="-122"/>
+                <a:cs typeface="Aptos" pitchFamily="34" charset="-120"/>
+              </a:rPr>
+              <a:t>Use this for</a:t>
+            </a:r>
+            <a:endParaRPr lang="en-US" sz="950" dirty="0"/>
+          </a:p>
+        </p:txBody>
+      </p:sp>
+      <p:sp>
+        <p:nvSpPr>
+          <p:cNvPr id="14" name="Text 12"/>
+          <p:cNvSpPr/>
+          <p:nvPr/>
+        </p:nvSpPr>
+        <p:spPr>
+          <a:xfrm>
+            <a:off x="8074152" y="3959352"/>
+            <a:ext cx="2825496" cy="1170432"/>
+          </a:xfrm>
+          <a:prstGeom prst="rect">
+            <a:avLst/>
+          </a:prstGeom>
+          <a:noFill/>
+          <a:ln/>
+        </p:spPr>
+        <p:txBody>
+          <a:bodyPr wrap="square" lIns="0" tIns="0" rIns="0" bIns="0" rtlCol="0" anchor="t">
+            <a:normAutofit/>
+          </a:bodyPr>
+          <a:lstStyle/>
+          <a:p>
+            <a:pPr indent="0" marL="0">
+              <a:buNone/>
+            </a:pPr>
+            <a:r>
+              <a:rPr lang="en-US" sz="1250" dirty="0">
+                <a:solidFill>
+                  <a:srgbClr val="17364A"/>
+                </a:solidFill>
+                <a:latin typeface="Aptos" pitchFamily="34" charset="0"/>
+                <a:ea typeface="Aptos" pitchFamily="34" charset="-122"/>
+                <a:cs typeface="Aptos" pitchFamily="34" charset="-120"/>
+              </a:rPr>
+              <a:t>Connect the concept to public health decisions, safeguards, documentation, or implementation work.</a:t>
+            </a:r>
+            <a:endParaRPr lang="en-US" sz="1250" dirty="0"/>
           </a:p>
         </p:txBody>
       </p:sp>
@@ -5767,7 +10365,32 @@
       </p:sp>
       <p:sp>
         <p:nvSpPr>
-          <p:cNvPr id="3" name="Text 1"/>
+          <p:cNvPr id="3" name="Shape 1"/>
+          <p:cNvSpPr/>
+          <p:nvPr/>
+        </p:nvSpPr>
+        <p:spPr>
+          <a:xfrm>
+            <a:off x="0" y="164592"/>
+            <a:ext cx="146304" cy="6693408"/>
+          </a:xfrm>
+          <a:prstGeom prst="rect">
+            <a:avLst/>
+          </a:prstGeom>
+          <a:solidFill>
+            <a:srgbClr val="2F8A28"/>
+          </a:solidFill>
+          <a:ln w="12700">
+            <a:solidFill>
+              <a:srgbClr val="2F8A28"/>
+            </a:solidFill>
+            <a:prstDash val="solid"/>
+          </a:ln>
+        </p:spPr>
+      </p:sp>
+      <p:sp>
+        <p:nvSpPr>
+          <p:cNvPr id="4" name="Text 2"/>
           <p:cNvSpPr/>
           <p:nvPr/>
         </p:nvSpPr>
@@ -5806,7 +10429,7 @@
       </p:sp>
       <p:sp>
         <p:nvSpPr>
-          <p:cNvPr id="4" name="Text 2"/>
+          <p:cNvPr id="5" name="Text 3"/>
           <p:cNvSpPr/>
           <p:nvPr/>
         </p:nvSpPr>
@@ -5845,7 +10468,7 @@
       </p:sp>
       <p:sp>
         <p:nvSpPr>
-          <p:cNvPr id="5" name="Text 3"/>
+          <p:cNvPr id="6" name="Text 4"/>
           <p:cNvSpPr/>
           <p:nvPr/>
         </p:nvSpPr>
@@ -5884,7 +10507,7 @@
       </p:sp>
       <p:sp>
         <p:nvSpPr>
-          <p:cNvPr id="6" name="Text 4"/>
+          <p:cNvPr id="7" name="Text 5"/>
           <p:cNvSpPr/>
           <p:nvPr/>
         </p:nvSpPr>
@@ -5917,7 +10540,7 @@
                 <a:ea typeface="Aptos Display" pitchFamily="34" charset="-122"/>
                 <a:cs typeface="Aptos Display" pitchFamily="34" charset="-120"/>
               </a:rPr>
-              <a:t>Learning Objectives</a:t>
+              <a:t>How this module connects to the playbook</a:t>
             </a:r>
             <a:endParaRPr lang="en-US" sz="2700" dirty="0"/>
           </a:p>
@@ -5925,14 +10548,14 @@
       </p:sp>
       <p:sp>
         <p:nvSpPr>
-          <p:cNvPr id="7" name="Text 5"/>
-          <p:cNvSpPr/>
-          <p:nvPr/>
-        </p:nvSpPr>
-        <p:spPr>
-          <a:xfrm>
-            <a:off x="822960" y="1325880"/>
-            <a:ext cx="10378440" cy="4800600"/>
+          <p:cNvPr id="8" name="Text 6"/>
+          <p:cNvSpPr/>
+          <p:nvPr/>
+        </p:nvSpPr>
+        <p:spPr>
+          <a:xfrm>
+            <a:off x="868680" y="1417320"/>
+            <a:ext cx="6903720" cy="4480560"/>
           </a:xfrm>
           <a:prstGeom prst="rect">
             <a:avLst/>
@@ -5947,7 +10570,7 @@
           <a:lstStyle/>
           <a:p>
             <a:r>
-              <a:rPr lang="en-US" sz="1450" dirty="0">
+              <a:rPr lang="en-US" sz="1540" dirty="0">
                 <a:solidFill>
                   <a:srgbClr val="17364A"/>
                 </a:solidFill>
@@ -5955,13 +10578,13 @@
                 <a:ea typeface="Aptos" pitchFamily="34" charset="-122"/>
                 <a:cs typeface="Aptos" pitchFamily="34" charset="-120"/>
               </a:rPr>
-              <a:t>Explain why community oversight matters for public health AI.</a:t>
-            </a:r>
-            <a:endParaRPr lang="en-US" sz="1450" dirty="0"/>
-          </a:p>
-          <a:p>
-            <a:r>
-              <a:rPr lang="en-US" sz="1450" dirty="0">
+              <a:t>Play 7: Prioritize Use Cases - This lesson informs Play 7 by helping learners connect the lesson topic to prioritize use cases work.</a:t>
+            </a:r>
+            <a:endParaRPr lang="en-US" sz="1540" dirty="0"/>
+          </a:p>
+          <a:p>
+            <a:r>
+              <a:rPr lang="en-US" sz="1540" dirty="0">
                 <a:solidFill>
                   <a:srgbClr val="17364A"/>
                 </a:solidFill>
@@ -5969,13 +10592,13 @@
                 <a:ea typeface="Aptos" pitchFamily="34" charset="-122"/>
                 <a:cs typeface="Aptos" pitchFamily="34" charset="-120"/>
               </a:rPr>
-              <a:t>Identify AI use cases that warrant community engagement or participatory governance.</a:t>
-            </a:r>
-            <a:endParaRPr lang="en-US" sz="1450" dirty="0"/>
-          </a:p>
-          <a:p>
-            <a:r>
-              <a:rPr lang="en-US" sz="1450" dirty="0">
+              <a:t>Play 11: Build and Deploy AI Solutions - This lesson informs Play 11 by helping learners connect the lesson topic to build and deploy.</a:t>
+            </a:r>
+            <a:endParaRPr lang="en-US" sz="1540" dirty="0"/>
+          </a:p>
+          <a:p>
+            <a:r>
+              <a:rPr lang="en-US" sz="1540" dirty="0">
                 <a:solidFill>
                   <a:srgbClr val="17364A"/>
                 </a:solidFill>
@@ -5983,13 +10606,13 @@
                 <a:ea typeface="Aptos" pitchFamily="34" charset="-122"/>
                 <a:cs typeface="Aptos" pitchFamily="34" charset="-120"/>
               </a:rPr>
-              <a:t>Design a community engagement approach matched to risk, impact, and community context.</a:t>
-            </a:r>
-            <a:endParaRPr lang="en-US" sz="1450" dirty="0"/>
-          </a:p>
-          <a:p>
-            <a:r>
-              <a:rPr lang="en-US" sz="1450" dirty="0">
+              <a:t>Play 1: Vision &amp; Guardrails - This lesson informs Play 1 by helping learners connect the lesson topic to vision &amp; guardrails work in.</a:t>
+            </a:r>
+            <a:endParaRPr lang="en-US" sz="1540" dirty="0"/>
+          </a:p>
+          <a:p>
+            <a:r>
+              <a:rPr lang="en-US" sz="1540" dirty="0">
                 <a:solidFill>
                   <a:srgbClr val="17364A"/>
                 </a:solidFill>
@@ -5997,13 +10620,106 @@
                 <a:ea typeface="Aptos" pitchFamily="34" charset="-122"/>
                 <a:cs typeface="Aptos" pitchFamily="34" charset="-120"/>
               </a:rPr>
-              <a:t>Recognize risks of tokenism, extractive engagement, and inaccessible technical language.</a:t>
-            </a:r>
-            <a:endParaRPr lang="en-US" sz="1450" dirty="0"/>
-          </a:p>
-          <a:p>
-            <a:r>
-              <a:rPr lang="en-US" sz="1450" dirty="0">
+              <a:t>Play 3: Establish AI Governance - This lesson informs Play 3 by helping learners connect the lesson topic to establish ai governance.</a:t>
+            </a:r>
+            <a:endParaRPr lang="en-US" sz="1540" dirty="0"/>
+          </a:p>
+        </p:txBody>
+      </p:sp>
+      <p:sp>
+        <p:nvSpPr>
+          <p:cNvPr id="9" name="Shape 7"/>
+          <p:cNvSpPr/>
+          <p:nvPr/>
+        </p:nvSpPr>
+        <p:spPr>
+          <a:xfrm>
+            <a:off x="8046720" y="1417320"/>
+            <a:ext cx="3063240" cy="2103120"/>
+          </a:xfrm>
+          <a:prstGeom prst="roundRect">
+            <a:avLst>
+              <a:gd name="adj" fmla="val 5217"/>
+            </a:avLst>
+          </a:prstGeom>
+          <a:solidFill>
+            <a:srgbClr val="EEF8ED"/>
+          </a:solidFill>
+          <a:ln w="12700">
+            <a:solidFill>
+              <a:srgbClr val="B9D7E6"/>
+            </a:solidFill>
+            <a:prstDash val="solid"/>
+          </a:ln>
+        </p:spPr>
+      </p:sp>
+      <p:sp>
+        <p:nvSpPr>
+          <p:cNvPr id="10" name="Text 8"/>
+          <p:cNvSpPr/>
+          <p:nvPr/>
+        </p:nvSpPr>
+        <p:spPr>
+          <a:xfrm>
+            <a:off x="8211312" y="1563624"/>
+            <a:ext cx="2734056" cy="201168"/>
+          </a:xfrm>
+          <a:prstGeom prst="rect">
+            <a:avLst/>
+          </a:prstGeom>
+          <a:noFill/>
+          <a:ln/>
+        </p:spPr>
+        <p:txBody>
+          <a:bodyPr wrap="square" lIns="0" tIns="0" rIns="0" bIns="0" rtlCol="0" anchor="ctr"/>
+          <a:lstStyle/>
+          <a:p>
+            <a:pPr indent="0" marL="0">
+              <a:buNone/>
+            </a:pPr>
+            <a:r>
+              <a:rPr lang="en-US" sz="950" b="1" dirty="0">
+                <a:solidFill>
+                  <a:srgbClr val="0068B7"/>
+                </a:solidFill>
+                <a:latin typeface="Aptos" pitchFamily="34" charset="0"/>
+                <a:ea typeface="Aptos" pitchFamily="34" charset="-122"/>
+                <a:cs typeface="Aptos" pitchFamily="34" charset="-120"/>
+              </a:rPr>
+              <a:t>Apply the lesson</a:t>
+            </a:r>
+            <a:endParaRPr lang="en-US" sz="950" dirty="0"/>
+          </a:p>
+        </p:txBody>
+      </p:sp>
+      <p:sp>
+        <p:nvSpPr>
+          <p:cNvPr id="11" name="Text 9"/>
+          <p:cNvSpPr/>
+          <p:nvPr/>
+        </p:nvSpPr>
+        <p:spPr>
+          <a:xfrm>
+            <a:off x="8211312" y="1856232"/>
+            <a:ext cx="2734056" cy="1536192"/>
+          </a:xfrm>
+          <a:prstGeom prst="rect">
+            <a:avLst/>
+          </a:prstGeom>
+          <a:noFill/>
+          <a:ln/>
+        </p:spPr>
+        <p:txBody>
+          <a:bodyPr wrap="square" lIns="0" tIns="0" rIns="0" bIns="0" rtlCol="0" anchor="t">
+            <a:normAutofit/>
+          </a:bodyPr>
+          <a:lstStyle/>
+          <a:p>
+            <a:pPr indent="0" marL="0">
+              <a:buNone/>
+            </a:pPr>
+            <a:r>
+              <a:rPr lang="en-US" sz="1250" dirty="0">
                 <a:solidFill>
                   <a:srgbClr val="17364A"/>
                 </a:solidFill>
@@ -6011,9 +10727,116 @@
                 <a:ea typeface="Aptos" pitchFamily="34" charset="-122"/>
                 <a:cs typeface="Aptos" pitchFamily="34" charset="-120"/>
               </a:rPr>
-              <a:t>Produce a participatory governance plan for one AI use case.</a:t>
-            </a:r>
-            <a:endParaRPr lang="en-US" sz="1450" dirty="0"/>
+              <a:t>Use the related plays to identify decisions, participants, timing, approvals, and documentation needed for responsible implementation.</a:t>
+            </a:r>
+            <a:endParaRPr lang="en-US" sz="1250" dirty="0"/>
+          </a:p>
+        </p:txBody>
+      </p:sp>
+      <p:sp>
+        <p:nvSpPr>
+          <p:cNvPr id="12" name="Shape 10"/>
+          <p:cNvSpPr/>
+          <p:nvPr/>
+        </p:nvSpPr>
+        <p:spPr>
+          <a:xfrm>
+            <a:off x="8046720" y="3794760"/>
+            <a:ext cx="3063240" cy="1508760"/>
+          </a:xfrm>
+          <a:prstGeom prst="roundRect">
+            <a:avLst>
+              <a:gd name="adj" fmla="val 7273"/>
+            </a:avLst>
+          </a:prstGeom>
+          <a:solidFill>
+            <a:srgbClr val="FFF4D9"/>
+          </a:solidFill>
+          <a:ln w="12700">
+            <a:solidFill>
+              <a:srgbClr val="B9D7E6"/>
+            </a:solidFill>
+            <a:prstDash val="solid"/>
+          </a:ln>
+        </p:spPr>
+      </p:sp>
+      <p:sp>
+        <p:nvSpPr>
+          <p:cNvPr id="13" name="Text 11"/>
+          <p:cNvSpPr/>
+          <p:nvPr/>
+        </p:nvSpPr>
+        <p:spPr>
+          <a:xfrm>
+            <a:off x="8211312" y="3941064"/>
+            <a:ext cx="2734056" cy="201168"/>
+          </a:xfrm>
+          <a:prstGeom prst="rect">
+            <a:avLst/>
+          </a:prstGeom>
+          <a:noFill/>
+          <a:ln/>
+        </p:spPr>
+        <p:txBody>
+          <a:bodyPr wrap="square" lIns="0" tIns="0" rIns="0" bIns="0" rtlCol="0" anchor="ctr"/>
+          <a:lstStyle/>
+          <a:p>
+            <a:pPr indent="0" marL="0">
+              <a:buNone/>
+            </a:pPr>
+            <a:r>
+              <a:rPr lang="en-US" sz="950" b="1" dirty="0">
+                <a:solidFill>
+                  <a:srgbClr val="0068B7"/>
+                </a:solidFill>
+                <a:latin typeface="Aptos" pitchFamily="34" charset="0"/>
+                <a:ea typeface="Aptos" pitchFamily="34" charset="-122"/>
+                <a:cs typeface="Aptos" pitchFamily="34" charset="-120"/>
+              </a:rPr>
+              <a:t>Keep in mind</a:t>
+            </a:r>
+            <a:endParaRPr lang="en-US" sz="950" dirty="0"/>
+          </a:p>
+        </p:txBody>
+      </p:sp>
+      <p:sp>
+        <p:nvSpPr>
+          <p:cNvPr id="14" name="Text 12"/>
+          <p:cNvSpPr/>
+          <p:nvPr/>
+        </p:nvSpPr>
+        <p:spPr>
+          <a:xfrm>
+            <a:off x="8211312" y="4233672"/>
+            <a:ext cx="2734056" cy="941832"/>
+          </a:xfrm>
+          <a:prstGeom prst="rect">
+            <a:avLst/>
+          </a:prstGeom>
+          <a:noFill/>
+          <a:ln/>
+        </p:spPr>
+        <p:txBody>
+          <a:bodyPr wrap="square" lIns="0" tIns="0" rIns="0" bIns="0" rtlCol="0" anchor="t">
+            <a:normAutofit/>
+          </a:bodyPr>
+          <a:lstStyle/>
+          <a:p>
+            <a:pPr indent="0" marL="0">
+              <a:buNone/>
+            </a:pPr>
+            <a:r>
+              <a:rPr lang="en-US" sz="1250" dirty="0">
+                <a:solidFill>
+                  <a:srgbClr val="17364A"/>
+                </a:solidFill>
+                <a:latin typeface="Aptos" pitchFamily="34" charset="0"/>
+                <a:ea typeface="Aptos" pitchFamily="34" charset="-122"/>
+                <a:cs typeface="Aptos" pitchFamily="34" charset="-120"/>
+              </a:rPr>
+              <a:t>The playbook connection helps turn training into agency work, not just individual knowledge.</a:t>
+            </a:r>
+            <a:endParaRPr lang="en-US" sz="1250" dirty="0"/>
           </a:p>
         </p:txBody>
       </p:sp>
@@ -6076,7 +10899,32 @@
       </p:sp>
       <p:sp>
         <p:nvSpPr>
-          <p:cNvPr id="3" name="Text 1"/>
+          <p:cNvPr id="3" name="Shape 1"/>
+          <p:cNvSpPr/>
+          <p:nvPr/>
+        </p:nvSpPr>
+        <p:spPr>
+          <a:xfrm>
+            <a:off x="0" y="164592"/>
+            <a:ext cx="146304" cy="6693408"/>
+          </a:xfrm>
+          <a:prstGeom prst="rect">
+            <a:avLst/>
+          </a:prstGeom>
+          <a:solidFill>
+            <a:srgbClr val="2F8A28"/>
+          </a:solidFill>
+          <a:ln w="12700">
+            <a:solidFill>
+              <a:srgbClr val="2F8A28"/>
+            </a:solidFill>
+            <a:prstDash val="solid"/>
+          </a:ln>
+        </p:spPr>
+      </p:sp>
+      <p:sp>
+        <p:nvSpPr>
+          <p:cNvPr id="4" name="Text 2"/>
           <p:cNvSpPr/>
           <p:nvPr/>
         </p:nvSpPr>
@@ -6115,7 +10963,7 @@
       </p:sp>
       <p:sp>
         <p:nvSpPr>
-          <p:cNvPr id="4" name="Text 2"/>
+          <p:cNvPr id="5" name="Text 3"/>
           <p:cNvSpPr/>
           <p:nvPr/>
         </p:nvSpPr>
@@ -6154,7 +11002,7 @@
       </p:sp>
       <p:sp>
         <p:nvSpPr>
-          <p:cNvPr id="5" name="Text 3"/>
+          <p:cNvPr id="6" name="Text 4"/>
           <p:cNvSpPr/>
           <p:nvPr/>
         </p:nvSpPr>
@@ -6193,7 +11041,7 @@
       </p:sp>
       <p:sp>
         <p:nvSpPr>
-          <p:cNvPr id="6" name="Text 4"/>
+          <p:cNvPr id="7" name="Text 5"/>
           <p:cNvSpPr/>
           <p:nvPr/>
         </p:nvSpPr>
@@ -6226,7 +11074,7 @@
                 <a:ea typeface="Aptos Display" pitchFamily="34" charset="-122"/>
                 <a:cs typeface="Aptos Display" pitchFamily="34" charset="-120"/>
               </a:rPr>
-              <a:t>Module Overview</a:t>
+              <a:t>Related toolkit resources</a:t>
             </a:r>
             <a:endParaRPr lang="en-US" sz="2700" dirty="0"/>
           </a:p>
@@ -6234,32 +11082,192 @@
       </p:sp>
       <p:sp>
         <p:nvSpPr>
-          <p:cNvPr id="7" name="Text 5"/>
-          <p:cNvSpPr/>
-          <p:nvPr/>
-        </p:nvSpPr>
-        <p:spPr>
-          <a:xfrm>
-            <a:off x="822960" y="1325880"/>
-            <a:ext cx="10378440" cy="4800600"/>
-          </a:xfrm>
-          <a:prstGeom prst="rect">
-            <a:avLst/>
-          </a:prstGeom>
-          <a:noFill/>
-          <a:ln/>
-        </p:spPr>
-        <p:txBody>
-          <a:bodyPr wrap="square" lIns="1016" tIns="1016" rIns="1016" bIns="1016" rtlCol="0" anchor="t">
+          <p:cNvPr id="8" name="Text 6"/>
+          <p:cNvSpPr/>
+          <p:nvPr/>
+        </p:nvSpPr>
+        <p:spPr>
+          <a:xfrm>
+            <a:off x="868680" y="1417320"/>
+            <a:ext cx="6903720" cy="4480560"/>
+          </a:xfrm>
+          <a:prstGeom prst="rect">
+            <a:avLst/>
+          </a:prstGeom>
+          <a:noFill/>
+          <a:ln/>
+        </p:spPr>
+        <p:txBody>
+          <a:bodyPr wrap="square" lIns="635" tIns="635" rIns="635" bIns="635" rtlCol="0" anchor="t">
             <a:normAutofit/>
           </a:bodyPr>
           <a:lstStyle/>
           <a:p>
+            <a:r>
+              <a:rPr lang="en-US" sz="1460" dirty="0">
+                <a:solidFill>
+                  <a:srgbClr val="17364A"/>
+                </a:solidFill>
+                <a:latin typeface="Aptos" pitchFamily="34" charset="0"/>
+                <a:ea typeface="Aptos" pitchFamily="34" charset="-122"/>
+                <a:cs typeface="Aptos" pitchFamily="34" charset="-120"/>
+              </a:rPr>
+              <a:t>Tool 3: Equity Impact Assessment Checklist (Checklist) - Use this tool to complete or strengthen the practical exercise for the.</a:t>
+            </a:r>
+            <a:endParaRPr lang="en-US" sz="1460" dirty="0"/>
+          </a:p>
+          <a:p>
+            <a:r>
+              <a:rPr lang="en-US" sz="1460" dirty="0">
+                <a:solidFill>
+                  <a:srgbClr val="17364A"/>
+                </a:solidFill>
+                <a:latin typeface="Aptos" pitchFamily="34" charset="0"/>
+                <a:ea typeface="Aptos" pitchFamily="34" charset="-122"/>
+                <a:cs typeface="Aptos" pitchFamily="34" charset="-120"/>
+              </a:rPr>
+              <a:t>Tool 47: Equity &amp; Disparity Impact Monitoring (Dashboard) - Use this tool to complete or strengthen the practical exercise for the.</a:t>
+            </a:r>
+            <a:endParaRPr lang="en-US" sz="1460" dirty="0"/>
+          </a:p>
+          <a:p>
+            <a:r>
+              <a:rPr lang="en-US" sz="1460" dirty="0">
+                <a:solidFill>
+                  <a:srgbClr val="17364A"/>
+                </a:solidFill>
+                <a:latin typeface="Aptos" pitchFamily="34" charset="0"/>
+                <a:ea typeface="Aptos" pitchFamily="34" charset="-122"/>
+                <a:cs typeface="Aptos" pitchFamily="34" charset="-120"/>
+              </a:rPr>
+              <a:t>Tool 4: AI Policy Landscape Scan (Worksheet) - Use AI Policy Landscape Scan to translate this lesson into a documented public health.</a:t>
+            </a:r>
+            <a:endParaRPr lang="en-US" sz="1460" dirty="0"/>
+          </a:p>
+          <a:p>
+            <a:r>
+              <a:rPr lang="en-US" sz="1460" dirty="0">
+                <a:solidFill>
+                  <a:srgbClr val="17364A"/>
+                </a:solidFill>
+                <a:latin typeface="Aptos" pitchFamily="34" charset="0"/>
+                <a:ea typeface="Aptos" pitchFamily="34" charset="-122"/>
+                <a:cs typeface="Aptos" pitchFamily="34" charset="-120"/>
+              </a:rPr>
+              <a:t>Tool 5: AI Environmental and Resource Impact Review (Checklist) - Use AI Environmental and Resource Impact Review to translate this.</a:t>
+            </a:r>
+            <a:endParaRPr lang="en-US" sz="1460" dirty="0"/>
+          </a:p>
+          <a:p>
+            <a:r>
+              <a:rPr lang="en-US" sz="1460" dirty="0">
+                <a:solidFill>
+                  <a:srgbClr val="17364A"/>
+                </a:solidFill>
+                <a:latin typeface="Aptos" pitchFamily="34" charset="0"/>
+                <a:ea typeface="Aptos" pitchFamily="34" charset="-122"/>
+                <a:cs typeface="Aptos" pitchFamily="34" charset="-120"/>
+              </a:rPr>
+              <a:t>Tool 6: Human-Centered AI Decision Rule Checklist (Checklist) - Use Human-Centered AI Decision Rule Checklist to translate this.</a:t>
+            </a:r>
+            <a:endParaRPr lang="en-US" sz="1460" dirty="0"/>
+          </a:p>
+        </p:txBody>
+      </p:sp>
+      <p:sp>
+        <p:nvSpPr>
+          <p:cNvPr id="9" name="Shape 7"/>
+          <p:cNvSpPr/>
+          <p:nvPr/>
+        </p:nvSpPr>
+        <p:spPr>
+          <a:xfrm>
+            <a:off x="8046720" y="1417320"/>
+            <a:ext cx="3063240" cy="2103120"/>
+          </a:xfrm>
+          <a:prstGeom prst="roundRect">
+            <a:avLst>
+              <a:gd name="adj" fmla="val 5217"/>
+            </a:avLst>
+          </a:prstGeom>
+          <a:solidFill>
+            <a:srgbClr val="EAF6F8"/>
+          </a:solidFill>
+          <a:ln w="12700">
+            <a:solidFill>
+              <a:srgbClr val="B9D7E6"/>
+            </a:solidFill>
+            <a:prstDash val="solid"/>
+          </a:ln>
+        </p:spPr>
+      </p:sp>
+      <p:sp>
+        <p:nvSpPr>
+          <p:cNvPr id="10" name="Text 8"/>
+          <p:cNvSpPr/>
+          <p:nvPr/>
+        </p:nvSpPr>
+        <p:spPr>
+          <a:xfrm>
+            <a:off x="8211312" y="1563624"/>
+            <a:ext cx="2734056" cy="201168"/>
+          </a:xfrm>
+          <a:prstGeom prst="rect">
+            <a:avLst/>
+          </a:prstGeom>
+          <a:noFill/>
+          <a:ln/>
+        </p:spPr>
+        <p:txBody>
+          <a:bodyPr wrap="square" lIns="0" tIns="0" rIns="0" bIns="0" rtlCol="0" anchor="ctr"/>
+          <a:lstStyle/>
+          <a:p>
             <a:pPr indent="0" marL="0">
               <a:buNone/>
             </a:pPr>
             <a:r>
-              <a:rPr lang="en-US" sz="1420" dirty="0">
+              <a:rPr lang="en-US" sz="950" b="1" dirty="0">
+                <a:solidFill>
+                  <a:srgbClr val="0068B7"/>
+                </a:solidFill>
+                <a:latin typeface="Aptos" pitchFamily="34" charset="0"/>
+                <a:ea typeface="Aptos" pitchFamily="34" charset="-122"/>
+                <a:cs typeface="Aptos" pitchFamily="34" charset="-120"/>
+              </a:rPr>
+              <a:t>Use the tools</a:t>
+            </a:r>
+            <a:endParaRPr lang="en-US" sz="950" dirty="0"/>
+          </a:p>
+        </p:txBody>
+      </p:sp>
+      <p:sp>
+        <p:nvSpPr>
+          <p:cNvPr id="11" name="Text 9"/>
+          <p:cNvSpPr/>
+          <p:nvPr/>
+        </p:nvSpPr>
+        <p:spPr>
+          <a:xfrm>
+            <a:off x="8211312" y="1856232"/>
+            <a:ext cx="2734056" cy="1536192"/>
+          </a:xfrm>
+          <a:prstGeom prst="rect">
+            <a:avLst/>
+          </a:prstGeom>
+          <a:noFill/>
+          <a:ln/>
+        </p:spPr>
+        <p:txBody>
+          <a:bodyPr wrap="square" lIns="0" tIns="0" rIns="0" bIns="0" rtlCol="0" anchor="t">
+            <a:normAutofit/>
+          </a:bodyPr>
+          <a:lstStyle/>
+          <a:p>
+            <a:pPr indent="0" marL="0">
+              <a:buNone/>
+            </a:pPr>
+            <a:r>
+              <a:rPr lang="en-US" sz="1250" dirty="0">
                 <a:solidFill>
                   <a:srgbClr val="17364A"/>
                 </a:solidFill>
@@ -6267,9 +11275,116 @@
                 <a:ea typeface="Aptos" pitchFamily="34" charset="-122"/>
                 <a:cs typeface="Aptos" pitchFamily="34" charset="-120"/>
               </a:rPr>
-              <a:t>Public health AI governance should not be limited to internal agency review. When AI affects communities, services, surveillance, communication, prioritization, or resource allocation, agencies should consider how community perspectives will inform design, review, implementation, and monitoring. Participatory governance creates structured ways for affected people and community partners to shape AI use. This module helps leaders distinguish between informing the public, consulting communities, involving partners, and sharing oversight. It emphasizes that community oversight must be meaningful and appropriately supported. Agencies should not ask communities to approve technical systems without plain-language information, time, context, and a clear explanation of how input will influence decisions.</a:t>
-            </a:r>
-            <a:endParaRPr lang="en-US" sz="1420" dirty="0"/>
+              <a:t>Use linked tools when your department needs a structured worksheet, template, checklist, review process, or documentation artifact.</a:t>
+            </a:r>
+            <a:endParaRPr lang="en-US" sz="1250" dirty="0"/>
+          </a:p>
+        </p:txBody>
+      </p:sp>
+      <p:sp>
+        <p:nvSpPr>
+          <p:cNvPr id="12" name="Shape 10"/>
+          <p:cNvSpPr/>
+          <p:nvPr/>
+        </p:nvSpPr>
+        <p:spPr>
+          <a:xfrm>
+            <a:off x="8046720" y="3794760"/>
+            <a:ext cx="3063240" cy="1508760"/>
+          </a:xfrm>
+          <a:prstGeom prst="roundRect">
+            <a:avLst>
+              <a:gd name="adj" fmla="val 7273"/>
+            </a:avLst>
+          </a:prstGeom>
+          <a:solidFill>
+            <a:srgbClr val="EEF8ED"/>
+          </a:solidFill>
+          <a:ln w="12700">
+            <a:solidFill>
+              <a:srgbClr val="B9D7E6"/>
+            </a:solidFill>
+            <a:prstDash val="solid"/>
+          </a:ln>
+        </p:spPr>
+      </p:sp>
+      <p:sp>
+        <p:nvSpPr>
+          <p:cNvPr id="13" name="Text 11"/>
+          <p:cNvSpPr/>
+          <p:nvPr/>
+        </p:nvSpPr>
+        <p:spPr>
+          <a:xfrm>
+            <a:off x="8211312" y="3941064"/>
+            <a:ext cx="2734056" cy="201168"/>
+          </a:xfrm>
+          <a:prstGeom prst="rect">
+            <a:avLst/>
+          </a:prstGeom>
+          <a:noFill/>
+          <a:ln/>
+        </p:spPr>
+        <p:txBody>
+          <a:bodyPr wrap="square" lIns="0" tIns="0" rIns="0" bIns="0" rtlCol="0" anchor="ctr"/>
+          <a:lstStyle/>
+          <a:p>
+            <a:pPr indent="0" marL="0">
+              <a:buNone/>
+            </a:pPr>
+            <a:r>
+              <a:rPr lang="en-US" sz="950" b="1" dirty="0">
+                <a:solidFill>
+                  <a:srgbClr val="0068B7"/>
+                </a:solidFill>
+                <a:latin typeface="Aptos" pitchFamily="34" charset="0"/>
+                <a:ea typeface="Aptos" pitchFamily="34" charset="-122"/>
+                <a:cs typeface="Aptos" pitchFamily="34" charset="-120"/>
+              </a:rPr>
+              <a:t>Avoid duplication</a:t>
+            </a:r>
+            <a:endParaRPr lang="en-US" sz="950" dirty="0"/>
+          </a:p>
+        </p:txBody>
+      </p:sp>
+      <p:sp>
+        <p:nvSpPr>
+          <p:cNvPr id="14" name="Text 12"/>
+          <p:cNvSpPr/>
+          <p:nvPr/>
+        </p:nvSpPr>
+        <p:spPr>
+          <a:xfrm>
+            <a:off x="8211312" y="4233672"/>
+            <a:ext cx="2734056" cy="941832"/>
+          </a:xfrm>
+          <a:prstGeom prst="rect">
+            <a:avLst/>
+          </a:prstGeom>
+          <a:noFill/>
+          <a:ln/>
+        </p:spPr>
+        <p:txBody>
+          <a:bodyPr wrap="square" lIns="0" tIns="0" rIns="0" bIns="0" rtlCol="0" anchor="t">
+            <a:normAutofit/>
+          </a:bodyPr>
+          <a:lstStyle/>
+          <a:p>
+            <a:pPr indent="0" marL="0">
+              <a:buNone/>
+            </a:pPr>
+            <a:r>
+              <a:rPr lang="en-US" sz="1250" dirty="0">
+                <a:solidFill>
+                  <a:srgbClr val="17364A"/>
+                </a:solidFill>
+                <a:latin typeface="Aptos" pitchFamily="34" charset="0"/>
+                <a:ea typeface="Aptos" pitchFamily="34" charset="-122"/>
+                <a:cs typeface="Aptos" pitchFamily="34" charset="-120"/>
+              </a:rPr>
+              <a:t>If your department already has a strong equivalent tool, adapt or use the existing process instead of recreating it.</a:t>
+            </a:r>
+            <a:endParaRPr lang="en-US" sz="1250" dirty="0"/>
           </a:p>
         </p:txBody>
       </p:sp>
@@ -6332,7 +11447,32 @@
       </p:sp>
       <p:sp>
         <p:nvSpPr>
-          <p:cNvPr id="3" name="Text 1"/>
+          <p:cNvPr id="3" name="Shape 1"/>
+          <p:cNvSpPr/>
+          <p:nvPr/>
+        </p:nvSpPr>
+        <p:spPr>
+          <a:xfrm>
+            <a:off x="0" y="164592"/>
+            <a:ext cx="146304" cy="6693408"/>
+          </a:xfrm>
+          <a:prstGeom prst="rect">
+            <a:avLst/>
+          </a:prstGeom>
+          <a:solidFill>
+            <a:srgbClr val="2F8A28"/>
+          </a:solidFill>
+          <a:ln w="12700">
+            <a:solidFill>
+              <a:srgbClr val="2F8A28"/>
+            </a:solidFill>
+            <a:prstDash val="solid"/>
+          </a:ln>
+        </p:spPr>
+      </p:sp>
+      <p:sp>
+        <p:nvSpPr>
+          <p:cNvPr id="4" name="Text 2"/>
           <p:cNvSpPr/>
           <p:nvPr/>
         </p:nvSpPr>
@@ -6371,7 +11511,7 @@
       </p:sp>
       <p:sp>
         <p:nvSpPr>
-          <p:cNvPr id="4" name="Text 2"/>
+          <p:cNvPr id="5" name="Text 3"/>
           <p:cNvSpPr/>
           <p:nvPr/>
         </p:nvSpPr>
@@ -6410,7 +11550,7 @@
       </p:sp>
       <p:sp>
         <p:nvSpPr>
-          <p:cNvPr id="5" name="Text 3"/>
+          <p:cNvPr id="6" name="Text 4"/>
           <p:cNvSpPr/>
           <p:nvPr/>
         </p:nvSpPr>
@@ -6449,13 +11589,77 @@
       </p:sp>
       <p:sp>
         <p:nvSpPr>
-          <p:cNvPr id="6" name="Text 4"/>
+          <p:cNvPr id="7" name="Shape 5"/>
           <p:cNvSpPr/>
           <p:nvPr/>
         </p:nvSpPr>
         <p:spPr>
           <a:xfrm>
             <a:off x="640080" y="658368"/>
+            <a:ext cx="420624" cy="420624"/>
+          </a:xfrm>
+          <a:prstGeom prst="ellipse">
+            <a:avLst/>
+          </a:prstGeom>
+          <a:solidFill>
+            <a:srgbClr val="0068B7"/>
+          </a:solidFill>
+          <a:ln w="12700">
+            <a:solidFill>
+              <a:srgbClr val="0068B7"/>
+            </a:solidFill>
+            <a:prstDash val="solid"/>
+          </a:ln>
+        </p:spPr>
+      </p:sp>
+      <p:sp>
+        <p:nvSpPr>
+          <p:cNvPr id="8" name="Text 6"/>
+          <p:cNvSpPr/>
+          <p:nvPr/>
+        </p:nvSpPr>
+        <p:spPr>
+          <a:xfrm>
+            <a:off x="640080" y="731520"/>
+            <a:ext cx="420624" cy="164592"/>
+          </a:xfrm>
+          <a:prstGeom prst="rect">
+            <a:avLst/>
+          </a:prstGeom>
+          <a:noFill/>
+          <a:ln/>
+        </p:spPr>
+        <p:txBody>
+          <a:bodyPr wrap="square" lIns="0" tIns="0" rIns="0" bIns="0" rtlCol="0" anchor="ctr"/>
+          <a:lstStyle/>
+          <a:p>
+            <a:pPr algn="ctr" indent="0" marL="0">
+              <a:buNone/>
+            </a:pPr>
+            <a:r>
+              <a:rPr lang="en-US" sz="1100" b="1" dirty="0">
+                <a:solidFill>
+                  <a:srgbClr val="FFFFFF"/>
+                </a:solidFill>
+                <a:latin typeface="Aptos" pitchFamily="34" charset="0"/>
+                <a:ea typeface="Aptos" pitchFamily="34" charset="-122"/>
+                <a:cs typeface="Aptos" pitchFamily="34" charset="-120"/>
+              </a:rPr>
+              <a:t>1</a:t>
+            </a:r>
+            <a:endParaRPr lang="en-US" sz="1100" dirty="0"/>
+          </a:p>
+        </p:txBody>
+      </p:sp>
+      <p:sp>
+        <p:nvSpPr>
+          <p:cNvPr id="9" name="Text 7"/>
+          <p:cNvSpPr/>
+          <p:nvPr/>
+        </p:nvSpPr>
+        <p:spPr>
+          <a:xfrm>
+            <a:off x="640080" y="621792"/>
             <a:ext cx="10881360" cy="566928"/>
           </a:xfrm>
           <a:prstGeom prst="rect">
@@ -6482,7 +11686,7 @@
                 <a:ea typeface="Aptos Display" pitchFamily="34" charset="-122"/>
                 <a:cs typeface="Aptos Display" pitchFamily="34" charset="-120"/>
               </a:rPr>
-              <a:t>Jurisdiction and Agency Policy Note</a:t>
+              <a:t>Learning Objectives</a:t>
             </a:r>
             <a:endParaRPr lang="en-US" sz="2700" dirty="0"/>
           </a:p>
@@ -6490,32 +11694,178 @@
       </p:sp>
       <p:sp>
         <p:nvSpPr>
-          <p:cNvPr id="7" name="Text 5"/>
-          <p:cNvSpPr/>
-          <p:nvPr/>
-        </p:nvSpPr>
-        <p:spPr>
-          <a:xfrm>
-            <a:off x="822960" y="1325880"/>
-            <a:ext cx="10378440" cy="4800600"/>
-          </a:xfrm>
-          <a:prstGeom prst="rect">
-            <a:avLst/>
-          </a:prstGeom>
-          <a:noFill/>
-          <a:ln/>
-        </p:spPr>
-        <p:txBody>
-          <a:bodyPr wrap="square" lIns="1016" tIns="1016" rIns="1016" bIns="1016" rtlCol="0" anchor="t">
+          <p:cNvPr id="10" name="Text 8"/>
+          <p:cNvSpPr/>
+          <p:nvPr/>
+        </p:nvSpPr>
+        <p:spPr>
+          <a:xfrm>
+            <a:off x="868680" y="1417320"/>
+            <a:ext cx="6675120" cy="4434840"/>
+          </a:xfrm>
+          <a:prstGeom prst="rect">
+            <a:avLst/>
+          </a:prstGeom>
+          <a:noFill/>
+          <a:ln/>
+        </p:spPr>
+        <p:txBody>
+          <a:bodyPr wrap="square" lIns="635" tIns="635" rIns="635" bIns="635" rtlCol="0" anchor="t">
             <a:normAutofit/>
           </a:bodyPr>
           <a:lstStyle/>
           <a:p>
+            <a:r>
+              <a:rPr lang="en-US" sz="1700" dirty="0">
+                <a:solidFill>
+                  <a:srgbClr val="17364A"/>
+                </a:solidFill>
+                <a:latin typeface="Aptos" pitchFamily="34" charset="0"/>
+                <a:ea typeface="Aptos" pitchFamily="34" charset="-122"/>
+                <a:cs typeface="Aptos" pitchFamily="34" charset="-120"/>
+              </a:rPr>
+              <a:t>Explain why community oversight matters for public health AI.</a:t>
+            </a:r>
+            <a:endParaRPr lang="en-US" sz="1700" dirty="0"/>
+          </a:p>
+          <a:p>
+            <a:r>
+              <a:rPr lang="en-US" sz="1700" dirty="0">
+                <a:solidFill>
+                  <a:srgbClr val="17364A"/>
+                </a:solidFill>
+                <a:latin typeface="Aptos" pitchFamily="34" charset="0"/>
+                <a:ea typeface="Aptos" pitchFamily="34" charset="-122"/>
+                <a:cs typeface="Aptos" pitchFamily="34" charset="-120"/>
+              </a:rPr>
+              <a:t>Identify AI use cases that warrant community engagement or participatory governance.</a:t>
+            </a:r>
+            <a:endParaRPr lang="en-US" sz="1700" dirty="0"/>
+          </a:p>
+          <a:p>
+            <a:r>
+              <a:rPr lang="en-US" sz="1700" dirty="0">
+                <a:solidFill>
+                  <a:srgbClr val="17364A"/>
+                </a:solidFill>
+                <a:latin typeface="Aptos" pitchFamily="34" charset="0"/>
+                <a:ea typeface="Aptos" pitchFamily="34" charset="-122"/>
+                <a:cs typeface="Aptos" pitchFamily="34" charset="-120"/>
+              </a:rPr>
+              <a:t>Design a community engagement approach matched to risk, impact, and community context.</a:t>
+            </a:r>
+            <a:endParaRPr lang="en-US" sz="1700" dirty="0"/>
+          </a:p>
+          <a:p>
+            <a:r>
+              <a:rPr lang="en-US" sz="1700" dirty="0">
+                <a:solidFill>
+                  <a:srgbClr val="17364A"/>
+                </a:solidFill>
+                <a:latin typeface="Aptos" pitchFamily="34" charset="0"/>
+                <a:ea typeface="Aptos" pitchFamily="34" charset="-122"/>
+                <a:cs typeface="Aptos" pitchFamily="34" charset="-120"/>
+              </a:rPr>
+              <a:t>Recognize risks of tokenism, extractive engagement, and inaccessible technical language.</a:t>
+            </a:r>
+            <a:endParaRPr lang="en-US" sz="1700" dirty="0"/>
+          </a:p>
+        </p:txBody>
+      </p:sp>
+      <p:sp>
+        <p:nvSpPr>
+          <p:cNvPr id="11" name="Shape 9"/>
+          <p:cNvSpPr/>
+          <p:nvPr/>
+        </p:nvSpPr>
+        <p:spPr>
+          <a:xfrm>
+            <a:off x="7909560" y="1417320"/>
+            <a:ext cx="3154680" cy="1828800"/>
+          </a:xfrm>
+          <a:prstGeom prst="roundRect">
+            <a:avLst>
+              <a:gd name="adj" fmla="val 6000"/>
+            </a:avLst>
+          </a:prstGeom>
+          <a:solidFill>
+            <a:srgbClr val="EEF8ED"/>
+          </a:solidFill>
+          <a:ln w="12700">
+            <a:solidFill>
+              <a:srgbClr val="B9D7E6"/>
+            </a:solidFill>
+            <a:prstDash val="solid"/>
+          </a:ln>
+        </p:spPr>
+      </p:sp>
+      <p:sp>
+        <p:nvSpPr>
+          <p:cNvPr id="12" name="Text 10"/>
+          <p:cNvSpPr/>
+          <p:nvPr/>
+        </p:nvSpPr>
+        <p:spPr>
+          <a:xfrm>
+            <a:off x="8074152" y="1563624"/>
+            <a:ext cx="2825496" cy="201168"/>
+          </a:xfrm>
+          <a:prstGeom prst="rect">
+            <a:avLst/>
+          </a:prstGeom>
+          <a:noFill/>
+          <a:ln/>
+        </p:spPr>
+        <p:txBody>
+          <a:bodyPr wrap="square" lIns="0" tIns="0" rIns="0" bIns="0" rtlCol="0" anchor="ctr"/>
+          <a:lstStyle/>
+          <a:p>
             <a:pPr indent="0" marL="0">
               <a:buNone/>
             </a:pPr>
             <a:r>
-              <a:rPr lang="en-US" sz="1420" dirty="0">
+              <a:rPr lang="en-US" sz="950" b="1" dirty="0">
+                <a:solidFill>
+                  <a:srgbClr val="0068B7"/>
+                </a:solidFill>
+                <a:latin typeface="Aptos" pitchFamily="34" charset="0"/>
+                <a:ea typeface="Aptos" pitchFamily="34" charset="-122"/>
+                <a:cs typeface="Aptos" pitchFamily="34" charset="-120"/>
+              </a:rPr>
+              <a:t>Key idea</a:t>
+            </a:r>
+            <a:endParaRPr lang="en-US" sz="950" dirty="0"/>
+          </a:p>
+        </p:txBody>
+      </p:sp>
+      <p:sp>
+        <p:nvSpPr>
+          <p:cNvPr id="13" name="Text 11"/>
+          <p:cNvSpPr/>
+          <p:nvPr/>
+        </p:nvSpPr>
+        <p:spPr>
+          <a:xfrm>
+            <a:off x="8074152" y="1856232"/>
+            <a:ext cx="2825496" cy="1261872"/>
+          </a:xfrm>
+          <a:prstGeom prst="rect">
+            <a:avLst/>
+          </a:prstGeom>
+          <a:noFill/>
+          <a:ln/>
+        </p:spPr>
+        <p:txBody>
+          <a:bodyPr wrap="square" lIns="0" tIns="0" rIns="0" bIns="0" rtlCol="0" anchor="t">
+            <a:normAutofit/>
+          </a:bodyPr>
+          <a:lstStyle/>
+          <a:p>
+            <a:pPr indent="0" marL="0">
+              <a:buNone/>
+            </a:pPr>
+            <a:r>
+              <a:rPr lang="en-US" sz="1250" dirty="0">
                 <a:solidFill>
                   <a:srgbClr val="17364A"/>
                 </a:solidFill>
@@ -6523,9 +11873,116 @@
                 <a:ea typeface="Aptos" pitchFamily="34" charset="-122"/>
                 <a:cs typeface="Aptos" pitchFamily="34" charset="-120"/>
               </a:rPr>
-              <a:t>This module provides national-level training guidance for public health agencies and partners. It is not legal advice and does not replace review by agency legal counsel, privacy officers, procurement officials, civil rights staff, records officers, or other authorized decision-makers. Requirements may vary by state, locality, territory, Tribe, agency, funding source, data-sharing agreement, emergency authority, and organizational policy. Learners should use this module to identify the issues that require review and should confirm applicable requirements before approving, procuring, deploying, or publicly communicating about AI-supported work.</a:t>
-            </a:r>
-            <a:endParaRPr lang="en-US" sz="1420" dirty="0"/>
+              <a:t>Explain why community oversight matters for public health AI.</a:t>
+            </a:r>
+            <a:endParaRPr lang="en-US" sz="1250" dirty="0"/>
+          </a:p>
+        </p:txBody>
+      </p:sp>
+      <p:sp>
+        <p:nvSpPr>
+          <p:cNvPr id="14" name="Shape 12"/>
+          <p:cNvSpPr/>
+          <p:nvPr/>
+        </p:nvSpPr>
+        <p:spPr>
+          <a:xfrm>
+            <a:off x="7909560" y="3520440"/>
+            <a:ext cx="3154680" cy="1737360"/>
+          </a:xfrm>
+          <a:prstGeom prst="roundRect">
+            <a:avLst>
+              <a:gd name="adj" fmla="val 6316"/>
+            </a:avLst>
+          </a:prstGeom>
+          <a:solidFill>
+            <a:srgbClr val="EAF6F8"/>
+          </a:solidFill>
+          <a:ln w="12700">
+            <a:solidFill>
+              <a:srgbClr val="B9D7E6"/>
+            </a:solidFill>
+            <a:prstDash val="solid"/>
+          </a:ln>
+        </p:spPr>
+      </p:sp>
+      <p:sp>
+        <p:nvSpPr>
+          <p:cNvPr id="15" name="Text 13"/>
+          <p:cNvSpPr/>
+          <p:nvPr/>
+        </p:nvSpPr>
+        <p:spPr>
+          <a:xfrm>
+            <a:off x="8074152" y="3666744"/>
+            <a:ext cx="2825496" cy="201168"/>
+          </a:xfrm>
+          <a:prstGeom prst="rect">
+            <a:avLst/>
+          </a:prstGeom>
+          <a:noFill/>
+          <a:ln/>
+        </p:spPr>
+        <p:txBody>
+          <a:bodyPr wrap="square" lIns="0" tIns="0" rIns="0" bIns="0" rtlCol="0" anchor="ctr"/>
+          <a:lstStyle/>
+          <a:p>
+            <a:pPr indent="0" marL="0">
+              <a:buNone/>
+            </a:pPr>
+            <a:r>
+              <a:rPr lang="en-US" sz="950" b="1" dirty="0">
+                <a:solidFill>
+                  <a:srgbClr val="0068B7"/>
+                </a:solidFill>
+                <a:latin typeface="Aptos" pitchFamily="34" charset="0"/>
+                <a:ea typeface="Aptos" pitchFamily="34" charset="-122"/>
+                <a:cs typeface="Aptos" pitchFamily="34" charset="-120"/>
+              </a:rPr>
+              <a:t>Use this for</a:t>
+            </a:r>
+            <a:endParaRPr lang="en-US" sz="950" dirty="0"/>
+          </a:p>
+        </p:txBody>
+      </p:sp>
+      <p:sp>
+        <p:nvSpPr>
+          <p:cNvPr id="16" name="Text 14"/>
+          <p:cNvSpPr/>
+          <p:nvPr/>
+        </p:nvSpPr>
+        <p:spPr>
+          <a:xfrm>
+            <a:off x="8074152" y="3959352"/>
+            <a:ext cx="2825496" cy="1170432"/>
+          </a:xfrm>
+          <a:prstGeom prst="rect">
+            <a:avLst/>
+          </a:prstGeom>
+          <a:noFill/>
+          <a:ln/>
+        </p:spPr>
+        <p:txBody>
+          <a:bodyPr wrap="square" lIns="0" tIns="0" rIns="0" bIns="0" rtlCol="0" anchor="t">
+            <a:normAutofit/>
+          </a:bodyPr>
+          <a:lstStyle/>
+          <a:p>
+            <a:pPr indent="0" marL="0">
+              <a:buNone/>
+            </a:pPr>
+            <a:r>
+              <a:rPr lang="en-US" sz="1250" dirty="0">
+                <a:solidFill>
+                  <a:srgbClr val="17364A"/>
+                </a:solidFill>
+                <a:latin typeface="Aptos" pitchFamily="34" charset="0"/>
+                <a:ea typeface="Aptos" pitchFamily="34" charset="-122"/>
+                <a:cs typeface="Aptos" pitchFamily="34" charset="-120"/>
+              </a:rPr>
+              <a:t>Connect the concept to public health decisions, safeguards, documentation, or implementation work.</a:t>
+            </a:r>
+            <a:endParaRPr lang="en-US" sz="1250" dirty="0"/>
           </a:p>
         </p:txBody>
       </p:sp>
@@ -6588,7 +12045,32 @@
       </p:sp>
       <p:sp>
         <p:nvSpPr>
-          <p:cNvPr id="3" name="Text 1"/>
+          <p:cNvPr id="3" name="Shape 1"/>
+          <p:cNvSpPr/>
+          <p:nvPr/>
+        </p:nvSpPr>
+        <p:spPr>
+          <a:xfrm>
+            <a:off x="0" y="164592"/>
+            <a:ext cx="146304" cy="6693408"/>
+          </a:xfrm>
+          <a:prstGeom prst="rect">
+            <a:avLst/>
+          </a:prstGeom>
+          <a:solidFill>
+            <a:srgbClr val="2F8A28"/>
+          </a:solidFill>
+          <a:ln w="12700">
+            <a:solidFill>
+              <a:srgbClr val="2F8A28"/>
+            </a:solidFill>
+            <a:prstDash val="solid"/>
+          </a:ln>
+        </p:spPr>
+      </p:sp>
+      <p:sp>
+        <p:nvSpPr>
+          <p:cNvPr id="4" name="Text 2"/>
           <p:cNvSpPr/>
           <p:nvPr/>
         </p:nvSpPr>
@@ -6627,7 +12109,7 @@
       </p:sp>
       <p:sp>
         <p:nvSpPr>
-          <p:cNvPr id="4" name="Text 2"/>
+          <p:cNvPr id="5" name="Text 3"/>
           <p:cNvSpPr/>
           <p:nvPr/>
         </p:nvSpPr>
@@ -6666,7 +12148,7 @@
       </p:sp>
       <p:sp>
         <p:nvSpPr>
-          <p:cNvPr id="5" name="Text 3"/>
+          <p:cNvPr id="6" name="Text 4"/>
           <p:cNvSpPr/>
           <p:nvPr/>
         </p:nvSpPr>
@@ -6705,13 +12187,77 @@
       </p:sp>
       <p:sp>
         <p:nvSpPr>
-          <p:cNvPr id="6" name="Text 4"/>
+          <p:cNvPr id="7" name="Shape 5"/>
           <p:cNvSpPr/>
           <p:nvPr/>
         </p:nvSpPr>
         <p:spPr>
           <a:xfrm>
             <a:off x="640080" y="658368"/>
+            <a:ext cx="420624" cy="420624"/>
+          </a:xfrm>
+          <a:prstGeom prst="ellipse">
+            <a:avLst/>
+          </a:prstGeom>
+          <a:solidFill>
+            <a:srgbClr val="0068B7"/>
+          </a:solidFill>
+          <a:ln w="12700">
+            <a:solidFill>
+              <a:srgbClr val="0068B7"/>
+            </a:solidFill>
+            <a:prstDash val="solid"/>
+          </a:ln>
+        </p:spPr>
+      </p:sp>
+      <p:sp>
+        <p:nvSpPr>
+          <p:cNvPr id="8" name="Text 6"/>
+          <p:cNvSpPr/>
+          <p:nvPr/>
+        </p:nvSpPr>
+        <p:spPr>
+          <a:xfrm>
+            <a:off x="640080" y="731520"/>
+            <a:ext cx="420624" cy="164592"/>
+          </a:xfrm>
+          <a:prstGeom prst="rect">
+            <a:avLst/>
+          </a:prstGeom>
+          <a:noFill/>
+          <a:ln/>
+        </p:spPr>
+        <p:txBody>
+          <a:bodyPr wrap="square" lIns="0" tIns="0" rIns="0" bIns="0" rtlCol="0" anchor="ctr"/>
+          <a:lstStyle/>
+          <a:p>
+            <a:pPr algn="ctr" indent="0" marL="0">
+              <a:buNone/>
+            </a:pPr>
+            <a:r>
+              <a:rPr lang="en-US" sz="1100" b="1" dirty="0">
+                <a:solidFill>
+                  <a:srgbClr val="FFFFFF"/>
+                </a:solidFill>
+                <a:latin typeface="Aptos" pitchFamily="34" charset="0"/>
+                <a:ea typeface="Aptos" pitchFamily="34" charset="-122"/>
+                <a:cs typeface="Aptos" pitchFamily="34" charset="-120"/>
+              </a:rPr>
+              <a:t>2</a:t>
+            </a:r>
+            <a:endParaRPr lang="en-US" sz="1100" dirty="0"/>
+          </a:p>
+        </p:txBody>
+      </p:sp>
+      <p:sp>
+        <p:nvSpPr>
+          <p:cNvPr id="9" name="Text 7"/>
+          <p:cNvSpPr/>
+          <p:nvPr/>
+        </p:nvSpPr>
+        <p:spPr>
+          <a:xfrm>
+            <a:off x="640080" y="621792"/>
             <a:ext cx="10881360" cy="566928"/>
           </a:xfrm>
           <a:prstGeom prst="rect">
@@ -6738,7 +12284,7 @@
                 <a:ea typeface="Aptos Display" pitchFamily="34" charset="-122"/>
                 <a:cs typeface="Aptos Display" pitchFamily="34" charset="-120"/>
               </a:rPr>
-              <a:t>Why This Topic Matters for Public Health AI</a:t>
+              <a:t>Module Overview</a:t>
             </a:r>
             <a:endParaRPr lang="en-US" sz="2700" dirty="0"/>
           </a:p>
@@ -6746,32 +12292,178 @@
       </p:sp>
       <p:sp>
         <p:nvSpPr>
-          <p:cNvPr id="7" name="Text 5"/>
-          <p:cNvSpPr/>
-          <p:nvPr/>
-        </p:nvSpPr>
-        <p:spPr>
-          <a:xfrm>
-            <a:off x="822960" y="1325880"/>
-            <a:ext cx="10378440" cy="4800600"/>
-          </a:xfrm>
-          <a:prstGeom prst="rect">
-            <a:avLst/>
-          </a:prstGeom>
-          <a:noFill/>
-          <a:ln/>
-        </p:spPr>
-        <p:txBody>
-          <a:bodyPr wrap="square" lIns="1016" tIns="1016" rIns="1016" bIns="1016" rtlCol="0" anchor="t">
+          <p:cNvPr id="10" name="Text 8"/>
+          <p:cNvSpPr/>
+          <p:nvPr/>
+        </p:nvSpPr>
+        <p:spPr>
+          <a:xfrm>
+            <a:off x="868680" y="1417320"/>
+            <a:ext cx="6675120" cy="4434840"/>
+          </a:xfrm>
+          <a:prstGeom prst="rect">
+            <a:avLst/>
+          </a:prstGeom>
+          <a:noFill/>
+          <a:ln/>
+        </p:spPr>
+        <p:txBody>
+          <a:bodyPr wrap="square" lIns="635" tIns="635" rIns="635" bIns="635" rtlCol="0" anchor="t">
             <a:normAutofit/>
           </a:bodyPr>
           <a:lstStyle/>
           <a:p>
+            <a:r>
+              <a:rPr lang="en-US" sz="1700" dirty="0">
+                <a:solidFill>
+                  <a:srgbClr val="17364A"/>
+                </a:solidFill>
+                <a:latin typeface="Aptos" pitchFamily="34" charset="0"/>
+                <a:ea typeface="Aptos" pitchFamily="34" charset="-122"/>
+                <a:cs typeface="Aptos" pitchFamily="34" charset="-120"/>
+              </a:rPr>
+              <a:t>Public health AI governance should not be limited to internal agency review.</a:t>
+            </a:r>
+            <a:endParaRPr lang="en-US" sz="1700" dirty="0"/>
+          </a:p>
+          <a:p>
+            <a:r>
+              <a:rPr lang="en-US" sz="1700" dirty="0">
+                <a:solidFill>
+                  <a:srgbClr val="17364A"/>
+                </a:solidFill>
+                <a:latin typeface="Aptos" pitchFamily="34" charset="0"/>
+                <a:ea typeface="Aptos" pitchFamily="34" charset="-122"/>
+                <a:cs typeface="Aptos" pitchFamily="34" charset="-120"/>
+              </a:rPr>
+              <a:t>When AI affects communities, services, surveillance, communication, prioritization, or resource allocation, agencies should.</a:t>
+            </a:r>
+            <a:endParaRPr lang="en-US" sz="1700" dirty="0"/>
+          </a:p>
+          <a:p>
+            <a:r>
+              <a:rPr lang="en-US" sz="1700" dirty="0">
+                <a:solidFill>
+                  <a:srgbClr val="17364A"/>
+                </a:solidFill>
+                <a:latin typeface="Aptos" pitchFamily="34" charset="0"/>
+                <a:ea typeface="Aptos" pitchFamily="34" charset="-122"/>
+                <a:cs typeface="Aptos" pitchFamily="34" charset="-120"/>
+              </a:rPr>
+              <a:t>Participatory governance creates structured ways for affected people and community partners to shape AI use.</a:t>
+            </a:r>
+            <a:endParaRPr lang="en-US" sz="1700" dirty="0"/>
+          </a:p>
+          <a:p>
+            <a:r>
+              <a:rPr lang="en-US" sz="1700" dirty="0">
+                <a:solidFill>
+                  <a:srgbClr val="17364A"/>
+                </a:solidFill>
+                <a:latin typeface="Aptos" pitchFamily="34" charset="0"/>
+                <a:ea typeface="Aptos" pitchFamily="34" charset="-122"/>
+                <a:cs typeface="Aptos" pitchFamily="34" charset="-120"/>
+              </a:rPr>
+              <a:t>This module helps leaders distinguish between informing the public, consulting communities, involving partners, and sharing.</a:t>
+            </a:r>
+            <a:endParaRPr lang="en-US" sz="1700" dirty="0"/>
+          </a:p>
+        </p:txBody>
+      </p:sp>
+      <p:sp>
+        <p:nvSpPr>
+          <p:cNvPr id="11" name="Shape 9"/>
+          <p:cNvSpPr/>
+          <p:nvPr/>
+        </p:nvSpPr>
+        <p:spPr>
+          <a:xfrm>
+            <a:off x="7909560" y="1417320"/>
+            <a:ext cx="3154680" cy="1828800"/>
+          </a:xfrm>
+          <a:prstGeom prst="roundRect">
+            <a:avLst>
+              <a:gd name="adj" fmla="val 6000"/>
+            </a:avLst>
+          </a:prstGeom>
+          <a:solidFill>
+            <a:srgbClr val="EEF8ED"/>
+          </a:solidFill>
+          <a:ln w="12700">
+            <a:solidFill>
+              <a:srgbClr val="B9D7E6"/>
+            </a:solidFill>
+            <a:prstDash val="solid"/>
+          </a:ln>
+        </p:spPr>
+      </p:sp>
+      <p:sp>
+        <p:nvSpPr>
+          <p:cNvPr id="12" name="Text 10"/>
+          <p:cNvSpPr/>
+          <p:nvPr/>
+        </p:nvSpPr>
+        <p:spPr>
+          <a:xfrm>
+            <a:off x="8074152" y="1563624"/>
+            <a:ext cx="2825496" cy="201168"/>
+          </a:xfrm>
+          <a:prstGeom prst="rect">
+            <a:avLst/>
+          </a:prstGeom>
+          <a:noFill/>
+          <a:ln/>
+        </p:spPr>
+        <p:txBody>
+          <a:bodyPr wrap="square" lIns="0" tIns="0" rIns="0" bIns="0" rtlCol="0" anchor="ctr"/>
+          <a:lstStyle/>
+          <a:p>
             <a:pPr indent="0" marL="0">
               <a:buNone/>
             </a:pPr>
             <a:r>
-              <a:rPr lang="en-US" sz="1420" dirty="0">
+              <a:rPr lang="en-US" sz="950" b="1" dirty="0">
+                <a:solidFill>
+                  <a:srgbClr val="0068B7"/>
+                </a:solidFill>
+                <a:latin typeface="Aptos" pitchFamily="34" charset="0"/>
+                <a:ea typeface="Aptos" pitchFamily="34" charset="-122"/>
+                <a:cs typeface="Aptos" pitchFamily="34" charset="-120"/>
+              </a:rPr>
+              <a:t>Key idea</a:t>
+            </a:r>
+            <a:endParaRPr lang="en-US" sz="950" dirty="0"/>
+          </a:p>
+        </p:txBody>
+      </p:sp>
+      <p:sp>
+        <p:nvSpPr>
+          <p:cNvPr id="13" name="Text 11"/>
+          <p:cNvSpPr/>
+          <p:nvPr/>
+        </p:nvSpPr>
+        <p:spPr>
+          <a:xfrm>
+            <a:off x="8074152" y="1856232"/>
+            <a:ext cx="2825496" cy="1261872"/>
+          </a:xfrm>
+          <a:prstGeom prst="rect">
+            <a:avLst/>
+          </a:prstGeom>
+          <a:noFill/>
+          <a:ln/>
+        </p:spPr>
+        <p:txBody>
+          <a:bodyPr wrap="square" lIns="0" tIns="0" rIns="0" bIns="0" rtlCol="0" anchor="t">
+            <a:normAutofit/>
+          </a:bodyPr>
+          <a:lstStyle/>
+          <a:p>
+            <a:pPr indent="0" marL="0">
+              <a:buNone/>
+            </a:pPr>
+            <a:r>
+              <a:rPr lang="en-US" sz="1250" dirty="0">
                 <a:solidFill>
                   <a:srgbClr val="17364A"/>
                 </a:solidFill>
@@ -6779,9 +12471,116 @@
                 <a:ea typeface="Aptos" pitchFamily="34" charset="-122"/>
                 <a:cs typeface="Aptos" pitchFamily="34" charset="-120"/>
               </a:rPr>
-              <a:t>Public health agencies make decisions that affect communities, often using data collected through clinical care, surveillance, service systems, public programs, and emergency response. AI can intensify concerns about surveillance, bias, exclusion, language access, disability access, and government trust. Community oversight helps agencies identify concerns that may not be visible through technical review alone. Participatory governance can also improve AI quality and usefulness. Community partners may identify missing context, harmful assumptions, access barriers, communication needs, and unintended consequences. Their input can help agencies design safer workflows, clearer notices, better escalation pathways, and more meaningful impact measures.</a:t>
-            </a:r>
-            <a:endParaRPr lang="en-US" sz="1420" dirty="0"/>
+              <a:t>Public health AI governance should not be limited to internal agency review.</a:t>
+            </a:r>
+            <a:endParaRPr lang="en-US" sz="1250" dirty="0"/>
+          </a:p>
+        </p:txBody>
+      </p:sp>
+      <p:sp>
+        <p:nvSpPr>
+          <p:cNvPr id="14" name="Shape 12"/>
+          <p:cNvSpPr/>
+          <p:nvPr/>
+        </p:nvSpPr>
+        <p:spPr>
+          <a:xfrm>
+            <a:off x="7909560" y="3520440"/>
+            <a:ext cx="3154680" cy="1737360"/>
+          </a:xfrm>
+          <a:prstGeom prst="roundRect">
+            <a:avLst>
+              <a:gd name="adj" fmla="val 6316"/>
+            </a:avLst>
+          </a:prstGeom>
+          <a:solidFill>
+            <a:srgbClr val="EAF6F8"/>
+          </a:solidFill>
+          <a:ln w="12700">
+            <a:solidFill>
+              <a:srgbClr val="B9D7E6"/>
+            </a:solidFill>
+            <a:prstDash val="solid"/>
+          </a:ln>
+        </p:spPr>
+      </p:sp>
+      <p:sp>
+        <p:nvSpPr>
+          <p:cNvPr id="15" name="Text 13"/>
+          <p:cNvSpPr/>
+          <p:nvPr/>
+        </p:nvSpPr>
+        <p:spPr>
+          <a:xfrm>
+            <a:off x="8074152" y="3666744"/>
+            <a:ext cx="2825496" cy="201168"/>
+          </a:xfrm>
+          <a:prstGeom prst="rect">
+            <a:avLst/>
+          </a:prstGeom>
+          <a:noFill/>
+          <a:ln/>
+        </p:spPr>
+        <p:txBody>
+          <a:bodyPr wrap="square" lIns="0" tIns="0" rIns="0" bIns="0" rtlCol="0" anchor="ctr"/>
+          <a:lstStyle/>
+          <a:p>
+            <a:pPr indent="0" marL="0">
+              <a:buNone/>
+            </a:pPr>
+            <a:r>
+              <a:rPr lang="en-US" sz="950" b="1" dirty="0">
+                <a:solidFill>
+                  <a:srgbClr val="0068B7"/>
+                </a:solidFill>
+                <a:latin typeface="Aptos" pitchFamily="34" charset="0"/>
+                <a:ea typeface="Aptos" pitchFamily="34" charset="-122"/>
+                <a:cs typeface="Aptos" pitchFamily="34" charset="-120"/>
+              </a:rPr>
+              <a:t>Use this for</a:t>
+            </a:r>
+            <a:endParaRPr lang="en-US" sz="950" dirty="0"/>
+          </a:p>
+        </p:txBody>
+      </p:sp>
+      <p:sp>
+        <p:nvSpPr>
+          <p:cNvPr id="16" name="Text 14"/>
+          <p:cNvSpPr/>
+          <p:nvPr/>
+        </p:nvSpPr>
+        <p:spPr>
+          <a:xfrm>
+            <a:off x="8074152" y="3959352"/>
+            <a:ext cx="2825496" cy="1170432"/>
+          </a:xfrm>
+          <a:prstGeom prst="rect">
+            <a:avLst/>
+          </a:prstGeom>
+          <a:noFill/>
+          <a:ln/>
+        </p:spPr>
+        <p:txBody>
+          <a:bodyPr wrap="square" lIns="0" tIns="0" rIns="0" bIns="0" rtlCol="0" anchor="t">
+            <a:normAutofit/>
+          </a:bodyPr>
+          <a:lstStyle/>
+          <a:p>
+            <a:pPr indent="0" marL="0">
+              <a:buNone/>
+            </a:pPr>
+            <a:r>
+              <a:rPr lang="en-US" sz="1250" dirty="0">
+                <a:solidFill>
+                  <a:srgbClr val="17364A"/>
+                </a:solidFill>
+                <a:latin typeface="Aptos" pitchFamily="34" charset="0"/>
+                <a:ea typeface="Aptos" pitchFamily="34" charset="-122"/>
+                <a:cs typeface="Aptos" pitchFamily="34" charset="-120"/>
+              </a:rPr>
+              <a:t>Connect the concept to public health decisions, safeguards, documentation, or implementation work.</a:t>
+            </a:r>
+            <a:endParaRPr lang="en-US" sz="1250" dirty="0"/>
           </a:p>
         </p:txBody>
       </p:sp>
@@ -6844,7 +12643,32 @@
       </p:sp>
       <p:sp>
         <p:nvSpPr>
-          <p:cNvPr id="3" name="Text 1"/>
+          <p:cNvPr id="3" name="Shape 1"/>
+          <p:cNvSpPr/>
+          <p:nvPr/>
+        </p:nvSpPr>
+        <p:spPr>
+          <a:xfrm>
+            <a:off x="0" y="164592"/>
+            <a:ext cx="146304" cy="6693408"/>
+          </a:xfrm>
+          <a:prstGeom prst="rect">
+            <a:avLst/>
+          </a:prstGeom>
+          <a:solidFill>
+            <a:srgbClr val="2F8A28"/>
+          </a:solidFill>
+          <a:ln w="12700">
+            <a:solidFill>
+              <a:srgbClr val="2F8A28"/>
+            </a:solidFill>
+            <a:prstDash val="solid"/>
+          </a:ln>
+        </p:spPr>
+      </p:sp>
+      <p:sp>
+        <p:nvSpPr>
+          <p:cNvPr id="4" name="Text 2"/>
           <p:cNvSpPr/>
           <p:nvPr/>
         </p:nvSpPr>
@@ -6883,7 +12707,7 @@
       </p:sp>
       <p:sp>
         <p:nvSpPr>
-          <p:cNvPr id="4" name="Text 2"/>
+          <p:cNvPr id="5" name="Text 3"/>
           <p:cNvSpPr/>
           <p:nvPr/>
         </p:nvSpPr>
@@ -6922,7 +12746,7 @@
       </p:sp>
       <p:sp>
         <p:nvSpPr>
-          <p:cNvPr id="5" name="Text 3"/>
+          <p:cNvPr id="6" name="Text 4"/>
           <p:cNvSpPr/>
           <p:nvPr/>
         </p:nvSpPr>
@@ -6961,13 +12785,77 @@
       </p:sp>
       <p:sp>
         <p:nvSpPr>
-          <p:cNvPr id="6" name="Text 4"/>
+          <p:cNvPr id="7" name="Shape 5"/>
           <p:cNvSpPr/>
           <p:nvPr/>
         </p:nvSpPr>
         <p:spPr>
           <a:xfrm>
             <a:off x="640080" y="658368"/>
+            <a:ext cx="420624" cy="420624"/>
+          </a:xfrm>
+          <a:prstGeom prst="ellipse">
+            <a:avLst/>
+          </a:prstGeom>
+          <a:solidFill>
+            <a:srgbClr val="0068B7"/>
+          </a:solidFill>
+          <a:ln w="12700">
+            <a:solidFill>
+              <a:srgbClr val="0068B7"/>
+            </a:solidFill>
+            <a:prstDash val="solid"/>
+          </a:ln>
+        </p:spPr>
+      </p:sp>
+      <p:sp>
+        <p:nvSpPr>
+          <p:cNvPr id="8" name="Text 6"/>
+          <p:cNvSpPr/>
+          <p:nvPr/>
+        </p:nvSpPr>
+        <p:spPr>
+          <a:xfrm>
+            <a:off x="640080" y="731520"/>
+            <a:ext cx="420624" cy="164592"/>
+          </a:xfrm>
+          <a:prstGeom prst="rect">
+            <a:avLst/>
+          </a:prstGeom>
+          <a:noFill/>
+          <a:ln/>
+        </p:spPr>
+        <p:txBody>
+          <a:bodyPr wrap="square" lIns="0" tIns="0" rIns="0" bIns="0" rtlCol="0" anchor="ctr"/>
+          <a:lstStyle/>
+          <a:p>
+            <a:pPr algn="ctr" indent="0" marL="0">
+              <a:buNone/>
+            </a:pPr>
+            <a:r>
+              <a:rPr lang="en-US" sz="1100" b="1" dirty="0">
+                <a:solidFill>
+                  <a:srgbClr val="FFFFFF"/>
+                </a:solidFill>
+                <a:latin typeface="Aptos" pitchFamily="34" charset="0"/>
+                <a:ea typeface="Aptos" pitchFamily="34" charset="-122"/>
+                <a:cs typeface="Aptos" pitchFamily="34" charset="-120"/>
+              </a:rPr>
+              <a:t>3</a:t>
+            </a:r>
+            <a:endParaRPr lang="en-US" sz="1100" dirty="0"/>
+          </a:p>
+        </p:txBody>
+      </p:sp>
+      <p:sp>
+        <p:nvSpPr>
+          <p:cNvPr id="9" name="Text 7"/>
+          <p:cNvSpPr/>
+          <p:nvPr/>
+        </p:nvSpPr>
+        <p:spPr>
+          <a:xfrm>
+            <a:off x="640080" y="621792"/>
             <a:ext cx="10881360" cy="566928"/>
           </a:xfrm>
           <a:prstGeom prst="rect">
@@ -6994,7 +12882,7 @@
                 <a:ea typeface="Aptos Display" pitchFamily="34" charset="-122"/>
                 <a:cs typeface="Aptos Display" pitchFamily="34" charset="-120"/>
               </a:rPr>
-              <a:t>Public Health Example</a:t>
+              <a:t>Jurisdiction and Agency Policy Note</a:t>
             </a:r>
             <a:endParaRPr lang="en-US" sz="2700" dirty="0"/>
           </a:p>
@@ -7002,32 +12890,178 @@
       </p:sp>
       <p:sp>
         <p:nvSpPr>
-          <p:cNvPr id="7" name="Text 5"/>
-          <p:cNvSpPr/>
-          <p:nvPr/>
-        </p:nvSpPr>
-        <p:spPr>
-          <a:xfrm>
-            <a:off x="822960" y="1325880"/>
-            <a:ext cx="10378440" cy="4800600"/>
-          </a:xfrm>
-          <a:prstGeom prst="rect">
-            <a:avLst/>
-          </a:prstGeom>
-          <a:noFill/>
-          <a:ln/>
-        </p:spPr>
-        <p:txBody>
-          <a:bodyPr wrap="square" lIns="1016" tIns="1016" rIns="1016" bIns="1016" rtlCol="0" anchor="t">
+          <p:cNvPr id="10" name="Text 8"/>
+          <p:cNvSpPr/>
+          <p:nvPr/>
+        </p:nvSpPr>
+        <p:spPr>
+          <a:xfrm>
+            <a:off x="868680" y="1417320"/>
+            <a:ext cx="6675120" cy="4434840"/>
+          </a:xfrm>
+          <a:prstGeom prst="rect">
+            <a:avLst/>
+          </a:prstGeom>
+          <a:noFill/>
+          <a:ln/>
+        </p:spPr>
+        <p:txBody>
+          <a:bodyPr wrap="square" lIns="635" tIns="635" rIns="635" bIns="635" rtlCol="0" anchor="t">
             <a:normAutofit/>
           </a:bodyPr>
           <a:lstStyle/>
           <a:p>
+            <a:r>
+              <a:rPr lang="en-US" sz="1700" dirty="0">
+                <a:solidFill>
+                  <a:srgbClr val="17364A"/>
+                </a:solidFill>
+                <a:latin typeface="Aptos" pitchFamily="34" charset="0"/>
+                <a:ea typeface="Aptos" pitchFamily="34" charset="-122"/>
+                <a:cs typeface="Aptos" pitchFamily="34" charset="-120"/>
+              </a:rPr>
+              <a:t>This module provides national-level training guidance for public health agencies and partners.</a:t>
+            </a:r>
+            <a:endParaRPr lang="en-US" sz="1700" dirty="0"/>
+          </a:p>
+          <a:p>
+            <a:r>
+              <a:rPr lang="en-US" sz="1700" dirty="0">
+                <a:solidFill>
+                  <a:srgbClr val="17364A"/>
+                </a:solidFill>
+                <a:latin typeface="Aptos" pitchFamily="34" charset="0"/>
+                <a:ea typeface="Aptos" pitchFamily="34" charset="-122"/>
+                <a:cs typeface="Aptos" pitchFamily="34" charset="-120"/>
+              </a:rPr>
+              <a:t>It is not legal advice and does not replace review by agency legal counsel, privacy officers, procurement officials, civil.</a:t>
+            </a:r>
+            <a:endParaRPr lang="en-US" sz="1700" dirty="0"/>
+          </a:p>
+          <a:p>
+            <a:r>
+              <a:rPr lang="en-US" sz="1700" dirty="0">
+                <a:solidFill>
+                  <a:srgbClr val="17364A"/>
+                </a:solidFill>
+                <a:latin typeface="Aptos" pitchFamily="34" charset="0"/>
+                <a:ea typeface="Aptos" pitchFamily="34" charset="-122"/>
+                <a:cs typeface="Aptos" pitchFamily="34" charset="-120"/>
+              </a:rPr>
+              <a:t>Requirements may vary by state, locality, territory, Tribe, agency, funding source, data-sharing agreement, emergency.</a:t>
+            </a:r>
+            <a:endParaRPr lang="en-US" sz="1700" dirty="0"/>
+          </a:p>
+          <a:p>
+            <a:r>
+              <a:rPr lang="en-US" sz="1700" dirty="0">
+                <a:solidFill>
+                  <a:srgbClr val="17364A"/>
+                </a:solidFill>
+                <a:latin typeface="Aptos" pitchFamily="34" charset="0"/>
+                <a:ea typeface="Aptos" pitchFamily="34" charset="-122"/>
+                <a:cs typeface="Aptos" pitchFamily="34" charset="-120"/>
+              </a:rPr>
+              <a:t>Learners should use this module to identify the issues that require review and should confirm applicable requirements.</a:t>
+            </a:r>
+            <a:endParaRPr lang="en-US" sz="1700" dirty="0"/>
+          </a:p>
+        </p:txBody>
+      </p:sp>
+      <p:sp>
+        <p:nvSpPr>
+          <p:cNvPr id="11" name="Shape 9"/>
+          <p:cNvSpPr/>
+          <p:nvPr/>
+        </p:nvSpPr>
+        <p:spPr>
+          <a:xfrm>
+            <a:off x="7909560" y="1417320"/>
+            <a:ext cx="3154680" cy="1828800"/>
+          </a:xfrm>
+          <a:prstGeom prst="roundRect">
+            <a:avLst>
+              <a:gd name="adj" fmla="val 6000"/>
+            </a:avLst>
+          </a:prstGeom>
+          <a:solidFill>
+            <a:srgbClr val="EEF8ED"/>
+          </a:solidFill>
+          <a:ln w="12700">
+            <a:solidFill>
+              <a:srgbClr val="B9D7E6"/>
+            </a:solidFill>
+            <a:prstDash val="solid"/>
+          </a:ln>
+        </p:spPr>
+      </p:sp>
+      <p:sp>
+        <p:nvSpPr>
+          <p:cNvPr id="12" name="Text 10"/>
+          <p:cNvSpPr/>
+          <p:nvPr/>
+        </p:nvSpPr>
+        <p:spPr>
+          <a:xfrm>
+            <a:off x="8074152" y="1563624"/>
+            <a:ext cx="2825496" cy="201168"/>
+          </a:xfrm>
+          <a:prstGeom prst="rect">
+            <a:avLst/>
+          </a:prstGeom>
+          <a:noFill/>
+          <a:ln/>
+        </p:spPr>
+        <p:txBody>
+          <a:bodyPr wrap="square" lIns="0" tIns="0" rIns="0" bIns="0" rtlCol="0" anchor="ctr"/>
+          <a:lstStyle/>
+          <a:p>
             <a:pPr indent="0" marL="0">
               <a:buNone/>
             </a:pPr>
             <a:r>
-              <a:rPr lang="en-US" sz="1420" dirty="0">
+              <a:rPr lang="en-US" sz="950" b="1" dirty="0">
+                <a:solidFill>
+                  <a:srgbClr val="0068B7"/>
+                </a:solidFill>
+                <a:latin typeface="Aptos" pitchFamily="34" charset="0"/>
+                <a:ea typeface="Aptos" pitchFamily="34" charset="-122"/>
+                <a:cs typeface="Aptos" pitchFamily="34" charset="-120"/>
+              </a:rPr>
+              <a:t>Key idea</a:t>
+            </a:r>
+            <a:endParaRPr lang="en-US" sz="950" dirty="0"/>
+          </a:p>
+        </p:txBody>
+      </p:sp>
+      <p:sp>
+        <p:nvSpPr>
+          <p:cNvPr id="13" name="Text 11"/>
+          <p:cNvSpPr/>
+          <p:nvPr/>
+        </p:nvSpPr>
+        <p:spPr>
+          <a:xfrm>
+            <a:off x="8074152" y="1856232"/>
+            <a:ext cx="2825496" cy="1261872"/>
+          </a:xfrm>
+          <a:prstGeom prst="rect">
+            <a:avLst/>
+          </a:prstGeom>
+          <a:noFill/>
+          <a:ln/>
+        </p:spPr>
+        <p:txBody>
+          <a:bodyPr wrap="square" lIns="0" tIns="0" rIns="0" bIns="0" rtlCol="0" anchor="t">
+            <a:normAutofit/>
+          </a:bodyPr>
+          <a:lstStyle/>
+          <a:p>
+            <a:pPr indent="0" marL="0">
+              <a:buNone/>
+            </a:pPr>
+            <a:r>
+              <a:rPr lang="en-US" sz="1250" dirty="0">
                 <a:solidFill>
                   <a:srgbClr val="17364A"/>
                 </a:solidFill>
@@ -7035,9 +13069,116 @@
                 <a:ea typeface="Aptos" pitchFamily="34" charset="-122"/>
                 <a:cs typeface="Aptos" pitchFamily="34" charset="-120"/>
               </a:rPr>
-              <a:t>A city health department considers using an AI tool to help prioritize outreach for maternal and child health services. The model would use program, demographic, and service utilization data to identify neighborhoods where outreach may be needed. Although the goal is supportive, communities may worry that the tool could stigmatize neighborhoods, miss families not represented in data, or direct resources away from groups with less complete records. A participatory governance plan would involve community-based organizations, maternal health advocates, service users, and equity staff before the tool is finalized. The agency would explain the intended use, data limitations, safeguards, and decision points in plain language. Community input could shape the variables used, how results are communicated, what services are offered, and how harm or misclassification concerns are handled.</a:t>
-            </a:r>
-            <a:endParaRPr lang="en-US" sz="1420" dirty="0"/>
+              <a:t>This module provides national-level training guidance for public health agencies and partners.</a:t>
+            </a:r>
+            <a:endParaRPr lang="en-US" sz="1250" dirty="0"/>
+          </a:p>
+        </p:txBody>
+      </p:sp>
+      <p:sp>
+        <p:nvSpPr>
+          <p:cNvPr id="14" name="Shape 12"/>
+          <p:cNvSpPr/>
+          <p:nvPr/>
+        </p:nvSpPr>
+        <p:spPr>
+          <a:xfrm>
+            <a:off x="7909560" y="3520440"/>
+            <a:ext cx="3154680" cy="1737360"/>
+          </a:xfrm>
+          <a:prstGeom prst="roundRect">
+            <a:avLst>
+              <a:gd name="adj" fmla="val 6316"/>
+            </a:avLst>
+          </a:prstGeom>
+          <a:solidFill>
+            <a:srgbClr val="EAF6F8"/>
+          </a:solidFill>
+          <a:ln w="12700">
+            <a:solidFill>
+              <a:srgbClr val="B9D7E6"/>
+            </a:solidFill>
+            <a:prstDash val="solid"/>
+          </a:ln>
+        </p:spPr>
+      </p:sp>
+      <p:sp>
+        <p:nvSpPr>
+          <p:cNvPr id="15" name="Text 13"/>
+          <p:cNvSpPr/>
+          <p:nvPr/>
+        </p:nvSpPr>
+        <p:spPr>
+          <a:xfrm>
+            <a:off x="8074152" y="3666744"/>
+            <a:ext cx="2825496" cy="201168"/>
+          </a:xfrm>
+          <a:prstGeom prst="rect">
+            <a:avLst/>
+          </a:prstGeom>
+          <a:noFill/>
+          <a:ln/>
+        </p:spPr>
+        <p:txBody>
+          <a:bodyPr wrap="square" lIns="0" tIns="0" rIns="0" bIns="0" rtlCol="0" anchor="ctr"/>
+          <a:lstStyle/>
+          <a:p>
+            <a:pPr indent="0" marL="0">
+              <a:buNone/>
+            </a:pPr>
+            <a:r>
+              <a:rPr lang="en-US" sz="950" b="1" dirty="0">
+                <a:solidFill>
+                  <a:srgbClr val="0068B7"/>
+                </a:solidFill>
+                <a:latin typeface="Aptos" pitchFamily="34" charset="0"/>
+                <a:ea typeface="Aptos" pitchFamily="34" charset="-122"/>
+                <a:cs typeface="Aptos" pitchFamily="34" charset="-120"/>
+              </a:rPr>
+              <a:t>Use this for</a:t>
+            </a:r>
+            <a:endParaRPr lang="en-US" sz="950" dirty="0"/>
+          </a:p>
+        </p:txBody>
+      </p:sp>
+      <p:sp>
+        <p:nvSpPr>
+          <p:cNvPr id="16" name="Text 14"/>
+          <p:cNvSpPr/>
+          <p:nvPr/>
+        </p:nvSpPr>
+        <p:spPr>
+          <a:xfrm>
+            <a:off x="8074152" y="3959352"/>
+            <a:ext cx="2825496" cy="1170432"/>
+          </a:xfrm>
+          <a:prstGeom prst="rect">
+            <a:avLst/>
+          </a:prstGeom>
+          <a:noFill/>
+          <a:ln/>
+        </p:spPr>
+        <p:txBody>
+          <a:bodyPr wrap="square" lIns="0" tIns="0" rIns="0" bIns="0" rtlCol="0" anchor="t">
+            <a:normAutofit/>
+          </a:bodyPr>
+          <a:lstStyle/>
+          <a:p>
+            <a:pPr indent="0" marL="0">
+              <a:buNone/>
+            </a:pPr>
+            <a:r>
+              <a:rPr lang="en-US" sz="1250" dirty="0">
+                <a:solidFill>
+                  <a:srgbClr val="17364A"/>
+                </a:solidFill>
+                <a:latin typeface="Aptos" pitchFamily="34" charset="0"/>
+                <a:ea typeface="Aptos" pitchFamily="34" charset="-122"/>
+                <a:cs typeface="Aptos" pitchFamily="34" charset="-120"/>
+              </a:rPr>
+              <a:t>Connect the concept to public health decisions, safeguards, documentation, or implementation work.</a:t>
+            </a:r>
+            <a:endParaRPr lang="en-US" sz="1250" dirty="0"/>
           </a:p>
         </p:txBody>
       </p:sp>
@@ -7100,7 +13241,32 @@
       </p:sp>
       <p:sp>
         <p:nvSpPr>
-          <p:cNvPr id="3" name="Text 1"/>
+          <p:cNvPr id="3" name="Shape 1"/>
+          <p:cNvSpPr/>
+          <p:nvPr/>
+        </p:nvSpPr>
+        <p:spPr>
+          <a:xfrm>
+            <a:off x="0" y="164592"/>
+            <a:ext cx="146304" cy="6693408"/>
+          </a:xfrm>
+          <a:prstGeom prst="rect">
+            <a:avLst/>
+          </a:prstGeom>
+          <a:solidFill>
+            <a:srgbClr val="2F8A28"/>
+          </a:solidFill>
+          <a:ln w="12700">
+            <a:solidFill>
+              <a:srgbClr val="2F8A28"/>
+            </a:solidFill>
+            <a:prstDash val="solid"/>
+          </a:ln>
+        </p:spPr>
+      </p:sp>
+      <p:sp>
+        <p:nvSpPr>
+          <p:cNvPr id="4" name="Text 2"/>
           <p:cNvSpPr/>
           <p:nvPr/>
         </p:nvSpPr>
@@ -7139,7 +13305,7 @@
       </p:sp>
       <p:sp>
         <p:nvSpPr>
-          <p:cNvPr id="4" name="Text 2"/>
+          <p:cNvPr id="5" name="Text 3"/>
           <p:cNvSpPr/>
           <p:nvPr/>
         </p:nvSpPr>
@@ -7178,7 +13344,7 @@
       </p:sp>
       <p:sp>
         <p:nvSpPr>
-          <p:cNvPr id="5" name="Text 3"/>
+          <p:cNvPr id="6" name="Text 4"/>
           <p:cNvSpPr/>
           <p:nvPr/>
         </p:nvSpPr>
@@ -7217,13 +13383,77 @@
       </p:sp>
       <p:sp>
         <p:nvSpPr>
-          <p:cNvPr id="6" name="Text 4"/>
+          <p:cNvPr id="7" name="Shape 5"/>
           <p:cNvSpPr/>
           <p:nvPr/>
         </p:nvSpPr>
         <p:spPr>
           <a:xfrm>
             <a:off x="640080" y="658368"/>
+            <a:ext cx="420624" cy="420624"/>
+          </a:xfrm>
+          <a:prstGeom prst="ellipse">
+            <a:avLst/>
+          </a:prstGeom>
+          <a:solidFill>
+            <a:srgbClr val="0068B7"/>
+          </a:solidFill>
+          <a:ln w="12700">
+            <a:solidFill>
+              <a:srgbClr val="0068B7"/>
+            </a:solidFill>
+            <a:prstDash val="solid"/>
+          </a:ln>
+        </p:spPr>
+      </p:sp>
+      <p:sp>
+        <p:nvSpPr>
+          <p:cNvPr id="8" name="Text 6"/>
+          <p:cNvSpPr/>
+          <p:nvPr/>
+        </p:nvSpPr>
+        <p:spPr>
+          <a:xfrm>
+            <a:off x="640080" y="731520"/>
+            <a:ext cx="420624" cy="164592"/>
+          </a:xfrm>
+          <a:prstGeom prst="rect">
+            <a:avLst/>
+          </a:prstGeom>
+          <a:noFill/>
+          <a:ln/>
+        </p:spPr>
+        <p:txBody>
+          <a:bodyPr wrap="square" lIns="0" tIns="0" rIns="0" bIns="0" rtlCol="0" anchor="ctr"/>
+          <a:lstStyle/>
+          <a:p>
+            <a:pPr algn="ctr" indent="0" marL="0">
+              <a:buNone/>
+            </a:pPr>
+            <a:r>
+              <a:rPr lang="en-US" sz="1100" b="1" dirty="0">
+                <a:solidFill>
+                  <a:srgbClr val="FFFFFF"/>
+                </a:solidFill>
+                <a:latin typeface="Aptos" pitchFamily="34" charset="0"/>
+                <a:ea typeface="Aptos" pitchFamily="34" charset="-122"/>
+                <a:cs typeface="Aptos" pitchFamily="34" charset="-120"/>
+              </a:rPr>
+              <a:t>4</a:t>
+            </a:r>
+            <a:endParaRPr lang="en-US" sz="1100" dirty="0"/>
+          </a:p>
+        </p:txBody>
+      </p:sp>
+      <p:sp>
+        <p:nvSpPr>
+          <p:cNvPr id="9" name="Text 7"/>
+          <p:cNvSpPr/>
+          <p:nvPr/>
+        </p:nvSpPr>
+        <p:spPr>
+          <a:xfrm>
+            <a:off x="640080" y="621792"/>
             <a:ext cx="10881360" cy="566928"/>
           </a:xfrm>
           <a:prstGeom prst="rect">
@@ -7250,7 +13480,7 @@
                 <a:ea typeface="Aptos Display" pitchFamily="34" charset="-122"/>
                 <a:cs typeface="Aptos Display" pitchFamily="34" charset="-120"/>
               </a:rPr>
-              <a:t>Technical and Governance Deep Dive</a:t>
+              <a:t>Why This Topic Matters for Public Health AI</a:t>
             </a:r>
             <a:endParaRPr lang="en-US" sz="2700" dirty="0"/>
           </a:p>
@@ -7258,32 +13488,178 @@
       </p:sp>
       <p:sp>
         <p:nvSpPr>
-          <p:cNvPr id="7" name="Text 5"/>
-          <p:cNvSpPr/>
-          <p:nvPr/>
-        </p:nvSpPr>
-        <p:spPr>
-          <a:xfrm>
-            <a:off x="822960" y="1325880"/>
-            <a:ext cx="10378440" cy="4800600"/>
-          </a:xfrm>
-          <a:prstGeom prst="rect">
-            <a:avLst/>
-          </a:prstGeom>
-          <a:noFill/>
-          <a:ln/>
-        </p:spPr>
-        <p:txBody>
-          <a:bodyPr wrap="square" lIns="1016" tIns="1016" rIns="1016" bIns="1016" rtlCol="0" anchor="t">
+          <p:cNvPr id="10" name="Text 8"/>
+          <p:cNvSpPr/>
+          <p:nvPr/>
+        </p:nvSpPr>
+        <p:spPr>
+          <a:xfrm>
+            <a:off x="868680" y="1417320"/>
+            <a:ext cx="6675120" cy="4434840"/>
+          </a:xfrm>
+          <a:prstGeom prst="rect">
+            <a:avLst/>
+          </a:prstGeom>
+          <a:noFill/>
+          <a:ln/>
+        </p:spPr>
+        <p:txBody>
+          <a:bodyPr wrap="square" lIns="635" tIns="635" rIns="635" bIns="635" rtlCol="0" anchor="t">
             <a:normAutofit/>
           </a:bodyPr>
           <a:lstStyle/>
           <a:p>
+            <a:r>
+              <a:rPr lang="en-US" sz="1700" dirty="0">
+                <a:solidFill>
+                  <a:srgbClr val="17364A"/>
+                </a:solidFill>
+                <a:latin typeface="Aptos" pitchFamily="34" charset="0"/>
+                <a:ea typeface="Aptos" pitchFamily="34" charset="-122"/>
+                <a:cs typeface="Aptos" pitchFamily="34" charset="-120"/>
+              </a:rPr>
+              <a:t>Public health agencies make decisions that affect communities, often using data collected through clinical care,.</a:t>
+            </a:r>
+            <a:endParaRPr lang="en-US" sz="1700" dirty="0"/>
+          </a:p>
+          <a:p>
+            <a:r>
+              <a:rPr lang="en-US" sz="1700" dirty="0">
+                <a:solidFill>
+                  <a:srgbClr val="17364A"/>
+                </a:solidFill>
+                <a:latin typeface="Aptos" pitchFamily="34" charset="0"/>
+                <a:ea typeface="Aptos" pitchFamily="34" charset="-122"/>
+                <a:cs typeface="Aptos" pitchFamily="34" charset="-120"/>
+              </a:rPr>
+              <a:t>AI can intensify concerns about surveillance, bias, exclusion, language access, disability access, and government trust.</a:t>
+            </a:r>
+            <a:endParaRPr lang="en-US" sz="1700" dirty="0"/>
+          </a:p>
+          <a:p>
+            <a:r>
+              <a:rPr lang="en-US" sz="1700" dirty="0">
+                <a:solidFill>
+                  <a:srgbClr val="17364A"/>
+                </a:solidFill>
+                <a:latin typeface="Aptos" pitchFamily="34" charset="0"/>
+                <a:ea typeface="Aptos" pitchFamily="34" charset="-122"/>
+                <a:cs typeface="Aptos" pitchFamily="34" charset="-120"/>
+              </a:rPr>
+              <a:t>Community oversight helps agencies identify concerns that may not be visible through technical review alone.</a:t>
+            </a:r>
+            <a:endParaRPr lang="en-US" sz="1700" dirty="0"/>
+          </a:p>
+          <a:p>
+            <a:r>
+              <a:rPr lang="en-US" sz="1700" dirty="0">
+                <a:solidFill>
+                  <a:srgbClr val="17364A"/>
+                </a:solidFill>
+                <a:latin typeface="Aptos" pitchFamily="34" charset="0"/>
+                <a:ea typeface="Aptos" pitchFamily="34" charset="-122"/>
+                <a:cs typeface="Aptos" pitchFamily="34" charset="-120"/>
+              </a:rPr>
+              <a:t>Participatory governance can also improve AI quality and usefulness.</a:t>
+            </a:r>
+            <a:endParaRPr lang="en-US" sz="1700" dirty="0"/>
+          </a:p>
+        </p:txBody>
+      </p:sp>
+      <p:sp>
+        <p:nvSpPr>
+          <p:cNvPr id="11" name="Shape 9"/>
+          <p:cNvSpPr/>
+          <p:nvPr/>
+        </p:nvSpPr>
+        <p:spPr>
+          <a:xfrm>
+            <a:off x="7909560" y="1417320"/>
+            <a:ext cx="3154680" cy="1828800"/>
+          </a:xfrm>
+          <a:prstGeom prst="roundRect">
+            <a:avLst>
+              <a:gd name="adj" fmla="val 6000"/>
+            </a:avLst>
+          </a:prstGeom>
+          <a:solidFill>
+            <a:srgbClr val="EEF8ED"/>
+          </a:solidFill>
+          <a:ln w="12700">
+            <a:solidFill>
+              <a:srgbClr val="B9D7E6"/>
+            </a:solidFill>
+            <a:prstDash val="solid"/>
+          </a:ln>
+        </p:spPr>
+      </p:sp>
+      <p:sp>
+        <p:nvSpPr>
+          <p:cNvPr id="12" name="Text 10"/>
+          <p:cNvSpPr/>
+          <p:nvPr/>
+        </p:nvSpPr>
+        <p:spPr>
+          <a:xfrm>
+            <a:off x="8074152" y="1563624"/>
+            <a:ext cx="2825496" cy="201168"/>
+          </a:xfrm>
+          <a:prstGeom prst="rect">
+            <a:avLst/>
+          </a:prstGeom>
+          <a:noFill/>
+          <a:ln/>
+        </p:spPr>
+        <p:txBody>
+          <a:bodyPr wrap="square" lIns="0" tIns="0" rIns="0" bIns="0" rtlCol="0" anchor="ctr"/>
+          <a:lstStyle/>
+          <a:p>
             <a:pPr indent="0" marL="0">
               <a:buNone/>
             </a:pPr>
             <a:r>
-              <a:rPr lang="en-US" sz="1420" dirty="0">
+              <a:rPr lang="en-US" sz="950" b="1" dirty="0">
+                <a:solidFill>
+                  <a:srgbClr val="0068B7"/>
+                </a:solidFill>
+                <a:latin typeface="Aptos" pitchFamily="34" charset="0"/>
+                <a:ea typeface="Aptos" pitchFamily="34" charset="-122"/>
+                <a:cs typeface="Aptos" pitchFamily="34" charset="-120"/>
+              </a:rPr>
+              <a:t>Key idea</a:t>
+            </a:r>
+            <a:endParaRPr lang="en-US" sz="950" dirty="0"/>
+          </a:p>
+        </p:txBody>
+      </p:sp>
+      <p:sp>
+        <p:nvSpPr>
+          <p:cNvPr id="13" name="Text 11"/>
+          <p:cNvSpPr/>
+          <p:nvPr/>
+        </p:nvSpPr>
+        <p:spPr>
+          <a:xfrm>
+            <a:off x="8074152" y="1856232"/>
+            <a:ext cx="2825496" cy="1261872"/>
+          </a:xfrm>
+          <a:prstGeom prst="rect">
+            <a:avLst/>
+          </a:prstGeom>
+          <a:noFill/>
+          <a:ln/>
+        </p:spPr>
+        <p:txBody>
+          <a:bodyPr wrap="square" lIns="0" tIns="0" rIns="0" bIns="0" rtlCol="0" anchor="t">
+            <a:normAutofit/>
+          </a:bodyPr>
+          <a:lstStyle/>
+          <a:p>
+            <a:pPr indent="0" marL="0">
+              <a:buNone/>
+            </a:pPr>
+            <a:r>
+              <a:rPr lang="en-US" sz="1250" dirty="0">
                 <a:solidFill>
                   <a:srgbClr val="17364A"/>
                 </a:solidFill>
@@ -7291,9 +13667,116 @@
                 <a:ea typeface="Aptos" pitchFamily="34" charset="-122"/>
                 <a:cs typeface="Aptos" pitchFamily="34" charset="-120"/>
               </a:rPr>
-              <a:t>Participatory governance should be matched to the impact of the use case. Internal productivity tools may not require community oversight, although they still require policy and privacy review. Tools that influence public communication, service access, enforcement, prioritization, outreach, or resource allocation may require deeper engagement. The higher the impact on communities, the stronger the case for involving community perspectives early. Engagement should be designed with care. Agencies should provide plain-language descriptions, realistic examples, data-use explanations, and clear questions for feedback. Meetings should be accessible, compensated when appropriate, linguistically inclusive, and scheduled in ways that support participation. Agencies should also explain what decisions are open for influence and what constraints exist because of law, funding, or public health authority. Follow-through is essential. Community members should know how their input was used, what changed because of engagement, and how concerns will be monitored after launch. Participatory governance is not a single listening session. It is an ongoing relationship between the agency and affected communities, especially when the AI use is consequential or long-term.</a:t>
-            </a:r>
-            <a:endParaRPr lang="en-US" sz="1420" dirty="0"/>
+              <a:t>Public health agencies make decisions that affect communities, often using data collected through clinical care,.</a:t>
+            </a:r>
+            <a:endParaRPr lang="en-US" sz="1250" dirty="0"/>
+          </a:p>
+        </p:txBody>
+      </p:sp>
+      <p:sp>
+        <p:nvSpPr>
+          <p:cNvPr id="14" name="Shape 12"/>
+          <p:cNvSpPr/>
+          <p:nvPr/>
+        </p:nvSpPr>
+        <p:spPr>
+          <a:xfrm>
+            <a:off x="7909560" y="3520440"/>
+            <a:ext cx="3154680" cy="1737360"/>
+          </a:xfrm>
+          <a:prstGeom prst="roundRect">
+            <a:avLst>
+              <a:gd name="adj" fmla="val 6316"/>
+            </a:avLst>
+          </a:prstGeom>
+          <a:solidFill>
+            <a:srgbClr val="EAF6F8"/>
+          </a:solidFill>
+          <a:ln w="12700">
+            <a:solidFill>
+              <a:srgbClr val="B9D7E6"/>
+            </a:solidFill>
+            <a:prstDash val="solid"/>
+          </a:ln>
+        </p:spPr>
+      </p:sp>
+      <p:sp>
+        <p:nvSpPr>
+          <p:cNvPr id="15" name="Text 13"/>
+          <p:cNvSpPr/>
+          <p:nvPr/>
+        </p:nvSpPr>
+        <p:spPr>
+          <a:xfrm>
+            <a:off x="8074152" y="3666744"/>
+            <a:ext cx="2825496" cy="201168"/>
+          </a:xfrm>
+          <a:prstGeom prst="rect">
+            <a:avLst/>
+          </a:prstGeom>
+          <a:noFill/>
+          <a:ln/>
+        </p:spPr>
+        <p:txBody>
+          <a:bodyPr wrap="square" lIns="0" tIns="0" rIns="0" bIns="0" rtlCol="0" anchor="ctr"/>
+          <a:lstStyle/>
+          <a:p>
+            <a:pPr indent="0" marL="0">
+              <a:buNone/>
+            </a:pPr>
+            <a:r>
+              <a:rPr lang="en-US" sz="950" b="1" dirty="0">
+                <a:solidFill>
+                  <a:srgbClr val="0068B7"/>
+                </a:solidFill>
+                <a:latin typeface="Aptos" pitchFamily="34" charset="0"/>
+                <a:ea typeface="Aptos" pitchFamily="34" charset="-122"/>
+                <a:cs typeface="Aptos" pitchFamily="34" charset="-120"/>
+              </a:rPr>
+              <a:t>Use this for</a:t>
+            </a:r>
+            <a:endParaRPr lang="en-US" sz="950" dirty="0"/>
+          </a:p>
+        </p:txBody>
+      </p:sp>
+      <p:sp>
+        <p:nvSpPr>
+          <p:cNvPr id="16" name="Text 14"/>
+          <p:cNvSpPr/>
+          <p:nvPr/>
+        </p:nvSpPr>
+        <p:spPr>
+          <a:xfrm>
+            <a:off x="8074152" y="3959352"/>
+            <a:ext cx="2825496" cy="1170432"/>
+          </a:xfrm>
+          <a:prstGeom prst="rect">
+            <a:avLst/>
+          </a:prstGeom>
+          <a:noFill/>
+          <a:ln/>
+        </p:spPr>
+        <p:txBody>
+          <a:bodyPr wrap="square" lIns="0" tIns="0" rIns="0" bIns="0" rtlCol="0" anchor="t">
+            <a:normAutofit/>
+          </a:bodyPr>
+          <a:lstStyle/>
+          <a:p>
+            <a:pPr indent="0" marL="0">
+              <a:buNone/>
+            </a:pPr>
+            <a:r>
+              <a:rPr lang="en-US" sz="1250" dirty="0">
+                <a:solidFill>
+                  <a:srgbClr val="17364A"/>
+                </a:solidFill>
+                <a:latin typeface="Aptos" pitchFamily="34" charset="0"/>
+                <a:ea typeface="Aptos" pitchFamily="34" charset="-122"/>
+                <a:cs typeface="Aptos" pitchFamily="34" charset="-120"/>
+              </a:rPr>
+              <a:t>Connect the concept to public health decisions, safeguards, documentation, or implementation work.</a:t>
+            </a:r>
+            <a:endParaRPr lang="en-US" sz="1250" dirty="0"/>
           </a:p>
         </p:txBody>
       </p:sp>
@@ -7356,7 +13839,32 @@
       </p:sp>
       <p:sp>
         <p:nvSpPr>
-          <p:cNvPr id="3" name="Text 1"/>
+          <p:cNvPr id="3" name="Shape 1"/>
+          <p:cNvSpPr/>
+          <p:nvPr/>
+        </p:nvSpPr>
+        <p:spPr>
+          <a:xfrm>
+            <a:off x="0" y="164592"/>
+            <a:ext cx="146304" cy="6693408"/>
+          </a:xfrm>
+          <a:prstGeom prst="rect">
+            <a:avLst/>
+          </a:prstGeom>
+          <a:solidFill>
+            <a:srgbClr val="2F8A28"/>
+          </a:solidFill>
+          <a:ln w="12700">
+            <a:solidFill>
+              <a:srgbClr val="2F8A28"/>
+            </a:solidFill>
+            <a:prstDash val="solid"/>
+          </a:ln>
+        </p:spPr>
+      </p:sp>
+      <p:sp>
+        <p:nvSpPr>
+          <p:cNvPr id="4" name="Text 2"/>
           <p:cNvSpPr/>
           <p:nvPr/>
         </p:nvSpPr>
@@ -7395,7 +13903,7 @@
       </p:sp>
       <p:sp>
         <p:nvSpPr>
-          <p:cNvPr id="4" name="Text 2"/>
+          <p:cNvPr id="5" name="Text 3"/>
           <p:cNvSpPr/>
           <p:nvPr/>
         </p:nvSpPr>
@@ -7434,7 +13942,7 @@
       </p:sp>
       <p:sp>
         <p:nvSpPr>
-          <p:cNvPr id="5" name="Text 3"/>
+          <p:cNvPr id="6" name="Text 4"/>
           <p:cNvSpPr/>
           <p:nvPr/>
         </p:nvSpPr>
@@ -7473,13 +13981,77 @@
       </p:sp>
       <p:sp>
         <p:nvSpPr>
-          <p:cNvPr id="6" name="Text 4"/>
+          <p:cNvPr id="7" name="Shape 5"/>
           <p:cNvSpPr/>
           <p:nvPr/>
         </p:nvSpPr>
         <p:spPr>
           <a:xfrm>
             <a:off x="640080" y="658368"/>
+            <a:ext cx="420624" cy="420624"/>
+          </a:xfrm>
+          <a:prstGeom prst="ellipse">
+            <a:avLst/>
+          </a:prstGeom>
+          <a:solidFill>
+            <a:srgbClr val="0068B7"/>
+          </a:solidFill>
+          <a:ln w="12700">
+            <a:solidFill>
+              <a:srgbClr val="0068B7"/>
+            </a:solidFill>
+            <a:prstDash val="solid"/>
+          </a:ln>
+        </p:spPr>
+      </p:sp>
+      <p:sp>
+        <p:nvSpPr>
+          <p:cNvPr id="8" name="Text 6"/>
+          <p:cNvSpPr/>
+          <p:nvPr/>
+        </p:nvSpPr>
+        <p:spPr>
+          <a:xfrm>
+            <a:off x="640080" y="731520"/>
+            <a:ext cx="420624" cy="164592"/>
+          </a:xfrm>
+          <a:prstGeom prst="rect">
+            <a:avLst/>
+          </a:prstGeom>
+          <a:noFill/>
+          <a:ln/>
+        </p:spPr>
+        <p:txBody>
+          <a:bodyPr wrap="square" lIns="0" tIns="0" rIns="0" bIns="0" rtlCol="0" anchor="ctr"/>
+          <a:lstStyle/>
+          <a:p>
+            <a:pPr algn="ctr" indent="0" marL="0">
+              <a:buNone/>
+            </a:pPr>
+            <a:r>
+              <a:rPr lang="en-US" sz="1100" b="1" dirty="0">
+                <a:solidFill>
+                  <a:srgbClr val="FFFFFF"/>
+                </a:solidFill>
+                <a:latin typeface="Aptos" pitchFamily="34" charset="0"/>
+                <a:ea typeface="Aptos" pitchFamily="34" charset="-122"/>
+                <a:cs typeface="Aptos" pitchFamily="34" charset="-120"/>
+              </a:rPr>
+              <a:t>5</a:t>
+            </a:r>
+            <a:endParaRPr lang="en-US" sz="1100" dirty="0"/>
+          </a:p>
+        </p:txBody>
+      </p:sp>
+      <p:sp>
+        <p:nvSpPr>
+          <p:cNvPr id="9" name="Text 7"/>
+          <p:cNvSpPr/>
+          <p:nvPr/>
+        </p:nvSpPr>
+        <p:spPr>
+          <a:xfrm>
+            <a:off x="640080" y="621792"/>
             <a:ext cx="10881360" cy="566928"/>
           </a:xfrm>
           <a:prstGeom prst="rect">
@@ -7506,7 +14078,7 @@
                 <a:ea typeface="Aptos Display" pitchFamily="34" charset="-122"/>
                 <a:cs typeface="Aptos Display" pitchFamily="34" charset="-120"/>
               </a:rPr>
-              <a:t>Risks, Failure Modes, and Guardrails</a:t>
+              <a:t>Public Health Example</a:t>
             </a:r>
             <a:endParaRPr lang="en-US" sz="2700" dirty="0"/>
           </a:p>
@@ -7514,32 +14086,178 @@
       </p:sp>
       <p:sp>
         <p:nvSpPr>
-          <p:cNvPr id="7" name="Text 5"/>
-          <p:cNvSpPr/>
-          <p:nvPr/>
-        </p:nvSpPr>
-        <p:spPr>
-          <a:xfrm>
-            <a:off x="822960" y="1325880"/>
-            <a:ext cx="10378440" cy="4800600"/>
-          </a:xfrm>
-          <a:prstGeom prst="rect">
-            <a:avLst/>
-          </a:prstGeom>
-          <a:noFill/>
-          <a:ln/>
-        </p:spPr>
-        <p:txBody>
-          <a:bodyPr wrap="square" lIns="1016" tIns="1016" rIns="1016" bIns="1016" rtlCol="0" anchor="t">
+          <p:cNvPr id="10" name="Text 8"/>
+          <p:cNvSpPr/>
+          <p:nvPr/>
+        </p:nvSpPr>
+        <p:spPr>
+          <a:xfrm>
+            <a:off x="868680" y="1417320"/>
+            <a:ext cx="6675120" cy="4434840"/>
+          </a:xfrm>
+          <a:prstGeom prst="rect">
+            <a:avLst/>
+          </a:prstGeom>
+          <a:noFill/>
+          <a:ln/>
+        </p:spPr>
+        <p:txBody>
+          <a:bodyPr wrap="square" lIns="635" tIns="635" rIns="635" bIns="635" rtlCol="0" anchor="t">
             <a:normAutofit/>
           </a:bodyPr>
           <a:lstStyle/>
           <a:p>
+            <a:r>
+              <a:rPr lang="en-US" sz="1700" dirty="0">
+                <a:solidFill>
+                  <a:srgbClr val="17364A"/>
+                </a:solidFill>
+                <a:latin typeface="Aptos" pitchFamily="34" charset="0"/>
+                <a:ea typeface="Aptos" pitchFamily="34" charset="-122"/>
+                <a:cs typeface="Aptos" pitchFamily="34" charset="-120"/>
+              </a:rPr>
+              <a:t>A city health department considers using an AI tool to help prioritize outreach for maternal and child health services.</a:t>
+            </a:r>
+            <a:endParaRPr lang="en-US" sz="1700" dirty="0"/>
+          </a:p>
+          <a:p>
+            <a:r>
+              <a:rPr lang="en-US" sz="1700" dirty="0">
+                <a:solidFill>
+                  <a:srgbClr val="17364A"/>
+                </a:solidFill>
+                <a:latin typeface="Aptos" pitchFamily="34" charset="0"/>
+                <a:ea typeface="Aptos" pitchFamily="34" charset="-122"/>
+                <a:cs typeface="Aptos" pitchFamily="34" charset="-120"/>
+              </a:rPr>
+              <a:t>The model would use program, demographic, and service utilization data to identify neighborhoods where outreach may be.</a:t>
+            </a:r>
+            <a:endParaRPr lang="en-US" sz="1700" dirty="0"/>
+          </a:p>
+          <a:p>
+            <a:r>
+              <a:rPr lang="en-US" sz="1700" dirty="0">
+                <a:solidFill>
+                  <a:srgbClr val="17364A"/>
+                </a:solidFill>
+                <a:latin typeface="Aptos" pitchFamily="34" charset="0"/>
+                <a:ea typeface="Aptos" pitchFamily="34" charset="-122"/>
+                <a:cs typeface="Aptos" pitchFamily="34" charset="-120"/>
+              </a:rPr>
+              <a:t>Although the goal is supportive, communities may worry that the tool could stigmatize neighborhoods, miss families not.</a:t>
+            </a:r>
+            <a:endParaRPr lang="en-US" sz="1700" dirty="0"/>
+          </a:p>
+          <a:p>
+            <a:r>
+              <a:rPr lang="en-US" sz="1700" dirty="0">
+                <a:solidFill>
+                  <a:srgbClr val="17364A"/>
+                </a:solidFill>
+                <a:latin typeface="Aptos" pitchFamily="34" charset="0"/>
+                <a:ea typeface="Aptos" pitchFamily="34" charset="-122"/>
+                <a:cs typeface="Aptos" pitchFamily="34" charset="-120"/>
+              </a:rPr>
+              <a:t>A participatory governance plan would involve community-based organizations, maternal health advocates, service users, and.</a:t>
+            </a:r>
+            <a:endParaRPr lang="en-US" sz="1700" dirty="0"/>
+          </a:p>
+        </p:txBody>
+      </p:sp>
+      <p:sp>
+        <p:nvSpPr>
+          <p:cNvPr id="11" name="Shape 9"/>
+          <p:cNvSpPr/>
+          <p:nvPr/>
+        </p:nvSpPr>
+        <p:spPr>
+          <a:xfrm>
+            <a:off x="7909560" y="1417320"/>
+            <a:ext cx="3154680" cy="1828800"/>
+          </a:xfrm>
+          <a:prstGeom prst="roundRect">
+            <a:avLst>
+              <a:gd name="adj" fmla="val 6000"/>
+            </a:avLst>
+          </a:prstGeom>
+          <a:solidFill>
+            <a:srgbClr val="EEF8ED"/>
+          </a:solidFill>
+          <a:ln w="12700">
+            <a:solidFill>
+              <a:srgbClr val="B9D7E6"/>
+            </a:solidFill>
+            <a:prstDash val="solid"/>
+          </a:ln>
+        </p:spPr>
+      </p:sp>
+      <p:sp>
+        <p:nvSpPr>
+          <p:cNvPr id="12" name="Text 10"/>
+          <p:cNvSpPr/>
+          <p:nvPr/>
+        </p:nvSpPr>
+        <p:spPr>
+          <a:xfrm>
+            <a:off x="8074152" y="1563624"/>
+            <a:ext cx="2825496" cy="201168"/>
+          </a:xfrm>
+          <a:prstGeom prst="rect">
+            <a:avLst/>
+          </a:prstGeom>
+          <a:noFill/>
+          <a:ln/>
+        </p:spPr>
+        <p:txBody>
+          <a:bodyPr wrap="square" lIns="0" tIns="0" rIns="0" bIns="0" rtlCol="0" anchor="ctr"/>
+          <a:lstStyle/>
+          <a:p>
             <a:pPr indent="0" marL="0">
               <a:buNone/>
             </a:pPr>
             <a:r>
-              <a:rPr lang="en-US" sz="1420" dirty="0">
+              <a:rPr lang="en-US" sz="950" b="1" dirty="0">
+                <a:solidFill>
+                  <a:srgbClr val="0068B7"/>
+                </a:solidFill>
+                <a:latin typeface="Aptos" pitchFamily="34" charset="0"/>
+                <a:ea typeface="Aptos" pitchFamily="34" charset="-122"/>
+                <a:cs typeface="Aptos" pitchFamily="34" charset="-120"/>
+              </a:rPr>
+              <a:t>Key idea</a:t>
+            </a:r>
+            <a:endParaRPr lang="en-US" sz="950" dirty="0"/>
+          </a:p>
+        </p:txBody>
+      </p:sp>
+      <p:sp>
+        <p:nvSpPr>
+          <p:cNvPr id="13" name="Text 11"/>
+          <p:cNvSpPr/>
+          <p:nvPr/>
+        </p:nvSpPr>
+        <p:spPr>
+          <a:xfrm>
+            <a:off x="8074152" y="1856232"/>
+            <a:ext cx="2825496" cy="1261872"/>
+          </a:xfrm>
+          <a:prstGeom prst="rect">
+            <a:avLst/>
+          </a:prstGeom>
+          <a:noFill/>
+          <a:ln/>
+        </p:spPr>
+        <p:txBody>
+          <a:bodyPr wrap="square" lIns="0" tIns="0" rIns="0" bIns="0" rtlCol="0" anchor="t">
+            <a:normAutofit/>
+          </a:bodyPr>
+          <a:lstStyle/>
+          <a:p>
+            <a:pPr indent="0" marL="0">
+              <a:buNone/>
+            </a:pPr>
+            <a:r>
+              <a:rPr lang="en-US" sz="1250" dirty="0">
                 <a:solidFill>
                   <a:srgbClr val="17364A"/>
                 </a:solidFill>
@@ -7547,9 +14265,116 @@
                 <a:ea typeface="Aptos" pitchFamily="34" charset="-122"/>
                 <a:cs typeface="Aptos" pitchFamily="34" charset="-120"/>
               </a:rPr>
-              <a:t>One risk is tokenistic engagement. Agencies may seek community input after key decisions have already been made. A guardrail is to engage before requirements, safeguards, and success measures are finalized. Another risk is technical opacity. Community participants may be asked to respond to vague or overly technical descriptions. A guardrail is to provide plain-language examples, visual workflows, and concrete descriptions of what the AI will and will not do.</a:t>
-            </a:r>
-            <a:endParaRPr lang="en-US" sz="1420" dirty="0"/>
+              <a:t>A city health department considers using an AI tool to help prioritize outreach for maternal and child health services.</a:t>
+            </a:r>
+            <a:endParaRPr lang="en-US" sz="1250" dirty="0"/>
+          </a:p>
+        </p:txBody>
+      </p:sp>
+      <p:sp>
+        <p:nvSpPr>
+          <p:cNvPr id="14" name="Shape 12"/>
+          <p:cNvSpPr/>
+          <p:nvPr/>
+        </p:nvSpPr>
+        <p:spPr>
+          <a:xfrm>
+            <a:off x="7909560" y="3520440"/>
+            <a:ext cx="3154680" cy="1737360"/>
+          </a:xfrm>
+          <a:prstGeom prst="roundRect">
+            <a:avLst>
+              <a:gd name="adj" fmla="val 6316"/>
+            </a:avLst>
+          </a:prstGeom>
+          <a:solidFill>
+            <a:srgbClr val="EAF6F8"/>
+          </a:solidFill>
+          <a:ln w="12700">
+            <a:solidFill>
+              <a:srgbClr val="B9D7E6"/>
+            </a:solidFill>
+            <a:prstDash val="solid"/>
+          </a:ln>
+        </p:spPr>
+      </p:sp>
+      <p:sp>
+        <p:nvSpPr>
+          <p:cNvPr id="15" name="Text 13"/>
+          <p:cNvSpPr/>
+          <p:nvPr/>
+        </p:nvSpPr>
+        <p:spPr>
+          <a:xfrm>
+            <a:off x="8074152" y="3666744"/>
+            <a:ext cx="2825496" cy="201168"/>
+          </a:xfrm>
+          <a:prstGeom prst="rect">
+            <a:avLst/>
+          </a:prstGeom>
+          <a:noFill/>
+          <a:ln/>
+        </p:spPr>
+        <p:txBody>
+          <a:bodyPr wrap="square" lIns="0" tIns="0" rIns="0" bIns="0" rtlCol="0" anchor="ctr"/>
+          <a:lstStyle/>
+          <a:p>
+            <a:pPr indent="0" marL="0">
+              <a:buNone/>
+            </a:pPr>
+            <a:r>
+              <a:rPr lang="en-US" sz="950" b="1" dirty="0">
+                <a:solidFill>
+                  <a:srgbClr val="0068B7"/>
+                </a:solidFill>
+                <a:latin typeface="Aptos" pitchFamily="34" charset="0"/>
+                <a:ea typeface="Aptos" pitchFamily="34" charset="-122"/>
+                <a:cs typeface="Aptos" pitchFamily="34" charset="-120"/>
+              </a:rPr>
+              <a:t>Use this for</a:t>
+            </a:r>
+            <a:endParaRPr lang="en-US" sz="950" dirty="0"/>
+          </a:p>
+        </p:txBody>
+      </p:sp>
+      <p:sp>
+        <p:nvSpPr>
+          <p:cNvPr id="16" name="Text 14"/>
+          <p:cNvSpPr/>
+          <p:nvPr/>
+        </p:nvSpPr>
+        <p:spPr>
+          <a:xfrm>
+            <a:off x="8074152" y="3959352"/>
+            <a:ext cx="2825496" cy="1170432"/>
+          </a:xfrm>
+          <a:prstGeom prst="rect">
+            <a:avLst/>
+          </a:prstGeom>
+          <a:noFill/>
+          <a:ln/>
+        </p:spPr>
+        <p:txBody>
+          <a:bodyPr wrap="square" lIns="0" tIns="0" rIns="0" bIns="0" rtlCol="0" anchor="t">
+            <a:normAutofit/>
+          </a:bodyPr>
+          <a:lstStyle/>
+          <a:p>
+            <a:pPr indent="0" marL="0">
+              <a:buNone/>
+            </a:pPr>
+            <a:r>
+              <a:rPr lang="en-US" sz="1250" dirty="0">
+                <a:solidFill>
+                  <a:srgbClr val="17364A"/>
+                </a:solidFill>
+                <a:latin typeface="Aptos" pitchFamily="34" charset="0"/>
+                <a:ea typeface="Aptos" pitchFamily="34" charset="-122"/>
+                <a:cs typeface="Aptos" pitchFamily="34" charset="-120"/>
+              </a:rPr>
+              <a:t>Connect the concept to public health decisions, safeguards, documentation, or implementation work.</a:t>
+            </a:r>
+            <a:endParaRPr lang="en-US" sz="1250" dirty="0"/>
           </a:p>
         </p:txBody>
       </p:sp>

--- a/downloads/presentations/modules/lesson-50-community-oversight-and-participatory-governance.pptx
+++ b/downloads/presentations/modules/lesson-50-community-oversight-and-participatory-governance.pptx
@@ -2900,6 +2900,45 @@
           </a:p>
         </p:txBody>
       </p:sp>
+      <p:sp>
+        <p:nvSpPr>
+          <p:cNvPr id="8" name="Text 5"/>
+          <p:cNvSpPr/>
+          <p:nvPr/>
+        </p:nvSpPr>
+        <p:spPr>
+          <a:xfrm>
+            <a:off x="11137392" y="6510528"/>
+            <a:ext cx="411480" cy="201168"/>
+          </a:xfrm>
+          <a:prstGeom prst="rect">
+            <a:avLst/>
+          </a:prstGeom>
+          <a:noFill/>
+          <a:ln/>
+        </p:spPr>
+        <p:txBody>
+          <a:bodyPr wrap="square" lIns="0" tIns="0" rIns="0" bIns="0" rtlCol="0" anchor="ctr"/>
+          <a:lstStyle/>
+          <a:p>
+            <a:pPr algn="r" indent="0" marL="0">
+              <a:buNone/>
+            </a:pPr>
+            <a:r>
+              <a:rPr lang="en-US" sz="900" dirty="0">
+                <a:solidFill>
+                  <a:srgbClr val="5F7181"/>
+                </a:solidFill>
+                <a:latin typeface="Aptos" pitchFamily="34" charset="0"/>
+                <a:ea typeface="Aptos" pitchFamily="34" charset="-122"/>
+                <a:cs typeface="Aptos" pitchFamily="34" charset="-120"/>
+              </a:rPr>
+              <a:t>1</a:t>
+            </a:r>
+            <a:endParaRPr lang="en-US" sz="900" dirty="0"/>
+          </a:p>
+        </p:txBody>
+      </p:sp>
     </p:spTree>
   </p:cSld>
   <p:clrMapOvr>
@@ -3093,7 +3132,7 @@
                 <a:ea typeface="Aptos" pitchFamily="34" charset="-122"/>
                 <a:cs typeface="Aptos" pitchFamily="34" charset="-120"/>
               </a:rPr>
-              <a:t>© Paula Soper</a:t>
+              <a:t>Â© Paula Soper</a:t>
             </a:r>
             <a:endParaRPr lang="en-US" sz="800" dirty="0"/>
           </a:p>
@@ -3101,7 +3140,46 @@
       </p:sp>
       <p:sp>
         <p:nvSpPr>
-          <p:cNvPr id="7" name="Shape 5"/>
+          <p:cNvPr id="7" name="Text 5"/>
+          <p:cNvSpPr/>
+          <p:nvPr/>
+        </p:nvSpPr>
+        <p:spPr>
+          <a:xfrm>
+            <a:off x="11137392" y="6510528"/>
+            <a:ext cx="411480" cy="201168"/>
+          </a:xfrm>
+          <a:prstGeom prst="rect">
+            <a:avLst/>
+          </a:prstGeom>
+          <a:noFill/>
+          <a:ln/>
+        </p:spPr>
+        <p:txBody>
+          <a:bodyPr wrap="square" lIns="0" tIns="0" rIns="0" bIns="0" rtlCol="0" anchor="ctr"/>
+          <a:lstStyle/>
+          <a:p>
+            <a:pPr algn="r" indent="0" marL="0">
+              <a:buNone/>
+            </a:pPr>
+            <a:r>
+              <a:rPr lang="en-US" sz="900" dirty="0">
+                <a:solidFill>
+                  <a:srgbClr val="5F7181"/>
+                </a:solidFill>
+                <a:latin typeface="Aptos" pitchFamily="34" charset="0"/>
+                <a:ea typeface="Aptos" pitchFamily="34" charset="-122"/>
+                <a:cs typeface="Aptos" pitchFamily="34" charset="-120"/>
+              </a:rPr>
+              <a:t>10</a:t>
+            </a:r>
+            <a:endParaRPr lang="en-US" sz="900" dirty="0"/>
+          </a:p>
+        </p:txBody>
+      </p:sp>
+      <p:sp>
+        <p:nvSpPr>
+          <p:cNvPr id="8" name="Shape 6"/>
           <p:cNvSpPr/>
           <p:nvPr/>
         </p:nvSpPr>
@@ -3126,7 +3204,7 @@
       </p:sp>
       <p:sp>
         <p:nvSpPr>
-          <p:cNvPr id="8" name="Text 6"/>
+          <p:cNvPr id="9" name="Text 7"/>
           <p:cNvSpPr/>
           <p:nvPr/>
         </p:nvSpPr>
@@ -3165,14 +3243,14 @@
       </p:sp>
       <p:sp>
         <p:nvSpPr>
-          <p:cNvPr id="9" name="Text 7"/>
+          <p:cNvPr id="10" name="Text 8"/>
           <p:cNvSpPr/>
           <p:nvPr/>
         </p:nvSpPr>
         <p:spPr>
           <a:xfrm>
             <a:off x="640080" y="621792"/>
-            <a:ext cx="10881360" cy="566928"/>
+            <a:ext cx="10881360" cy="713232"/>
           </a:xfrm>
           <a:prstGeom prst="rect">
             <a:avLst/>
@@ -3190,7 +3268,7 @@
               <a:buNone/>
             </a:pPr>
             <a:r>
-              <a:rPr lang="en-US" sz="2700" b="1" dirty="0">
+              <a:rPr lang="en-US" sz="3400" b="1" dirty="0">
                 <a:solidFill>
                   <a:srgbClr val="003A63"/>
                 </a:solidFill>
@@ -3200,20 +3278,20 @@
               </a:rPr>
               <a:t>Technical and Governance Deep Dive</a:t>
             </a:r>
-            <a:endParaRPr lang="en-US" sz="2700" dirty="0"/>
-          </a:p>
-        </p:txBody>
-      </p:sp>
-      <p:sp>
-        <p:nvSpPr>
-          <p:cNvPr id="10" name="Text 8"/>
-          <p:cNvSpPr/>
-          <p:nvPr/>
-        </p:nvSpPr>
-        <p:spPr>
-          <a:xfrm>
-            <a:off x="868680" y="1417320"/>
-            <a:ext cx="6675120" cy="4434840"/>
+            <a:endParaRPr lang="en-US" sz="3400" dirty="0"/>
+          </a:p>
+        </p:txBody>
+      </p:sp>
+      <p:sp>
+        <p:nvSpPr>
+          <p:cNvPr id="11" name="Text 9"/>
+          <p:cNvSpPr/>
+          <p:nvPr/>
+        </p:nvSpPr>
+        <p:spPr>
+          <a:xfrm>
+            <a:off x="868680" y="1508760"/>
+            <a:ext cx="6537960" cy="4160520"/>
           </a:xfrm>
           <a:prstGeom prst="rect">
             <a:avLst/>
@@ -3228,7 +3306,7 @@
           <a:lstStyle/>
           <a:p>
             <a:r>
-              <a:rPr lang="en-US" sz="1700" dirty="0">
+              <a:rPr lang="en-US" sz="2100" dirty="0">
                 <a:solidFill>
                   <a:srgbClr val="17364A"/>
                 </a:solidFill>
@@ -3238,11 +3316,11 @@
               </a:rPr>
               <a:t>Participatory governance should be matched to the impact of the use case.</a:t>
             </a:r>
-            <a:endParaRPr lang="en-US" sz="1700" dirty="0"/>
-          </a:p>
-          <a:p>
-            <a:r>
-              <a:rPr lang="en-US" sz="1700" dirty="0">
+            <a:endParaRPr lang="en-US" sz="2100" dirty="0"/>
+          </a:p>
+          <a:p>
+            <a:r>
+              <a:rPr lang="en-US" sz="2100" dirty="0">
                 <a:solidFill>
                   <a:srgbClr val="17364A"/>
                 </a:solidFill>
@@ -3250,13 +3328,13 @@
                 <a:ea typeface="Aptos" pitchFamily="34" charset="-122"/>
                 <a:cs typeface="Aptos" pitchFamily="34" charset="-120"/>
               </a:rPr>
-              <a:t>Internal productivity tools may not require community oversight, although they still require policy and privacy review.</a:t>
-            </a:r>
-            <a:endParaRPr lang="en-US" sz="1700" dirty="0"/>
-          </a:p>
-          <a:p>
-            <a:r>
-              <a:rPr lang="en-US" sz="1700" dirty="0">
+              <a:t>Internal productivity tools may not require community oversight, although they still require policy and.</a:t>
+            </a:r>
+            <a:endParaRPr lang="en-US" sz="2100" dirty="0"/>
+          </a:p>
+          <a:p>
+            <a:r>
+              <a:rPr lang="en-US" sz="2100" dirty="0">
                 <a:solidFill>
                   <a:srgbClr val="17364A"/>
                 </a:solidFill>
@@ -3264,29 +3342,15 @@
                 <a:ea typeface="Aptos" pitchFamily="34" charset="-122"/>
                 <a:cs typeface="Aptos" pitchFamily="34" charset="-120"/>
               </a:rPr>
-              <a:t>Tools that influence public communication, service access, enforcement, prioritization, outreach, or resource allocation.</a:t>
-            </a:r>
-            <a:endParaRPr lang="en-US" sz="1700" dirty="0"/>
-          </a:p>
-          <a:p>
-            <a:r>
-              <a:rPr lang="en-US" sz="1700" dirty="0">
-                <a:solidFill>
-                  <a:srgbClr val="17364A"/>
-                </a:solidFill>
-                <a:latin typeface="Aptos" pitchFamily="34" charset="0"/>
-                <a:ea typeface="Aptos" pitchFamily="34" charset="-122"/>
-                <a:cs typeface="Aptos" pitchFamily="34" charset="-120"/>
-              </a:rPr>
-              <a:t>The higher the impact on communities, the stronger the case for involving community perspectives early.</a:t>
-            </a:r>
-            <a:endParaRPr lang="en-US" sz="1700" dirty="0"/>
-          </a:p>
-        </p:txBody>
-      </p:sp>
-      <p:sp>
-        <p:nvSpPr>
-          <p:cNvPr id="11" name="Shape 9"/>
+              <a:t>Tools that influence public communication, service access, enforcement, prioritization, outreach, or.</a:t>
+            </a:r>
+            <a:endParaRPr lang="en-US" sz="2100" dirty="0"/>
+          </a:p>
+        </p:txBody>
+      </p:sp>
+      <p:sp>
+        <p:nvSpPr>
+          <p:cNvPr id="12" name="Shape 10"/>
           <p:cNvSpPr/>
           <p:nvPr/>
         </p:nvSpPr>
@@ -3313,14 +3377,14 @@
       </p:sp>
       <p:sp>
         <p:nvSpPr>
-          <p:cNvPr id="12" name="Text 10"/>
+          <p:cNvPr id="13" name="Text 11"/>
           <p:cNvSpPr/>
           <p:nvPr/>
         </p:nvSpPr>
         <p:spPr>
           <a:xfrm>
             <a:off x="8074152" y="1563624"/>
-            <a:ext cx="2825496" cy="201168"/>
+            <a:ext cx="2825496" cy="256032"/>
           </a:xfrm>
           <a:prstGeom prst="rect">
             <a:avLst/>
@@ -3336,7 +3400,7 @@
               <a:buNone/>
             </a:pPr>
             <a:r>
-              <a:rPr lang="en-US" sz="950" b="1" dirty="0">
+              <a:rPr lang="en-US" sz="1300" b="1" dirty="0">
                 <a:solidFill>
                   <a:srgbClr val="0068B7"/>
                 </a:solidFill>
@@ -3346,20 +3410,20 @@
               </a:rPr>
               <a:t>Key idea</a:t>
             </a:r>
-            <a:endParaRPr lang="en-US" sz="950" dirty="0"/>
-          </a:p>
-        </p:txBody>
-      </p:sp>
-      <p:sp>
-        <p:nvSpPr>
-          <p:cNvPr id="13" name="Text 11"/>
-          <p:cNvSpPr/>
-          <p:nvPr/>
-        </p:nvSpPr>
-        <p:spPr>
-          <a:xfrm>
-            <a:off x="8074152" y="1856232"/>
-            <a:ext cx="2825496" cy="1261872"/>
+            <a:endParaRPr lang="en-US" sz="1300" dirty="0"/>
+          </a:p>
+        </p:txBody>
+      </p:sp>
+      <p:sp>
+        <p:nvSpPr>
+          <p:cNvPr id="14" name="Text 12"/>
+          <p:cNvSpPr/>
+          <p:nvPr/>
+        </p:nvSpPr>
+        <p:spPr>
+          <a:xfrm>
+            <a:off x="8074152" y="1920240"/>
+            <a:ext cx="2825496" cy="1188720"/>
           </a:xfrm>
           <a:prstGeom prst="rect">
             <a:avLst/>
@@ -3377,7 +3441,7 @@
               <a:buNone/>
             </a:pPr>
             <a:r>
-              <a:rPr lang="en-US" sz="1250" dirty="0">
+              <a:rPr lang="en-US" sz="1550" dirty="0">
                 <a:solidFill>
                   <a:srgbClr val="17364A"/>
                 </a:solidFill>
@@ -3387,13 +3451,13 @@
               </a:rPr>
               <a:t>Participatory governance should be matched to the impact of the use case.</a:t>
             </a:r>
-            <a:endParaRPr lang="en-US" sz="1250" dirty="0"/>
-          </a:p>
-        </p:txBody>
-      </p:sp>
-      <p:sp>
-        <p:nvSpPr>
-          <p:cNvPr id="14" name="Shape 12"/>
+            <a:endParaRPr lang="en-US" sz="1550" dirty="0"/>
+          </a:p>
+        </p:txBody>
+      </p:sp>
+      <p:sp>
+        <p:nvSpPr>
+          <p:cNvPr id="15" name="Shape 13"/>
           <p:cNvSpPr/>
           <p:nvPr/>
         </p:nvSpPr>
@@ -3420,14 +3484,14 @@
       </p:sp>
       <p:sp>
         <p:nvSpPr>
-          <p:cNvPr id="15" name="Text 13"/>
+          <p:cNvPr id="16" name="Text 14"/>
           <p:cNvSpPr/>
           <p:nvPr/>
         </p:nvSpPr>
         <p:spPr>
           <a:xfrm>
             <a:off x="8074152" y="3666744"/>
-            <a:ext cx="2825496" cy="201168"/>
+            <a:ext cx="2825496" cy="256032"/>
           </a:xfrm>
           <a:prstGeom prst="rect">
             <a:avLst/>
@@ -3443,7 +3507,7 @@
               <a:buNone/>
             </a:pPr>
             <a:r>
-              <a:rPr lang="en-US" sz="950" b="1" dirty="0">
+              <a:rPr lang="en-US" sz="1300" b="1" dirty="0">
                 <a:solidFill>
                   <a:srgbClr val="0068B7"/>
                 </a:solidFill>
@@ -3453,20 +3517,20 @@
               </a:rPr>
               <a:t>Use this for</a:t>
             </a:r>
-            <a:endParaRPr lang="en-US" sz="950" dirty="0"/>
-          </a:p>
-        </p:txBody>
-      </p:sp>
-      <p:sp>
-        <p:nvSpPr>
-          <p:cNvPr id="16" name="Text 14"/>
-          <p:cNvSpPr/>
-          <p:nvPr/>
-        </p:nvSpPr>
-        <p:spPr>
-          <a:xfrm>
-            <a:off x="8074152" y="3959352"/>
-            <a:ext cx="2825496" cy="1170432"/>
+            <a:endParaRPr lang="en-US" sz="1300" dirty="0"/>
+          </a:p>
+        </p:txBody>
+      </p:sp>
+      <p:sp>
+        <p:nvSpPr>
+          <p:cNvPr id="17" name="Text 15"/>
+          <p:cNvSpPr/>
+          <p:nvPr/>
+        </p:nvSpPr>
+        <p:spPr>
+          <a:xfrm>
+            <a:off x="8074152" y="4023360"/>
+            <a:ext cx="2825496" cy="1097280"/>
           </a:xfrm>
           <a:prstGeom prst="rect">
             <a:avLst/>
@@ -3484,7 +3548,7 @@
               <a:buNone/>
             </a:pPr>
             <a:r>
-              <a:rPr lang="en-US" sz="1250" dirty="0">
+              <a:rPr lang="en-US" sz="1550" dirty="0">
                 <a:solidFill>
                   <a:srgbClr val="17364A"/>
                 </a:solidFill>
@@ -3494,7 +3558,7 @@
               </a:rPr>
               <a:t>Connect the concept to public health decisions, safeguards, documentation, or implementation work.</a:t>
             </a:r>
-            <a:endParaRPr lang="en-US" sz="1250" dirty="0"/>
+            <a:endParaRPr lang="en-US" sz="1550" dirty="0"/>
           </a:p>
         </p:txBody>
       </p:sp>
@@ -3691,7 +3755,7 @@
                 <a:ea typeface="Aptos" pitchFamily="34" charset="-122"/>
                 <a:cs typeface="Aptos" pitchFamily="34" charset="-120"/>
               </a:rPr>
-              <a:t>© Paula Soper</a:t>
+              <a:t>Â© Paula Soper</a:t>
             </a:r>
             <a:endParaRPr lang="en-US" sz="800" dirty="0"/>
           </a:p>
@@ -3699,7 +3763,46 @@
       </p:sp>
       <p:sp>
         <p:nvSpPr>
-          <p:cNvPr id="7" name="Shape 5"/>
+          <p:cNvPr id="7" name="Text 5"/>
+          <p:cNvSpPr/>
+          <p:nvPr/>
+        </p:nvSpPr>
+        <p:spPr>
+          <a:xfrm>
+            <a:off x="11137392" y="6510528"/>
+            <a:ext cx="411480" cy="201168"/>
+          </a:xfrm>
+          <a:prstGeom prst="rect">
+            <a:avLst/>
+          </a:prstGeom>
+          <a:noFill/>
+          <a:ln/>
+        </p:spPr>
+        <p:txBody>
+          <a:bodyPr wrap="square" lIns="0" tIns="0" rIns="0" bIns="0" rtlCol="0" anchor="ctr"/>
+          <a:lstStyle/>
+          <a:p>
+            <a:pPr algn="r" indent="0" marL="0">
+              <a:buNone/>
+            </a:pPr>
+            <a:r>
+              <a:rPr lang="en-US" sz="900" dirty="0">
+                <a:solidFill>
+                  <a:srgbClr val="5F7181"/>
+                </a:solidFill>
+                <a:latin typeface="Aptos" pitchFamily="34" charset="0"/>
+                <a:ea typeface="Aptos" pitchFamily="34" charset="-122"/>
+                <a:cs typeface="Aptos" pitchFamily="34" charset="-120"/>
+              </a:rPr>
+              <a:t>11</a:t>
+            </a:r>
+            <a:endParaRPr lang="en-US" sz="900" dirty="0"/>
+          </a:p>
+        </p:txBody>
+      </p:sp>
+      <p:sp>
+        <p:nvSpPr>
+          <p:cNvPr id="8" name="Shape 6"/>
           <p:cNvSpPr/>
           <p:nvPr/>
         </p:nvSpPr>
@@ -3724,7 +3827,7 @@
       </p:sp>
       <p:sp>
         <p:nvSpPr>
-          <p:cNvPr id="8" name="Text 6"/>
+          <p:cNvPr id="9" name="Text 7"/>
           <p:cNvSpPr/>
           <p:nvPr/>
         </p:nvSpPr>
@@ -3763,14 +3866,14 @@
       </p:sp>
       <p:sp>
         <p:nvSpPr>
-          <p:cNvPr id="9" name="Text 7"/>
+          <p:cNvPr id="10" name="Text 8"/>
           <p:cNvSpPr/>
           <p:nvPr/>
         </p:nvSpPr>
         <p:spPr>
           <a:xfrm>
             <a:off x="640080" y="621792"/>
-            <a:ext cx="10881360" cy="566928"/>
+            <a:ext cx="10881360" cy="713232"/>
           </a:xfrm>
           <a:prstGeom prst="rect">
             <a:avLst/>
@@ -3788,7 +3891,7 @@
               <a:buNone/>
             </a:pPr>
             <a:r>
-              <a:rPr lang="en-US" sz="2700" b="1" dirty="0">
+              <a:rPr lang="en-US" sz="3400" b="1" dirty="0">
                 <a:solidFill>
                   <a:srgbClr val="003A63"/>
                 </a:solidFill>
@@ -3798,20 +3901,20 @@
               </a:rPr>
               <a:t>Risks, Failure Modes, and Guardrails</a:t>
             </a:r>
-            <a:endParaRPr lang="en-US" sz="2700" dirty="0"/>
-          </a:p>
-        </p:txBody>
-      </p:sp>
-      <p:sp>
-        <p:nvSpPr>
-          <p:cNvPr id="10" name="Text 8"/>
-          <p:cNvSpPr/>
-          <p:nvPr/>
-        </p:nvSpPr>
-        <p:spPr>
-          <a:xfrm>
-            <a:off x="868680" y="1417320"/>
-            <a:ext cx="6675120" cy="4434840"/>
+            <a:endParaRPr lang="en-US" sz="3400" dirty="0"/>
+          </a:p>
+        </p:txBody>
+      </p:sp>
+      <p:sp>
+        <p:nvSpPr>
+          <p:cNvPr id="11" name="Text 9"/>
+          <p:cNvSpPr/>
+          <p:nvPr/>
+        </p:nvSpPr>
+        <p:spPr>
+          <a:xfrm>
+            <a:off x="868680" y="1508760"/>
+            <a:ext cx="6537960" cy="4160520"/>
           </a:xfrm>
           <a:prstGeom prst="rect">
             <a:avLst/>
@@ -3826,7 +3929,7 @@
           <a:lstStyle/>
           <a:p>
             <a:r>
-              <a:rPr lang="en-US" sz="1700" dirty="0">
+              <a:rPr lang="en-US" sz="2100" dirty="0">
                 <a:solidFill>
                   <a:srgbClr val="17364A"/>
                 </a:solidFill>
@@ -3836,11 +3939,11 @@
               </a:rPr>
               <a:t>One risk is tokenistic engagement.</a:t>
             </a:r>
-            <a:endParaRPr lang="en-US" sz="1700" dirty="0"/>
-          </a:p>
-          <a:p>
-            <a:r>
-              <a:rPr lang="en-US" sz="1700" dirty="0">
+            <a:endParaRPr lang="en-US" sz="2100" dirty="0"/>
+          </a:p>
+          <a:p>
+            <a:r>
+              <a:rPr lang="en-US" sz="2100" dirty="0">
                 <a:solidFill>
                   <a:srgbClr val="17364A"/>
                 </a:solidFill>
@@ -3850,11 +3953,11 @@
               </a:rPr>
               <a:t>Agencies may seek community input after key decisions have already been made.</a:t>
             </a:r>
-            <a:endParaRPr lang="en-US" sz="1700" dirty="0"/>
-          </a:p>
-          <a:p>
-            <a:r>
-              <a:rPr lang="en-US" sz="1700" dirty="0">
+            <a:endParaRPr lang="en-US" sz="2100" dirty="0"/>
+          </a:p>
+          <a:p>
+            <a:r>
+              <a:rPr lang="en-US" sz="2100" dirty="0">
                 <a:solidFill>
                   <a:srgbClr val="17364A"/>
                 </a:solidFill>
@@ -3864,27 +3967,13 @@
               </a:rPr>
               <a:t>A guardrail is to engage before requirements, safeguards, and success measures are finalized.</a:t>
             </a:r>
-            <a:endParaRPr lang="en-US" sz="1700" dirty="0"/>
-          </a:p>
-          <a:p>
-            <a:r>
-              <a:rPr lang="en-US" sz="1700" dirty="0">
-                <a:solidFill>
-                  <a:srgbClr val="17364A"/>
-                </a:solidFill>
-                <a:latin typeface="Aptos" pitchFamily="34" charset="0"/>
-                <a:ea typeface="Aptos" pitchFamily="34" charset="-122"/>
-                <a:cs typeface="Aptos" pitchFamily="34" charset="-120"/>
-              </a:rPr>
-              <a:t>Another risk is technical opacity.</a:t>
-            </a:r>
-            <a:endParaRPr lang="en-US" sz="1700" dirty="0"/>
-          </a:p>
-        </p:txBody>
-      </p:sp>
-      <p:sp>
-        <p:nvSpPr>
-          <p:cNvPr id="11" name="Shape 9"/>
+            <a:endParaRPr lang="en-US" sz="2100" dirty="0"/>
+          </a:p>
+        </p:txBody>
+      </p:sp>
+      <p:sp>
+        <p:nvSpPr>
+          <p:cNvPr id="12" name="Shape 10"/>
           <p:cNvSpPr/>
           <p:nvPr/>
         </p:nvSpPr>
@@ -3911,14 +4000,14 @@
       </p:sp>
       <p:sp>
         <p:nvSpPr>
-          <p:cNvPr id="12" name="Text 10"/>
+          <p:cNvPr id="13" name="Text 11"/>
           <p:cNvSpPr/>
           <p:nvPr/>
         </p:nvSpPr>
         <p:spPr>
           <a:xfrm>
             <a:off x="8074152" y="1563624"/>
-            <a:ext cx="2825496" cy="201168"/>
+            <a:ext cx="2825496" cy="256032"/>
           </a:xfrm>
           <a:prstGeom prst="rect">
             <a:avLst/>
@@ -3934,7 +4023,7 @@
               <a:buNone/>
             </a:pPr>
             <a:r>
-              <a:rPr lang="en-US" sz="950" b="1" dirty="0">
+              <a:rPr lang="en-US" sz="1300" b="1" dirty="0">
                 <a:solidFill>
                   <a:srgbClr val="0068B7"/>
                 </a:solidFill>
@@ -3944,20 +4033,20 @@
               </a:rPr>
               <a:t>Key idea</a:t>
             </a:r>
-            <a:endParaRPr lang="en-US" sz="950" dirty="0"/>
-          </a:p>
-        </p:txBody>
-      </p:sp>
-      <p:sp>
-        <p:nvSpPr>
-          <p:cNvPr id="13" name="Text 11"/>
-          <p:cNvSpPr/>
-          <p:nvPr/>
-        </p:nvSpPr>
-        <p:spPr>
-          <a:xfrm>
-            <a:off x="8074152" y="1856232"/>
-            <a:ext cx="2825496" cy="1261872"/>
+            <a:endParaRPr lang="en-US" sz="1300" dirty="0"/>
+          </a:p>
+        </p:txBody>
+      </p:sp>
+      <p:sp>
+        <p:nvSpPr>
+          <p:cNvPr id="14" name="Text 12"/>
+          <p:cNvSpPr/>
+          <p:nvPr/>
+        </p:nvSpPr>
+        <p:spPr>
+          <a:xfrm>
+            <a:off x="8074152" y="1920240"/>
+            <a:ext cx="2825496" cy="1188720"/>
           </a:xfrm>
           <a:prstGeom prst="rect">
             <a:avLst/>
@@ -3975,7 +4064,7 @@
               <a:buNone/>
             </a:pPr>
             <a:r>
-              <a:rPr lang="en-US" sz="1250" dirty="0">
+              <a:rPr lang="en-US" sz="1550" dirty="0">
                 <a:solidFill>
                   <a:srgbClr val="17364A"/>
                 </a:solidFill>
@@ -3985,13 +4074,13 @@
               </a:rPr>
               <a:t>One risk is tokenistic engagement.</a:t>
             </a:r>
-            <a:endParaRPr lang="en-US" sz="1250" dirty="0"/>
-          </a:p>
-        </p:txBody>
-      </p:sp>
-      <p:sp>
-        <p:nvSpPr>
-          <p:cNvPr id="14" name="Shape 12"/>
+            <a:endParaRPr lang="en-US" sz="1550" dirty="0"/>
+          </a:p>
+        </p:txBody>
+      </p:sp>
+      <p:sp>
+        <p:nvSpPr>
+          <p:cNvPr id="15" name="Shape 13"/>
           <p:cNvSpPr/>
           <p:nvPr/>
         </p:nvSpPr>
@@ -4018,14 +4107,14 @@
       </p:sp>
       <p:sp>
         <p:nvSpPr>
-          <p:cNvPr id="15" name="Text 13"/>
+          <p:cNvPr id="16" name="Text 14"/>
           <p:cNvSpPr/>
           <p:nvPr/>
         </p:nvSpPr>
         <p:spPr>
           <a:xfrm>
             <a:off x="8074152" y="3666744"/>
-            <a:ext cx="2825496" cy="201168"/>
+            <a:ext cx="2825496" cy="256032"/>
           </a:xfrm>
           <a:prstGeom prst="rect">
             <a:avLst/>
@@ -4041,7 +4130,7 @@
               <a:buNone/>
             </a:pPr>
             <a:r>
-              <a:rPr lang="en-US" sz="950" b="1" dirty="0">
+              <a:rPr lang="en-US" sz="1300" b="1" dirty="0">
                 <a:solidFill>
                   <a:srgbClr val="0068B7"/>
                 </a:solidFill>
@@ -4051,20 +4140,20 @@
               </a:rPr>
               <a:t>Use this for</a:t>
             </a:r>
-            <a:endParaRPr lang="en-US" sz="950" dirty="0"/>
-          </a:p>
-        </p:txBody>
-      </p:sp>
-      <p:sp>
-        <p:nvSpPr>
-          <p:cNvPr id="16" name="Text 14"/>
-          <p:cNvSpPr/>
-          <p:nvPr/>
-        </p:nvSpPr>
-        <p:spPr>
-          <a:xfrm>
-            <a:off x="8074152" y="3959352"/>
-            <a:ext cx="2825496" cy="1170432"/>
+            <a:endParaRPr lang="en-US" sz="1300" dirty="0"/>
+          </a:p>
+        </p:txBody>
+      </p:sp>
+      <p:sp>
+        <p:nvSpPr>
+          <p:cNvPr id="17" name="Text 15"/>
+          <p:cNvSpPr/>
+          <p:nvPr/>
+        </p:nvSpPr>
+        <p:spPr>
+          <a:xfrm>
+            <a:off x="8074152" y="4023360"/>
+            <a:ext cx="2825496" cy="1097280"/>
           </a:xfrm>
           <a:prstGeom prst="rect">
             <a:avLst/>
@@ -4082,7 +4171,7 @@
               <a:buNone/>
             </a:pPr>
             <a:r>
-              <a:rPr lang="en-US" sz="1250" dirty="0">
+              <a:rPr lang="en-US" sz="1550" dirty="0">
                 <a:solidFill>
                   <a:srgbClr val="17364A"/>
                 </a:solidFill>
@@ -4092,7 +4181,7 @@
               </a:rPr>
               <a:t>Connect the concept to public health decisions, safeguards, documentation, or implementation work.</a:t>
             </a:r>
-            <a:endParaRPr lang="en-US" sz="1250" dirty="0"/>
+            <a:endParaRPr lang="en-US" sz="1550" dirty="0"/>
           </a:p>
         </p:txBody>
       </p:sp>
@@ -4289,7 +4378,7 @@
                 <a:ea typeface="Aptos" pitchFamily="34" charset="-122"/>
                 <a:cs typeface="Aptos" pitchFamily="34" charset="-120"/>
               </a:rPr>
-              <a:t>© Paula Soper</a:t>
+              <a:t>Â© Paula Soper</a:t>
             </a:r>
             <a:endParaRPr lang="en-US" sz="800" dirty="0"/>
           </a:p>
@@ -4297,7 +4386,46 @@
       </p:sp>
       <p:sp>
         <p:nvSpPr>
-          <p:cNvPr id="7" name="Shape 5"/>
+          <p:cNvPr id="7" name="Text 5"/>
+          <p:cNvSpPr/>
+          <p:nvPr/>
+        </p:nvSpPr>
+        <p:spPr>
+          <a:xfrm>
+            <a:off x="11137392" y="6510528"/>
+            <a:ext cx="411480" cy="201168"/>
+          </a:xfrm>
+          <a:prstGeom prst="rect">
+            <a:avLst/>
+          </a:prstGeom>
+          <a:noFill/>
+          <a:ln/>
+        </p:spPr>
+        <p:txBody>
+          <a:bodyPr wrap="square" lIns="0" tIns="0" rIns="0" bIns="0" rtlCol="0" anchor="ctr"/>
+          <a:lstStyle/>
+          <a:p>
+            <a:pPr algn="r" indent="0" marL="0">
+              <a:buNone/>
+            </a:pPr>
+            <a:r>
+              <a:rPr lang="en-US" sz="900" dirty="0">
+                <a:solidFill>
+                  <a:srgbClr val="5F7181"/>
+                </a:solidFill>
+                <a:latin typeface="Aptos" pitchFamily="34" charset="0"/>
+                <a:ea typeface="Aptos" pitchFamily="34" charset="-122"/>
+                <a:cs typeface="Aptos" pitchFamily="34" charset="-120"/>
+              </a:rPr>
+              <a:t>12</a:t>
+            </a:r>
+            <a:endParaRPr lang="en-US" sz="900" dirty="0"/>
+          </a:p>
+        </p:txBody>
+      </p:sp>
+      <p:sp>
+        <p:nvSpPr>
+          <p:cNvPr id="8" name="Shape 6"/>
           <p:cNvSpPr/>
           <p:nvPr/>
         </p:nvSpPr>
@@ -4322,7 +4450,7 @@
       </p:sp>
       <p:sp>
         <p:nvSpPr>
-          <p:cNvPr id="8" name="Text 6"/>
+          <p:cNvPr id="9" name="Text 7"/>
           <p:cNvSpPr/>
           <p:nvPr/>
         </p:nvSpPr>
@@ -4361,14 +4489,14 @@
       </p:sp>
       <p:sp>
         <p:nvSpPr>
-          <p:cNvPr id="9" name="Text 7"/>
+          <p:cNvPr id="10" name="Text 8"/>
           <p:cNvSpPr/>
           <p:nvPr/>
         </p:nvSpPr>
         <p:spPr>
           <a:xfrm>
             <a:off x="640080" y="621792"/>
-            <a:ext cx="10881360" cy="566928"/>
+            <a:ext cx="10881360" cy="713232"/>
           </a:xfrm>
           <a:prstGeom prst="rect">
             <a:avLst/>
@@ -4386,7 +4514,7 @@
               <a:buNone/>
             </a:pPr>
             <a:r>
-              <a:rPr lang="en-US" sz="2700" b="1" dirty="0">
+              <a:rPr lang="en-US" sz="3400" b="1" dirty="0">
                 <a:solidFill>
                   <a:srgbClr val="003A63"/>
                 </a:solidFill>
@@ -4396,20 +4524,20 @@
               </a:rPr>
               <a:t>Application to AI-Supported Workflows</a:t>
             </a:r>
-            <a:endParaRPr lang="en-US" sz="2700" dirty="0"/>
-          </a:p>
-        </p:txBody>
-      </p:sp>
-      <p:sp>
-        <p:nvSpPr>
-          <p:cNvPr id="10" name="Text 8"/>
-          <p:cNvSpPr/>
-          <p:nvPr/>
-        </p:nvSpPr>
-        <p:spPr>
-          <a:xfrm>
-            <a:off x="868680" y="1417320"/>
-            <a:ext cx="6675120" cy="4434840"/>
+            <a:endParaRPr lang="en-US" sz="3400" dirty="0"/>
+          </a:p>
+        </p:txBody>
+      </p:sp>
+      <p:sp>
+        <p:nvSpPr>
+          <p:cNvPr id="11" name="Text 9"/>
+          <p:cNvSpPr/>
+          <p:nvPr/>
+        </p:nvSpPr>
+        <p:spPr>
+          <a:xfrm>
+            <a:off x="868680" y="1508760"/>
+            <a:ext cx="6537960" cy="4160520"/>
           </a:xfrm>
           <a:prstGeom prst="rect">
             <a:avLst/>
@@ -4424,7 +4552,7 @@
           <a:lstStyle/>
           <a:p>
             <a:r>
-              <a:rPr lang="en-US" sz="1700" dirty="0">
+              <a:rPr lang="en-US" sz="2100" dirty="0">
                 <a:solidFill>
                   <a:srgbClr val="17364A"/>
                 </a:solidFill>
@@ -4432,13 +4560,13 @@
                 <a:ea typeface="Aptos" pitchFamily="34" charset="-122"/>
                 <a:cs typeface="Aptos" pitchFamily="34" charset="-120"/>
               </a:rPr>
-              <a:t>Generative AI tools that produce public messages may benefit from community review for tone, trust, accessibility, and.</a:t>
-            </a:r>
-            <a:endParaRPr lang="en-US" sz="1700" dirty="0"/>
-          </a:p>
-          <a:p>
-            <a:r>
-              <a:rPr lang="en-US" sz="1700" dirty="0">
+              <a:t>Generative AI tools that produce public messages may benefit from community review for tone, trust,.</a:t>
+            </a:r>
+            <a:endParaRPr lang="en-US" sz="2100" dirty="0"/>
+          </a:p>
+          <a:p>
+            <a:r>
+              <a:rPr lang="en-US" sz="2100" dirty="0">
                 <a:solidFill>
                   <a:srgbClr val="17364A"/>
                 </a:solidFill>
@@ -4446,13 +4574,13 @@
                 <a:ea typeface="Aptos" pitchFamily="34" charset="-122"/>
                 <a:cs typeface="Aptos" pitchFamily="34" charset="-120"/>
               </a:rPr>
-              <a:t>Predictive models used for outreach or allocation should include review of data representativeness and potential stigma.</a:t>
-            </a:r>
-            <a:endParaRPr lang="en-US" sz="1700" dirty="0"/>
-          </a:p>
-          <a:p>
-            <a:r>
-              <a:rPr lang="en-US" sz="1700" dirty="0">
+              <a:t>Predictive models used for outreach or allocation should include review of data representativeness and.</a:t>
+            </a:r>
+            <a:endParaRPr lang="en-US" sz="2100" dirty="0"/>
+          </a:p>
+          <a:p>
+            <a:r>
+              <a:rPr lang="en-US" sz="2100" dirty="0">
                 <a:solidFill>
                   <a:srgbClr val="17364A"/>
                 </a:solidFill>
@@ -4460,15 +4588,15 @@
                 <a:ea typeface="Aptos" pitchFamily="34" charset="-122"/>
                 <a:cs typeface="Aptos" pitchFamily="34" charset="-120"/>
               </a:rPr>
-              <a:t>Agentic tools that trigger actions affecting residents should have clear community-informed escalation and correction.</a:t>
-            </a:r>
-            <a:endParaRPr lang="en-US" sz="1700" dirty="0"/>
-          </a:p>
-        </p:txBody>
-      </p:sp>
-      <p:sp>
-        <p:nvSpPr>
-          <p:cNvPr id="11" name="Shape 9"/>
+              <a:t>Agentic tools that trigger actions affecting residents should have clear community-informed escalation.</a:t>
+            </a:r>
+            <a:endParaRPr lang="en-US" sz="2100" dirty="0"/>
+          </a:p>
+        </p:txBody>
+      </p:sp>
+      <p:sp>
+        <p:nvSpPr>
+          <p:cNvPr id="12" name="Shape 10"/>
           <p:cNvSpPr/>
           <p:nvPr/>
         </p:nvSpPr>
@@ -4495,14 +4623,14 @@
       </p:sp>
       <p:sp>
         <p:nvSpPr>
-          <p:cNvPr id="12" name="Text 10"/>
+          <p:cNvPr id="13" name="Text 11"/>
           <p:cNvSpPr/>
           <p:nvPr/>
         </p:nvSpPr>
         <p:spPr>
           <a:xfrm>
             <a:off x="8074152" y="1563624"/>
-            <a:ext cx="2825496" cy="201168"/>
+            <a:ext cx="2825496" cy="256032"/>
           </a:xfrm>
           <a:prstGeom prst="rect">
             <a:avLst/>
@@ -4518,7 +4646,7 @@
               <a:buNone/>
             </a:pPr>
             <a:r>
-              <a:rPr lang="en-US" sz="950" b="1" dirty="0">
+              <a:rPr lang="en-US" sz="1300" b="1" dirty="0">
                 <a:solidFill>
                   <a:srgbClr val="0068B7"/>
                 </a:solidFill>
@@ -4528,20 +4656,20 @@
               </a:rPr>
               <a:t>Key idea</a:t>
             </a:r>
-            <a:endParaRPr lang="en-US" sz="950" dirty="0"/>
-          </a:p>
-        </p:txBody>
-      </p:sp>
-      <p:sp>
-        <p:nvSpPr>
-          <p:cNvPr id="13" name="Text 11"/>
-          <p:cNvSpPr/>
-          <p:nvPr/>
-        </p:nvSpPr>
-        <p:spPr>
-          <a:xfrm>
-            <a:off x="8074152" y="1856232"/>
-            <a:ext cx="2825496" cy="1261872"/>
+            <a:endParaRPr lang="en-US" sz="1300" dirty="0"/>
+          </a:p>
+        </p:txBody>
+      </p:sp>
+      <p:sp>
+        <p:nvSpPr>
+          <p:cNvPr id="14" name="Text 12"/>
+          <p:cNvSpPr/>
+          <p:nvPr/>
+        </p:nvSpPr>
+        <p:spPr>
+          <a:xfrm>
+            <a:off x="8074152" y="1920240"/>
+            <a:ext cx="2825496" cy="1188720"/>
           </a:xfrm>
           <a:prstGeom prst="rect">
             <a:avLst/>
@@ -4559,7 +4687,7 @@
               <a:buNone/>
             </a:pPr>
             <a:r>
-              <a:rPr lang="en-US" sz="1250" dirty="0">
+              <a:rPr lang="en-US" sz="1550" dirty="0">
                 <a:solidFill>
                   <a:srgbClr val="17364A"/>
                 </a:solidFill>
@@ -4567,15 +4695,15 @@
                 <a:ea typeface="Aptos" pitchFamily="34" charset="-122"/>
                 <a:cs typeface="Aptos" pitchFamily="34" charset="-120"/>
               </a:rPr>
-              <a:t>Generative AI tools that produce public messages may benefit from community review for tone, trust, accessibility, and.</a:t>
-            </a:r>
-            <a:endParaRPr lang="en-US" sz="1250" dirty="0"/>
-          </a:p>
-        </p:txBody>
-      </p:sp>
-      <p:sp>
-        <p:nvSpPr>
-          <p:cNvPr id="14" name="Shape 12"/>
+              <a:t>Generative AI tools that produce public messages may benefit from community review for tone, trust,.</a:t>
+            </a:r>
+            <a:endParaRPr lang="en-US" sz="1550" dirty="0"/>
+          </a:p>
+        </p:txBody>
+      </p:sp>
+      <p:sp>
+        <p:nvSpPr>
+          <p:cNvPr id="15" name="Shape 13"/>
           <p:cNvSpPr/>
           <p:nvPr/>
         </p:nvSpPr>
@@ -4602,14 +4730,14 @@
       </p:sp>
       <p:sp>
         <p:nvSpPr>
-          <p:cNvPr id="15" name="Text 13"/>
+          <p:cNvPr id="16" name="Text 14"/>
           <p:cNvSpPr/>
           <p:nvPr/>
         </p:nvSpPr>
         <p:spPr>
           <a:xfrm>
             <a:off x="8074152" y="3666744"/>
-            <a:ext cx="2825496" cy="201168"/>
+            <a:ext cx="2825496" cy="256032"/>
           </a:xfrm>
           <a:prstGeom prst="rect">
             <a:avLst/>
@@ -4625,7 +4753,7 @@
               <a:buNone/>
             </a:pPr>
             <a:r>
-              <a:rPr lang="en-US" sz="950" b="1" dirty="0">
+              <a:rPr lang="en-US" sz="1300" b="1" dirty="0">
                 <a:solidFill>
                   <a:srgbClr val="0068B7"/>
                 </a:solidFill>
@@ -4635,20 +4763,20 @@
               </a:rPr>
               <a:t>Use this for</a:t>
             </a:r>
-            <a:endParaRPr lang="en-US" sz="950" dirty="0"/>
-          </a:p>
-        </p:txBody>
-      </p:sp>
-      <p:sp>
-        <p:nvSpPr>
-          <p:cNvPr id="16" name="Text 14"/>
-          <p:cNvSpPr/>
-          <p:nvPr/>
-        </p:nvSpPr>
-        <p:spPr>
-          <a:xfrm>
-            <a:off x="8074152" y="3959352"/>
-            <a:ext cx="2825496" cy="1170432"/>
+            <a:endParaRPr lang="en-US" sz="1300" dirty="0"/>
+          </a:p>
+        </p:txBody>
+      </p:sp>
+      <p:sp>
+        <p:nvSpPr>
+          <p:cNvPr id="17" name="Text 15"/>
+          <p:cNvSpPr/>
+          <p:nvPr/>
+        </p:nvSpPr>
+        <p:spPr>
+          <a:xfrm>
+            <a:off x="8074152" y="4023360"/>
+            <a:ext cx="2825496" cy="1097280"/>
           </a:xfrm>
           <a:prstGeom prst="rect">
             <a:avLst/>
@@ -4666,7 +4794,7 @@
               <a:buNone/>
             </a:pPr>
             <a:r>
-              <a:rPr lang="en-US" sz="1250" dirty="0">
+              <a:rPr lang="en-US" sz="1550" dirty="0">
                 <a:solidFill>
                   <a:srgbClr val="17364A"/>
                 </a:solidFill>
@@ -4676,7 +4804,7 @@
               </a:rPr>
               <a:t>Connect the concept to public health decisions, safeguards, documentation, or implementation work.</a:t>
             </a:r>
-            <a:endParaRPr lang="en-US" sz="1250" dirty="0"/>
+            <a:endParaRPr lang="en-US" sz="1550" dirty="0"/>
           </a:p>
         </p:txBody>
       </p:sp>
@@ -4873,7 +5001,7 @@
                 <a:ea typeface="Aptos" pitchFamily="34" charset="-122"/>
                 <a:cs typeface="Aptos" pitchFamily="34" charset="-120"/>
               </a:rPr>
-              <a:t>© Paula Soper</a:t>
+              <a:t>Â© Paula Soper</a:t>
             </a:r>
             <a:endParaRPr lang="en-US" sz="800" dirty="0"/>
           </a:p>
@@ -4881,7 +5009,46 @@
       </p:sp>
       <p:sp>
         <p:nvSpPr>
-          <p:cNvPr id="7" name="Shape 5"/>
+          <p:cNvPr id="7" name="Text 5"/>
+          <p:cNvSpPr/>
+          <p:nvPr/>
+        </p:nvSpPr>
+        <p:spPr>
+          <a:xfrm>
+            <a:off x="11137392" y="6510528"/>
+            <a:ext cx="411480" cy="201168"/>
+          </a:xfrm>
+          <a:prstGeom prst="rect">
+            <a:avLst/>
+          </a:prstGeom>
+          <a:noFill/>
+          <a:ln/>
+        </p:spPr>
+        <p:txBody>
+          <a:bodyPr wrap="square" lIns="0" tIns="0" rIns="0" bIns="0" rtlCol="0" anchor="ctr"/>
+          <a:lstStyle/>
+          <a:p>
+            <a:pPr algn="r" indent="0" marL="0">
+              <a:buNone/>
+            </a:pPr>
+            <a:r>
+              <a:rPr lang="en-US" sz="900" dirty="0">
+                <a:solidFill>
+                  <a:srgbClr val="5F7181"/>
+                </a:solidFill>
+                <a:latin typeface="Aptos" pitchFamily="34" charset="0"/>
+                <a:ea typeface="Aptos" pitchFamily="34" charset="-122"/>
+                <a:cs typeface="Aptos" pitchFamily="34" charset="-120"/>
+              </a:rPr>
+              <a:t>13</a:t>
+            </a:r>
+            <a:endParaRPr lang="en-US" sz="900" dirty="0"/>
+          </a:p>
+        </p:txBody>
+      </p:sp>
+      <p:sp>
+        <p:nvSpPr>
+          <p:cNvPr id="8" name="Shape 6"/>
           <p:cNvSpPr/>
           <p:nvPr/>
         </p:nvSpPr>
@@ -4906,7 +5073,7 @@
       </p:sp>
       <p:sp>
         <p:nvSpPr>
-          <p:cNvPr id="8" name="Text 6"/>
+          <p:cNvPr id="9" name="Text 7"/>
           <p:cNvSpPr/>
           <p:nvPr/>
         </p:nvSpPr>
@@ -4945,14 +5112,14 @@
       </p:sp>
       <p:sp>
         <p:nvSpPr>
-          <p:cNvPr id="9" name="Text 7"/>
+          <p:cNvPr id="10" name="Text 8"/>
           <p:cNvSpPr/>
           <p:nvPr/>
         </p:nvSpPr>
         <p:spPr>
           <a:xfrm>
             <a:off x="640080" y="621792"/>
-            <a:ext cx="10881360" cy="566928"/>
+            <a:ext cx="10881360" cy="713232"/>
           </a:xfrm>
           <a:prstGeom prst="rect">
             <a:avLst/>
@@ -4970,7 +5137,7 @@
               <a:buNone/>
             </a:pPr>
             <a:r>
-              <a:rPr lang="en-US" sz="2700" b="1" dirty="0">
+              <a:rPr lang="en-US" sz="3400" b="1" dirty="0">
                 <a:solidFill>
                   <a:srgbClr val="003A63"/>
                 </a:solidFill>
@@ -4980,20 +5147,20 @@
               </a:rPr>
               <a:t>Reflection Questions</a:t>
             </a:r>
-            <a:endParaRPr lang="en-US" sz="2700" dirty="0"/>
-          </a:p>
-        </p:txBody>
-      </p:sp>
-      <p:sp>
-        <p:nvSpPr>
-          <p:cNvPr id="10" name="Text 8"/>
-          <p:cNvSpPr/>
-          <p:nvPr/>
-        </p:nvSpPr>
-        <p:spPr>
-          <a:xfrm>
-            <a:off x="868680" y="1417320"/>
-            <a:ext cx="6675120" cy="4434840"/>
+            <a:endParaRPr lang="en-US" sz="3400" dirty="0"/>
+          </a:p>
+        </p:txBody>
+      </p:sp>
+      <p:sp>
+        <p:nvSpPr>
+          <p:cNvPr id="11" name="Text 9"/>
+          <p:cNvSpPr/>
+          <p:nvPr/>
+        </p:nvSpPr>
+        <p:spPr>
+          <a:xfrm>
+            <a:off x="868680" y="1508760"/>
+            <a:ext cx="6537960" cy="4160520"/>
           </a:xfrm>
           <a:prstGeom prst="rect">
             <a:avLst/>
@@ -5008,7 +5175,7 @@
           <a:lstStyle/>
           <a:p>
             <a:r>
-              <a:rPr lang="en-US" sz="1700" dirty="0">
+              <a:rPr lang="en-US" sz="2100" dirty="0">
                 <a:solidFill>
                   <a:srgbClr val="17364A"/>
                 </a:solidFill>
@@ -5016,13 +5183,13 @@
                 <a:ea typeface="Aptos" pitchFamily="34" charset="-122"/>
                 <a:cs typeface="Aptos" pitchFamily="34" charset="-120"/>
               </a:rPr>
-              <a:t>Which current or proposed AI use case in your agency raises this leadership or governance issue most clearly?</a:t>
-            </a:r>
-            <a:endParaRPr lang="en-US" sz="1700" dirty="0"/>
-          </a:p>
-          <a:p>
-            <a:r>
-              <a:rPr lang="en-US" sz="1700" dirty="0">
+              <a:t>Which current or proposed AI use case in your agency raises this leadership or governance issue most.</a:t>
+            </a:r>
+            <a:endParaRPr lang="en-US" sz="2100" dirty="0"/>
+          </a:p>
+          <a:p>
+            <a:r>
+              <a:rPr lang="en-US" sz="2100" dirty="0">
                 <a:solidFill>
                   <a:srgbClr val="17364A"/>
                 </a:solidFill>
@@ -5032,11 +5199,11 @@
               </a:rPr>
               <a:t>Who currently has authority to make decisions about this issue, and is that authority documented?</a:t>
             </a:r>
-            <a:endParaRPr lang="en-US" sz="1700" dirty="0"/>
-          </a:p>
-          <a:p>
-            <a:r>
-              <a:rPr lang="en-US" sz="1700" dirty="0">
+            <a:endParaRPr lang="en-US" sz="2100" dirty="0"/>
+          </a:p>
+          <a:p>
+            <a:r>
+              <a:rPr lang="en-US" sz="2100" dirty="0">
                 <a:solidFill>
                   <a:srgbClr val="17364A"/>
                 </a:solidFill>
@@ -5046,13 +5213,13 @@
               </a:rPr>
               <a:t>What evidence would governance or leadership need before approving the use case?</a:t>
             </a:r>
-            <a:endParaRPr lang="en-US" sz="1700" dirty="0"/>
-          </a:p>
-        </p:txBody>
-      </p:sp>
-      <p:sp>
-        <p:nvSpPr>
-          <p:cNvPr id="11" name="Shape 9"/>
+            <a:endParaRPr lang="en-US" sz="2100" dirty="0"/>
+          </a:p>
+        </p:txBody>
+      </p:sp>
+      <p:sp>
+        <p:nvSpPr>
+          <p:cNvPr id="12" name="Shape 10"/>
           <p:cNvSpPr/>
           <p:nvPr/>
         </p:nvSpPr>
@@ -5079,14 +5246,14 @@
       </p:sp>
       <p:sp>
         <p:nvSpPr>
-          <p:cNvPr id="12" name="Text 10"/>
+          <p:cNvPr id="13" name="Text 11"/>
           <p:cNvSpPr/>
           <p:nvPr/>
         </p:nvSpPr>
         <p:spPr>
           <a:xfrm>
             <a:off x="8074152" y="1563624"/>
-            <a:ext cx="2825496" cy="201168"/>
+            <a:ext cx="2825496" cy="256032"/>
           </a:xfrm>
           <a:prstGeom prst="rect">
             <a:avLst/>
@@ -5102,7 +5269,7 @@
               <a:buNone/>
             </a:pPr>
             <a:r>
-              <a:rPr lang="en-US" sz="950" b="1" dirty="0">
+              <a:rPr lang="en-US" sz="1300" b="1" dirty="0">
                 <a:solidFill>
                   <a:srgbClr val="0068B7"/>
                 </a:solidFill>
@@ -5112,20 +5279,20 @@
               </a:rPr>
               <a:t>Key idea</a:t>
             </a:r>
-            <a:endParaRPr lang="en-US" sz="950" dirty="0"/>
-          </a:p>
-        </p:txBody>
-      </p:sp>
-      <p:sp>
-        <p:nvSpPr>
-          <p:cNvPr id="13" name="Text 11"/>
-          <p:cNvSpPr/>
-          <p:nvPr/>
-        </p:nvSpPr>
-        <p:spPr>
-          <a:xfrm>
-            <a:off x="8074152" y="1856232"/>
-            <a:ext cx="2825496" cy="1261872"/>
+            <a:endParaRPr lang="en-US" sz="1300" dirty="0"/>
+          </a:p>
+        </p:txBody>
+      </p:sp>
+      <p:sp>
+        <p:nvSpPr>
+          <p:cNvPr id="14" name="Text 12"/>
+          <p:cNvSpPr/>
+          <p:nvPr/>
+        </p:nvSpPr>
+        <p:spPr>
+          <a:xfrm>
+            <a:off x="8074152" y="1920240"/>
+            <a:ext cx="2825496" cy="1188720"/>
           </a:xfrm>
           <a:prstGeom prst="rect">
             <a:avLst/>
@@ -5143,7 +5310,7 @@
               <a:buNone/>
             </a:pPr>
             <a:r>
-              <a:rPr lang="en-US" sz="1250" dirty="0">
+              <a:rPr lang="en-US" sz="1550" dirty="0">
                 <a:solidFill>
                   <a:srgbClr val="17364A"/>
                 </a:solidFill>
@@ -5151,15 +5318,15 @@
                 <a:ea typeface="Aptos" pitchFamily="34" charset="-122"/>
                 <a:cs typeface="Aptos" pitchFamily="34" charset="-120"/>
               </a:rPr>
-              <a:t>Which current or proposed AI use case in your agency raises this leadership or governance issue most clearly?</a:t>
-            </a:r>
-            <a:endParaRPr lang="en-US" sz="1250" dirty="0"/>
-          </a:p>
-        </p:txBody>
-      </p:sp>
-      <p:sp>
-        <p:nvSpPr>
-          <p:cNvPr id="14" name="Shape 12"/>
+              <a:t>Which current or proposed AI use case in your agency raises this leadership or governance issue most.</a:t>
+            </a:r>
+            <a:endParaRPr lang="en-US" sz="1550" dirty="0"/>
+          </a:p>
+        </p:txBody>
+      </p:sp>
+      <p:sp>
+        <p:nvSpPr>
+          <p:cNvPr id="15" name="Shape 13"/>
           <p:cNvSpPr/>
           <p:nvPr/>
         </p:nvSpPr>
@@ -5186,14 +5353,14 @@
       </p:sp>
       <p:sp>
         <p:nvSpPr>
-          <p:cNvPr id="15" name="Text 13"/>
+          <p:cNvPr id="16" name="Text 14"/>
           <p:cNvSpPr/>
           <p:nvPr/>
         </p:nvSpPr>
         <p:spPr>
           <a:xfrm>
             <a:off x="8074152" y="3666744"/>
-            <a:ext cx="2825496" cy="201168"/>
+            <a:ext cx="2825496" cy="256032"/>
           </a:xfrm>
           <a:prstGeom prst="rect">
             <a:avLst/>
@@ -5209,7 +5376,7 @@
               <a:buNone/>
             </a:pPr>
             <a:r>
-              <a:rPr lang="en-US" sz="950" b="1" dirty="0">
+              <a:rPr lang="en-US" sz="1300" b="1" dirty="0">
                 <a:solidFill>
                   <a:srgbClr val="0068B7"/>
                 </a:solidFill>
@@ -5219,20 +5386,20 @@
               </a:rPr>
               <a:t>Use this for</a:t>
             </a:r>
-            <a:endParaRPr lang="en-US" sz="950" dirty="0"/>
-          </a:p>
-        </p:txBody>
-      </p:sp>
-      <p:sp>
-        <p:nvSpPr>
-          <p:cNvPr id="16" name="Text 14"/>
-          <p:cNvSpPr/>
-          <p:nvPr/>
-        </p:nvSpPr>
-        <p:spPr>
-          <a:xfrm>
-            <a:off x="8074152" y="3959352"/>
-            <a:ext cx="2825496" cy="1170432"/>
+            <a:endParaRPr lang="en-US" sz="1300" dirty="0"/>
+          </a:p>
+        </p:txBody>
+      </p:sp>
+      <p:sp>
+        <p:nvSpPr>
+          <p:cNvPr id="17" name="Text 15"/>
+          <p:cNvSpPr/>
+          <p:nvPr/>
+        </p:nvSpPr>
+        <p:spPr>
+          <a:xfrm>
+            <a:off x="8074152" y="4023360"/>
+            <a:ext cx="2825496" cy="1097280"/>
           </a:xfrm>
           <a:prstGeom prst="rect">
             <a:avLst/>
@@ -5250,7 +5417,7 @@
               <a:buNone/>
             </a:pPr>
             <a:r>
-              <a:rPr lang="en-US" sz="1250" dirty="0">
+              <a:rPr lang="en-US" sz="1550" dirty="0">
                 <a:solidFill>
                   <a:srgbClr val="17364A"/>
                 </a:solidFill>
@@ -5260,7 +5427,7 @@
               </a:rPr>
               <a:t>Connect the concept to public health decisions, safeguards, documentation, or implementation work.</a:t>
             </a:r>
-            <a:endParaRPr lang="en-US" sz="1250" dirty="0"/>
+            <a:endParaRPr lang="en-US" sz="1550" dirty="0"/>
           </a:p>
         </p:txBody>
       </p:sp>
@@ -5457,7 +5624,7 @@
                 <a:ea typeface="Aptos" pitchFamily="34" charset="-122"/>
                 <a:cs typeface="Aptos" pitchFamily="34" charset="-120"/>
               </a:rPr>
-              <a:t>© Paula Soper</a:t>
+              <a:t>Â© Paula Soper</a:t>
             </a:r>
             <a:endParaRPr lang="en-US" sz="800" dirty="0"/>
           </a:p>
@@ -5471,8 +5638,47 @@
         </p:nvSpPr>
         <p:spPr>
           <a:xfrm>
+            <a:off x="11137392" y="6510528"/>
+            <a:ext cx="411480" cy="201168"/>
+          </a:xfrm>
+          <a:prstGeom prst="rect">
+            <a:avLst/>
+          </a:prstGeom>
+          <a:noFill/>
+          <a:ln/>
+        </p:spPr>
+        <p:txBody>
+          <a:bodyPr wrap="square" lIns="0" tIns="0" rIns="0" bIns="0" rtlCol="0" anchor="ctr"/>
+          <a:lstStyle/>
+          <a:p>
+            <a:pPr algn="r" indent="0" marL="0">
+              <a:buNone/>
+            </a:pPr>
+            <a:r>
+              <a:rPr lang="en-US" sz="900" dirty="0">
+                <a:solidFill>
+                  <a:srgbClr val="5F7181"/>
+                </a:solidFill>
+                <a:latin typeface="Aptos" pitchFamily="34" charset="0"/>
+                <a:ea typeface="Aptos" pitchFamily="34" charset="-122"/>
+                <a:cs typeface="Aptos" pitchFamily="34" charset="-120"/>
+              </a:rPr>
+              <a:t>14</a:t>
+            </a:r>
+            <a:endParaRPr lang="en-US" sz="900" dirty="0"/>
+          </a:p>
+        </p:txBody>
+      </p:sp>
+      <p:sp>
+        <p:nvSpPr>
+          <p:cNvPr id="8" name="Text 6"/>
+          <p:cNvSpPr/>
+          <p:nvPr/>
+        </p:nvSpPr>
+        <p:spPr>
+          <a:xfrm>
             <a:off x="640080" y="658368"/>
-            <a:ext cx="10881360" cy="566928"/>
+            <a:ext cx="10881360" cy="713232"/>
           </a:xfrm>
           <a:prstGeom prst="rect">
             <a:avLst/>
@@ -5490,7 +5696,7 @@
               <a:buNone/>
             </a:pPr>
             <a:r>
-              <a:rPr lang="en-US" sz="2700" b="1" dirty="0">
+              <a:rPr lang="en-US" sz="3400" b="1" dirty="0">
                 <a:solidFill>
                   <a:srgbClr val="003A63"/>
                 </a:solidFill>
@@ -5500,20 +5706,20 @@
               </a:rPr>
               <a:t>Reflection Questions Continued</a:t>
             </a:r>
-            <a:endParaRPr lang="en-US" sz="2700" dirty="0"/>
-          </a:p>
-        </p:txBody>
-      </p:sp>
-      <p:sp>
-        <p:nvSpPr>
-          <p:cNvPr id="8" name="Text 6"/>
-          <p:cNvSpPr/>
-          <p:nvPr/>
-        </p:nvSpPr>
-        <p:spPr>
-          <a:xfrm>
-            <a:off x="868680" y="1417320"/>
-            <a:ext cx="6675120" cy="4434840"/>
+            <a:endParaRPr lang="en-US" sz="3400" dirty="0"/>
+          </a:p>
+        </p:txBody>
+      </p:sp>
+      <p:sp>
+        <p:nvSpPr>
+          <p:cNvPr id="9" name="Text 7"/>
+          <p:cNvSpPr/>
+          <p:nvPr/>
+        </p:nvSpPr>
+        <p:spPr>
+          <a:xfrm>
+            <a:off x="868680" y="1508760"/>
+            <a:ext cx="6537960" cy="4160520"/>
           </a:xfrm>
           <a:prstGeom prst="rect">
             <a:avLst/>
@@ -5528,7 +5734,7 @@
           <a:lstStyle/>
           <a:p>
             <a:r>
-              <a:rPr lang="en-US" sz="1700" dirty="0">
+              <a:rPr lang="en-US" sz="2100" dirty="0">
                 <a:solidFill>
                   <a:srgbClr val="17364A"/>
                 </a:solidFill>
@@ -5538,11 +5744,11 @@
               </a:rPr>
               <a:t>Which staff, partners, or communities would be affected if this issue were handled poorly?</a:t>
             </a:r>
-            <a:endParaRPr lang="en-US" sz="1700" dirty="0"/>
-          </a:p>
-          <a:p>
-            <a:r>
-              <a:rPr lang="en-US" sz="1700" dirty="0">
+            <a:endParaRPr lang="en-US" sz="2100" dirty="0"/>
+          </a:p>
+          <a:p>
+            <a:r>
+              <a:rPr lang="en-US" sz="2100" dirty="0">
                 <a:solidFill>
                   <a:srgbClr val="17364A"/>
                 </a:solidFill>
@@ -5552,13 +5758,13 @@
               </a:rPr>
               <a:t>What policy, process, or artifact should be created or updated after this module?</a:t>
             </a:r>
-            <a:endParaRPr lang="en-US" sz="1700" dirty="0"/>
-          </a:p>
-        </p:txBody>
-      </p:sp>
-      <p:sp>
-        <p:nvSpPr>
-          <p:cNvPr id="9" name="Shape 7"/>
+            <a:endParaRPr lang="en-US" sz="2100" dirty="0"/>
+          </a:p>
+        </p:txBody>
+      </p:sp>
+      <p:sp>
+        <p:nvSpPr>
+          <p:cNvPr id="10" name="Shape 8"/>
           <p:cNvSpPr/>
           <p:nvPr/>
         </p:nvSpPr>
@@ -5585,14 +5791,14 @@
       </p:sp>
       <p:sp>
         <p:nvSpPr>
-          <p:cNvPr id="10" name="Text 8"/>
+          <p:cNvPr id="11" name="Text 9"/>
           <p:cNvSpPr/>
           <p:nvPr/>
         </p:nvSpPr>
         <p:spPr>
           <a:xfrm>
             <a:off x="8074152" y="1563624"/>
-            <a:ext cx="2825496" cy="201168"/>
+            <a:ext cx="2825496" cy="256032"/>
           </a:xfrm>
           <a:prstGeom prst="rect">
             <a:avLst/>
@@ -5608,7 +5814,7 @@
               <a:buNone/>
             </a:pPr>
             <a:r>
-              <a:rPr lang="en-US" sz="950" b="1" dirty="0">
+              <a:rPr lang="en-US" sz="1300" b="1" dirty="0">
                 <a:solidFill>
                   <a:srgbClr val="0068B7"/>
                 </a:solidFill>
@@ -5618,20 +5824,20 @@
               </a:rPr>
               <a:t>Key idea</a:t>
             </a:r>
-            <a:endParaRPr lang="en-US" sz="950" dirty="0"/>
-          </a:p>
-        </p:txBody>
-      </p:sp>
-      <p:sp>
-        <p:nvSpPr>
-          <p:cNvPr id="11" name="Text 9"/>
-          <p:cNvSpPr/>
-          <p:nvPr/>
-        </p:nvSpPr>
-        <p:spPr>
-          <a:xfrm>
-            <a:off x="8074152" y="1856232"/>
-            <a:ext cx="2825496" cy="1261872"/>
+            <a:endParaRPr lang="en-US" sz="1300" dirty="0"/>
+          </a:p>
+        </p:txBody>
+      </p:sp>
+      <p:sp>
+        <p:nvSpPr>
+          <p:cNvPr id="12" name="Text 10"/>
+          <p:cNvSpPr/>
+          <p:nvPr/>
+        </p:nvSpPr>
+        <p:spPr>
+          <a:xfrm>
+            <a:off x="8074152" y="1920240"/>
+            <a:ext cx="2825496" cy="1188720"/>
           </a:xfrm>
           <a:prstGeom prst="rect">
             <a:avLst/>
@@ -5649,7 +5855,7 @@
               <a:buNone/>
             </a:pPr>
             <a:r>
-              <a:rPr lang="en-US" sz="1250" dirty="0">
+              <a:rPr lang="en-US" sz="1550" dirty="0">
                 <a:solidFill>
                   <a:srgbClr val="17364A"/>
                 </a:solidFill>
@@ -5659,13 +5865,13 @@
               </a:rPr>
               <a:t>Which staff, partners, or communities would be affected if this issue were handled poorly?</a:t>
             </a:r>
-            <a:endParaRPr lang="en-US" sz="1250" dirty="0"/>
-          </a:p>
-        </p:txBody>
-      </p:sp>
-      <p:sp>
-        <p:nvSpPr>
-          <p:cNvPr id="12" name="Shape 10"/>
+            <a:endParaRPr lang="en-US" sz="1550" dirty="0"/>
+          </a:p>
+        </p:txBody>
+      </p:sp>
+      <p:sp>
+        <p:nvSpPr>
+          <p:cNvPr id="13" name="Shape 11"/>
           <p:cNvSpPr/>
           <p:nvPr/>
         </p:nvSpPr>
@@ -5692,14 +5898,14 @@
       </p:sp>
       <p:sp>
         <p:nvSpPr>
-          <p:cNvPr id="13" name="Text 11"/>
+          <p:cNvPr id="14" name="Text 12"/>
           <p:cNvSpPr/>
           <p:nvPr/>
         </p:nvSpPr>
         <p:spPr>
           <a:xfrm>
             <a:off x="8074152" y="3666744"/>
-            <a:ext cx="2825496" cy="201168"/>
+            <a:ext cx="2825496" cy="256032"/>
           </a:xfrm>
           <a:prstGeom prst="rect">
             <a:avLst/>
@@ -5715,7 +5921,7 @@
               <a:buNone/>
             </a:pPr>
             <a:r>
-              <a:rPr lang="en-US" sz="950" b="1" dirty="0">
+              <a:rPr lang="en-US" sz="1300" b="1" dirty="0">
                 <a:solidFill>
                   <a:srgbClr val="0068B7"/>
                 </a:solidFill>
@@ -5725,20 +5931,20 @@
               </a:rPr>
               <a:t>Use this for</a:t>
             </a:r>
-            <a:endParaRPr lang="en-US" sz="950" dirty="0"/>
-          </a:p>
-        </p:txBody>
-      </p:sp>
-      <p:sp>
-        <p:nvSpPr>
-          <p:cNvPr id="14" name="Text 12"/>
-          <p:cNvSpPr/>
-          <p:nvPr/>
-        </p:nvSpPr>
-        <p:spPr>
-          <a:xfrm>
-            <a:off x="8074152" y="3959352"/>
-            <a:ext cx="2825496" cy="1170432"/>
+            <a:endParaRPr lang="en-US" sz="1300" dirty="0"/>
+          </a:p>
+        </p:txBody>
+      </p:sp>
+      <p:sp>
+        <p:nvSpPr>
+          <p:cNvPr id="15" name="Text 13"/>
+          <p:cNvSpPr/>
+          <p:nvPr/>
+        </p:nvSpPr>
+        <p:spPr>
+          <a:xfrm>
+            <a:off x="8074152" y="4023360"/>
+            <a:ext cx="2825496" cy="1097280"/>
           </a:xfrm>
           <a:prstGeom prst="rect">
             <a:avLst/>
@@ -5756,7 +5962,7 @@
               <a:buNone/>
             </a:pPr>
             <a:r>
-              <a:rPr lang="en-US" sz="1250" dirty="0">
+              <a:rPr lang="en-US" sz="1550" dirty="0">
                 <a:solidFill>
                   <a:srgbClr val="17364A"/>
                 </a:solidFill>
@@ -5766,7 +5972,7 @@
               </a:rPr>
               <a:t>Connect the concept to public health decisions, safeguards, documentation, or implementation work.</a:t>
             </a:r>
-            <a:endParaRPr lang="en-US" sz="1250" dirty="0"/>
+            <a:endParaRPr lang="en-US" sz="1550" dirty="0"/>
           </a:p>
         </p:txBody>
       </p:sp>
@@ -5963,7 +6169,7 @@
                 <a:ea typeface="Aptos" pitchFamily="34" charset="-122"/>
                 <a:cs typeface="Aptos" pitchFamily="34" charset="-120"/>
               </a:rPr>
-              <a:t>© Paula Soper</a:t>
+              <a:t>Â© Paula Soper</a:t>
             </a:r>
             <a:endParaRPr lang="en-US" sz="800" dirty="0"/>
           </a:p>
@@ -5971,7 +6177,46 @@
       </p:sp>
       <p:sp>
         <p:nvSpPr>
-          <p:cNvPr id="7" name="Shape 5"/>
+          <p:cNvPr id="7" name="Text 5"/>
+          <p:cNvSpPr/>
+          <p:nvPr/>
+        </p:nvSpPr>
+        <p:spPr>
+          <a:xfrm>
+            <a:off x="11137392" y="6510528"/>
+            <a:ext cx="411480" cy="201168"/>
+          </a:xfrm>
+          <a:prstGeom prst="rect">
+            <a:avLst/>
+          </a:prstGeom>
+          <a:noFill/>
+          <a:ln/>
+        </p:spPr>
+        <p:txBody>
+          <a:bodyPr wrap="square" lIns="0" tIns="0" rIns="0" bIns="0" rtlCol="0" anchor="ctr"/>
+          <a:lstStyle/>
+          <a:p>
+            <a:pPr algn="r" indent="0" marL="0">
+              <a:buNone/>
+            </a:pPr>
+            <a:r>
+              <a:rPr lang="en-US" sz="900" dirty="0">
+                <a:solidFill>
+                  <a:srgbClr val="5F7181"/>
+                </a:solidFill>
+                <a:latin typeface="Aptos" pitchFamily="34" charset="0"/>
+                <a:ea typeface="Aptos" pitchFamily="34" charset="-122"/>
+                <a:cs typeface="Aptos" pitchFamily="34" charset="-120"/>
+              </a:rPr>
+              <a:t>15</a:t>
+            </a:r>
+            <a:endParaRPr lang="en-US" sz="900" dirty="0"/>
+          </a:p>
+        </p:txBody>
+      </p:sp>
+      <p:sp>
+        <p:nvSpPr>
+          <p:cNvPr id="8" name="Shape 6"/>
           <p:cNvSpPr/>
           <p:nvPr/>
         </p:nvSpPr>
@@ -5996,7 +6241,7 @@
       </p:sp>
       <p:sp>
         <p:nvSpPr>
-          <p:cNvPr id="8" name="Text 6"/>
+          <p:cNvPr id="9" name="Text 7"/>
           <p:cNvSpPr/>
           <p:nvPr/>
         </p:nvSpPr>
@@ -6035,14 +6280,14 @@
       </p:sp>
       <p:sp>
         <p:nvSpPr>
-          <p:cNvPr id="9" name="Text 7"/>
+          <p:cNvPr id="10" name="Text 8"/>
           <p:cNvSpPr/>
           <p:nvPr/>
         </p:nvSpPr>
         <p:spPr>
           <a:xfrm>
             <a:off x="640080" y="621792"/>
-            <a:ext cx="10881360" cy="566928"/>
+            <a:ext cx="10881360" cy="713232"/>
           </a:xfrm>
           <a:prstGeom prst="rect">
             <a:avLst/>
@@ -6060,7 +6305,7 @@
               <a:buNone/>
             </a:pPr>
             <a:r>
-              <a:rPr lang="en-US" sz="2700" b="1" dirty="0">
+              <a:rPr lang="en-US" sz="3400" b="1" dirty="0">
                 <a:solidFill>
                   <a:srgbClr val="003A63"/>
                 </a:solidFill>
@@ -6070,20 +6315,20 @@
               </a:rPr>
               <a:t>Practical Exercise</a:t>
             </a:r>
-            <a:endParaRPr lang="en-US" sz="2700" dirty="0"/>
-          </a:p>
-        </p:txBody>
-      </p:sp>
-      <p:sp>
-        <p:nvSpPr>
-          <p:cNvPr id="10" name="Text 8"/>
-          <p:cNvSpPr/>
-          <p:nvPr/>
-        </p:nvSpPr>
-        <p:spPr>
-          <a:xfrm>
-            <a:off x="868680" y="1417320"/>
-            <a:ext cx="6675120" cy="4434840"/>
+            <a:endParaRPr lang="en-US" sz="3400" dirty="0"/>
+          </a:p>
+        </p:txBody>
+      </p:sp>
+      <p:sp>
+        <p:nvSpPr>
+          <p:cNvPr id="11" name="Text 9"/>
+          <p:cNvSpPr/>
+          <p:nvPr/>
+        </p:nvSpPr>
+        <p:spPr>
+          <a:xfrm>
+            <a:off x="868680" y="1508760"/>
+            <a:ext cx="6537960" cy="4160520"/>
           </a:xfrm>
           <a:prstGeom prst="rect">
             <a:avLst/>
@@ -6098,7 +6343,7 @@
           <a:lstStyle/>
           <a:p>
             <a:r>
-              <a:rPr lang="en-US" sz="1700" dirty="0">
+              <a:rPr lang="en-US" sz="2100" dirty="0">
                 <a:solidFill>
                   <a:srgbClr val="17364A"/>
                 </a:solidFill>
@@ -6108,11 +6353,11 @@
               </a:rPr>
               <a:t>Develop a participatory governance plan for one AI use case.</a:t>
             </a:r>
-            <a:endParaRPr lang="en-US" sz="1700" dirty="0"/>
-          </a:p>
-          <a:p>
-            <a:r>
-              <a:rPr lang="en-US" sz="1700" dirty="0">
+            <a:endParaRPr lang="en-US" sz="2100" dirty="0"/>
+          </a:p>
+          <a:p>
+            <a:r>
+              <a:rPr lang="en-US" sz="2100" dirty="0">
                 <a:solidFill>
                   <a:srgbClr val="17364A"/>
                 </a:solidFill>
@@ -6120,15 +6365,15 @@
                 <a:ea typeface="Aptos" pitchFamily="34" charset="-122"/>
                 <a:cs typeface="Aptos" pitchFamily="34" charset="-120"/>
               </a:rPr>
-              <a:t>Include affected groups, engagement purpose, timing, materials, questions, accessibility supports, decision influence,.</a:t>
-            </a:r>
-            <a:endParaRPr lang="en-US" sz="1700" dirty="0"/>
-          </a:p>
-        </p:txBody>
-      </p:sp>
-      <p:sp>
-        <p:nvSpPr>
-          <p:cNvPr id="11" name="Shape 9"/>
+              <a:t>Include affected groups, engagement purpose, timing, materials, questions, accessibility supports,.</a:t>
+            </a:r>
+            <a:endParaRPr lang="en-US" sz="2100" dirty="0"/>
+          </a:p>
+        </p:txBody>
+      </p:sp>
+      <p:sp>
+        <p:nvSpPr>
+          <p:cNvPr id="12" name="Shape 10"/>
           <p:cNvSpPr/>
           <p:nvPr/>
         </p:nvSpPr>
@@ -6155,14 +6400,14 @@
       </p:sp>
       <p:sp>
         <p:nvSpPr>
-          <p:cNvPr id="12" name="Text 10"/>
+          <p:cNvPr id="13" name="Text 11"/>
           <p:cNvSpPr/>
           <p:nvPr/>
         </p:nvSpPr>
         <p:spPr>
           <a:xfrm>
             <a:off x="8074152" y="1563624"/>
-            <a:ext cx="2825496" cy="201168"/>
+            <a:ext cx="2825496" cy="256032"/>
           </a:xfrm>
           <a:prstGeom prst="rect">
             <a:avLst/>
@@ -6178,7 +6423,7 @@
               <a:buNone/>
             </a:pPr>
             <a:r>
-              <a:rPr lang="en-US" sz="950" b="1" dirty="0">
+              <a:rPr lang="en-US" sz="1300" b="1" dirty="0">
                 <a:solidFill>
                   <a:srgbClr val="0068B7"/>
                 </a:solidFill>
@@ -6188,20 +6433,20 @@
               </a:rPr>
               <a:t>Key idea</a:t>
             </a:r>
-            <a:endParaRPr lang="en-US" sz="950" dirty="0"/>
-          </a:p>
-        </p:txBody>
-      </p:sp>
-      <p:sp>
-        <p:nvSpPr>
-          <p:cNvPr id="13" name="Text 11"/>
-          <p:cNvSpPr/>
-          <p:nvPr/>
-        </p:nvSpPr>
-        <p:spPr>
-          <a:xfrm>
-            <a:off x="8074152" y="1856232"/>
-            <a:ext cx="2825496" cy="1261872"/>
+            <a:endParaRPr lang="en-US" sz="1300" dirty="0"/>
+          </a:p>
+        </p:txBody>
+      </p:sp>
+      <p:sp>
+        <p:nvSpPr>
+          <p:cNvPr id="14" name="Text 12"/>
+          <p:cNvSpPr/>
+          <p:nvPr/>
+        </p:nvSpPr>
+        <p:spPr>
+          <a:xfrm>
+            <a:off x="8074152" y="1920240"/>
+            <a:ext cx="2825496" cy="1188720"/>
           </a:xfrm>
           <a:prstGeom prst="rect">
             <a:avLst/>
@@ -6219,7 +6464,7 @@
               <a:buNone/>
             </a:pPr>
             <a:r>
-              <a:rPr lang="en-US" sz="1250" dirty="0">
+              <a:rPr lang="en-US" sz="1550" dirty="0">
                 <a:solidFill>
                   <a:srgbClr val="17364A"/>
                 </a:solidFill>
@@ -6229,13 +6474,13 @@
               </a:rPr>
               <a:t>Develop a participatory governance plan for one AI use case.</a:t>
             </a:r>
-            <a:endParaRPr lang="en-US" sz="1250" dirty="0"/>
-          </a:p>
-        </p:txBody>
-      </p:sp>
-      <p:sp>
-        <p:nvSpPr>
-          <p:cNvPr id="14" name="Shape 12"/>
+            <a:endParaRPr lang="en-US" sz="1550" dirty="0"/>
+          </a:p>
+        </p:txBody>
+      </p:sp>
+      <p:sp>
+        <p:nvSpPr>
+          <p:cNvPr id="15" name="Shape 13"/>
           <p:cNvSpPr/>
           <p:nvPr/>
         </p:nvSpPr>
@@ -6262,14 +6507,14 @@
       </p:sp>
       <p:sp>
         <p:nvSpPr>
-          <p:cNvPr id="15" name="Text 13"/>
+          <p:cNvPr id="16" name="Text 14"/>
           <p:cNvSpPr/>
           <p:nvPr/>
         </p:nvSpPr>
         <p:spPr>
           <a:xfrm>
             <a:off x="8074152" y="3666744"/>
-            <a:ext cx="2825496" cy="201168"/>
+            <a:ext cx="2825496" cy="256032"/>
           </a:xfrm>
           <a:prstGeom prst="rect">
             <a:avLst/>
@@ -6285,7 +6530,7 @@
               <a:buNone/>
             </a:pPr>
             <a:r>
-              <a:rPr lang="en-US" sz="950" b="1" dirty="0">
+              <a:rPr lang="en-US" sz="1300" b="1" dirty="0">
                 <a:solidFill>
                   <a:srgbClr val="0068B7"/>
                 </a:solidFill>
@@ -6295,20 +6540,20 @@
               </a:rPr>
               <a:t>Use this for</a:t>
             </a:r>
-            <a:endParaRPr lang="en-US" sz="950" dirty="0"/>
-          </a:p>
-        </p:txBody>
-      </p:sp>
-      <p:sp>
-        <p:nvSpPr>
-          <p:cNvPr id="16" name="Text 14"/>
-          <p:cNvSpPr/>
-          <p:nvPr/>
-        </p:nvSpPr>
-        <p:spPr>
-          <a:xfrm>
-            <a:off x="8074152" y="3959352"/>
-            <a:ext cx="2825496" cy="1170432"/>
+            <a:endParaRPr lang="en-US" sz="1300" dirty="0"/>
+          </a:p>
+        </p:txBody>
+      </p:sp>
+      <p:sp>
+        <p:nvSpPr>
+          <p:cNvPr id="17" name="Text 15"/>
+          <p:cNvSpPr/>
+          <p:nvPr/>
+        </p:nvSpPr>
+        <p:spPr>
+          <a:xfrm>
+            <a:off x="8074152" y="4023360"/>
+            <a:ext cx="2825496" cy="1097280"/>
           </a:xfrm>
           <a:prstGeom prst="rect">
             <a:avLst/>
@@ -6326,7 +6571,7 @@
               <a:buNone/>
             </a:pPr>
             <a:r>
-              <a:rPr lang="en-US" sz="1250" dirty="0">
+              <a:rPr lang="en-US" sz="1550" dirty="0">
                 <a:solidFill>
                   <a:srgbClr val="17364A"/>
                 </a:solidFill>
@@ -6336,7 +6581,7 @@
               </a:rPr>
               <a:t>Connect the concept to public health decisions, safeguards, documentation, or implementation work.</a:t>
             </a:r>
-            <a:endParaRPr lang="en-US" sz="1250" dirty="0"/>
+            <a:endParaRPr lang="en-US" sz="1550" dirty="0"/>
           </a:p>
         </p:txBody>
       </p:sp>
@@ -6533,7 +6778,7 @@
                 <a:ea typeface="Aptos" pitchFamily="34" charset="-122"/>
                 <a:cs typeface="Aptos" pitchFamily="34" charset="-120"/>
               </a:rPr>
-              <a:t>© Paula Soper</a:t>
+              <a:t>Â© Paula Soper</a:t>
             </a:r>
             <a:endParaRPr lang="en-US" sz="800" dirty="0"/>
           </a:p>
@@ -6541,7 +6786,46 @@
       </p:sp>
       <p:sp>
         <p:nvSpPr>
-          <p:cNvPr id="7" name="Shape 5"/>
+          <p:cNvPr id="7" name="Text 5"/>
+          <p:cNvSpPr/>
+          <p:nvPr/>
+        </p:nvSpPr>
+        <p:spPr>
+          <a:xfrm>
+            <a:off x="11137392" y="6510528"/>
+            <a:ext cx="411480" cy="201168"/>
+          </a:xfrm>
+          <a:prstGeom prst="rect">
+            <a:avLst/>
+          </a:prstGeom>
+          <a:noFill/>
+          <a:ln/>
+        </p:spPr>
+        <p:txBody>
+          <a:bodyPr wrap="square" lIns="0" tIns="0" rIns="0" bIns="0" rtlCol="0" anchor="ctr"/>
+          <a:lstStyle/>
+          <a:p>
+            <a:pPr algn="r" indent="0" marL="0">
+              <a:buNone/>
+            </a:pPr>
+            <a:r>
+              <a:rPr lang="en-US" sz="900" dirty="0">
+                <a:solidFill>
+                  <a:srgbClr val="5F7181"/>
+                </a:solidFill>
+                <a:latin typeface="Aptos" pitchFamily="34" charset="0"/>
+                <a:ea typeface="Aptos" pitchFamily="34" charset="-122"/>
+                <a:cs typeface="Aptos" pitchFamily="34" charset="-120"/>
+              </a:rPr>
+              <a:t>16</a:t>
+            </a:r>
+            <a:endParaRPr lang="en-US" sz="900" dirty="0"/>
+          </a:p>
+        </p:txBody>
+      </p:sp>
+      <p:sp>
+        <p:nvSpPr>
+          <p:cNvPr id="8" name="Shape 6"/>
           <p:cNvSpPr/>
           <p:nvPr/>
         </p:nvSpPr>
@@ -6566,7 +6850,7 @@
       </p:sp>
       <p:sp>
         <p:nvSpPr>
-          <p:cNvPr id="8" name="Text 6"/>
+          <p:cNvPr id="9" name="Text 7"/>
           <p:cNvSpPr/>
           <p:nvPr/>
         </p:nvSpPr>
@@ -6605,14 +6889,14 @@
       </p:sp>
       <p:sp>
         <p:nvSpPr>
-          <p:cNvPr id="9" name="Text 7"/>
+          <p:cNvPr id="10" name="Text 8"/>
           <p:cNvSpPr/>
           <p:nvPr/>
         </p:nvSpPr>
         <p:spPr>
           <a:xfrm>
             <a:off x="640080" y="621792"/>
-            <a:ext cx="10881360" cy="566928"/>
+            <a:ext cx="10881360" cy="713232"/>
           </a:xfrm>
           <a:prstGeom prst="rect">
             <a:avLst/>
@@ -6630,7 +6914,7 @@
               <a:buNone/>
             </a:pPr>
             <a:r>
-              <a:rPr lang="en-US" sz="2700" b="1" dirty="0">
+              <a:rPr lang="en-US" sz="3400" b="1" dirty="0">
                 <a:solidFill>
                   <a:srgbClr val="003A63"/>
                 </a:solidFill>
@@ -6640,20 +6924,20 @@
               </a:rPr>
               <a:t>Before You Begin</a:t>
             </a:r>
-            <a:endParaRPr lang="en-US" sz="2700" dirty="0"/>
-          </a:p>
-        </p:txBody>
-      </p:sp>
-      <p:sp>
-        <p:nvSpPr>
-          <p:cNvPr id="10" name="Text 8"/>
-          <p:cNvSpPr/>
-          <p:nvPr/>
-        </p:nvSpPr>
-        <p:spPr>
-          <a:xfrm>
-            <a:off x="868680" y="1417320"/>
-            <a:ext cx="6675120" cy="4434840"/>
+            <a:endParaRPr lang="en-US" sz="3400" dirty="0"/>
+          </a:p>
+        </p:txBody>
+      </p:sp>
+      <p:sp>
+        <p:nvSpPr>
+          <p:cNvPr id="11" name="Text 9"/>
+          <p:cNvSpPr/>
+          <p:nvPr/>
+        </p:nvSpPr>
+        <p:spPr>
+          <a:xfrm>
+            <a:off x="868680" y="1508760"/>
+            <a:ext cx="6537960" cy="4160520"/>
           </a:xfrm>
           <a:prstGeom prst="rect">
             <a:avLst/>
@@ -6668,7 +6952,7 @@
           <a:lstStyle/>
           <a:p>
             <a:r>
-              <a:rPr lang="en-US" sz="1700" dirty="0">
+              <a:rPr lang="en-US" sz="2100" dirty="0">
                 <a:solidFill>
                   <a:srgbClr val="17364A"/>
                 </a:solidFill>
@@ -6678,11 +6962,11 @@
               </a:rPr>
               <a:t>Choose a real or realistic public health AI use case.</a:t>
             </a:r>
-            <a:endParaRPr lang="en-US" sz="1700" dirty="0"/>
-          </a:p>
-          <a:p>
-            <a:r>
-              <a:rPr lang="en-US" sz="1700" dirty="0">
+            <a:endParaRPr lang="en-US" sz="2100" dirty="0"/>
+          </a:p>
+          <a:p>
+            <a:r>
+              <a:rPr lang="en-US" sz="2100" dirty="0">
                 <a:solidFill>
                   <a:srgbClr val="17364A"/>
                 </a:solidFill>
@@ -6690,13 +6974,13 @@
                 <a:ea typeface="Aptos" pitchFamily="34" charset="-122"/>
                 <a:cs typeface="Aptos" pitchFamily="34" charset="-120"/>
               </a:rPr>
-              <a:t>Document assumptions, unresolved questions, and which agency roles would need to review the artifact before it is adopted.</a:t>
-            </a:r>
-            <a:endParaRPr lang="en-US" sz="1700" dirty="0"/>
-          </a:p>
-          <a:p>
-            <a:r>
-              <a:rPr lang="en-US" sz="1700" dirty="0">
+              <a:t>Document assumptions, unresolved questions, and which agency roles would need to review the artifact.</a:t>
+            </a:r>
+            <a:endParaRPr lang="en-US" sz="2100" dirty="0"/>
+          </a:p>
+          <a:p>
+            <a:r>
+              <a:rPr lang="en-US" sz="2100" dirty="0">
                 <a:solidFill>
                   <a:srgbClr val="17364A"/>
                 </a:solidFill>
@@ -6704,15 +6988,15 @@
                 <a:ea typeface="Aptos" pitchFamily="34" charset="-122"/>
                 <a:cs typeface="Aptos" pitchFamily="34" charset="-120"/>
               </a:rPr>
-              <a:t>The exercise should produce a work product that could support governance review, leadership discussion, implementation.</a:t>
-            </a:r>
-            <a:endParaRPr lang="en-US" sz="1700" dirty="0"/>
-          </a:p>
-        </p:txBody>
-      </p:sp>
-      <p:sp>
-        <p:nvSpPr>
-          <p:cNvPr id="11" name="Shape 9"/>
+              <a:t>The exercise should produce a work product that could support governance review, leadership discussion,.</a:t>
+            </a:r>
+            <a:endParaRPr lang="en-US" sz="2100" dirty="0"/>
+          </a:p>
+        </p:txBody>
+      </p:sp>
+      <p:sp>
+        <p:nvSpPr>
+          <p:cNvPr id="12" name="Shape 10"/>
           <p:cNvSpPr/>
           <p:nvPr/>
         </p:nvSpPr>
@@ -6739,14 +7023,14 @@
       </p:sp>
       <p:sp>
         <p:nvSpPr>
-          <p:cNvPr id="12" name="Text 10"/>
+          <p:cNvPr id="13" name="Text 11"/>
           <p:cNvSpPr/>
           <p:nvPr/>
         </p:nvSpPr>
         <p:spPr>
           <a:xfrm>
             <a:off x="8074152" y="1563624"/>
-            <a:ext cx="2825496" cy="201168"/>
+            <a:ext cx="2825496" cy="256032"/>
           </a:xfrm>
           <a:prstGeom prst="rect">
             <a:avLst/>
@@ -6762,7 +7046,7 @@
               <a:buNone/>
             </a:pPr>
             <a:r>
-              <a:rPr lang="en-US" sz="950" b="1" dirty="0">
+              <a:rPr lang="en-US" sz="1300" b="1" dirty="0">
                 <a:solidFill>
                   <a:srgbClr val="0068B7"/>
                 </a:solidFill>
@@ -6772,20 +7056,20 @@
               </a:rPr>
               <a:t>Key idea</a:t>
             </a:r>
-            <a:endParaRPr lang="en-US" sz="950" dirty="0"/>
-          </a:p>
-        </p:txBody>
-      </p:sp>
-      <p:sp>
-        <p:nvSpPr>
-          <p:cNvPr id="13" name="Text 11"/>
-          <p:cNvSpPr/>
-          <p:nvPr/>
-        </p:nvSpPr>
-        <p:spPr>
-          <a:xfrm>
-            <a:off x="8074152" y="1856232"/>
-            <a:ext cx="2825496" cy="1261872"/>
+            <a:endParaRPr lang="en-US" sz="1300" dirty="0"/>
+          </a:p>
+        </p:txBody>
+      </p:sp>
+      <p:sp>
+        <p:nvSpPr>
+          <p:cNvPr id="14" name="Text 12"/>
+          <p:cNvSpPr/>
+          <p:nvPr/>
+        </p:nvSpPr>
+        <p:spPr>
+          <a:xfrm>
+            <a:off x="8074152" y="1920240"/>
+            <a:ext cx="2825496" cy="1188720"/>
           </a:xfrm>
           <a:prstGeom prst="rect">
             <a:avLst/>
@@ -6803,7 +7087,7 @@
               <a:buNone/>
             </a:pPr>
             <a:r>
-              <a:rPr lang="en-US" sz="1250" dirty="0">
+              <a:rPr lang="en-US" sz="1550" dirty="0">
                 <a:solidFill>
                   <a:srgbClr val="17364A"/>
                 </a:solidFill>
@@ -6813,13 +7097,13 @@
               </a:rPr>
               <a:t>Choose a real or realistic public health AI use case.</a:t>
             </a:r>
-            <a:endParaRPr lang="en-US" sz="1250" dirty="0"/>
-          </a:p>
-        </p:txBody>
-      </p:sp>
-      <p:sp>
-        <p:nvSpPr>
-          <p:cNvPr id="14" name="Shape 12"/>
+            <a:endParaRPr lang="en-US" sz="1550" dirty="0"/>
+          </a:p>
+        </p:txBody>
+      </p:sp>
+      <p:sp>
+        <p:nvSpPr>
+          <p:cNvPr id="15" name="Shape 13"/>
           <p:cNvSpPr/>
           <p:nvPr/>
         </p:nvSpPr>
@@ -6846,14 +7130,14 @@
       </p:sp>
       <p:sp>
         <p:nvSpPr>
-          <p:cNvPr id="15" name="Text 13"/>
+          <p:cNvPr id="16" name="Text 14"/>
           <p:cNvSpPr/>
           <p:nvPr/>
         </p:nvSpPr>
         <p:spPr>
           <a:xfrm>
             <a:off x="8074152" y="3666744"/>
-            <a:ext cx="2825496" cy="201168"/>
+            <a:ext cx="2825496" cy="256032"/>
           </a:xfrm>
           <a:prstGeom prst="rect">
             <a:avLst/>
@@ -6869,7 +7153,7 @@
               <a:buNone/>
             </a:pPr>
             <a:r>
-              <a:rPr lang="en-US" sz="950" b="1" dirty="0">
+              <a:rPr lang="en-US" sz="1300" b="1" dirty="0">
                 <a:solidFill>
                   <a:srgbClr val="0068B7"/>
                 </a:solidFill>
@@ -6879,20 +7163,20 @@
               </a:rPr>
               <a:t>Use this for</a:t>
             </a:r>
-            <a:endParaRPr lang="en-US" sz="950" dirty="0"/>
-          </a:p>
-        </p:txBody>
-      </p:sp>
-      <p:sp>
-        <p:nvSpPr>
-          <p:cNvPr id="16" name="Text 14"/>
-          <p:cNvSpPr/>
-          <p:nvPr/>
-        </p:nvSpPr>
-        <p:spPr>
-          <a:xfrm>
-            <a:off x="8074152" y="3959352"/>
-            <a:ext cx="2825496" cy="1170432"/>
+            <a:endParaRPr lang="en-US" sz="1300" dirty="0"/>
+          </a:p>
+        </p:txBody>
+      </p:sp>
+      <p:sp>
+        <p:nvSpPr>
+          <p:cNvPr id="17" name="Text 15"/>
+          <p:cNvSpPr/>
+          <p:nvPr/>
+        </p:nvSpPr>
+        <p:spPr>
+          <a:xfrm>
+            <a:off x="8074152" y="4023360"/>
+            <a:ext cx="2825496" cy="1097280"/>
           </a:xfrm>
           <a:prstGeom prst="rect">
             <a:avLst/>
@@ -6910,7 +7194,7 @@
               <a:buNone/>
             </a:pPr>
             <a:r>
-              <a:rPr lang="en-US" sz="1250" dirty="0">
+              <a:rPr lang="en-US" sz="1550" dirty="0">
                 <a:solidFill>
                   <a:srgbClr val="17364A"/>
                 </a:solidFill>
@@ -6920,7 +7204,7 @@
               </a:rPr>
               <a:t>Connect the concept to public health decisions, safeguards, documentation, or implementation work.</a:t>
             </a:r>
-            <a:endParaRPr lang="en-US" sz="1250" dirty="0"/>
+            <a:endParaRPr lang="en-US" sz="1550" dirty="0"/>
           </a:p>
         </p:txBody>
       </p:sp>
@@ -7117,7 +7401,7 @@
                 <a:ea typeface="Aptos" pitchFamily="34" charset="-122"/>
                 <a:cs typeface="Aptos" pitchFamily="34" charset="-120"/>
               </a:rPr>
-              <a:t>© Paula Soper</a:t>
+              <a:t>Â© Paula Soper</a:t>
             </a:r>
             <a:endParaRPr lang="en-US" sz="800" dirty="0"/>
           </a:p>
@@ -7125,7 +7409,46 @@
       </p:sp>
       <p:sp>
         <p:nvSpPr>
-          <p:cNvPr id="7" name="Shape 5"/>
+          <p:cNvPr id="7" name="Text 5"/>
+          <p:cNvSpPr/>
+          <p:nvPr/>
+        </p:nvSpPr>
+        <p:spPr>
+          <a:xfrm>
+            <a:off x="11137392" y="6510528"/>
+            <a:ext cx="411480" cy="201168"/>
+          </a:xfrm>
+          <a:prstGeom prst="rect">
+            <a:avLst/>
+          </a:prstGeom>
+          <a:noFill/>
+          <a:ln/>
+        </p:spPr>
+        <p:txBody>
+          <a:bodyPr wrap="square" lIns="0" tIns="0" rIns="0" bIns="0" rtlCol="0" anchor="ctr"/>
+          <a:lstStyle/>
+          <a:p>
+            <a:pPr algn="r" indent="0" marL="0">
+              <a:buNone/>
+            </a:pPr>
+            <a:r>
+              <a:rPr lang="en-US" sz="900" dirty="0">
+                <a:solidFill>
+                  <a:srgbClr val="5F7181"/>
+                </a:solidFill>
+                <a:latin typeface="Aptos" pitchFamily="34" charset="0"/>
+                <a:ea typeface="Aptos" pitchFamily="34" charset="-122"/>
+                <a:cs typeface="Aptos" pitchFamily="34" charset="-120"/>
+              </a:rPr>
+              <a:t>17</a:t>
+            </a:r>
+            <a:endParaRPr lang="en-US" sz="900" dirty="0"/>
+          </a:p>
+        </p:txBody>
+      </p:sp>
+      <p:sp>
+        <p:nvSpPr>
+          <p:cNvPr id="8" name="Shape 6"/>
           <p:cNvSpPr/>
           <p:nvPr/>
         </p:nvSpPr>
@@ -7150,7 +7473,7 @@
       </p:sp>
       <p:sp>
         <p:nvSpPr>
-          <p:cNvPr id="8" name="Text 6"/>
+          <p:cNvPr id="9" name="Text 7"/>
           <p:cNvSpPr/>
           <p:nvPr/>
         </p:nvSpPr>
@@ -7189,14 +7512,14 @@
       </p:sp>
       <p:sp>
         <p:nvSpPr>
-          <p:cNvPr id="9" name="Text 7"/>
+          <p:cNvPr id="10" name="Text 8"/>
           <p:cNvSpPr/>
           <p:nvPr/>
         </p:nvSpPr>
         <p:spPr>
           <a:xfrm>
             <a:off x="640080" y="621792"/>
-            <a:ext cx="10881360" cy="566928"/>
+            <a:ext cx="10881360" cy="713232"/>
           </a:xfrm>
           <a:prstGeom prst="rect">
             <a:avLst/>
@@ -7214,7 +7537,7 @@
               <a:buNone/>
             </a:pPr>
             <a:r>
-              <a:rPr lang="en-US" sz="2700" b="1" dirty="0">
+              <a:rPr lang="en-US" sz="3400" b="1" dirty="0">
                 <a:solidFill>
                   <a:srgbClr val="003A63"/>
                 </a:solidFill>
@@ -7224,20 +7547,20 @@
               </a:rPr>
               <a:t>Expected Artifact or Evidence</a:t>
             </a:r>
-            <a:endParaRPr lang="en-US" sz="2700" dirty="0"/>
-          </a:p>
-        </p:txBody>
-      </p:sp>
-      <p:sp>
-        <p:nvSpPr>
-          <p:cNvPr id="10" name="Text 8"/>
-          <p:cNvSpPr/>
-          <p:nvPr/>
-        </p:nvSpPr>
-        <p:spPr>
-          <a:xfrm>
-            <a:off x="868680" y="1417320"/>
-            <a:ext cx="6675120" cy="4434840"/>
+            <a:endParaRPr lang="en-US" sz="3400" dirty="0"/>
+          </a:p>
+        </p:txBody>
+      </p:sp>
+      <p:sp>
+        <p:nvSpPr>
+          <p:cNvPr id="11" name="Text 9"/>
+          <p:cNvSpPr/>
+          <p:nvPr/>
+        </p:nvSpPr>
+        <p:spPr>
+          <a:xfrm>
+            <a:off x="868680" y="1508760"/>
+            <a:ext cx="6537960" cy="4160520"/>
           </a:xfrm>
           <a:prstGeom prst="rect">
             <a:avLst/>
@@ -7252,7 +7575,7 @@
           <a:lstStyle/>
           <a:p>
             <a:r>
-              <a:rPr lang="en-US" sz="1700" dirty="0">
+              <a:rPr lang="en-US" sz="2100" dirty="0">
                 <a:solidFill>
                   <a:srgbClr val="17364A"/>
                 </a:solidFill>
@@ -7262,13 +7585,13 @@
               </a:rPr>
               <a:t>Participatory governance plan; community briefing outline; engagement questions; feedback response plan.</a:t>
             </a:r>
-            <a:endParaRPr lang="en-US" sz="1700" dirty="0"/>
-          </a:p>
-        </p:txBody>
-      </p:sp>
-      <p:sp>
-        <p:nvSpPr>
-          <p:cNvPr id="11" name="Shape 9"/>
+            <a:endParaRPr lang="en-US" sz="2100" dirty="0"/>
+          </a:p>
+        </p:txBody>
+      </p:sp>
+      <p:sp>
+        <p:nvSpPr>
+          <p:cNvPr id="12" name="Shape 10"/>
           <p:cNvSpPr/>
           <p:nvPr/>
         </p:nvSpPr>
@@ -7295,14 +7618,14 @@
       </p:sp>
       <p:sp>
         <p:nvSpPr>
-          <p:cNvPr id="12" name="Text 10"/>
+          <p:cNvPr id="13" name="Text 11"/>
           <p:cNvSpPr/>
           <p:nvPr/>
         </p:nvSpPr>
         <p:spPr>
           <a:xfrm>
             <a:off x="8074152" y="1563624"/>
-            <a:ext cx="2825496" cy="201168"/>
+            <a:ext cx="2825496" cy="256032"/>
           </a:xfrm>
           <a:prstGeom prst="rect">
             <a:avLst/>
@@ -7318,7 +7641,7 @@
               <a:buNone/>
             </a:pPr>
             <a:r>
-              <a:rPr lang="en-US" sz="950" b="1" dirty="0">
+              <a:rPr lang="en-US" sz="1300" b="1" dirty="0">
                 <a:solidFill>
                   <a:srgbClr val="0068B7"/>
                 </a:solidFill>
@@ -7328,20 +7651,20 @@
               </a:rPr>
               <a:t>Key idea</a:t>
             </a:r>
-            <a:endParaRPr lang="en-US" sz="950" dirty="0"/>
-          </a:p>
-        </p:txBody>
-      </p:sp>
-      <p:sp>
-        <p:nvSpPr>
-          <p:cNvPr id="13" name="Text 11"/>
-          <p:cNvSpPr/>
-          <p:nvPr/>
-        </p:nvSpPr>
-        <p:spPr>
-          <a:xfrm>
-            <a:off x="8074152" y="1856232"/>
-            <a:ext cx="2825496" cy="1261872"/>
+            <a:endParaRPr lang="en-US" sz="1300" dirty="0"/>
+          </a:p>
+        </p:txBody>
+      </p:sp>
+      <p:sp>
+        <p:nvSpPr>
+          <p:cNvPr id="14" name="Text 12"/>
+          <p:cNvSpPr/>
+          <p:nvPr/>
+        </p:nvSpPr>
+        <p:spPr>
+          <a:xfrm>
+            <a:off x="8074152" y="1920240"/>
+            <a:ext cx="2825496" cy="1188720"/>
           </a:xfrm>
           <a:prstGeom prst="rect">
             <a:avLst/>
@@ -7359,7 +7682,7 @@
               <a:buNone/>
             </a:pPr>
             <a:r>
-              <a:rPr lang="en-US" sz="1250" dirty="0">
+              <a:rPr lang="en-US" sz="1550" dirty="0">
                 <a:solidFill>
                   <a:srgbClr val="17364A"/>
                 </a:solidFill>
@@ -7369,13 +7692,13 @@
               </a:rPr>
               <a:t>Participatory governance plan; community briefing outline; engagement questions; feedback response plan.</a:t>
             </a:r>
-            <a:endParaRPr lang="en-US" sz="1250" dirty="0"/>
-          </a:p>
-        </p:txBody>
-      </p:sp>
-      <p:sp>
-        <p:nvSpPr>
-          <p:cNvPr id="14" name="Shape 12"/>
+            <a:endParaRPr lang="en-US" sz="1550" dirty="0"/>
+          </a:p>
+        </p:txBody>
+      </p:sp>
+      <p:sp>
+        <p:nvSpPr>
+          <p:cNvPr id="15" name="Shape 13"/>
           <p:cNvSpPr/>
           <p:nvPr/>
         </p:nvSpPr>
@@ -7402,14 +7725,14 @@
       </p:sp>
       <p:sp>
         <p:nvSpPr>
-          <p:cNvPr id="15" name="Text 13"/>
+          <p:cNvPr id="16" name="Text 14"/>
           <p:cNvSpPr/>
           <p:nvPr/>
         </p:nvSpPr>
         <p:spPr>
           <a:xfrm>
             <a:off x="8074152" y="3666744"/>
-            <a:ext cx="2825496" cy="201168"/>
+            <a:ext cx="2825496" cy="256032"/>
           </a:xfrm>
           <a:prstGeom prst="rect">
             <a:avLst/>
@@ -7425,7 +7748,7 @@
               <a:buNone/>
             </a:pPr>
             <a:r>
-              <a:rPr lang="en-US" sz="950" b="1" dirty="0">
+              <a:rPr lang="en-US" sz="1300" b="1" dirty="0">
                 <a:solidFill>
                   <a:srgbClr val="0068B7"/>
                 </a:solidFill>
@@ -7435,20 +7758,20 @@
               </a:rPr>
               <a:t>Use this for</a:t>
             </a:r>
-            <a:endParaRPr lang="en-US" sz="950" dirty="0"/>
-          </a:p>
-        </p:txBody>
-      </p:sp>
-      <p:sp>
-        <p:nvSpPr>
-          <p:cNvPr id="16" name="Text 14"/>
-          <p:cNvSpPr/>
-          <p:nvPr/>
-        </p:nvSpPr>
-        <p:spPr>
-          <a:xfrm>
-            <a:off x="8074152" y="3959352"/>
-            <a:ext cx="2825496" cy="1170432"/>
+            <a:endParaRPr lang="en-US" sz="1300" dirty="0"/>
+          </a:p>
+        </p:txBody>
+      </p:sp>
+      <p:sp>
+        <p:nvSpPr>
+          <p:cNvPr id="17" name="Text 15"/>
+          <p:cNvSpPr/>
+          <p:nvPr/>
+        </p:nvSpPr>
+        <p:spPr>
+          <a:xfrm>
+            <a:off x="8074152" y="4023360"/>
+            <a:ext cx="2825496" cy="1097280"/>
           </a:xfrm>
           <a:prstGeom prst="rect">
             <a:avLst/>
@@ -7466,7 +7789,7 @@
               <a:buNone/>
             </a:pPr>
             <a:r>
-              <a:rPr lang="en-US" sz="1250" dirty="0">
+              <a:rPr lang="en-US" sz="1550" dirty="0">
                 <a:solidFill>
                   <a:srgbClr val="17364A"/>
                 </a:solidFill>
@@ -7476,7 +7799,7 @@
               </a:rPr>
               <a:t>Connect the concept to public health decisions, safeguards, documentation, or implementation work.</a:t>
             </a:r>
-            <a:endParaRPr lang="en-US" sz="1250" dirty="0"/>
+            <a:endParaRPr lang="en-US" sz="1550" dirty="0"/>
           </a:p>
         </p:txBody>
       </p:sp>
@@ -7673,7 +7996,7 @@
                 <a:ea typeface="Aptos" pitchFamily="34" charset="-122"/>
                 <a:cs typeface="Aptos" pitchFamily="34" charset="-120"/>
               </a:rPr>
-              <a:t>© Paula Soper</a:t>
+              <a:t>Â© Paula Soper</a:t>
             </a:r>
             <a:endParaRPr lang="en-US" sz="800" dirty="0"/>
           </a:p>
@@ -7681,7 +8004,46 @@
       </p:sp>
       <p:sp>
         <p:nvSpPr>
-          <p:cNvPr id="7" name="Shape 5"/>
+          <p:cNvPr id="7" name="Text 5"/>
+          <p:cNvSpPr/>
+          <p:nvPr/>
+        </p:nvSpPr>
+        <p:spPr>
+          <a:xfrm>
+            <a:off x="11137392" y="6510528"/>
+            <a:ext cx="411480" cy="201168"/>
+          </a:xfrm>
+          <a:prstGeom prst="rect">
+            <a:avLst/>
+          </a:prstGeom>
+          <a:noFill/>
+          <a:ln/>
+        </p:spPr>
+        <p:txBody>
+          <a:bodyPr wrap="square" lIns="0" tIns="0" rIns="0" bIns="0" rtlCol="0" anchor="ctr"/>
+          <a:lstStyle/>
+          <a:p>
+            <a:pPr algn="r" indent="0" marL="0">
+              <a:buNone/>
+            </a:pPr>
+            <a:r>
+              <a:rPr lang="en-US" sz="900" dirty="0">
+                <a:solidFill>
+                  <a:srgbClr val="5F7181"/>
+                </a:solidFill>
+                <a:latin typeface="Aptos" pitchFamily="34" charset="0"/>
+                <a:ea typeface="Aptos" pitchFamily="34" charset="-122"/>
+                <a:cs typeface="Aptos" pitchFamily="34" charset="-120"/>
+              </a:rPr>
+              <a:t>18</a:t>
+            </a:r>
+            <a:endParaRPr lang="en-US" sz="900" dirty="0"/>
+          </a:p>
+        </p:txBody>
+      </p:sp>
+      <p:sp>
+        <p:nvSpPr>
+          <p:cNvPr id="8" name="Shape 6"/>
           <p:cNvSpPr/>
           <p:nvPr/>
         </p:nvSpPr>
@@ -7706,7 +8068,7 @@
       </p:sp>
       <p:sp>
         <p:nvSpPr>
-          <p:cNvPr id="8" name="Text 6"/>
+          <p:cNvPr id="9" name="Text 7"/>
           <p:cNvSpPr/>
           <p:nvPr/>
         </p:nvSpPr>
@@ -7745,14 +8107,14 @@
       </p:sp>
       <p:sp>
         <p:nvSpPr>
-          <p:cNvPr id="9" name="Text 7"/>
+          <p:cNvPr id="10" name="Text 8"/>
           <p:cNvSpPr/>
           <p:nvPr/>
         </p:nvSpPr>
         <p:spPr>
           <a:xfrm>
             <a:off x="640080" y="621792"/>
-            <a:ext cx="10881360" cy="566928"/>
+            <a:ext cx="10881360" cy="713232"/>
           </a:xfrm>
           <a:prstGeom prst="rect">
             <a:avLst/>
@@ -7770,7 +8132,7 @@
               <a:buNone/>
             </a:pPr>
             <a:r>
-              <a:rPr lang="en-US" sz="2700" b="1" dirty="0">
+              <a:rPr lang="en-US" sz="3400" b="1" dirty="0">
                 <a:solidFill>
                   <a:srgbClr val="003A63"/>
                 </a:solidFill>
@@ -7780,20 +8142,20 @@
               </a:rPr>
               <a:t>Expected Assignment</a:t>
             </a:r>
-            <a:endParaRPr lang="en-US" sz="2700" dirty="0"/>
-          </a:p>
-        </p:txBody>
-      </p:sp>
-      <p:sp>
-        <p:nvSpPr>
-          <p:cNvPr id="10" name="Text 8"/>
-          <p:cNvSpPr/>
-          <p:nvPr/>
-        </p:nvSpPr>
-        <p:spPr>
-          <a:xfrm>
-            <a:off x="868680" y="1417320"/>
-            <a:ext cx="6675120" cy="4434840"/>
+            <a:endParaRPr lang="en-US" sz="3400" dirty="0"/>
+          </a:p>
+        </p:txBody>
+      </p:sp>
+      <p:sp>
+        <p:nvSpPr>
+          <p:cNvPr id="11" name="Text 9"/>
+          <p:cNvSpPr/>
+          <p:nvPr/>
+        </p:nvSpPr>
+        <p:spPr>
+          <a:xfrm>
+            <a:off x="868680" y="1508760"/>
+            <a:ext cx="6537960" cy="4160520"/>
           </a:xfrm>
           <a:prstGeom prst="rect">
             <a:avLst/>
@@ -7808,7 +8170,7 @@
           <a:lstStyle/>
           <a:p>
             <a:r>
-              <a:rPr lang="en-US" sz="1700" dirty="0">
+              <a:rPr lang="en-US" sz="2100" dirty="0">
                 <a:solidFill>
                   <a:srgbClr val="17364A"/>
                 </a:solidFill>
@@ -7818,13 +8180,13 @@
               </a:rPr>
               <a:t>Participatory governance plan; community briefing outline; engagement questions; feedback response plan.</a:t>
             </a:r>
-            <a:endParaRPr lang="en-US" sz="1700" dirty="0"/>
-          </a:p>
-        </p:txBody>
-      </p:sp>
-      <p:sp>
-        <p:nvSpPr>
-          <p:cNvPr id="11" name="Shape 9"/>
+            <a:endParaRPr lang="en-US" sz="2100" dirty="0"/>
+          </a:p>
+        </p:txBody>
+      </p:sp>
+      <p:sp>
+        <p:nvSpPr>
+          <p:cNvPr id="12" name="Shape 10"/>
           <p:cNvSpPr/>
           <p:nvPr/>
         </p:nvSpPr>
@@ -7851,14 +8213,14 @@
       </p:sp>
       <p:sp>
         <p:nvSpPr>
-          <p:cNvPr id="12" name="Text 10"/>
+          <p:cNvPr id="13" name="Text 11"/>
           <p:cNvSpPr/>
           <p:nvPr/>
         </p:nvSpPr>
         <p:spPr>
           <a:xfrm>
             <a:off x="8074152" y="1563624"/>
-            <a:ext cx="2825496" cy="201168"/>
+            <a:ext cx="2825496" cy="256032"/>
           </a:xfrm>
           <a:prstGeom prst="rect">
             <a:avLst/>
@@ -7874,7 +8236,7 @@
               <a:buNone/>
             </a:pPr>
             <a:r>
-              <a:rPr lang="en-US" sz="950" b="1" dirty="0">
+              <a:rPr lang="en-US" sz="1300" b="1" dirty="0">
                 <a:solidFill>
                   <a:srgbClr val="0068B7"/>
                 </a:solidFill>
@@ -7884,20 +8246,20 @@
               </a:rPr>
               <a:t>Key idea</a:t>
             </a:r>
-            <a:endParaRPr lang="en-US" sz="950" dirty="0"/>
-          </a:p>
-        </p:txBody>
-      </p:sp>
-      <p:sp>
-        <p:nvSpPr>
-          <p:cNvPr id="13" name="Text 11"/>
-          <p:cNvSpPr/>
-          <p:nvPr/>
-        </p:nvSpPr>
-        <p:spPr>
-          <a:xfrm>
-            <a:off x="8074152" y="1856232"/>
-            <a:ext cx="2825496" cy="1261872"/>
+            <a:endParaRPr lang="en-US" sz="1300" dirty="0"/>
+          </a:p>
+        </p:txBody>
+      </p:sp>
+      <p:sp>
+        <p:nvSpPr>
+          <p:cNvPr id="14" name="Text 12"/>
+          <p:cNvSpPr/>
+          <p:nvPr/>
+        </p:nvSpPr>
+        <p:spPr>
+          <a:xfrm>
+            <a:off x="8074152" y="1920240"/>
+            <a:ext cx="2825496" cy="1188720"/>
           </a:xfrm>
           <a:prstGeom prst="rect">
             <a:avLst/>
@@ -7915,7 +8277,7 @@
               <a:buNone/>
             </a:pPr>
             <a:r>
-              <a:rPr lang="en-US" sz="1250" dirty="0">
+              <a:rPr lang="en-US" sz="1550" dirty="0">
                 <a:solidFill>
                   <a:srgbClr val="17364A"/>
                 </a:solidFill>
@@ -7925,13 +8287,13 @@
               </a:rPr>
               <a:t>Participatory governance plan; community briefing outline; engagement questions; feedback response plan.</a:t>
             </a:r>
-            <a:endParaRPr lang="en-US" sz="1250" dirty="0"/>
-          </a:p>
-        </p:txBody>
-      </p:sp>
-      <p:sp>
-        <p:nvSpPr>
-          <p:cNvPr id="14" name="Shape 12"/>
+            <a:endParaRPr lang="en-US" sz="1550" dirty="0"/>
+          </a:p>
+        </p:txBody>
+      </p:sp>
+      <p:sp>
+        <p:nvSpPr>
+          <p:cNvPr id="15" name="Shape 13"/>
           <p:cNvSpPr/>
           <p:nvPr/>
         </p:nvSpPr>
@@ -7958,14 +8320,14 @@
       </p:sp>
       <p:sp>
         <p:nvSpPr>
-          <p:cNvPr id="15" name="Text 13"/>
+          <p:cNvPr id="16" name="Text 14"/>
           <p:cNvSpPr/>
           <p:nvPr/>
         </p:nvSpPr>
         <p:spPr>
           <a:xfrm>
             <a:off x="8074152" y="3666744"/>
-            <a:ext cx="2825496" cy="201168"/>
+            <a:ext cx="2825496" cy="256032"/>
           </a:xfrm>
           <a:prstGeom prst="rect">
             <a:avLst/>
@@ -7981,7 +8343,7 @@
               <a:buNone/>
             </a:pPr>
             <a:r>
-              <a:rPr lang="en-US" sz="950" b="1" dirty="0">
+              <a:rPr lang="en-US" sz="1300" b="1" dirty="0">
                 <a:solidFill>
                   <a:srgbClr val="0068B7"/>
                 </a:solidFill>
@@ -7991,20 +8353,20 @@
               </a:rPr>
               <a:t>Use this for</a:t>
             </a:r>
-            <a:endParaRPr lang="en-US" sz="950" dirty="0"/>
-          </a:p>
-        </p:txBody>
-      </p:sp>
-      <p:sp>
-        <p:nvSpPr>
-          <p:cNvPr id="16" name="Text 14"/>
-          <p:cNvSpPr/>
-          <p:nvPr/>
-        </p:nvSpPr>
-        <p:spPr>
-          <a:xfrm>
-            <a:off x="8074152" y="3959352"/>
-            <a:ext cx="2825496" cy="1170432"/>
+            <a:endParaRPr lang="en-US" sz="1300" dirty="0"/>
+          </a:p>
+        </p:txBody>
+      </p:sp>
+      <p:sp>
+        <p:nvSpPr>
+          <p:cNvPr id="17" name="Text 15"/>
+          <p:cNvSpPr/>
+          <p:nvPr/>
+        </p:nvSpPr>
+        <p:spPr>
+          <a:xfrm>
+            <a:off x="8074152" y="4023360"/>
+            <a:ext cx="2825496" cy="1097280"/>
           </a:xfrm>
           <a:prstGeom prst="rect">
             <a:avLst/>
@@ -8022,7 +8384,7 @@
               <a:buNone/>
             </a:pPr>
             <a:r>
-              <a:rPr lang="en-US" sz="1250" dirty="0">
+              <a:rPr lang="en-US" sz="1550" dirty="0">
                 <a:solidFill>
                   <a:srgbClr val="17364A"/>
                 </a:solidFill>
@@ -8032,7 +8394,7 @@
               </a:rPr>
               <a:t>Connect the concept to public health decisions, safeguards, documentation, or implementation work.</a:t>
             </a:r>
-            <a:endParaRPr lang="en-US" sz="1250" dirty="0"/>
+            <a:endParaRPr lang="en-US" sz="1550" dirty="0"/>
           </a:p>
         </p:txBody>
       </p:sp>
@@ -8229,7 +8591,7 @@
                 <a:ea typeface="Aptos" pitchFamily="34" charset="-122"/>
                 <a:cs typeface="Aptos" pitchFamily="34" charset="-120"/>
               </a:rPr>
-              <a:t>© Paula Soper</a:t>
+              <a:t>Â© Paula Soper</a:t>
             </a:r>
             <a:endParaRPr lang="en-US" sz="800" dirty="0"/>
           </a:p>
@@ -8237,7 +8599,46 @@
       </p:sp>
       <p:sp>
         <p:nvSpPr>
-          <p:cNvPr id="7" name="Shape 5"/>
+          <p:cNvPr id="7" name="Text 5"/>
+          <p:cNvSpPr/>
+          <p:nvPr/>
+        </p:nvSpPr>
+        <p:spPr>
+          <a:xfrm>
+            <a:off x="11137392" y="6510528"/>
+            <a:ext cx="411480" cy="201168"/>
+          </a:xfrm>
+          <a:prstGeom prst="rect">
+            <a:avLst/>
+          </a:prstGeom>
+          <a:noFill/>
+          <a:ln/>
+        </p:spPr>
+        <p:txBody>
+          <a:bodyPr wrap="square" lIns="0" tIns="0" rIns="0" bIns="0" rtlCol="0" anchor="ctr"/>
+          <a:lstStyle/>
+          <a:p>
+            <a:pPr algn="r" indent="0" marL="0">
+              <a:buNone/>
+            </a:pPr>
+            <a:r>
+              <a:rPr lang="en-US" sz="900" dirty="0">
+                <a:solidFill>
+                  <a:srgbClr val="5F7181"/>
+                </a:solidFill>
+                <a:latin typeface="Aptos" pitchFamily="34" charset="0"/>
+                <a:ea typeface="Aptos" pitchFamily="34" charset="-122"/>
+                <a:cs typeface="Aptos" pitchFamily="34" charset="-120"/>
+              </a:rPr>
+              <a:t>19</a:t>
+            </a:r>
+            <a:endParaRPr lang="en-US" sz="900" dirty="0"/>
+          </a:p>
+        </p:txBody>
+      </p:sp>
+      <p:sp>
+        <p:nvSpPr>
+          <p:cNvPr id="8" name="Shape 6"/>
           <p:cNvSpPr/>
           <p:nvPr/>
         </p:nvSpPr>
@@ -8262,7 +8663,7 @@
       </p:sp>
       <p:sp>
         <p:nvSpPr>
-          <p:cNvPr id="8" name="Text 6"/>
+          <p:cNvPr id="9" name="Text 7"/>
           <p:cNvSpPr/>
           <p:nvPr/>
         </p:nvSpPr>
@@ -8301,14 +8702,14 @@
       </p:sp>
       <p:sp>
         <p:nvSpPr>
-          <p:cNvPr id="9" name="Text 7"/>
+          <p:cNvPr id="10" name="Text 8"/>
           <p:cNvSpPr/>
           <p:nvPr/>
         </p:nvSpPr>
         <p:spPr>
           <a:xfrm>
             <a:off x="640080" y="621792"/>
-            <a:ext cx="10881360" cy="566928"/>
+            <a:ext cx="10881360" cy="713232"/>
           </a:xfrm>
           <a:prstGeom prst="rect">
             <a:avLst/>
@@ -8326,7 +8727,7 @@
               <a:buNone/>
             </a:pPr>
             <a:r>
-              <a:rPr lang="en-US" sz="2700" b="1" dirty="0">
+              <a:rPr lang="en-US" sz="3400" b="1" dirty="0">
                 <a:solidFill>
                   <a:srgbClr val="003A63"/>
                 </a:solidFill>
@@ -8336,20 +8737,20 @@
               </a:rPr>
               <a:t>Knowledge Check</a:t>
             </a:r>
-            <a:endParaRPr lang="en-US" sz="2700" dirty="0"/>
-          </a:p>
-        </p:txBody>
-      </p:sp>
-      <p:sp>
-        <p:nvSpPr>
-          <p:cNvPr id="10" name="Text 8"/>
-          <p:cNvSpPr/>
-          <p:nvPr/>
-        </p:nvSpPr>
-        <p:spPr>
-          <a:xfrm>
-            <a:off x="868680" y="1417320"/>
-            <a:ext cx="6675120" cy="4434840"/>
+            <a:endParaRPr lang="en-US" sz="3400" dirty="0"/>
+          </a:p>
+        </p:txBody>
+      </p:sp>
+      <p:sp>
+        <p:nvSpPr>
+          <p:cNvPr id="11" name="Text 9"/>
+          <p:cNvSpPr/>
+          <p:nvPr/>
+        </p:nvSpPr>
+        <p:spPr>
+          <a:xfrm>
+            <a:off x="868680" y="1508760"/>
+            <a:ext cx="6537960" cy="4160520"/>
           </a:xfrm>
           <a:prstGeom prst="rect">
             <a:avLst/>
@@ -8364,7 +8765,7 @@
           <a:lstStyle/>
           <a:p>
             <a:r>
-              <a:rPr lang="en-US" sz="1700" dirty="0">
+              <a:rPr lang="en-US" sz="2100" dirty="0">
                 <a:solidFill>
                   <a:srgbClr val="17364A"/>
                 </a:solidFill>
@@ -8374,11 +8775,11 @@
               </a:rPr>
               <a:t>1. What is the strongest reason this module topic belongs in AI leadership and governance training?</a:t>
             </a:r>
-            <a:endParaRPr lang="en-US" sz="1700" dirty="0"/>
-          </a:p>
-          <a:p>
-            <a:r>
-              <a:rPr lang="en-US" sz="1700" dirty="0">
+            <a:endParaRPr lang="en-US" sz="2100" dirty="0"/>
+          </a:p>
+          <a:p>
+            <a:r>
+              <a:rPr lang="en-US" sz="2100" dirty="0">
                 <a:solidFill>
                   <a:srgbClr val="17364A"/>
                 </a:solidFill>
@@ -8388,11 +8789,11 @@
               </a:rPr>
               <a:t>2. Which practice best supports accountable public health AI governance?</a:t>
             </a:r>
-            <a:endParaRPr lang="en-US" sz="1700" dirty="0"/>
-          </a:p>
-          <a:p>
-            <a:r>
-              <a:rPr lang="en-US" sz="1700" dirty="0">
+            <a:endParaRPr lang="en-US" sz="2100" dirty="0"/>
+          </a:p>
+          <a:p>
+            <a:r>
+              <a:rPr lang="en-US" sz="2100" dirty="0">
                 <a:solidFill>
                   <a:srgbClr val="17364A"/>
                 </a:solidFill>
@@ -8402,27 +8803,13 @@
               </a:rPr>
               <a:t>3. When should an AI use case be escalated for leadership or governance review?</a:t>
             </a:r>
-            <a:endParaRPr lang="en-US" sz="1700" dirty="0"/>
-          </a:p>
-          <a:p>
-            <a:r>
-              <a:rPr lang="en-US" sz="1700" dirty="0">
-                <a:solidFill>
-                  <a:srgbClr val="17364A"/>
-                </a:solidFill>
-                <a:latin typeface="Aptos" pitchFamily="34" charset="0"/>
-                <a:ea typeface="Aptos" pitchFamily="34" charset="-122"/>
-                <a:cs typeface="Aptos" pitchFamily="34" charset="-120"/>
-              </a:rPr>
-              <a:t>4. What is weak evidence of completion for a leadership and governance module?</a:t>
-            </a:r>
-            <a:endParaRPr lang="en-US" sz="1700" dirty="0"/>
-          </a:p>
-        </p:txBody>
-      </p:sp>
-      <p:sp>
-        <p:nvSpPr>
-          <p:cNvPr id="11" name="Shape 9"/>
+            <a:endParaRPr lang="en-US" sz="2100" dirty="0"/>
+          </a:p>
+        </p:txBody>
+      </p:sp>
+      <p:sp>
+        <p:nvSpPr>
+          <p:cNvPr id="12" name="Shape 10"/>
           <p:cNvSpPr/>
           <p:nvPr/>
         </p:nvSpPr>
@@ -8449,14 +8836,14 @@
       </p:sp>
       <p:sp>
         <p:nvSpPr>
-          <p:cNvPr id="12" name="Text 10"/>
+          <p:cNvPr id="13" name="Text 11"/>
           <p:cNvSpPr/>
           <p:nvPr/>
         </p:nvSpPr>
         <p:spPr>
           <a:xfrm>
             <a:off x="8074152" y="1563624"/>
-            <a:ext cx="2825496" cy="201168"/>
+            <a:ext cx="2825496" cy="256032"/>
           </a:xfrm>
           <a:prstGeom prst="rect">
             <a:avLst/>
@@ -8472,7 +8859,7 @@
               <a:buNone/>
             </a:pPr>
             <a:r>
-              <a:rPr lang="en-US" sz="950" b="1" dirty="0">
+              <a:rPr lang="en-US" sz="1300" b="1" dirty="0">
                 <a:solidFill>
                   <a:srgbClr val="0068B7"/>
                 </a:solidFill>
@@ -8482,20 +8869,20 @@
               </a:rPr>
               <a:t>Key idea</a:t>
             </a:r>
-            <a:endParaRPr lang="en-US" sz="950" dirty="0"/>
-          </a:p>
-        </p:txBody>
-      </p:sp>
-      <p:sp>
-        <p:nvSpPr>
-          <p:cNvPr id="13" name="Text 11"/>
-          <p:cNvSpPr/>
-          <p:nvPr/>
-        </p:nvSpPr>
-        <p:spPr>
-          <a:xfrm>
-            <a:off x="8074152" y="1856232"/>
-            <a:ext cx="2825496" cy="1261872"/>
+            <a:endParaRPr lang="en-US" sz="1300" dirty="0"/>
+          </a:p>
+        </p:txBody>
+      </p:sp>
+      <p:sp>
+        <p:nvSpPr>
+          <p:cNvPr id="14" name="Text 12"/>
+          <p:cNvSpPr/>
+          <p:nvPr/>
+        </p:nvSpPr>
+        <p:spPr>
+          <a:xfrm>
+            <a:off x="8074152" y="1920240"/>
+            <a:ext cx="2825496" cy="1188720"/>
           </a:xfrm>
           <a:prstGeom prst="rect">
             <a:avLst/>
@@ -8513,7 +8900,7 @@
               <a:buNone/>
             </a:pPr>
             <a:r>
-              <a:rPr lang="en-US" sz="1250" dirty="0">
+              <a:rPr lang="en-US" sz="1550" dirty="0">
                 <a:solidFill>
                   <a:srgbClr val="17364A"/>
                 </a:solidFill>
@@ -8523,13 +8910,13 @@
               </a:rPr>
               <a:t>1. What is the strongest reason this module topic belongs in AI leadership and governance training?</a:t>
             </a:r>
-            <a:endParaRPr lang="en-US" sz="1250" dirty="0"/>
-          </a:p>
-        </p:txBody>
-      </p:sp>
-      <p:sp>
-        <p:nvSpPr>
-          <p:cNvPr id="14" name="Shape 12"/>
+            <a:endParaRPr lang="en-US" sz="1550" dirty="0"/>
+          </a:p>
+        </p:txBody>
+      </p:sp>
+      <p:sp>
+        <p:nvSpPr>
+          <p:cNvPr id="15" name="Shape 13"/>
           <p:cNvSpPr/>
           <p:nvPr/>
         </p:nvSpPr>
@@ -8556,14 +8943,14 @@
       </p:sp>
       <p:sp>
         <p:nvSpPr>
-          <p:cNvPr id="15" name="Text 13"/>
+          <p:cNvPr id="16" name="Text 14"/>
           <p:cNvSpPr/>
           <p:nvPr/>
         </p:nvSpPr>
         <p:spPr>
           <a:xfrm>
             <a:off x="8074152" y="3666744"/>
-            <a:ext cx="2825496" cy="201168"/>
+            <a:ext cx="2825496" cy="256032"/>
           </a:xfrm>
           <a:prstGeom prst="rect">
             <a:avLst/>
@@ -8579,7 +8966,7 @@
               <a:buNone/>
             </a:pPr>
             <a:r>
-              <a:rPr lang="en-US" sz="950" b="1" dirty="0">
+              <a:rPr lang="en-US" sz="1300" b="1" dirty="0">
                 <a:solidFill>
                   <a:srgbClr val="0068B7"/>
                 </a:solidFill>
@@ -8589,20 +8976,20 @@
               </a:rPr>
               <a:t>Use this for</a:t>
             </a:r>
-            <a:endParaRPr lang="en-US" sz="950" dirty="0"/>
-          </a:p>
-        </p:txBody>
-      </p:sp>
-      <p:sp>
-        <p:nvSpPr>
-          <p:cNvPr id="16" name="Text 14"/>
-          <p:cNvSpPr/>
-          <p:nvPr/>
-        </p:nvSpPr>
-        <p:spPr>
-          <a:xfrm>
-            <a:off x="8074152" y="3959352"/>
-            <a:ext cx="2825496" cy="1170432"/>
+            <a:endParaRPr lang="en-US" sz="1300" dirty="0"/>
+          </a:p>
+        </p:txBody>
+      </p:sp>
+      <p:sp>
+        <p:nvSpPr>
+          <p:cNvPr id="17" name="Text 15"/>
+          <p:cNvSpPr/>
+          <p:nvPr/>
+        </p:nvSpPr>
+        <p:spPr>
+          <a:xfrm>
+            <a:off x="8074152" y="4023360"/>
+            <a:ext cx="2825496" cy="1097280"/>
           </a:xfrm>
           <a:prstGeom prst="rect">
             <a:avLst/>
@@ -8620,7 +9007,7 @@
               <a:buNone/>
             </a:pPr>
             <a:r>
-              <a:rPr lang="en-US" sz="1250" dirty="0">
+              <a:rPr lang="en-US" sz="1550" dirty="0">
                 <a:solidFill>
                   <a:srgbClr val="17364A"/>
                 </a:solidFill>
@@ -8630,7 +9017,7 @@
               </a:rPr>
               <a:t>Connect the concept to public health decisions, safeguards, documentation, or implementation work.</a:t>
             </a:r>
-            <a:endParaRPr lang="en-US" sz="1250" dirty="0"/>
+            <a:endParaRPr lang="en-US" sz="1550" dirty="0"/>
           </a:p>
         </p:txBody>
       </p:sp>
@@ -8827,7 +9214,7 @@
                 <a:ea typeface="Aptos" pitchFamily="34" charset="-122"/>
                 <a:cs typeface="Aptos" pitchFamily="34" charset="-120"/>
               </a:rPr>
-              <a:t>© Paula Soper</a:t>
+              <a:t>Â© Paula Soper</a:t>
             </a:r>
             <a:endParaRPr lang="en-US" sz="800" dirty="0"/>
           </a:p>
@@ -8841,8 +9228,47 @@
         </p:nvSpPr>
         <p:spPr>
           <a:xfrm>
+            <a:off x="11137392" y="6510528"/>
+            <a:ext cx="411480" cy="201168"/>
+          </a:xfrm>
+          <a:prstGeom prst="rect">
+            <a:avLst/>
+          </a:prstGeom>
+          <a:noFill/>
+          <a:ln/>
+        </p:spPr>
+        <p:txBody>
+          <a:bodyPr wrap="square" lIns="0" tIns="0" rIns="0" bIns="0" rtlCol="0" anchor="ctr"/>
+          <a:lstStyle/>
+          <a:p>
+            <a:pPr algn="r" indent="0" marL="0">
+              <a:buNone/>
+            </a:pPr>
+            <a:r>
+              <a:rPr lang="en-US" sz="900" dirty="0">
+                <a:solidFill>
+                  <a:srgbClr val="5F7181"/>
+                </a:solidFill>
+                <a:latin typeface="Aptos" pitchFamily="34" charset="0"/>
+                <a:ea typeface="Aptos" pitchFamily="34" charset="-122"/>
+                <a:cs typeface="Aptos" pitchFamily="34" charset="-120"/>
+              </a:rPr>
+              <a:t>2</a:t>
+            </a:r>
+            <a:endParaRPr lang="en-US" sz="900" dirty="0"/>
+          </a:p>
+        </p:txBody>
+      </p:sp>
+      <p:sp>
+        <p:nvSpPr>
+          <p:cNvPr id="8" name="Text 6"/>
+          <p:cNvSpPr/>
+          <p:nvPr/>
+        </p:nvSpPr>
+        <p:spPr>
+          <a:xfrm>
             <a:off x="640080" y="658368"/>
-            <a:ext cx="10881360" cy="566928"/>
+            <a:ext cx="10881360" cy="713232"/>
           </a:xfrm>
           <a:prstGeom prst="rect">
             <a:avLst/>
@@ -8860,7 +9286,7 @@
               <a:buNone/>
             </a:pPr>
             <a:r>
-              <a:rPr lang="en-US" sz="2700" b="1" dirty="0">
+              <a:rPr lang="en-US" sz="3400" b="1" dirty="0">
                 <a:solidFill>
                   <a:srgbClr val="003A63"/>
                 </a:solidFill>
@@ -8870,20 +9296,20 @@
               </a:rPr>
               <a:t>What this module helps you do</a:t>
             </a:r>
-            <a:endParaRPr lang="en-US" sz="2700" dirty="0"/>
-          </a:p>
-        </p:txBody>
-      </p:sp>
-      <p:sp>
-        <p:nvSpPr>
-          <p:cNvPr id="8" name="Text 6"/>
-          <p:cNvSpPr/>
-          <p:nvPr/>
-        </p:nvSpPr>
-        <p:spPr>
-          <a:xfrm>
-            <a:off x="868680" y="1417320"/>
-            <a:ext cx="6675120" cy="3291840"/>
+            <a:endParaRPr lang="en-US" sz="3400" dirty="0"/>
+          </a:p>
+        </p:txBody>
+      </p:sp>
+      <p:sp>
+        <p:nvSpPr>
+          <p:cNvPr id="9" name="Text 7"/>
+          <p:cNvSpPr/>
+          <p:nvPr/>
+        </p:nvSpPr>
+        <p:spPr>
+          <a:xfrm>
+            <a:off x="868680" y="1508760"/>
+            <a:ext cx="6446520" cy="2926080"/>
           </a:xfrm>
           <a:prstGeom prst="rect">
             <a:avLst/>
@@ -8898,7 +9324,7 @@
           <a:lstStyle/>
           <a:p>
             <a:r>
-              <a:rPr lang="en-US" sz="1700" dirty="0">
+              <a:rPr lang="en-US" sz="2100" dirty="0">
                 <a:solidFill>
                   <a:srgbClr val="17364A"/>
                 </a:solidFill>
@@ -8908,11 +9334,11 @@
               </a:rPr>
               <a:t>Public health AI governance should not be limited to internal agency review.</a:t>
             </a:r>
-            <a:endParaRPr lang="en-US" sz="1700" dirty="0"/>
-          </a:p>
-          <a:p>
-            <a:r>
-              <a:rPr lang="en-US" sz="1700" dirty="0">
+            <a:endParaRPr lang="en-US" sz="2100" dirty="0"/>
+          </a:p>
+          <a:p>
+            <a:r>
+              <a:rPr lang="en-US" sz="2100" dirty="0">
                 <a:solidFill>
                   <a:srgbClr val="17364A"/>
                 </a:solidFill>
@@ -8920,13 +9346,13 @@
                 <a:ea typeface="Aptos" pitchFamily="34" charset="-122"/>
                 <a:cs typeface="Aptos" pitchFamily="34" charset="-120"/>
               </a:rPr>
-              <a:t>When AI affects communities, services, surveillance, communication, prioritization, or resource allocation, agencies should consider how community.</a:t>
-            </a:r>
-            <a:endParaRPr lang="en-US" sz="1700" dirty="0"/>
-          </a:p>
-          <a:p>
-            <a:r>
-              <a:rPr lang="en-US" sz="1700" dirty="0">
+              <a:t>When AI affects communities, services, surveillance, communication, prioritization, or resource allocation,.</a:t>
+            </a:r>
+            <a:endParaRPr lang="en-US" sz="2100" dirty="0"/>
+          </a:p>
+          <a:p>
+            <a:r>
+              <a:rPr lang="en-US" sz="2100" dirty="0">
                 <a:solidFill>
                   <a:srgbClr val="17364A"/>
                 </a:solidFill>
@@ -8936,27 +9362,13 @@
               </a:rPr>
               <a:t>Participatory governance creates structured ways for affected people and community partners to shape AI use.</a:t>
             </a:r>
-            <a:endParaRPr lang="en-US" sz="1700" dirty="0"/>
-          </a:p>
-          <a:p>
-            <a:r>
-              <a:rPr lang="en-US" sz="1700" dirty="0">
-                <a:solidFill>
-                  <a:srgbClr val="17364A"/>
-                </a:solidFill>
-                <a:latin typeface="Aptos" pitchFamily="34" charset="0"/>
-                <a:ea typeface="Aptos" pitchFamily="34" charset="-122"/>
-                <a:cs typeface="Aptos" pitchFamily="34" charset="-120"/>
-              </a:rPr>
-              <a:t>This module helps leaders distinguish between informing the public, consulting communities, involving partners, and sharing oversight.</a:t>
-            </a:r>
-            <a:endParaRPr lang="en-US" sz="1700" dirty="0"/>
-          </a:p>
-        </p:txBody>
-      </p:sp>
-      <p:sp>
-        <p:nvSpPr>
-          <p:cNvPr id="9" name="Shape 7"/>
+            <a:endParaRPr lang="en-US" sz="2100" dirty="0"/>
+          </a:p>
+        </p:txBody>
+      </p:sp>
+      <p:sp>
+        <p:nvSpPr>
+          <p:cNvPr id="10" name="Shape 8"/>
           <p:cNvSpPr/>
           <p:nvPr/>
         </p:nvSpPr>
@@ -8983,14 +9395,14 @@
       </p:sp>
       <p:sp>
         <p:nvSpPr>
-          <p:cNvPr id="10" name="Text 8"/>
+          <p:cNvPr id="11" name="Text 9"/>
           <p:cNvSpPr/>
           <p:nvPr/>
         </p:nvSpPr>
         <p:spPr>
           <a:xfrm>
             <a:off x="8074152" y="1563624"/>
-            <a:ext cx="2825496" cy="201168"/>
+            <a:ext cx="2825496" cy="256032"/>
           </a:xfrm>
           <a:prstGeom prst="rect">
             <a:avLst/>
@@ -9006,7 +9418,7 @@
               <a:buNone/>
             </a:pPr>
             <a:r>
-              <a:rPr lang="en-US" sz="950" b="1" dirty="0">
+              <a:rPr lang="en-US" sz="1300" b="1" dirty="0">
                 <a:solidFill>
                   <a:srgbClr val="0068B7"/>
                 </a:solidFill>
@@ -9016,20 +9428,20 @@
               </a:rPr>
               <a:t>Module details</a:t>
             </a:r>
-            <a:endParaRPr lang="en-US" sz="950" dirty="0"/>
-          </a:p>
-        </p:txBody>
-      </p:sp>
-      <p:sp>
-        <p:nvSpPr>
-          <p:cNvPr id="11" name="Text 9"/>
-          <p:cNvSpPr/>
-          <p:nvPr/>
-        </p:nvSpPr>
-        <p:spPr>
-          <a:xfrm>
-            <a:off x="8074152" y="1856232"/>
-            <a:ext cx="2825496" cy="1353312"/>
+            <a:endParaRPr lang="en-US" sz="1300" dirty="0"/>
+          </a:p>
+        </p:txBody>
+      </p:sp>
+      <p:sp>
+        <p:nvSpPr>
+          <p:cNvPr id="12" name="Text 10"/>
+          <p:cNvSpPr/>
+          <p:nvPr/>
+        </p:nvSpPr>
+        <p:spPr>
+          <a:xfrm>
+            <a:off x="8074152" y="1920240"/>
+            <a:ext cx="2825496" cy="1280160"/>
           </a:xfrm>
           <a:prstGeom prst="rect">
             <a:avLst/>
@@ -9047,7 +9459,7 @@
               <a:buNone/>
             </a:pPr>
             <a:r>
-              <a:rPr lang="en-US" sz="1250" dirty="0">
+              <a:rPr lang="en-US" sz="1550" dirty="0">
                 <a:solidFill>
                   <a:srgbClr val="17364A"/>
                 </a:solidFill>
@@ -9057,14 +9469,14 @@
               </a:rPr>
               <a:t>Level: advanced/leadership</a:t>
             </a:r>
-            <a:endParaRPr lang="en-US" sz="1250" dirty="0"/>
+            <a:endParaRPr lang="en-US" sz="1550" dirty="0"/>
           </a:p>
           <a:p>
             <a:pPr indent="0" marL="0">
               <a:buNone/>
             </a:pPr>
             <a:r>
-              <a:rPr lang="en-US" sz="1250" dirty="0">
+              <a:rPr lang="en-US" sz="1550" dirty="0">
                 <a:solidFill>
                   <a:srgbClr val="17364A"/>
                 </a:solidFill>
@@ -9074,14 +9486,14 @@
               </a:rPr>
               <a:t>Primary track: Governance and Security Track</a:t>
             </a:r>
-            <a:endParaRPr lang="en-US" sz="1250" dirty="0"/>
+            <a:endParaRPr lang="en-US" sz="1550" dirty="0"/>
           </a:p>
           <a:p>
             <a:pPr indent="0" marL="0">
               <a:buNone/>
             </a:pPr>
             <a:r>
-              <a:rPr lang="en-US" sz="1250" dirty="0">
+              <a:rPr lang="en-US" sz="1550" dirty="0">
                 <a:solidFill>
                   <a:srgbClr val="17364A"/>
                 </a:solidFill>
@@ -9091,32 +9503,32 @@
               </a:rPr>
               <a:t>Appears in tracks: governance-security</a:t>
             </a:r>
-            <a:endParaRPr lang="en-US" sz="1250" dirty="0"/>
-          </a:p>
-        </p:txBody>
-      </p:sp>
-      <p:sp>
-        <p:nvSpPr>
-          <p:cNvPr id="12" name="Shape 10"/>
-          <p:cNvSpPr/>
-          <p:nvPr/>
-        </p:nvSpPr>
-        <p:spPr>
-          <a:xfrm>
-            <a:off x="7909560" y="3611880"/>
-            <a:ext cx="3154680" cy="1783080"/>
+            <a:endParaRPr lang="en-US" sz="1550" dirty="0"/>
+          </a:p>
+        </p:txBody>
+      </p:sp>
+      <p:sp>
+        <p:nvSpPr>
+          <p:cNvPr id="13" name="Shape 11"/>
+          <p:cNvSpPr/>
+          <p:nvPr/>
+        </p:nvSpPr>
+        <p:spPr>
+          <a:xfrm>
+            <a:off x="7635240" y="3730752"/>
+            <a:ext cx="1033272" cy="749808"/>
           </a:xfrm>
           <a:prstGeom prst="roundRect">
             <a:avLst>
-              <a:gd name="adj" fmla="val 6154"/>
+              <a:gd name="adj" fmla="val 14634"/>
             </a:avLst>
           </a:prstGeom>
           <a:solidFill>
-            <a:srgbClr val="EEF8ED"/>
+            <a:srgbClr val="0068B7"/>
           </a:solidFill>
           <a:ln w="12700">
             <a:solidFill>
-              <a:srgbClr val="B9D7E6"/>
+              <a:srgbClr val="0068B7"/>
             </a:solidFill>
             <a:prstDash val="solid"/>
           </a:ln>
@@ -9124,81 +9536,256 @@
       </p:sp>
       <p:sp>
         <p:nvSpPr>
-          <p:cNvPr id="13" name="Text 11"/>
-          <p:cNvSpPr/>
-          <p:nvPr/>
-        </p:nvSpPr>
-        <p:spPr>
-          <a:xfrm>
-            <a:off x="8074152" y="3758184"/>
-            <a:ext cx="2825496" cy="201168"/>
-          </a:xfrm>
-          <a:prstGeom prst="rect">
-            <a:avLst/>
-          </a:prstGeom>
-          <a:noFill/>
-          <a:ln/>
-        </p:spPr>
-        <p:txBody>
-          <a:bodyPr wrap="square" lIns="0" tIns="0" rIns="0" bIns="0" rtlCol="0" anchor="ctr"/>
-          <a:lstStyle/>
-          <a:p>
-            <a:pPr indent="0" marL="0">
-              <a:buNone/>
-            </a:pPr>
-            <a:r>
-              <a:rPr lang="en-US" sz="950" b="1" dirty="0">
-                <a:solidFill>
-                  <a:srgbClr val="0068B7"/>
-                </a:solidFill>
-                <a:latin typeface="Aptos" pitchFamily="34" charset="0"/>
-                <a:ea typeface="Aptos" pitchFamily="34" charset="-122"/>
-                <a:cs typeface="Aptos" pitchFamily="34" charset="-120"/>
-              </a:rPr>
-              <a:t>Learning approach</a:t>
-            </a:r>
-            <a:endParaRPr lang="en-US" sz="950" dirty="0"/>
-          </a:p>
-        </p:txBody>
-      </p:sp>
-      <p:sp>
-        <p:nvSpPr>
           <p:cNvPr id="14" name="Text 12"/>
           <p:cNvSpPr/>
           <p:nvPr/>
         </p:nvSpPr>
         <p:spPr>
           <a:xfrm>
-            <a:off x="8074152" y="4050792"/>
-            <a:ext cx="2825496" cy="1216152"/>
-          </a:xfrm>
-          <a:prstGeom prst="rect">
-            <a:avLst/>
-          </a:prstGeom>
-          <a:noFill/>
-          <a:ln/>
-        </p:spPr>
-        <p:txBody>
-          <a:bodyPr wrap="square" lIns="0" tIns="0" rIns="0" bIns="0" rtlCol="0" anchor="t">
+            <a:off x="7708392" y="3922776"/>
+            <a:ext cx="886968" cy="310896"/>
+          </a:xfrm>
+          <a:prstGeom prst="rect">
+            <a:avLst/>
+          </a:prstGeom>
+          <a:noFill/>
+          <a:ln/>
+        </p:spPr>
+        <p:txBody>
+          <a:bodyPr wrap="square" lIns="0" tIns="0" rIns="0" bIns="0" rtlCol="0" anchor="ctr">
             <a:normAutofit/>
           </a:bodyPr>
           <a:lstStyle/>
           <a:p>
-            <a:pPr indent="0" marL="0">
-              <a:buNone/>
-            </a:pPr>
-            <a:r>
-              <a:rPr lang="en-US" sz="1250" dirty="0">
-                <a:solidFill>
-                  <a:srgbClr val="17364A"/>
-                </a:solidFill>
-                <a:latin typeface="Aptos" pitchFamily="34" charset="0"/>
-                <a:ea typeface="Aptos" pitchFamily="34" charset="-122"/>
-                <a:cs typeface="Aptos" pitchFamily="34" charset="-120"/>
-              </a:rPr>
-              <a:t>Review the core ideas, complete the practical exercise, check your understanding, and use the related plays and tools to apply the lesson.</a:t>
-            </a:r>
-            <a:endParaRPr lang="en-US" sz="1250" dirty="0"/>
+            <a:pPr algn="ctr" indent="0" marL="0">
+              <a:buNone/>
+            </a:pPr>
+            <a:r>
+              <a:rPr lang="en-US" sz="1500" b="1" dirty="0">
+                <a:solidFill>
+                  <a:srgbClr val="FFFFFF"/>
+                </a:solidFill>
+                <a:latin typeface="Aptos" pitchFamily="34" charset="0"/>
+                <a:ea typeface="Aptos" pitchFamily="34" charset="-122"/>
+                <a:cs typeface="Aptos" pitchFamily="34" charset="-120"/>
+              </a:rPr>
+              <a:t>Learn</a:t>
+            </a:r>
+            <a:endParaRPr lang="en-US" sz="1500" dirty="0"/>
+          </a:p>
+        </p:txBody>
+      </p:sp>
+      <p:sp>
+        <p:nvSpPr>
+          <p:cNvPr id="15" name="Text 13"/>
+          <p:cNvSpPr/>
+          <p:nvPr/>
+        </p:nvSpPr>
+        <p:spPr>
+          <a:xfrm>
+            <a:off x="8695944" y="3941064"/>
+            <a:ext cx="201168" cy="256032"/>
+          </a:xfrm>
+          <a:prstGeom prst="rect">
+            <a:avLst/>
+          </a:prstGeom>
+          <a:noFill/>
+          <a:ln/>
+        </p:spPr>
+        <p:txBody>
+          <a:bodyPr wrap="square" lIns="0" tIns="0" rIns="0" bIns="0" rtlCol="0" anchor="ctr"/>
+          <a:lstStyle/>
+          <a:p>
+            <a:pPr algn="ctr" indent="0" marL="0">
+              <a:buNone/>
+            </a:pPr>
+            <a:r>
+              <a:rPr lang="en-US" sz="1800" b="1" dirty="0">
+                <a:solidFill>
+                  <a:srgbClr val="0068B7"/>
+                </a:solidFill>
+                <a:latin typeface="Aptos" pitchFamily="34" charset="0"/>
+                <a:ea typeface="Aptos" pitchFamily="34" charset="-122"/>
+                <a:cs typeface="Aptos" pitchFamily="34" charset="-120"/>
+              </a:rPr>
+              <a:t>â†’</a:t>
+            </a:r>
+            <a:endParaRPr lang="en-US" sz="1800" dirty="0"/>
+          </a:p>
+        </p:txBody>
+      </p:sp>
+      <p:sp>
+        <p:nvSpPr>
+          <p:cNvPr id="16" name="Shape 14"/>
+          <p:cNvSpPr/>
+          <p:nvPr/>
+        </p:nvSpPr>
+        <p:spPr>
+          <a:xfrm>
+            <a:off x="8924544" y="3730752"/>
+            <a:ext cx="1033272" cy="749808"/>
+          </a:xfrm>
+          <a:prstGeom prst="roundRect">
+            <a:avLst>
+              <a:gd name="adj" fmla="val 14634"/>
+            </a:avLst>
+          </a:prstGeom>
+          <a:solidFill>
+            <a:srgbClr val="2F8A28"/>
+          </a:solidFill>
+          <a:ln w="12700">
+            <a:solidFill>
+              <a:srgbClr val="2F8A28"/>
+            </a:solidFill>
+            <a:prstDash val="solid"/>
+          </a:ln>
+        </p:spPr>
+      </p:sp>
+      <p:sp>
+        <p:nvSpPr>
+          <p:cNvPr id="17" name="Text 15"/>
+          <p:cNvSpPr/>
+          <p:nvPr/>
+        </p:nvSpPr>
+        <p:spPr>
+          <a:xfrm>
+            <a:off x="8997696" y="3922776"/>
+            <a:ext cx="886968" cy="310896"/>
+          </a:xfrm>
+          <a:prstGeom prst="rect">
+            <a:avLst/>
+          </a:prstGeom>
+          <a:noFill/>
+          <a:ln/>
+        </p:spPr>
+        <p:txBody>
+          <a:bodyPr wrap="square" lIns="0" tIns="0" rIns="0" bIns="0" rtlCol="0" anchor="ctr">
+            <a:normAutofit/>
+          </a:bodyPr>
+          <a:lstStyle/>
+          <a:p>
+            <a:pPr algn="ctr" indent="0" marL="0">
+              <a:buNone/>
+            </a:pPr>
+            <a:r>
+              <a:rPr lang="en-US" sz="1500" b="1" dirty="0">
+                <a:solidFill>
+                  <a:srgbClr val="FFFFFF"/>
+                </a:solidFill>
+                <a:latin typeface="Aptos" pitchFamily="34" charset="0"/>
+                <a:ea typeface="Aptos" pitchFamily="34" charset="-122"/>
+                <a:cs typeface="Aptos" pitchFamily="34" charset="-120"/>
+              </a:rPr>
+              <a:t>Apply</a:t>
+            </a:r>
+            <a:endParaRPr lang="en-US" sz="1500" dirty="0"/>
+          </a:p>
+        </p:txBody>
+      </p:sp>
+      <p:sp>
+        <p:nvSpPr>
+          <p:cNvPr id="18" name="Text 16"/>
+          <p:cNvSpPr/>
+          <p:nvPr/>
+        </p:nvSpPr>
+        <p:spPr>
+          <a:xfrm>
+            <a:off x="9985248" y="3941064"/>
+            <a:ext cx="201168" cy="256032"/>
+          </a:xfrm>
+          <a:prstGeom prst="rect">
+            <a:avLst/>
+          </a:prstGeom>
+          <a:noFill/>
+          <a:ln/>
+        </p:spPr>
+        <p:txBody>
+          <a:bodyPr wrap="square" lIns="0" tIns="0" rIns="0" bIns="0" rtlCol="0" anchor="ctr"/>
+          <a:lstStyle/>
+          <a:p>
+            <a:pPr algn="ctr" indent="0" marL="0">
+              <a:buNone/>
+            </a:pPr>
+            <a:r>
+              <a:rPr lang="en-US" sz="1800" b="1" dirty="0">
+                <a:solidFill>
+                  <a:srgbClr val="0068B7"/>
+                </a:solidFill>
+                <a:latin typeface="Aptos" pitchFamily="34" charset="0"/>
+                <a:ea typeface="Aptos" pitchFamily="34" charset="-122"/>
+                <a:cs typeface="Aptos" pitchFamily="34" charset="-120"/>
+              </a:rPr>
+              <a:t>â†’</a:t>
+            </a:r>
+            <a:endParaRPr lang="en-US" sz="1800" dirty="0"/>
+          </a:p>
+        </p:txBody>
+      </p:sp>
+      <p:sp>
+        <p:nvSpPr>
+          <p:cNvPr id="19" name="Shape 17"/>
+          <p:cNvSpPr/>
+          <p:nvPr/>
+        </p:nvSpPr>
+        <p:spPr>
+          <a:xfrm>
+            <a:off x="10213848" y="3730752"/>
+            <a:ext cx="1033272" cy="749808"/>
+          </a:xfrm>
+          <a:prstGeom prst="roundRect">
+            <a:avLst>
+              <a:gd name="adj" fmla="val 14634"/>
+            </a:avLst>
+          </a:prstGeom>
+          <a:solidFill>
+            <a:srgbClr val="6A4CA3"/>
+          </a:solidFill>
+          <a:ln w="12700">
+            <a:solidFill>
+              <a:srgbClr val="6A4CA3"/>
+            </a:solidFill>
+            <a:prstDash val="solid"/>
+          </a:ln>
+        </p:spPr>
+      </p:sp>
+      <p:sp>
+        <p:nvSpPr>
+          <p:cNvPr id="20" name="Text 18"/>
+          <p:cNvSpPr/>
+          <p:nvPr/>
+        </p:nvSpPr>
+        <p:spPr>
+          <a:xfrm>
+            <a:off x="10287000" y="3922776"/>
+            <a:ext cx="886968" cy="310896"/>
+          </a:xfrm>
+          <a:prstGeom prst="rect">
+            <a:avLst/>
+          </a:prstGeom>
+          <a:noFill/>
+          <a:ln/>
+        </p:spPr>
+        <p:txBody>
+          <a:bodyPr wrap="square" lIns="0" tIns="0" rIns="0" bIns="0" rtlCol="0" anchor="ctr">
+            <a:normAutofit/>
+          </a:bodyPr>
+          <a:lstStyle/>
+          <a:p>
+            <a:pPr algn="ctr" indent="0" marL="0">
+              <a:buNone/>
+            </a:pPr>
+            <a:r>
+              <a:rPr lang="en-US" sz="1500" b="1" dirty="0">
+                <a:solidFill>
+                  <a:srgbClr val="FFFFFF"/>
+                </a:solidFill>
+                <a:latin typeface="Aptos" pitchFamily="34" charset="0"/>
+                <a:ea typeface="Aptos" pitchFamily="34" charset="-122"/>
+                <a:cs typeface="Aptos" pitchFamily="34" charset="-120"/>
+              </a:rPr>
+              <a:t>Document</a:t>
+            </a:r>
+            <a:endParaRPr lang="en-US" sz="1500" dirty="0"/>
           </a:p>
         </p:txBody>
       </p:sp>
@@ -9395,7 +9982,7 @@
                 <a:ea typeface="Aptos" pitchFamily="34" charset="-122"/>
                 <a:cs typeface="Aptos" pitchFamily="34" charset="-120"/>
               </a:rPr>
-              <a:t>© Paula Soper</a:t>
+              <a:t>Â© Paula Soper</a:t>
             </a:r>
             <a:endParaRPr lang="en-US" sz="800" dirty="0"/>
           </a:p>
@@ -9403,7 +9990,46 @@
       </p:sp>
       <p:sp>
         <p:nvSpPr>
-          <p:cNvPr id="7" name="Shape 5"/>
+          <p:cNvPr id="7" name="Text 5"/>
+          <p:cNvSpPr/>
+          <p:nvPr/>
+        </p:nvSpPr>
+        <p:spPr>
+          <a:xfrm>
+            <a:off x="11137392" y="6510528"/>
+            <a:ext cx="411480" cy="201168"/>
+          </a:xfrm>
+          <a:prstGeom prst="rect">
+            <a:avLst/>
+          </a:prstGeom>
+          <a:noFill/>
+          <a:ln/>
+        </p:spPr>
+        <p:txBody>
+          <a:bodyPr wrap="square" lIns="0" tIns="0" rIns="0" bIns="0" rtlCol="0" anchor="ctr"/>
+          <a:lstStyle/>
+          <a:p>
+            <a:pPr algn="r" indent="0" marL="0">
+              <a:buNone/>
+            </a:pPr>
+            <a:r>
+              <a:rPr lang="en-US" sz="900" dirty="0">
+                <a:solidFill>
+                  <a:srgbClr val="5F7181"/>
+                </a:solidFill>
+                <a:latin typeface="Aptos" pitchFamily="34" charset="0"/>
+                <a:ea typeface="Aptos" pitchFamily="34" charset="-122"/>
+                <a:cs typeface="Aptos" pitchFamily="34" charset="-120"/>
+              </a:rPr>
+              <a:t>20</a:t>
+            </a:r>
+            <a:endParaRPr lang="en-US" sz="900" dirty="0"/>
+          </a:p>
+        </p:txBody>
+      </p:sp>
+      <p:sp>
+        <p:nvSpPr>
+          <p:cNvPr id="8" name="Shape 6"/>
           <p:cNvSpPr/>
           <p:nvPr/>
         </p:nvSpPr>
@@ -9428,7 +10054,7 @@
       </p:sp>
       <p:sp>
         <p:nvSpPr>
-          <p:cNvPr id="8" name="Text 6"/>
+          <p:cNvPr id="9" name="Text 7"/>
           <p:cNvSpPr/>
           <p:nvPr/>
         </p:nvSpPr>
@@ -9467,14 +10093,14 @@
       </p:sp>
       <p:sp>
         <p:nvSpPr>
-          <p:cNvPr id="9" name="Text 7"/>
+          <p:cNvPr id="10" name="Text 8"/>
           <p:cNvSpPr/>
           <p:nvPr/>
         </p:nvSpPr>
         <p:spPr>
           <a:xfrm>
             <a:off x="640080" y="621792"/>
-            <a:ext cx="10881360" cy="566928"/>
+            <a:ext cx="10881360" cy="713232"/>
           </a:xfrm>
           <a:prstGeom prst="rect">
             <a:avLst/>
@@ -9492,7 +10118,7 @@
               <a:buNone/>
             </a:pPr>
             <a:r>
-              <a:rPr lang="en-US" sz="2700" b="1" dirty="0">
+              <a:rPr lang="en-US" sz="3400" b="1" dirty="0">
                 <a:solidFill>
                   <a:srgbClr val="003A63"/>
                 </a:solidFill>
@@ -9502,20 +10128,20 @@
               </a:rPr>
               <a:t>References and Resources</a:t>
             </a:r>
-            <a:endParaRPr lang="en-US" sz="2700" dirty="0"/>
-          </a:p>
-        </p:txBody>
-      </p:sp>
-      <p:sp>
-        <p:nvSpPr>
-          <p:cNvPr id="10" name="Text 8"/>
-          <p:cNvSpPr/>
-          <p:nvPr/>
-        </p:nvSpPr>
-        <p:spPr>
-          <a:xfrm>
-            <a:off x="868680" y="1417320"/>
-            <a:ext cx="6675120" cy="4434840"/>
+            <a:endParaRPr lang="en-US" sz="3400" dirty="0"/>
+          </a:p>
+        </p:txBody>
+      </p:sp>
+      <p:sp>
+        <p:nvSpPr>
+          <p:cNvPr id="11" name="Text 9"/>
+          <p:cNvSpPr/>
+          <p:nvPr/>
+        </p:nvSpPr>
+        <p:spPr>
+          <a:xfrm>
+            <a:off x="868680" y="1508760"/>
+            <a:ext cx="6537960" cy="4160520"/>
           </a:xfrm>
           <a:prstGeom prst="rect">
             <a:avLst/>
@@ -9530,7 +10156,7 @@
           <a:lstStyle/>
           <a:p>
             <a:r>
-              <a:rPr lang="en-US" sz="1700" dirty="0">
+              <a:rPr lang="en-US" sz="2100" dirty="0">
                 <a:solidFill>
                   <a:srgbClr val="17364A"/>
                 </a:solidFill>
@@ -9538,13 +10164,13 @@
                 <a:ea typeface="Aptos" pitchFamily="34" charset="-122"/>
                 <a:cs typeface="Aptos" pitchFamily="34" charset="-120"/>
               </a:rPr>
-              <a:t>NIST Artificial Intelligence Risk Management Framework (AI RMF 1.0): https://www.nist.gov/itl/ai-risk-management-framework</a:t>
-            </a:r>
-            <a:endParaRPr lang="en-US" sz="1700" dirty="0"/>
-          </a:p>
-          <a:p>
-            <a:r>
-              <a:rPr lang="en-US" sz="1700" dirty="0">
+              <a:t>NIST Artificial Intelligence Risk Management Framework (AI RMF 1.0):.</a:t>
+            </a:r>
+            <a:endParaRPr lang="en-US" sz="2100" dirty="0"/>
+          </a:p>
+          <a:p>
+            <a:r>
+              <a:rPr lang="en-US" sz="2100" dirty="0">
                 <a:solidFill>
                   <a:srgbClr val="17364A"/>
                 </a:solidFill>
@@ -9554,11 +10180,11 @@
               </a:rPr>
               <a:t>NIST Generative AI Profile:.</a:t>
             </a:r>
-            <a:endParaRPr lang="en-US" sz="1700" dirty="0"/>
-          </a:p>
-          <a:p>
-            <a:r>
-              <a:rPr lang="en-US" sz="1700" dirty="0">
+            <a:endParaRPr lang="en-US" sz="2100" dirty="0"/>
+          </a:p>
+          <a:p>
+            <a:r>
+              <a:rPr lang="en-US" sz="2100" dirty="0">
                 <a:solidFill>
                   <a:srgbClr val="17364A"/>
                 </a:solidFill>
@@ -9568,27 +10194,13 @@
               </a:rPr>
               <a:t>NIST Privacy Framework</a:t>
             </a:r>
-            <a:endParaRPr lang="en-US" sz="1700" dirty="0"/>
-          </a:p>
-          <a:p>
-            <a:r>
-              <a:rPr lang="en-US" sz="1700" dirty="0">
-                <a:solidFill>
-                  <a:srgbClr val="17364A"/>
-                </a:solidFill>
-                <a:latin typeface="Aptos" pitchFamily="34" charset="0"/>
-                <a:ea typeface="Aptos" pitchFamily="34" charset="-122"/>
-                <a:cs typeface="Aptos" pitchFamily="34" charset="-120"/>
-              </a:rPr>
-              <a:t>CDC Public Health Data Strategy and Data Modernization resources:.</a:t>
-            </a:r>
-            <a:endParaRPr lang="en-US" sz="1700" dirty="0"/>
-          </a:p>
-        </p:txBody>
-      </p:sp>
-      <p:sp>
-        <p:nvSpPr>
-          <p:cNvPr id="11" name="Shape 9"/>
+            <a:endParaRPr lang="en-US" sz="2100" dirty="0"/>
+          </a:p>
+        </p:txBody>
+      </p:sp>
+      <p:sp>
+        <p:nvSpPr>
+          <p:cNvPr id="12" name="Shape 10"/>
           <p:cNvSpPr/>
           <p:nvPr/>
         </p:nvSpPr>
@@ -9615,14 +10227,14 @@
       </p:sp>
       <p:sp>
         <p:nvSpPr>
-          <p:cNvPr id="12" name="Text 10"/>
+          <p:cNvPr id="13" name="Text 11"/>
           <p:cNvSpPr/>
           <p:nvPr/>
         </p:nvSpPr>
         <p:spPr>
           <a:xfrm>
             <a:off x="8074152" y="1563624"/>
-            <a:ext cx="2825496" cy="201168"/>
+            <a:ext cx="2825496" cy="256032"/>
           </a:xfrm>
           <a:prstGeom prst="rect">
             <a:avLst/>
@@ -9638,7 +10250,7 @@
               <a:buNone/>
             </a:pPr>
             <a:r>
-              <a:rPr lang="en-US" sz="950" b="1" dirty="0">
+              <a:rPr lang="en-US" sz="1300" b="1" dirty="0">
                 <a:solidFill>
                   <a:srgbClr val="0068B7"/>
                 </a:solidFill>
@@ -9648,20 +10260,20 @@
               </a:rPr>
               <a:t>Key idea</a:t>
             </a:r>
-            <a:endParaRPr lang="en-US" sz="950" dirty="0"/>
-          </a:p>
-        </p:txBody>
-      </p:sp>
-      <p:sp>
-        <p:nvSpPr>
-          <p:cNvPr id="13" name="Text 11"/>
-          <p:cNvSpPr/>
-          <p:nvPr/>
-        </p:nvSpPr>
-        <p:spPr>
-          <a:xfrm>
-            <a:off x="8074152" y="1856232"/>
-            <a:ext cx="2825496" cy="1261872"/>
+            <a:endParaRPr lang="en-US" sz="1300" dirty="0"/>
+          </a:p>
+        </p:txBody>
+      </p:sp>
+      <p:sp>
+        <p:nvSpPr>
+          <p:cNvPr id="14" name="Text 12"/>
+          <p:cNvSpPr/>
+          <p:nvPr/>
+        </p:nvSpPr>
+        <p:spPr>
+          <a:xfrm>
+            <a:off x="8074152" y="1920240"/>
+            <a:ext cx="2825496" cy="1188720"/>
           </a:xfrm>
           <a:prstGeom prst="rect">
             <a:avLst/>
@@ -9679,7 +10291,7 @@
               <a:buNone/>
             </a:pPr>
             <a:r>
-              <a:rPr lang="en-US" sz="1250" dirty="0">
+              <a:rPr lang="en-US" sz="1550" dirty="0">
                 <a:solidFill>
                   <a:srgbClr val="17364A"/>
                 </a:solidFill>
@@ -9687,15 +10299,15 @@
                 <a:ea typeface="Aptos" pitchFamily="34" charset="-122"/>
                 <a:cs typeface="Aptos" pitchFamily="34" charset="-120"/>
               </a:rPr>
-              <a:t>NIST Artificial Intelligence Risk Management Framework (AI RMF 1.0): https://www.nist.gov/itl/ai-risk-management-framework</a:t>
-            </a:r>
-            <a:endParaRPr lang="en-US" sz="1250" dirty="0"/>
-          </a:p>
-        </p:txBody>
-      </p:sp>
-      <p:sp>
-        <p:nvSpPr>
-          <p:cNvPr id="14" name="Shape 12"/>
+              <a:t>NIST Artificial Intelligence Risk Management Framework (AI RMF 1.0):.</a:t>
+            </a:r>
+            <a:endParaRPr lang="en-US" sz="1550" dirty="0"/>
+          </a:p>
+        </p:txBody>
+      </p:sp>
+      <p:sp>
+        <p:nvSpPr>
+          <p:cNvPr id="15" name="Shape 13"/>
           <p:cNvSpPr/>
           <p:nvPr/>
         </p:nvSpPr>
@@ -9722,14 +10334,14 @@
       </p:sp>
       <p:sp>
         <p:nvSpPr>
-          <p:cNvPr id="15" name="Text 13"/>
+          <p:cNvPr id="16" name="Text 14"/>
           <p:cNvSpPr/>
           <p:nvPr/>
         </p:nvSpPr>
         <p:spPr>
           <a:xfrm>
             <a:off x="8074152" y="3666744"/>
-            <a:ext cx="2825496" cy="201168"/>
+            <a:ext cx="2825496" cy="256032"/>
           </a:xfrm>
           <a:prstGeom prst="rect">
             <a:avLst/>
@@ -9745,7 +10357,7 @@
               <a:buNone/>
             </a:pPr>
             <a:r>
-              <a:rPr lang="en-US" sz="950" b="1" dirty="0">
+              <a:rPr lang="en-US" sz="1300" b="1" dirty="0">
                 <a:solidFill>
                   <a:srgbClr val="0068B7"/>
                 </a:solidFill>
@@ -9755,20 +10367,20 @@
               </a:rPr>
               <a:t>Use this for</a:t>
             </a:r>
-            <a:endParaRPr lang="en-US" sz="950" dirty="0"/>
-          </a:p>
-        </p:txBody>
-      </p:sp>
-      <p:sp>
-        <p:nvSpPr>
-          <p:cNvPr id="16" name="Text 14"/>
-          <p:cNvSpPr/>
-          <p:nvPr/>
-        </p:nvSpPr>
-        <p:spPr>
-          <a:xfrm>
-            <a:off x="8074152" y="3959352"/>
-            <a:ext cx="2825496" cy="1170432"/>
+            <a:endParaRPr lang="en-US" sz="1300" dirty="0"/>
+          </a:p>
+        </p:txBody>
+      </p:sp>
+      <p:sp>
+        <p:nvSpPr>
+          <p:cNvPr id="17" name="Text 15"/>
+          <p:cNvSpPr/>
+          <p:nvPr/>
+        </p:nvSpPr>
+        <p:spPr>
+          <a:xfrm>
+            <a:off x="8074152" y="4023360"/>
+            <a:ext cx="2825496" cy="1097280"/>
           </a:xfrm>
           <a:prstGeom prst="rect">
             <a:avLst/>
@@ -9786,7 +10398,7 @@
               <a:buNone/>
             </a:pPr>
             <a:r>
-              <a:rPr lang="en-US" sz="1250" dirty="0">
+              <a:rPr lang="en-US" sz="1550" dirty="0">
                 <a:solidFill>
                   <a:srgbClr val="17364A"/>
                 </a:solidFill>
@@ -9796,7 +10408,7 @@
               </a:rPr>
               <a:t>Connect the concept to public health decisions, safeguards, documentation, or implementation work.</a:t>
             </a:r>
-            <a:endParaRPr lang="en-US" sz="1250" dirty="0"/>
+            <a:endParaRPr lang="en-US" sz="1550" dirty="0"/>
           </a:p>
         </p:txBody>
       </p:sp>
@@ -9993,7 +10605,7 @@
                 <a:ea typeface="Aptos" pitchFamily="34" charset="-122"/>
                 <a:cs typeface="Aptos" pitchFamily="34" charset="-120"/>
               </a:rPr>
-              <a:t>© Paula Soper</a:t>
+              <a:t>Â© Paula Soper</a:t>
             </a:r>
             <a:endParaRPr lang="en-US" sz="800" dirty="0"/>
           </a:p>
@@ -10007,8 +10619,47 @@
         </p:nvSpPr>
         <p:spPr>
           <a:xfrm>
+            <a:off x="11137392" y="6510528"/>
+            <a:ext cx="411480" cy="201168"/>
+          </a:xfrm>
+          <a:prstGeom prst="rect">
+            <a:avLst/>
+          </a:prstGeom>
+          <a:noFill/>
+          <a:ln/>
+        </p:spPr>
+        <p:txBody>
+          <a:bodyPr wrap="square" lIns="0" tIns="0" rIns="0" bIns="0" rtlCol="0" anchor="ctr"/>
+          <a:lstStyle/>
+          <a:p>
+            <a:pPr algn="r" indent="0" marL="0">
+              <a:buNone/>
+            </a:pPr>
+            <a:r>
+              <a:rPr lang="en-US" sz="900" dirty="0">
+                <a:solidFill>
+                  <a:srgbClr val="5F7181"/>
+                </a:solidFill>
+                <a:latin typeface="Aptos" pitchFamily="34" charset="0"/>
+                <a:ea typeface="Aptos" pitchFamily="34" charset="-122"/>
+                <a:cs typeface="Aptos" pitchFamily="34" charset="-120"/>
+              </a:rPr>
+              <a:t>21</a:t>
+            </a:r>
+            <a:endParaRPr lang="en-US" sz="900" dirty="0"/>
+          </a:p>
+        </p:txBody>
+      </p:sp>
+      <p:sp>
+        <p:nvSpPr>
+          <p:cNvPr id="8" name="Text 6"/>
+          <p:cNvSpPr/>
+          <p:nvPr/>
+        </p:nvSpPr>
+        <p:spPr>
+          <a:xfrm>
             <a:off x="640080" y="658368"/>
-            <a:ext cx="10881360" cy="566928"/>
+            <a:ext cx="10881360" cy="713232"/>
           </a:xfrm>
           <a:prstGeom prst="rect">
             <a:avLst/>
@@ -10026,7 +10677,7 @@
               <a:buNone/>
             </a:pPr>
             <a:r>
-              <a:rPr lang="en-US" sz="2700" b="1" dirty="0">
+              <a:rPr lang="en-US" sz="3400" b="1" dirty="0">
                 <a:solidFill>
                   <a:srgbClr val="003A63"/>
                 </a:solidFill>
@@ -10036,20 +10687,20 @@
               </a:rPr>
               <a:t>References and Resources Continued</a:t>
             </a:r>
-            <a:endParaRPr lang="en-US" sz="2700" dirty="0"/>
-          </a:p>
-        </p:txBody>
-      </p:sp>
-      <p:sp>
-        <p:nvSpPr>
-          <p:cNvPr id="8" name="Text 6"/>
-          <p:cNvSpPr/>
-          <p:nvPr/>
-        </p:nvSpPr>
-        <p:spPr>
-          <a:xfrm>
-            <a:off x="868680" y="1417320"/>
-            <a:ext cx="6675120" cy="4434840"/>
+            <a:endParaRPr lang="en-US" sz="3400" dirty="0"/>
+          </a:p>
+        </p:txBody>
+      </p:sp>
+      <p:sp>
+        <p:nvSpPr>
+          <p:cNvPr id="9" name="Text 7"/>
+          <p:cNvSpPr/>
+          <p:nvPr/>
+        </p:nvSpPr>
+        <p:spPr>
+          <a:xfrm>
+            <a:off x="868680" y="1508760"/>
+            <a:ext cx="6537960" cy="4160520"/>
           </a:xfrm>
           <a:prstGeom prst="rect">
             <a:avLst/>
@@ -10064,7 +10715,7 @@
           <a:lstStyle/>
           <a:p>
             <a:r>
-              <a:rPr lang="en-US" sz="1700" dirty="0">
+              <a:rPr lang="en-US" sz="2100" dirty="0">
                 <a:solidFill>
                   <a:srgbClr val="17364A"/>
                 </a:solidFill>
@@ -10072,13 +10723,13 @@
                 <a:ea typeface="Aptos" pitchFamily="34" charset="-122"/>
                 <a:cs typeface="Aptos" pitchFamily="34" charset="-120"/>
               </a:rPr>
-              <a:t>OMB Memorandum M-24-10 on federal AI governance, risk management, and innovation, where relevant to public-sector governance.</a:t>
-            </a:r>
-            <a:endParaRPr lang="en-US" sz="1700" dirty="0"/>
-          </a:p>
-          <a:p>
-            <a:r>
-              <a:rPr lang="en-US" sz="1700" dirty="0">
+              <a:t>OMB Memorandum M-24-10 on federal AI governance, risk management, and innovation, where relevant to.</a:t>
+            </a:r>
+            <a:endParaRPr lang="en-US" sz="2100" dirty="0"/>
+          </a:p>
+          <a:p>
+            <a:r>
+              <a:rPr lang="en-US" sz="2100" dirty="0">
                 <a:solidFill>
                   <a:srgbClr val="17364A"/>
                 </a:solidFill>
@@ -10086,15 +10737,15 @@
                 <a:ea typeface="Aptos" pitchFamily="34" charset="-122"/>
                 <a:cs typeface="Aptos" pitchFamily="34" charset="-120"/>
               </a:rPr>
-              <a:t>Agency strategic plans, procurement policies, privacy policies, cybersecurity policies, records policies, and equity plans</a:t>
-            </a:r>
-            <a:endParaRPr lang="en-US" sz="1700" dirty="0"/>
-          </a:p>
-        </p:txBody>
-      </p:sp>
-      <p:sp>
-        <p:nvSpPr>
-          <p:cNvPr id="9" name="Shape 7"/>
+              <a:t>Agency strategic plans, procurement policies, privacy policies, cybersecurity policies, records.</a:t>
+            </a:r>
+            <a:endParaRPr lang="en-US" sz="2100" dirty="0"/>
+          </a:p>
+        </p:txBody>
+      </p:sp>
+      <p:sp>
+        <p:nvSpPr>
+          <p:cNvPr id="10" name="Shape 8"/>
           <p:cNvSpPr/>
           <p:nvPr/>
         </p:nvSpPr>
@@ -10121,14 +10772,14 @@
       </p:sp>
       <p:sp>
         <p:nvSpPr>
-          <p:cNvPr id="10" name="Text 8"/>
+          <p:cNvPr id="11" name="Text 9"/>
           <p:cNvSpPr/>
           <p:nvPr/>
         </p:nvSpPr>
         <p:spPr>
           <a:xfrm>
             <a:off x="8074152" y="1563624"/>
-            <a:ext cx="2825496" cy="201168"/>
+            <a:ext cx="2825496" cy="256032"/>
           </a:xfrm>
           <a:prstGeom prst="rect">
             <a:avLst/>
@@ -10144,7 +10795,7 @@
               <a:buNone/>
             </a:pPr>
             <a:r>
-              <a:rPr lang="en-US" sz="950" b="1" dirty="0">
+              <a:rPr lang="en-US" sz="1300" b="1" dirty="0">
                 <a:solidFill>
                   <a:srgbClr val="0068B7"/>
                 </a:solidFill>
@@ -10154,20 +10805,20 @@
               </a:rPr>
               <a:t>Key idea</a:t>
             </a:r>
-            <a:endParaRPr lang="en-US" sz="950" dirty="0"/>
-          </a:p>
-        </p:txBody>
-      </p:sp>
-      <p:sp>
-        <p:nvSpPr>
-          <p:cNvPr id="11" name="Text 9"/>
-          <p:cNvSpPr/>
-          <p:nvPr/>
-        </p:nvSpPr>
-        <p:spPr>
-          <a:xfrm>
-            <a:off x="8074152" y="1856232"/>
-            <a:ext cx="2825496" cy="1261872"/>
+            <a:endParaRPr lang="en-US" sz="1300" dirty="0"/>
+          </a:p>
+        </p:txBody>
+      </p:sp>
+      <p:sp>
+        <p:nvSpPr>
+          <p:cNvPr id="12" name="Text 10"/>
+          <p:cNvSpPr/>
+          <p:nvPr/>
+        </p:nvSpPr>
+        <p:spPr>
+          <a:xfrm>
+            <a:off x="8074152" y="1920240"/>
+            <a:ext cx="2825496" cy="1188720"/>
           </a:xfrm>
           <a:prstGeom prst="rect">
             <a:avLst/>
@@ -10185,7 +10836,7 @@
               <a:buNone/>
             </a:pPr>
             <a:r>
-              <a:rPr lang="en-US" sz="1250" dirty="0">
+              <a:rPr lang="en-US" sz="1550" dirty="0">
                 <a:solidFill>
                   <a:srgbClr val="17364A"/>
                 </a:solidFill>
@@ -10193,15 +10844,15 @@
                 <a:ea typeface="Aptos" pitchFamily="34" charset="-122"/>
                 <a:cs typeface="Aptos" pitchFamily="34" charset="-120"/>
               </a:rPr>
-              <a:t>OMB Memorandum M-24-10 on federal AI governance, risk management, and innovation, where relevant to public-sector governance.</a:t>
-            </a:r>
-            <a:endParaRPr lang="en-US" sz="1250" dirty="0"/>
-          </a:p>
-        </p:txBody>
-      </p:sp>
-      <p:sp>
-        <p:nvSpPr>
-          <p:cNvPr id="12" name="Shape 10"/>
+              <a:t>OMB Memorandum M-24-10 on federal AI governance, risk management, and innovation, where relevant to.</a:t>
+            </a:r>
+            <a:endParaRPr lang="en-US" sz="1550" dirty="0"/>
+          </a:p>
+        </p:txBody>
+      </p:sp>
+      <p:sp>
+        <p:nvSpPr>
+          <p:cNvPr id="13" name="Shape 11"/>
           <p:cNvSpPr/>
           <p:nvPr/>
         </p:nvSpPr>
@@ -10228,14 +10879,14 @@
       </p:sp>
       <p:sp>
         <p:nvSpPr>
-          <p:cNvPr id="13" name="Text 11"/>
+          <p:cNvPr id="14" name="Text 12"/>
           <p:cNvSpPr/>
           <p:nvPr/>
         </p:nvSpPr>
         <p:spPr>
           <a:xfrm>
             <a:off x="8074152" y="3666744"/>
-            <a:ext cx="2825496" cy="201168"/>
+            <a:ext cx="2825496" cy="256032"/>
           </a:xfrm>
           <a:prstGeom prst="rect">
             <a:avLst/>
@@ -10251,7 +10902,7 @@
               <a:buNone/>
             </a:pPr>
             <a:r>
-              <a:rPr lang="en-US" sz="950" b="1" dirty="0">
+              <a:rPr lang="en-US" sz="1300" b="1" dirty="0">
                 <a:solidFill>
                   <a:srgbClr val="0068B7"/>
                 </a:solidFill>
@@ -10261,20 +10912,20 @@
               </a:rPr>
               <a:t>Use this for</a:t>
             </a:r>
-            <a:endParaRPr lang="en-US" sz="950" dirty="0"/>
-          </a:p>
-        </p:txBody>
-      </p:sp>
-      <p:sp>
-        <p:nvSpPr>
-          <p:cNvPr id="14" name="Text 12"/>
-          <p:cNvSpPr/>
-          <p:nvPr/>
-        </p:nvSpPr>
-        <p:spPr>
-          <a:xfrm>
-            <a:off x="8074152" y="3959352"/>
-            <a:ext cx="2825496" cy="1170432"/>
+            <a:endParaRPr lang="en-US" sz="1300" dirty="0"/>
+          </a:p>
+        </p:txBody>
+      </p:sp>
+      <p:sp>
+        <p:nvSpPr>
+          <p:cNvPr id="15" name="Text 13"/>
+          <p:cNvSpPr/>
+          <p:nvPr/>
+        </p:nvSpPr>
+        <p:spPr>
+          <a:xfrm>
+            <a:off x="8074152" y="4023360"/>
+            <a:ext cx="2825496" cy="1097280"/>
           </a:xfrm>
           <a:prstGeom prst="rect">
             <a:avLst/>
@@ -10292,7 +10943,7 @@
               <a:buNone/>
             </a:pPr>
             <a:r>
-              <a:rPr lang="en-US" sz="1250" dirty="0">
+              <a:rPr lang="en-US" sz="1550" dirty="0">
                 <a:solidFill>
                   <a:srgbClr val="17364A"/>
                 </a:solidFill>
@@ -10302,7 +10953,7 @@
               </a:rPr>
               <a:t>Connect the concept to public health decisions, safeguards, documentation, or implementation work.</a:t>
             </a:r>
-            <a:endParaRPr lang="en-US" sz="1250" dirty="0"/>
+            <a:endParaRPr lang="en-US" sz="1550" dirty="0"/>
           </a:p>
         </p:txBody>
       </p:sp>
@@ -10499,7 +11150,7 @@
                 <a:ea typeface="Aptos" pitchFamily="34" charset="-122"/>
                 <a:cs typeface="Aptos" pitchFamily="34" charset="-120"/>
               </a:rPr>
-              <a:t>© Paula Soper</a:t>
+              <a:t>Â© Paula Soper</a:t>
             </a:r>
             <a:endParaRPr lang="en-US" sz="800" dirty="0"/>
           </a:p>
@@ -10513,8 +11164,47 @@
         </p:nvSpPr>
         <p:spPr>
           <a:xfrm>
+            <a:off x="11137392" y="6510528"/>
+            <a:ext cx="411480" cy="201168"/>
+          </a:xfrm>
+          <a:prstGeom prst="rect">
+            <a:avLst/>
+          </a:prstGeom>
+          <a:noFill/>
+          <a:ln/>
+        </p:spPr>
+        <p:txBody>
+          <a:bodyPr wrap="square" lIns="0" tIns="0" rIns="0" bIns="0" rtlCol="0" anchor="ctr"/>
+          <a:lstStyle/>
+          <a:p>
+            <a:pPr algn="r" indent="0" marL="0">
+              <a:buNone/>
+            </a:pPr>
+            <a:r>
+              <a:rPr lang="en-US" sz="900" dirty="0">
+                <a:solidFill>
+                  <a:srgbClr val="5F7181"/>
+                </a:solidFill>
+                <a:latin typeface="Aptos" pitchFamily="34" charset="0"/>
+                <a:ea typeface="Aptos" pitchFamily="34" charset="-122"/>
+                <a:cs typeface="Aptos" pitchFamily="34" charset="-120"/>
+              </a:rPr>
+              <a:t>3</a:t>
+            </a:r>
+            <a:endParaRPr lang="en-US" sz="900" dirty="0"/>
+          </a:p>
+        </p:txBody>
+      </p:sp>
+      <p:sp>
+        <p:nvSpPr>
+          <p:cNvPr id="8" name="Text 6"/>
+          <p:cNvSpPr/>
+          <p:nvPr/>
+        </p:nvSpPr>
+        <p:spPr>
+          <a:xfrm>
             <a:off x="640080" y="658368"/>
-            <a:ext cx="10881360" cy="566928"/>
+            <a:ext cx="10881360" cy="713232"/>
           </a:xfrm>
           <a:prstGeom prst="rect">
             <a:avLst/>
@@ -10532,7 +11222,7 @@
               <a:buNone/>
             </a:pPr>
             <a:r>
-              <a:rPr lang="en-US" sz="2700" b="1" dirty="0">
+              <a:rPr lang="en-US" sz="3400" b="1" dirty="0">
                 <a:solidFill>
                   <a:srgbClr val="003A63"/>
                 </a:solidFill>
@@ -10542,20 +11232,20 @@
               </a:rPr>
               <a:t>How this module connects to the playbook</a:t>
             </a:r>
-            <a:endParaRPr lang="en-US" sz="2700" dirty="0"/>
-          </a:p>
-        </p:txBody>
-      </p:sp>
-      <p:sp>
-        <p:nvSpPr>
-          <p:cNvPr id="8" name="Text 6"/>
-          <p:cNvSpPr/>
-          <p:nvPr/>
-        </p:nvSpPr>
-        <p:spPr>
-          <a:xfrm>
-            <a:off x="868680" y="1417320"/>
-            <a:ext cx="6903720" cy="4480560"/>
+            <a:endParaRPr lang="en-US" sz="3400" dirty="0"/>
+          </a:p>
+        </p:txBody>
+      </p:sp>
+      <p:sp>
+        <p:nvSpPr>
+          <p:cNvPr id="9" name="Text 7"/>
+          <p:cNvSpPr/>
+          <p:nvPr/>
+        </p:nvSpPr>
+        <p:spPr>
+          <a:xfrm>
+            <a:off x="868680" y="1508760"/>
+            <a:ext cx="6812280" cy="3977640"/>
           </a:xfrm>
           <a:prstGeom prst="rect">
             <a:avLst/>
@@ -10570,7 +11260,7 @@
           <a:lstStyle/>
           <a:p>
             <a:r>
-              <a:rPr lang="en-US" sz="1540" dirty="0">
+              <a:rPr lang="en-US" sz="1900" dirty="0">
                 <a:solidFill>
                   <a:srgbClr val="17364A"/>
                 </a:solidFill>
@@ -10578,13 +11268,13 @@
                 <a:ea typeface="Aptos" pitchFamily="34" charset="-122"/>
                 <a:cs typeface="Aptos" pitchFamily="34" charset="-120"/>
               </a:rPr>
-              <a:t>Play 7: Prioritize Use Cases - This lesson informs Play 7 by helping learners connect the lesson topic to prioritize use cases work.</a:t>
-            </a:r>
-            <a:endParaRPr lang="en-US" sz="1540" dirty="0"/>
-          </a:p>
-          <a:p>
-            <a:r>
-              <a:rPr lang="en-US" sz="1540" dirty="0">
+              <a:t>Play 7: Prioritize Use Cases - This lesson informs Play 7 by helping learners connect the lesson topic to.</a:t>
+            </a:r>
+            <a:endParaRPr lang="en-US" sz="1900" dirty="0"/>
+          </a:p>
+          <a:p>
+            <a:r>
+              <a:rPr lang="en-US" sz="1900" dirty="0">
                 <a:solidFill>
                   <a:srgbClr val="17364A"/>
                 </a:solidFill>
@@ -10592,13 +11282,13 @@
                 <a:ea typeface="Aptos" pitchFamily="34" charset="-122"/>
                 <a:cs typeface="Aptos" pitchFamily="34" charset="-120"/>
               </a:rPr>
-              <a:t>Play 11: Build and Deploy AI Solutions - This lesson informs Play 11 by helping learners connect the lesson topic to build and deploy.</a:t>
-            </a:r>
-            <a:endParaRPr lang="en-US" sz="1540" dirty="0"/>
-          </a:p>
-          <a:p>
-            <a:r>
-              <a:rPr lang="en-US" sz="1540" dirty="0">
+              <a:t>Play 11: Build and Deploy AI Solutions - This lesson informs Play 11 by helping learners connect the lesson.</a:t>
+            </a:r>
+            <a:endParaRPr lang="en-US" sz="1900" dirty="0"/>
+          </a:p>
+          <a:p>
+            <a:r>
+              <a:rPr lang="en-US" sz="1900" dirty="0">
                 <a:solidFill>
                   <a:srgbClr val="17364A"/>
                 </a:solidFill>
@@ -10606,13 +11296,13 @@
                 <a:ea typeface="Aptos" pitchFamily="34" charset="-122"/>
                 <a:cs typeface="Aptos" pitchFamily="34" charset="-120"/>
               </a:rPr>
-              <a:t>Play 1: Vision &amp; Guardrails - This lesson informs Play 1 by helping learners connect the lesson topic to vision &amp; guardrails work in.</a:t>
-            </a:r>
-            <a:endParaRPr lang="en-US" sz="1540" dirty="0"/>
-          </a:p>
-          <a:p>
-            <a:r>
-              <a:rPr lang="en-US" sz="1540" dirty="0">
+              <a:t>Play 1: Vision &amp; Guardrails - This lesson informs Play 1 by helping learners connect the lesson topic to.</a:t>
+            </a:r>
+            <a:endParaRPr lang="en-US" sz="1900" dirty="0"/>
+          </a:p>
+          <a:p>
+            <a:r>
+              <a:rPr lang="en-US" sz="1900" dirty="0">
                 <a:solidFill>
                   <a:srgbClr val="17364A"/>
                 </a:solidFill>
@@ -10620,15 +11310,15 @@
                 <a:ea typeface="Aptos" pitchFamily="34" charset="-122"/>
                 <a:cs typeface="Aptos" pitchFamily="34" charset="-120"/>
               </a:rPr>
-              <a:t>Play 3: Establish AI Governance - This lesson informs Play 3 by helping learners connect the lesson topic to establish ai governance.</a:t>
-            </a:r>
-            <a:endParaRPr lang="en-US" sz="1540" dirty="0"/>
-          </a:p>
-        </p:txBody>
-      </p:sp>
-      <p:sp>
-        <p:nvSpPr>
-          <p:cNvPr id="9" name="Shape 7"/>
+              <a:t>Play 3: Establish AI Governance - This lesson informs Play 3 by helping learners connect the lesson topic to.</a:t>
+            </a:r>
+            <a:endParaRPr lang="en-US" sz="1900" dirty="0"/>
+          </a:p>
+        </p:txBody>
+      </p:sp>
+      <p:sp>
+        <p:nvSpPr>
+          <p:cNvPr id="10" name="Shape 8"/>
           <p:cNvSpPr/>
           <p:nvPr/>
         </p:nvSpPr>
@@ -10655,14 +11345,14 @@
       </p:sp>
       <p:sp>
         <p:nvSpPr>
-          <p:cNvPr id="10" name="Text 8"/>
+          <p:cNvPr id="11" name="Text 9"/>
           <p:cNvSpPr/>
           <p:nvPr/>
         </p:nvSpPr>
         <p:spPr>
           <a:xfrm>
             <a:off x="8211312" y="1563624"/>
-            <a:ext cx="2734056" cy="201168"/>
+            <a:ext cx="2734056" cy="256032"/>
           </a:xfrm>
           <a:prstGeom prst="rect">
             <a:avLst/>
@@ -10678,7 +11368,7 @@
               <a:buNone/>
             </a:pPr>
             <a:r>
-              <a:rPr lang="en-US" sz="950" b="1" dirty="0">
+              <a:rPr lang="en-US" sz="1300" b="1" dirty="0">
                 <a:solidFill>
                   <a:srgbClr val="0068B7"/>
                 </a:solidFill>
@@ -10688,20 +11378,20 @@
               </a:rPr>
               <a:t>Apply the lesson</a:t>
             </a:r>
-            <a:endParaRPr lang="en-US" sz="950" dirty="0"/>
-          </a:p>
-        </p:txBody>
-      </p:sp>
-      <p:sp>
-        <p:nvSpPr>
-          <p:cNvPr id="11" name="Text 9"/>
-          <p:cNvSpPr/>
-          <p:nvPr/>
-        </p:nvSpPr>
-        <p:spPr>
-          <a:xfrm>
-            <a:off x="8211312" y="1856232"/>
-            <a:ext cx="2734056" cy="1536192"/>
+            <a:endParaRPr lang="en-US" sz="1300" dirty="0"/>
+          </a:p>
+        </p:txBody>
+      </p:sp>
+      <p:sp>
+        <p:nvSpPr>
+          <p:cNvPr id="12" name="Text 10"/>
+          <p:cNvSpPr/>
+          <p:nvPr/>
+        </p:nvSpPr>
+        <p:spPr>
+          <a:xfrm>
+            <a:off x="8211312" y="1920240"/>
+            <a:ext cx="2734056" cy="1463040"/>
           </a:xfrm>
           <a:prstGeom prst="rect">
             <a:avLst/>
@@ -10719,7 +11409,7 @@
               <a:buNone/>
             </a:pPr>
             <a:r>
-              <a:rPr lang="en-US" sz="1250" dirty="0">
+              <a:rPr lang="en-US" sz="1550" dirty="0">
                 <a:solidFill>
                   <a:srgbClr val="17364A"/>
                 </a:solidFill>
@@ -10729,32 +11419,32 @@
               </a:rPr>
               <a:t>Use the related plays to identify decisions, participants, timing, approvals, and documentation needed for responsible implementation.</a:t>
             </a:r>
-            <a:endParaRPr lang="en-US" sz="1250" dirty="0"/>
-          </a:p>
-        </p:txBody>
-      </p:sp>
-      <p:sp>
-        <p:nvSpPr>
-          <p:cNvPr id="12" name="Shape 10"/>
-          <p:cNvSpPr/>
-          <p:nvPr/>
-        </p:nvSpPr>
-        <p:spPr>
-          <a:xfrm>
-            <a:off x="8046720" y="3794760"/>
-            <a:ext cx="3063240" cy="1508760"/>
+            <a:endParaRPr lang="en-US" sz="1550" dirty="0"/>
+          </a:p>
+        </p:txBody>
+      </p:sp>
+      <p:sp>
+        <p:nvSpPr>
+          <p:cNvPr id="13" name="Shape 11"/>
+          <p:cNvSpPr/>
+          <p:nvPr/>
+        </p:nvSpPr>
+        <p:spPr>
+          <a:xfrm>
+            <a:off x="7818120" y="3977640"/>
+            <a:ext cx="972312" cy="749808"/>
           </a:xfrm>
           <a:prstGeom prst="roundRect">
             <a:avLst>
-              <a:gd name="adj" fmla="val 7273"/>
+              <a:gd name="adj" fmla="val 14634"/>
             </a:avLst>
           </a:prstGeom>
           <a:solidFill>
-            <a:srgbClr val="FFF4D9"/>
+            <a:srgbClr val="0068B7"/>
           </a:solidFill>
           <a:ln w="12700">
             <a:solidFill>
-              <a:srgbClr val="B9D7E6"/>
+              <a:srgbClr val="0068B7"/>
             </a:solidFill>
             <a:prstDash val="solid"/>
           </a:ln>
@@ -10762,81 +11452,256 @@
       </p:sp>
       <p:sp>
         <p:nvSpPr>
-          <p:cNvPr id="13" name="Text 11"/>
-          <p:cNvSpPr/>
-          <p:nvPr/>
-        </p:nvSpPr>
-        <p:spPr>
-          <a:xfrm>
-            <a:off x="8211312" y="3941064"/>
-            <a:ext cx="2734056" cy="201168"/>
-          </a:xfrm>
-          <a:prstGeom prst="rect">
-            <a:avLst/>
-          </a:prstGeom>
-          <a:noFill/>
-          <a:ln/>
-        </p:spPr>
-        <p:txBody>
-          <a:bodyPr wrap="square" lIns="0" tIns="0" rIns="0" bIns="0" rtlCol="0" anchor="ctr"/>
-          <a:lstStyle/>
-          <a:p>
-            <a:pPr indent="0" marL="0">
-              <a:buNone/>
-            </a:pPr>
-            <a:r>
-              <a:rPr lang="en-US" sz="950" b="1" dirty="0">
-                <a:solidFill>
-                  <a:srgbClr val="0068B7"/>
-                </a:solidFill>
-                <a:latin typeface="Aptos" pitchFamily="34" charset="0"/>
-                <a:ea typeface="Aptos" pitchFamily="34" charset="-122"/>
-                <a:cs typeface="Aptos" pitchFamily="34" charset="-120"/>
-              </a:rPr>
-              <a:t>Keep in mind</a:t>
-            </a:r>
-            <a:endParaRPr lang="en-US" sz="950" dirty="0"/>
-          </a:p>
-        </p:txBody>
-      </p:sp>
-      <p:sp>
-        <p:nvSpPr>
           <p:cNvPr id="14" name="Text 12"/>
           <p:cNvSpPr/>
           <p:nvPr/>
         </p:nvSpPr>
         <p:spPr>
           <a:xfrm>
-            <a:off x="8211312" y="4233672"/>
-            <a:ext cx="2734056" cy="941832"/>
-          </a:xfrm>
-          <a:prstGeom prst="rect">
-            <a:avLst/>
-          </a:prstGeom>
-          <a:noFill/>
-          <a:ln/>
-        </p:spPr>
-        <p:txBody>
-          <a:bodyPr wrap="square" lIns="0" tIns="0" rIns="0" bIns="0" rtlCol="0" anchor="t">
+            <a:off x="7891272" y="4169664"/>
+            <a:ext cx="826008" cy="310896"/>
+          </a:xfrm>
+          <a:prstGeom prst="rect">
+            <a:avLst/>
+          </a:prstGeom>
+          <a:noFill/>
+          <a:ln/>
+        </p:spPr>
+        <p:txBody>
+          <a:bodyPr wrap="square" lIns="0" tIns="0" rIns="0" bIns="0" rtlCol="0" anchor="ctr">
             <a:normAutofit/>
           </a:bodyPr>
           <a:lstStyle/>
           <a:p>
-            <a:pPr indent="0" marL="0">
-              <a:buNone/>
-            </a:pPr>
-            <a:r>
-              <a:rPr lang="en-US" sz="1250" dirty="0">
-                <a:solidFill>
-                  <a:srgbClr val="17364A"/>
-                </a:solidFill>
-                <a:latin typeface="Aptos" pitchFamily="34" charset="0"/>
-                <a:ea typeface="Aptos" pitchFamily="34" charset="-122"/>
-                <a:cs typeface="Aptos" pitchFamily="34" charset="-120"/>
-              </a:rPr>
-              <a:t>The playbook connection helps turn training into agency work, not just individual knowledge.</a:t>
-            </a:r>
-            <a:endParaRPr lang="en-US" sz="1250" dirty="0"/>
+            <a:pPr algn="ctr" indent="0" marL="0">
+              <a:buNone/>
+            </a:pPr>
+            <a:r>
+              <a:rPr lang="en-US" sz="1500" b="1" dirty="0">
+                <a:solidFill>
+                  <a:srgbClr val="FFFFFF"/>
+                </a:solidFill>
+                <a:latin typeface="Aptos" pitchFamily="34" charset="0"/>
+                <a:ea typeface="Aptos" pitchFamily="34" charset="-122"/>
+                <a:cs typeface="Aptos" pitchFamily="34" charset="-120"/>
+              </a:rPr>
+              <a:t>Lesson</a:t>
+            </a:r>
+            <a:endParaRPr lang="en-US" sz="1500" dirty="0"/>
+          </a:p>
+        </p:txBody>
+      </p:sp>
+      <p:sp>
+        <p:nvSpPr>
+          <p:cNvPr id="15" name="Text 13"/>
+          <p:cNvSpPr/>
+          <p:nvPr/>
+        </p:nvSpPr>
+        <p:spPr>
+          <a:xfrm>
+            <a:off x="8817864" y="4187952"/>
+            <a:ext cx="201168" cy="256032"/>
+          </a:xfrm>
+          <a:prstGeom prst="rect">
+            <a:avLst/>
+          </a:prstGeom>
+          <a:noFill/>
+          <a:ln/>
+        </p:spPr>
+        <p:txBody>
+          <a:bodyPr wrap="square" lIns="0" tIns="0" rIns="0" bIns="0" rtlCol="0" anchor="ctr"/>
+          <a:lstStyle/>
+          <a:p>
+            <a:pPr algn="ctr" indent="0" marL="0">
+              <a:buNone/>
+            </a:pPr>
+            <a:r>
+              <a:rPr lang="en-US" sz="1800" b="1" dirty="0">
+                <a:solidFill>
+                  <a:srgbClr val="0068B7"/>
+                </a:solidFill>
+                <a:latin typeface="Aptos" pitchFamily="34" charset="0"/>
+                <a:ea typeface="Aptos" pitchFamily="34" charset="-122"/>
+                <a:cs typeface="Aptos" pitchFamily="34" charset="-120"/>
+              </a:rPr>
+              <a:t>â†’</a:t>
+            </a:r>
+            <a:endParaRPr lang="en-US" sz="1800" dirty="0"/>
+          </a:p>
+        </p:txBody>
+      </p:sp>
+      <p:sp>
+        <p:nvSpPr>
+          <p:cNvPr id="16" name="Shape 14"/>
+          <p:cNvSpPr/>
+          <p:nvPr/>
+        </p:nvSpPr>
+        <p:spPr>
+          <a:xfrm>
+            <a:off x="9046464" y="3977640"/>
+            <a:ext cx="972312" cy="749808"/>
+          </a:xfrm>
+          <a:prstGeom prst="roundRect">
+            <a:avLst>
+              <a:gd name="adj" fmla="val 14634"/>
+            </a:avLst>
+          </a:prstGeom>
+          <a:solidFill>
+            <a:srgbClr val="2F8A28"/>
+          </a:solidFill>
+          <a:ln w="12700">
+            <a:solidFill>
+              <a:srgbClr val="2F8A28"/>
+            </a:solidFill>
+            <a:prstDash val="solid"/>
+          </a:ln>
+        </p:spPr>
+      </p:sp>
+      <p:sp>
+        <p:nvSpPr>
+          <p:cNvPr id="17" name="Text 15"/>
+          <p:cNvSpPr/>
+          <p:nvPr/>
+        </p:nvSpPr>
+        <p:spPr>
+          <a:xfrm>
+            <a:off x="9119616" y="4169664"/>
+            <a:ext cx="826008" cy="310896"/>
+          </a:xfrm>
+          <a:prstGeom prst="rect">
+            <a:avLst/>
+          </a:prstGeom>
+          <a:noFill/>
+          <a:ln/>
+        </p:spPr>
+        <p:txBody>
+          <a:bodyPr wrap="square" lIns="0" tIns="0" rIns="0" bIns="0" rtlCol="0" anchor="ctr">
+            <a:normAutofit/>
+          </a:bodyPr>
+          <a:lstStyle/>
+          <a:p>
+            <a:pPr algn="ctr" indent="0" marL="0">
+              <a:buNone/>
+            </a:pPr>
+            <a:r>
+              <a:rPr lang="en-US" sz="1500" b="1" dirty="0">
+                <a:solidFill>
+                  <a:srgbClr val="FFFFFF"/>
+                </a:solidFill>
+                <a:latin typeface="Aptos" pitchFamily="34" charset="0"/>
+                <a:ea typeface="Aptos" pitchFamily="34" charset="-122"/>
+                <a:cs typeface="Aptos" pitchFamily="34" charset="-120"/>
+              </a:rPr>
+              <a:t>Plays</a:t>
+            </a:r>
+            <a:endParaRPr lang="en-US" sz="1500" dirty="0"/>
+          </a:p>
+        </p:txBody>
+      </p:sp>
+      <p:sp>
+        <p:nvSpPr>
+          <p:cNvPr id="18" name="Text 16"/>
+          <p:cNvSpPr/>
+          <p:nvPr/>
+        </p:nvSpPr>
+        <p:spPr>
+          <a:xfrm>
+            <a:off x="10046208" y="4187952"/>
+            <a:ext cx="201168" cy="256032"/>
+          </a:xfrm>
+          <a:prstGeom prst="rect">
+            <a:avLst/>
+          </a:prstGeom>
+          <a:noFill/>
+          <a:ln/>
+        </p:spPr>
+        <p:txBody>
+          <a:bodyPr wrap="square" lIns="0" tIns="0" rIns="0" bIns="0" rtlCol="0" anchor="ctr"/>
+          <a:lstStyle/>
+          <a:p>
+            <a:pPr algn="ctr" indent="0" marL="0">
+              <a:buNone/>
+            </a:pPr>
+            <a:r>
+              <a:rPr lang="en-US" sz="1800" b="1" dirty="0">
+                <a:solidFill>
+                  <a:srgbClr val="0068B7"/>
+                </a:solidFill>
+                <a:latin typeface="Aptos" pitchFamily="34" charset="0"/>
+                <a:ea typeface="Aptos" pitchFamily="34" charset="-122"/>
+                <a:cs typeface="Aptos" pitchFamily="34" charset="-120"/>
+              </a:rPr>
+              <a:t>â†’</a:t>
+            </a:r>
+            <a:endParaRPr lang="en-US" sz="1800" dirty="0"/>
+          </a:p>
+        </p:txBody>
+      </p:sp>
+      <p:sp>
+        <p:nvSpPr>
+          <p:cNvPr id="19" name="Shape 17"/>
+          <p:cNvSpPr/>
+          <p:nvPr/>
+        </p:nvSpPr>
+        <p:spPr>
+          <a:xfrm>
+            <a:off x="10274808" y="3977640"/>
+            <a:ext cx="972312" cy="749808"/>
+          </a:xfrm>
+          <a:prstGeom prst="roundRect">
+            <a:avLst>
+              <a:gd name="adj" fmla="val 14634"/>
+            </a:avLst>
+          </a:prstGeom>
+          <a:solidFill>
+            <a:srgbClr val="6A4CA3"/>
+          </a:solidFill>
+          <a:ln w="12700">
+            <a:solidFill>
+              <a:srgbClr val="6A4CA3"/>
+            </a:solidFill>
+            <a:prstDash val="solid"/>
+          </a:ln>
+        </p:spPr>
+      </p:sp>
+      <p:sp>
+        <p:nvSpPr>
+          <p:cNvPr id="20" name="Text 18"/>
+          <p:cNvSpPr/>
+          <p:nvPr/>
+        </p:nvSpPr>
+        <p:spPr>
+          <a:xfrm>
+            <a:off x="10347960" y="4169664"/>
+            <a:ext cx="826008" cy="310896"/>
+          </a:xfrm>
+          <a:prstGeom prst="rect">
+            <a:avLst/>
+          </a:prstGeom>
+          <a:noFill/>
+          <a:ln/>
+        </p:spPr>
+        <p:txBody>
+          <a:bodyPr wrap="square" lIns="0" tIns="0" rIns="0" bIns="0" rtlCol="0" anchor="ctr">
+            <a:normAutofit/>
+          </a:bodyPr>
+          <a:lstStyle/>
+          <a:p>
+            <a:pPr algn="ctr" indent="0" marL="0">
+              <a:buNone/>
+            </a:pPr>
+            <a:r>
+              <a:rPr lang="en-US" sz="1500" b="1" dirty="0">
+                <a:solidFill>
+                  <a:srgbClr val="FFFFFF"/>
+                </a:solidFill>
+                <a:latin typeface="Aptos" pitchFamily="34" charset="0"/>
+                <a:ea typeface="Aptos" pitchFamily="34" charset="-122"/>
+                <a:cs typeface="Aptos" pitchFamily="34" charset="-120"/>
+              </a:rPr>
+              <a:t>Action</a:t>
+            </a:r>
+            <a:endParaRPr lang="en-US" sz="1500" dirty="0"/>
           </a:p>
         </p:txBody>
       </p:sp>
@@ -11033,7 +11898,7 @@
                 <a:ea typeface="Aptos" pitchFamily="34" charset="-122"/>
                 <a:cs typeface="Aptos" pitchFamily="34" charset="-120"/>
               </a:rPr>
-              <a:t>© Paula Soper</a:t>
+              <a:t>Â© Paula Soper</a:t>
             </a:r>
             <a:endParaRPr lang="en-US" sz="800" dirty="0"/>
           </a:p>
@@ -11047,8 +11912,47 @@
         </p:nvSpPr>
         <p:spPr>
           <a:xfrm>
+            <a:off x="11137392" y="6510528"/>
+            <a:ext cx="411480" cy="201168"/>
+          </a:xfrm>
+          <a:prstGeom prst="rect">
+            <a:avLst/>
+          </a:prstGeom>
+          <a:noFill/>
+          <a:ln/>
+        </p:spPr>
+        <p:txBody>
+          <a:bodyPr wrap="square" lIns="0" tIns="0" rIns="0" bIns="0" rtlCol="0" anchor="ctr"/>
+          <a:lstStyle/>
+          <a:p>
+            <a:pPr algn="r" indent="0" marL="0">
+              <a:buNone/>
+            </a:pPr>
+            <a:r>
+              <a:rPr lang="en-US" sz="900" dirty="0">
+                <a:solidFill>
+                  <a:srgbClr val="5F7181"/>
+                </a:solidFill>
+                <a:latin typeface="Aptos" pitchFamily="34" charset="0"/>
+                <a:ea typeface="Aptos" pitchFamily="34" charset="-122"/>
+                <a:cs typeface="Aptos" pitchFamily="34" charset="-120"/>
+              </a:rPr>
+              <a:t>4</a:t>
+            </a:r>
+            <a:endParaRPr lang="en-US" sz="900" dirty="0"/>
+          </a:p>
+        </p:txBody>
+      </p:sp>
+      <p:sp>
+        <p:nvSpPr>
+          <p:cNvPr id="8" name="Text 6"/>
+          <p:cNvSpPr/>
+          <p:nvPr/>
+        </p:nvSpPr>
+        <p:spPr>
+          <a:xfrm>
             <a:off x="640080" y="658368"/>
-            <a:ext cx="10881360" cy="566928"/>
+            <a:ext cx="10881360" cy="713232"/>
           </a:xfrm>
           <a:prstGeom prst="rect">
             <a:avLst/>
@@ -11066,7 +11970,7 @@
               <a:buNone/>
             </a:pPr>
             <a:r>
-              <a:rPr lang="en-US" sz="2700" b="1" dirty="0">
+              <a:rPr lang="en-US" sz="3400" b="1" dirty="0">
                 <a:solidFill>
                   <a:srgbClr val="003A63"/>
                 </a:solidFill>
@@ -11076,20 +11980,20 @@
               </a:rPr>
               <a:t>Related toolkit resources</a:t>
             </a:r>
-            <a:endParaRPr lang="en-US" sz="2700" dirty="0"/>
-          </a:p>
-        </p:txBody>
-      </p:sp>
-      <p:sp>
-        <p:nvSpPr>
-          <p:cNvPr id="8" name="Text 6"/>
-          <p:cNvSpPr/>
-          <p:nvPr/>
-        </p:nvSpPr>
-        <p:spPr>
-          <a:xfrm>
-            <a:off x="868680" y="1417320"/>
-            <a:ext cx="6903720" cy="4480560"/>
+            <a:endParaRPr lang="en-US" sz="3400" dirty="0"/>
+          </a:p>
+        </p:txBody>
+      </p:sp>
+      <p:sp>
+        <p:nvSpPr>
+          <p:cNvPr id="9" name="Text 7"/>
+          <p:cNvSpPr/>
+          <p:nvPr/>
+        </p:nvSpPr>
+        <p:spPr>
+          <a:xfrm>
+            <a:off x="868680" y="1508760"/>
+            <a:ext cx="6812280" cy="3977640"/>
           </a:xfrm>
           <a:prstGeom prst="rect">
             <a:avLst/>
@@ -11104,7 +12008,7 @@
           <a:lstStyle/>
           <a:p>
             <a:r>
-              <a:rPr lang="en-US" sz="1460" dirty="0">
+              <a:rPr lang="en-US" sz="1850" dirty="0">
                 <a:solidFill>
                   <a:srgbClr val="17364A"/>
                 </a:solidFill>
@@ -11112,13 +12016,13 @@
                 <a:ea typeface="Aptos" pitchFamily="34" charset="-122"/>
                 <a:cs typeface="Aptos" pitchFamily="34" charset="-120"/>
               </a:rPr>
-              <a:t>Tool 3: Equity Impact Assessment Checklist (Checklist) - Use this tool to complete or strengthen the practical exercise for the.</a:t>
-            </a:r>
-            <a:endParaRPr lang="en-US" sz="1460" dirty="0"/>
-          </a:p>
-          <a:p>
-            <a:r>
-              <a:rPr lang="en-US" sz="1460" dirty="0">
+              <a:t>Tool 3: Equity Impact Assessment Checklist (Checklist) - Use this tool to complete or strengthen the.</a:t>
+            </a:r>
+            <a:endParaRPr lang="en-US" sz="1850" dirty="0"/>
+          </a:p>
+          <a:p>
+            <a:r>
+              <a:rPr lang="en-US" sz="1850" dirty="0">
                 <a:solidFill>
                   <a:srgbClr val="17364A"/>
                 </a:solidFill>
@@ -11126,13 +12030,13 @@
                 <a:ea typeface="Aptos" pitchFamily="34" charset="-122"/>
                 <a:cs typeface="Aptos" pitchFamily="34" charset="-120"/>
               </a:rPr>
-              <a:t>Tool 47: Equity &amp; Disparity Impact Monitoring (Dashboard) - Use this tool to complete or strengthen the practical exercise for the.</a:t>
-            </a:r>
-            <a:endParaRPr lang="en-US" sz="1460" dirty="0"/>
-          </a:p>
-          <a:p>
-            <a:r>
-              <a:rPr lang="en-US" sz="1460" dirty="0">
+              <a:t>Tool 47: Equity &amp; Disparity Impact Monitoring (Dashboard) - Use this tool to complete or strengthen the.</a:t>
+            </a:r>
+            <a:endParaRPr lang="en-US" sz="1850" dirty="0"/>
+          </a:p>
+          <a:p>
+            <a:r>
+              <a:rPr lang="en-US" sz="1850" dirty="0">
                 <a:solidFill>
                   <a:srgbClr val="17364A"/>
                 </a:solidFill>
@@ -11140,13 +12044,13 @@
                 <a:ea typeface="Aptos" pitchFamily="34" charset="-122"/>
                 <a:cs typeface="Aptos" pitchFamily="34" charset="-120"/>
               </a:rPr>
-              <a:t>Tool 4: AI Policy Landscape Scan (Worksheet) - Use AI Policy Landscape Scan to translate this lesson into a documented public health.</a:t>
-            </a:r>
-            <a:endParaRPr lang="en-US" sz="1460" dirty="0"/>
-          </a:p>
-          <a:p>
-            <a:r>
-              <a:rPr lang="en-US" sz="1460" dirty="0">
+              <a:t>Tool 4: AI Policy Landscape Scan (Worksheet) - Use AI Policy Landscape Scan to translate this lesson into a.</a:t>
+            </a:r>
+            <a:endParaRPr lang="en-US" sz="1850" dirty="0"/>
+          </a:p>
+          <a:p>
+            <a:r>
+              <a:rPr lang="en-US" sz="1850" dirty="0">
                 <a:solidFill>
                   <a:srgbClr val="17364A"/>
                 </a:solidFill>
@@ -11154,29 +12058,15 @@
                 <a:ea typeface="Aptos" pitchFamily="34" charset="-122"/>
                 <a:cs typeface="Aptos" pitchFamily="34" charset="-120"/>
               </a:rPr>
-              <a:t>Tool 5: AI Environmental and Resource Impact Review (Checklist) - Use AI Environmental and Resource Impact Review to translate this.</a:t>
-            </a:r>
-            <a:endParaRPr lang="en-US" sz="1460" dirty="0"/>
-          </a:p>
-          <a:p>
-            <a:r>
-              <a:rPr lang="en-US" sz="1460" dirty="0">
-                <a:solidFill>
-                  <a:srgbClr val="17364A"/>
-                </a:solidFill>
-                <a:latin typeface="Aptos" pitchFamily="34" charset="0"/>
-                <a:ea typeface="Aptos" pitchFamily="34" charset="-122"/>
-                <a:cs typeface="Aptos" pitchFamily="34" charset="-120"/>
-              </a:rPr>
-              <a:t>Tool 6: Human-Centered AI Decision Rule Checklist (Checklist) - Use Human-Centered AI Decision Rule Checklist to translate this.</a:t>
-            </a:r>
-            <a:endParaRPr lang="en-US" sz="1460" dirty="0"/>
-          </a:p>
-        </p:txBody>
-      </p:sp>
-      <p:sp>
-        <p:nvSpPr>
-          <p:cNvPr id="9" name="Shape 7"/>
+              <a:t>Tool 5: AI Environmental and Resource Impact Review (Checklist) - Use AI Environmental and Resource Impact.</a:t>
+            </a:r>
+            <a:endParaRPr lang="en-US" sz="1850" dirty="0"/>
+          </a:p>
+        </p:txBody>
+      </p:sp>
+      <p:sp>
+        <p:nvSpPr>
+          <p:cNvPr id="10" name="Shape 8"/>
           <p:cNvSpPr/>
           <p:nvPr/>
         </p:nvSpPr>
@@ -11203,14 +12093,14 @@
       </p:sp>
       <p:sp>
         <p:nvSpPr>
-          <p:cNvPr id="10" name="Text 8"/>
+          <p:cNvPr id="11" name="Text 9"/>
           <p:cNvSpPr/>
           <p:nvPr/>
         </p:nvSpPr>
         <p:spPr>
           <a:xfrm>
             <a:off x="8211312" y="1563624"/>
-            <a:ext cx="2734056" cy="201168"/>
+            <a:ext cx="2734056" cy="256032"/>
           </a:xfrm>
           <a:prstGeom prst="rect">
             <a:avLst/>
@@ -11226,7 +12116,7 @@
               <a:buNone/>
             </a:pPr>
             <a:r>
-              <a:rPr lang="en-US" sz="950" b="1" dirty="0">
+              <a:rPr lang="en-US" sz="1300" b="1" dirty="0">
                 <a:solidFill>
                   <a:srgbClr val="0068B7"/>
                 </a:solidFill>
@@ -11236,20 +12126,20 @@
               </a:rPr>
               <a:t>Use the tools</a:t>
             </a:r>
-            <a:endParaRPr lang="en-US" sz="950" dirty="0"/>
-          </a:p>
-        </p:txBody>
-      </p:sp>
-      <p:sp>
-        <p:nvSpPr>
-          <p:cNvPr id="11" name="Text 9"/>
-          <p:cNvSpPr/>
-          <p:nvPr/>
-        </p:nvSpPr>
-        <p:spPr>
-          <a:xfrm>
-            <a:off x="8211312" y="1856232"/>
-            <a:ext cx="2734056" cy="1536192"/>
+            <a:endParaRPr lang="en-US" sz="1300" dirty="0"/>
+          </a:p>
+        </p:txBody>
+      </p:sp>
+      <p:sp>
+        <p:nvSpPr>
+          <p:cNvPr id="12" name="Text 10"/>
+          <p:cNvSpPr/>
+          <p:nvPr/>
+        </p:nvSpPr>
+        <p:spPr>
+          <a:xfrm>
+            <a:off x="8211312" y="1920240"/>
+            <a:ext cx="2734056" cy="1463040"/>
           </a:xfrm>
           <a:prstGeom prst="rect">
             <a:avLst/>
@@ -11267,7 +12157,7 @@
               <a:buNone/>
             </a:pPr>
             <a:r>
-              <a:rPr lang="en-US" sz="1250" dirty="0">
+              <a:rPr lang="en-US" sz="1550" dirty="0">
                 <a:solidFill>
                   <a:srgbClr val="17364A"/>
                 </a:solidFill>
@@ -11277,32 +12167,32 @@
               </a:rPr>
               <a:t>Use linked tools when your department needs a structured worksheet, template, checklist, review process, or documentation artifact.</a:t>
             </a:r>
-            <a:endParaRPr lang="en-US" sz="1250" dirty="0"/>
-          </a:p>
-        </p:txBody>
-      </p:sp>
-      <p:sp>
-        <p:nvSpPr>
-          <p:cNvPr id="12" name="Shape 10"/>
-          <p:cNvSpPr/>
-          <p:nvPr/>
-        </p:nvSpPr>
-        <p:spPr>
-          <a:xfrm>
-            <a:off x="8046720" y="3794760"/>
-            <a:ext cx="3063240" cy="1508760"/>
+            <a:endParaRPr lang="en-US" sz="1550" dirty="0"/>
+          </a:p>
+        </p:txBody>
+      </p:sp>
+      <p:sp>
+        <p:nvSpPr>
+          <p:cNvPr id="13" name="Shape 11"/>
+          <p:cNvSpPr/>
+          <p:nvPr/>
+        </p:nvSpPr>
+        <p:spPr>
+          <a:xfrm>
+            <a:off x="7818120" y="3977640"/>
+            <a:ext cx="972312" cy="749808"/>
           </a:xfrm>
           <a:prstGeom prst="roundRect">
             <a:avLst>
-              <a:gd name="adj" fmla="val 7273"/>
+              <a:gd name="adj" fmla="val 14634"/>
             </a:avLst>
           </a:prstGeom>
           <a:solidFill>
-            <a:srgbClr val="EEF8ED"/>
+            <a:srgbClr val="0068B7"/>
           </a:solidFill>
           <a:ln w="12700">
             <a:solidFill>
-              <a:srgbClr val="B9D7E6"/>
+              <a:srgbClr val="0068B7"/>
             </a:solidFill>
             <a:prstDash val="solid"/>
           </a:ln>
@@ -11310,81 +12200,256 @@
       </p:sp>
       <p:sp>
         <p:nvSpPr>
-          <p:cNvPr id="13" name="Text 11"/>
-          <p:cNvSpPr/>
-          <p:nvPr/>
-        </p:nvSpPr>
-        <p:spPr>
-          <a:xfrm>
-            <a:off x="8211312" y="3941064"/>
-            <a:ext cx="2734056" cy="201168"/>
-          </a:xfrm>
-          <a:prstGeom prst="rect">
-            <a:avLst/>
-          </a:prstGeom>
-          <a:noFill/>
-          <a:ln/>
-        </p:spPr>
-        <p:txBody>
-          <a:bodyPr wrap="square" lIns="0" tIns="0" rIns="0" bIns="0" rtlCol="0" anchor="ctr"/>
-          <a:lstStyle/>
-          <a:p>
-            <a:pPr indent="0" marL="0">
-              <a:buNone/>
-            </a:pPr>
-            <a:r>
-              <a:rPr lang="en-US" sz="950" b="1" dirty="0">
-                <a:solidFill>
-                  <a:srgbClr val="0068B7"/>
-                </a:solidFill>
-                <a:latin typeface="Aptos" pitchFamily="34" charset="0"/>
-                <a:ea typeface="Aptos" pitchFamily="34" charset="-122"/>
-                <a:cs typeface="Aptos" pitchFamily="34" charset="-120"/>
-              </a:rPr>
-              <a:t>Avoid duplication</a:t>
-            </a:r>
-            <a:endParaRPr lang="en-US" sz="950" dirty="0"/>
-          </a:p>
-        </p:txBody>
-      </p:sp>
-      <p:sp>
-        <p:nvSpPr>
           <p:cNvPr id="14" name="Text 12"/>
           <p:cNvSpPr/>
           <p:nvPr/>
         </p:nvSpPr>
         <p:spPr>
           <a:xfrm>
-            <a:off x="8211312" y="4233672"/>
-            <a:ext cx="2734056" cy="941832"/>
-          </a:xfrm>
-          <a:prstGeom prst="rect">
-            <a:avLst/>
-          </a:prstGeom>
-          <a:noFill/>
-          <a:ln/>
-        </p:spPr>
-        <p:txBody>
-          <a:bodyPr wrap="square" lIns="0" tIns="0" rIns="0" bIns="0" rtlCol="0" anchor="t">
+            <a:off x="7891272" y="4169664"/>
+            <a:ext cx="826008" cy="310896"/>
+          </a:xfrm>
+          <a:prstGeom prst="rect">
+            <a:avLst/>
+          </a:prstGeom>
+          <a:noFill/>
+          <a:ln/>
+        </p:spPr>
+        <p:txBody>
+          <a:bodyPr wrap="square" lIns="0" tIns="0" rIns="0" bIns="0" rtlCol="0" anchor="ctr">
             <a:normAutofit/>
           </a:bodyPr>
           <a:lstStyle/>
           <a:p>
-            <a:pPr indent="0" marL="0">
-              <a:buNone/>
-            </a:pPr>
-            <a:r>
-              <a:rPr lang="en-US" sz="1250" dirty="0">
-                <a:solidFill>
-                  <a:srgbClr val="17364A"/>
-                </a:solidFill>
-                <a:latin typeface="Aptos" pitchFamily="34" charset="0"/>
-                <a:ea typeface="Aptos" pitchFamily="34" charset="-122"/>
-                <a:cs typeface="Aptos" pitchFamily="34" charset="-120"/>
-              </a:rPr>
-              <a:t>If your department already has a strong equivalent tool, adapt or use the existing process instead of recreating it.</a:t>
-            </a:r>
-            <a:endParaRPr lang="en-US" sz="1250" dirty="0"/>
+            <a:pPr algn="ctr" indent="0" marL="0">
+              <a:buNone/>
+            </a:pPr>
+            <a:r>
+              <a:rPr lang="en-US" sz="1500" b="1" dirty="0">
+                <a:solidFill>
+                  <a:srgbClr val="FFFFFF"/>
+                </a:solidFill>
+                <a:latin typeface="Aptos" pitchFamily="34" charset="0"/>
+                <a:ea typeface="Aptos" pitchFamily="34" charset="-122"/>
+                <a:cs typeface="Aptos" pitchFamily="34" charset="-120"/>
+              </a:rPr>
+              <a:t>Concept</a:t>
+            </a:r>
+            <a:endParaRPr lang="en-US" sz="1500" dirty="0"/>
+          </a:p>
+        </p:txBody>
+      </p:sp>
+      <p:sp>
+        <p:nvSpPr>
+          <p:cNvPr id="15" name="Text 13"/>
+          <p:cNvSpPr/>
+          <p:nvPr/>
+        </p:nvSpPr>
+        <p:spPr>
+          <a:xfrm>
+            <a:off x="8817864" y="4187952"/>
+            <a:ext cx="201168" cy="256032"/>
+          </a:xfrm>
+          <a:prstGeom prst="rect">
+            <a:avLst/>
+          </a:prstGeom>
+          <a:noFill/>
+          <a:ln/>
+        </p:spPr>
+        <p:txBody>
+          <a:bodyPr wrap="square" lIns="0" tIns="0" rIns="0" bIns="0" rtlCol="0" anchor="ctr"/>
+          <a:lstStyle/>
+          <a:p>
+            <a:pPr algn="ctr" indent="0" marL="0">
+              <a:buNone/>
+            </a:pPr>
+            <a:r>
+              <a:rPr lang="en-US" sz="1800" b="1" dirty="0">
+                <a:solidFill>
+                  <a:srgbClr val="0068B7"/>
+                </a:solidFill>
+                <a:latin typeface="Aptos" pitchFamily="34" charset="0"/>
+                <a:ea typeface="Aptos" pitchFamily="34" charset="-122"/>
+                <a:cs typeface="Aptos" pitchFamily="34" charset="-120"/>
+              </a:rPr>
+              <a:t>â†’</a:t>
+            </a:r>
+            <a:endParaRPr lang="en-US" sz="1800" dirty="0"/>
+          </a:p>
+        </p:txBody>
+      </p:sp>
+      <p:sp>
+        <p:nvSpPr>
+          <p:cNvPr id="16" name="Shape 14"/>
+          <p:cNvSpPr/>
+          <p:nvPr/>
+        </p:nvSpPr>
+        <p:spPr>
+          <a:xfrm>
+            <a:off x="9046464" y="3977640"/>
+            <a:ext cx="972312" cy="749808"/>
+          </a:xfrm>
+          <a:prstGeom prst="roundRect">
+            <a:avLst>
+              <a:gd name="adj" fmla="val 14634"/>
+            </a:avLst>
+          </a:prstGeom>
+          <a:solidFill>
+            <a:srgbClr val="2F8A28"/>
+          </a:solidFill>
+          <a:ln w="12700">
+            <a:solidFill>
+              <a:srgbClr val="2F8A28"/>
+            </a:solidFill>
+            <a:prstDash val="solid"/>
+          </a:ln>
+        </p:spPr>
+      </p:sp>
+      <p:sp>
+        <p:nvSpPr>
+          <p:cNvPr id="17" name="Text 15"/>
+          <p:cNvSpPr/>
+          <p:nvPr/>
+        </p:nvSpPr>
+        <p:spPr>
+          <a:xfrm>
+            <a:off x="9119616" y="4169664"/>
+            <a:ext cx="826008" cy="310896"/>
+          </a:xfrm>
+          <a:prstGeom prst="rect">
+            <a:avLst/>
+          </a:prstGeom>
+          <a:noFill/>
+          <a:ln/>
+        </p:spPr>
+        <p:txBody>
+          <a:bodyPr wrap="square" lIns="0" tIns="0" rIns="0" bIns="0" rtlCol="0" anchor="ctr">
+            <a:normAutofit/>
+          </a:bodyPr>
+          <a:lstStyle/>
+          <a:p>
+            <a:pPr algn="ctr" indent="0" marL="0">
+              <a:buNone/>
+            </a:pPr>
+            <a:r>
+              <a:rPr lang="en-US" sz="1500" b="1" dirty="0">
+                <a:solidFill>
+                  <a:srgbClr val="FFFFFF"/>
+                </a:solidFill>
+                <a:latin typeface="Aptos" pitchFamily="34" charset="0"/>
+                <a:ea typeface="Aptos" pitchFamily="34" charset="-122"/>
+                <a:cs typeface="Aptos" pitchFamily="34" charset="-120"/>
+              </a:rPr>
+              <a:t>Tool</a:t>
+            </a:r>
+            <a:endParaRPr lang="en-US" sz="1500" dirty="0"/>
+          </a:p>
+        </p:txBody>
+      </p:sp>
+      <p:sp>
+        <p:nvSpPr>
+          <p:cNvPr id="18" name="Text 16"/>
+          <p:cNvSpPr/>
+          <p:nvPr/>
+        </p:nvSpPr>
+        <p:spPr>
+          <a:xfrm>
+            <a:off x="10046208" y="4187952"/>
+            <a:ext cx="201168" cy="256032"/>
+          </a:xfrm>
+          <a:prstGeom prst="rect">
+            <a:avLst/>
+          </a:prstGeom>
+          <a:noFill/>
+          <a:ln/>
+        </p:spPr>
+        <p:txBody>
+          <a:bodyPr wrap="square" lIns="0" tIns="0" rIns="0" bIns="0" rtlCol="0" anchor="ctr"/>
+          <a:lstStyle/>
+          <a:p>
+            <a:pPr algn="ctr" indent="0" marL="0">
+              <a:buNone/>
+            </a:pPr>
+            <a:r>
+              <a:rPr lang="en-US" sz="1800" b="1" dirty="0">
+                <a:solidFill>
+                  <a:srgbClr val="0068B7"/>
+                </a:solidFill>
+                <a:latin typeface="Aptos" pitchFamily="34" charset="0"/>
+                <a:ea typeface="Aptos" pitchFamily="34" charset="-122"/>
+                <a:cs typeface="Aptos" pitchFamily="34" charset="-120"/>
+              </a:rPr>
+              <a:t>â†’</a:t>
+            </a:r>
+            <a:endParaRPr lang="en-US" sz="1800" dirty="0"/>
+          </a:p>
+        </p:txBody>
+      </p:sp>
+      <p:sp>
+        <p:nvSpPr>
+          <p:cNvPr id="19" name="Shape 17"/>
+          <p:cNvSpPr/>
+          <p:nvPr/>
+        </p:nvSpPr>
+        <p:spPr>
+          <a:xfrm>
+            <a:off x="10274808" y="3977640"/>
+            <a:ext cx="972312" cy="749808"/>
+          </a:xfrm>
+          <a:prstGeom prst="roundRect">
+            <a:avLst>
+              <a:gd name="adj" fmla="val 14634"/>
+            </a:avLst>
+          </a:prstGeom>
+          <a:solidFill>
+            <a:srgbClr val="D69A2D"/>
+          </a:solidFill>
+          <a:ln w="12700">
+            <a:solidFill>
+              <a:srgbClr val="D69A2D"/>
+            </a:solidFill>
+            <a:prstDash val="solid"/>
+          </a:ln>
+        </p:spPr>
+      </p:sp>
+      <p:sp>
+        <p:nvSpPr>
+          <p:cNvPr id="20" name="Text 18"/>
+          <p:cNvSpPr/>
+          <p:nvPr/>
+        </p:nvSpPr>
+        <p:spPr>
+          <a:xfrm>
+            <a:off x="10347960" y="4169664"/>
+            <a:ext cx="826008" cy="310896"/>
+          </a:xfrm>
+          <a:prstGeom prst="rect">
+            <a:avLst/>
+          </a:prstGeom>
+          <a:noFill/>
+          <a:ln/>
+        </p:spPr>
+        <p:txBody>
+          <a:bodyPr wrap="square" lIns="0" tIns="0" rIns="0" bIns="0" rtlCol="0" anchor="ctr">
+            <a:normAutofit/>
+          </a:bodyPr>
+          <a:lstStyle/>
+          <a:p>
+            <a:pPr algn="ctr" indent="0" marL="0">
+              <a:buNone/>
+            </a:pPr>
+            <a:r>
+              <a:rPr lang="en-US" sz="1500" b="1" dirty="0">
+                <a:solidFill>
+                  <a:srgbClr val="FFFFFF"/>
+                </a:solidFill>
+                <a:latin typeface="Aptos" pitchFamily="34" charset="0"/>
+                <a:ea typeface="Aptos" pitchFamily="34" charset="-122"/>
+                <a:cs typeface="Aptos" pitchFamily="34" charset="-120"/>
+              </a:rPr>
+              <a:t>Artifact</a:t>
+            </a:r>
+            <a:endParaRPr lang="en-US" sz="1500" dirty="0"/>
           </a:p>
         </p:txBody>
       </p:sp>
@@ -11581,7 +12646,7 @@
                 <a:ea typeface="Aptos" pitchFamily="34" charset="-122"/>
                 <a:cs typeface="Aptos" pitchFamily="34" charset="-120"/>
               </a:rPr>
-              <a:t>© Paula Soper</a:t>
+              <a:t>Â© Paula Soper</a:t>
             </a:r>
             <a:endParaRPr lang="en-US" sz="800" dirty="0"/>
           </a:p>
@@ -11589,7 +12654,46 @@
       </p:sp>
       <p:sp>
         <p:nvSpPr>
-          <p:cNvPr id="7" name="Shape 5"/>
+          <p:cNvPr id="7" name="Text 5"/>
+          <p:cNvSpPr/>
+          <p:nvPr/>
+        </p:nvSpPr>
+        <p:spPr>
+          <a:xfrm>
+            <a:off x="11137392" y="6510528"/>
+            <a:ext cx="411480" cy="201168"/>
+          </a:xfrm>
+          <a:prstGeom prst="rect">
+            <a:avLst/>
+          </a:prstGeom>
+          <a:noFill/>
+          <a:ln/>
+        </p:spPr>
+        <p:txBody>
+          <a:bodyPr wrap="square" lIns="0" tIns="0" rIns="0" bIns="0" rtlCol="0" anchor="ctr"/>
+          <a:lstStyle/>
+          <a:p>
+            <a:pPr algn="r" indent="0" marL="0">
+              <a:buNone/>
+            </a:pPr>
+            <a:r>
+              <a:rPr lang="en-US" sz="900" dirty="0">
+                <a:solidFill>
+                  <a:srgbClr val="5F7181"/>
+                </a:solidFill>
+                <a:latin typeface="Aptos" pitchFamily="34" charset="0"/>
+                <a:ea typeface="Aptos" pitchFamily="34" charset="-122"/>
+                <a:cs typeface="Aptos" pitchFamily="34" charset="-120"/>
+              </a:rPr>
+              <a:t>5</a:t>
+            </a:r>
+            <a:endParaRPr lang="en-US" sz="900" dirty="0"/>
+          </a:p>
+        </p:txBody>
+      </p:sp>
+      <p:sp>
+        <p:nvSpPr>
+          <p:cNvPr id="8" name="Shape 6"/>
           <p:cNvSpPr/>
           <p:nvPr/>
         </p:nvSpPr>
@@ -11614,7 +12718,7 @@
       </p:sp>
       <p:sp>
         <p:nvSpPr>
-          <p:cNvPr id="8" name="Text 6"/>
+          <p:cNvPr id="9" name="Text 7"/>
           <p:cNvSpPr/>
           <p:nvPr/>
         </p:nvSpPr>
@@ -11653,14 +12757,14 @@
       </p:sp>
       <p:sp>
         <p:nvSpPr>
-          <p:cNvPr id="9" name="Text 7"/>
+          <p:cNvPr id="10" name="Text 8"/>
           <p:cNvSpPr/>
           <p:nvPr/>
         </p:nvSpPr>
         <p:spPr>
           <a:xfrm>
             <a:off x="640080" y="621792"/>
-            <a:ext cx="10881360" cy="566928"/>
+            <a:ext cx="10881360" cy="713232"/>
           </a:xfrm>
           <a:prstGeom prst="rect">
             <a:avLst/>
@@ -11678,7 +12782,7 @@
               <a:buNone/>
             </a:pPr>
             <a:r>
-              <a:rPr lang="en-US" sz="2700" b="1" dirty="0">
+              <a:rPr lang="en-US" sz="3400" b="1" dirty="0">
                 <a:solidFill>
                   <a:srgbClr val="003A63"/>
                 </a:solidFill>
@@ -11688,20 +12792,20 @@
               </a:rPr>
               <a:t>Learning Objectives</a:t>
             </a:r>
-            <a:endParaRPr lang="en-US" sz="2700" dirty="0"/>
-          </a:p>
-        </p:txBody>
-      </p:sp>
-      <p:sp>
-        <p:nvSpPr>
-          <p:cNvPr id="10" name="Text 8"/>
-          <p:cNvSpPr/>
-          <p:nvPr/>
-        </p:nvSpPr>
-        <p:spPr>
-          <a:xfrm>
-            <a:off x="868680" y="1417320"/>
-            <a:ext cx="6675120" cy="4434840"/>
+            <a:endParaRPr lang="en-US" sz="3400" dirty="0"/>
+          </a:p>
+        </p:txBody>
+      </p:sp>
+      <p:sp>
+        <p:nvSpPr>
+          <p:cNvPr id="11" name="Text 9"/>
+          <p:cNvSpPr/>
+          <p:nvPr/>
+        </p:nvSpPr>
+        <p:spPr>
+          <a:xfrm>
+            <a:off x="868680" y="1508760"/>
+            <a:ext cx="6537960" cy="4160520"/>
           </a:xfrm>
           <a:prstGeom prst="rect">
             <a:avLst/>
@@ -11716,7 +12820,7 @@
           <a:lstStyle/>
           <a:p>
             <a:r>
-              <a:rPr lang="en-US" sz="1700" dirty="0">
+              <a:rPr lang="en-US" sz="2100" dirty="0">
                 <a:solidFill>
                   <a:srgbClr val="17364A"/>
                 </a:solidFill>
@@ -11726,11 +12830,11 @@
               </a:rPr>
               <a:t>Explain why community oversight matters for public health AI.</a:t>
             </a:r>
-            <a:endParaRPr lang="en-US" sz="1700" dirty="0"/>
-          </a:p>
-          <a:p>
-            <a:r>
-              <a:rPr lang="en-US" sz="1700" dirty="0">
+            <a:endParaRPr lang="en-US" sz="2100" dirty="0"/>
+          </a:p>
+          <a:p>
+            <a:r>
+              <a:rPr lang="en-US" sz="2100" dirty="0">
                 <a:solidFill>
                   <a:srgbClr val="17364A"/>
                 </a:solidFill>
@@ -11740,11 +12844,11 @@
               </a:rPr>
               <a:t>Identify AI use cases that warrant community engagement or participatory governance.</a:t>
             </a:r>
-            <a:endParaRPr lang="en-US" sz="1700" dirty="0"/>
-          </a:p>
-          <a:p>
-            <a:r>
-              <a:rPr lang="en-US" sz="1700" dirty="0">
+            <a:endParaRPr lang="en-US" sz="2100" dirty="0"/>
+          </a:p>
+          <a:p>
+            <a:r>
+              <a:rPr lang="en-US" sz="2100" dirty="0">
                 <a:solidFill>
                   <a:srgbClr val="17364A"/>
                 </a:solidFill>
@@ -11754,27 +12858,13 @@
               </a:rPr>
               <a:t>Design a community engagement approach matched to risk, impact, and community context.</a:t>
             </a:r>
-            <a:endParaRPr lang="en-US" sz="1700" dirty="0"/>
-          </a:p>
-          <a:p>
-            <a:r>
-              <a:rPr lang="en-US" sz="1700" dirty="0">
-                <a:solidFill>
-                  <a:srgbClr val="17364A"/>
-                </a:solidFill>
-                <a:latin typeface="Aptos" pitchFamily="34" charset="0"/>
-                <a:ea typeface="Aptos" pitchFamily="34" charset="-122"/>
-                <a:cs typeface="Aptos" pitchFamily="34" charset="-120"/>
-              </a:rPr>
-              <a:t>Recognize risks of tokenism, extractive engagement, and inaccessible technical language.</a:t>
-            </a:r>
-            <a:endParaRPr lang="en-US" sz="1700" dirty="0"/>
-          </a:p>
-        </p:txBody>
-      </p:sp>
-      <p:sp>
-        <p:nvSpPr>
-          <p:cNvPr id="11" name="Shape 9"/>
+            <a:endParaRPr lang="en-US" sz="2100" dirty="0"/>
+          </a:p>
+        </p:txBody>
+      </p:sp>
+      <p:sp>
+        <p:nvSpPr>
+          <p:cNvPr id="12" name="Shape 10"/>
           <p:cNvSpPr/>
           <p:nvPr/>
         </p:nvSpPr>
@@ -11801,14 +12891,14 @@
       </p:sp>
       <p:sp>
         <p:nvSpPr>
-          <p:cNvPr id="12" name="Text 10"/>
+          <p:cNvPr id="13" name="Text 11"/>
           <p:cNvSpPr/>
           <p:nvPr/>
         </p:nvSpPr>
         <p:spPr>
           <a:xfrm>
             <a:off x="8074152" y="1563624"/>
-            <a:ext cx="2825496" cy="201168"/>
+            <a:ext cx="2825496" cy="256032"/>
           </a:xfrm>
           <a:prstGeom prst="rect">
             <a:avLst/>
@@ -11824,7 +12914,7 @@
               <a:buNone/>
             </a:pPr>
             <a:r>
-              <a:rPr lang="en-US" sz="950" b="1" dirty="0">
+              <a:rPr lang="en-US" sz="1300" b="1" dirty="0">
                 <a:solidFill>
                   <a:srgbClr val="0068B7"/>
                 </a:solidFill>
@@ -11834,20 +12924,20 @@
               </a:rPr>
               <a:t>Key idea</a:t>
             </a:r>
-            <a:endParaRPr lang="en-US" sz="950" dirty="0"/>
-          </a:p>
-        </p:txBody>
-      </p:sp>
-      <p:sp>
-        <p:nvSpPr>
-          <p:cNvPr id="13" name="Text 11"/>
-          <p:cNvSpPr/>
-          <p:nvPr/>
-        </p:nvSpPr>
-        <p:spPr>
-          <a:xfrm>
-            <a:off x="8074152" y="1856232"/>
-            <a:ext cx="2825496" cy="1261872"/>
+            <a:endParaRPr lang="en-US" sz="1300" dirty="0"/>
+          </a:p>
+        </p:txBody>
+      </p:sp>
+      <p:sp>
+        <p:nvSpPr>
+          <p:cNvPr id="14" name="Text 12"/>
+          <p:cNvSpPr/>
+          <p:nvPr/>
+        </p:nvSpPr>
+        <p:spPr>
+          <a:xfrm>
+            <a:off x="8074152" y="1920240"/>
+            <a:ext cx="2825496" cy="1188720"/>
           </a:xfrm>
           <a:prstGeom prst="rect">
             <a:avLst/>
@@ -11865,7 +12955,7 @@
               <a:buNone/>
             </a:pPr>
             <a:r>
-              <a:rPr lang="en-US" sz="1250" dirty="0">
+              <a:rPr lang="en-US" sz="1550" dirty="0">
                 <a:solidFill>
                   <a:srgbClr val="17364A"/>
                 </a:solidFill>
@@ -11875,13 +12965,13 @@
               </a:rPr>
               <a:t>Explain why community oversight matters for public health AI.</a:t>
             </a:r>
-            <a:endParaRPr lang="en-US" sz="1250" dirty="0"/>
-          </a:p>
-        </p:txBody>
-      </p:sp>
-      <p:sp>
-        <p:nvSpPr>
-          <p:cNvPr id="14" name="Shape 12"/>
+            <a:endParaRPr lang="en-US" sz="1550" dirty="0"/>
+          </a:p>
+        </p:txBody>
+      </p:sp>
+      <p:sp>
+        <p:nvSpPr>
+          <p:cNvPr id="15" name="Shape 13"/>
           <p:cNvSpPr/>
           <p:nvPr/>
         </p:nvSpPr>
@@ -11908,14 +12998,14 @@
       </p:sp>
       <p:sp>
         <p:nvSpPr>
-          <p:cNvPr id="15" name="Text 13"/>
+          <p:cNvPr id="16" name="Text 14"/>
           <p:cNvSpPr/>
           <p:nvPr/>
         </p:nvSpPr>
         <p:spPr>
           <a:xfrm>
             <a:off x="8074152" y="3666744"/>
-            <a:ext cx="2825496" cy="201168"/>
+            <a:ext cx="2825496" cy="256032"/>
           </a:xfrm>
           <a:prstGeom prst="rect">
             <a:avLst/>
@@ -11931,7 +13021,7 @@
               <a:buNone/>
             </a:pPr>
             <a:r>
-              <a:rPr lang="en-US" sz="950" b="1" dirty="0">
+              <a:rPr lang="en-US" sz="1300" b="1" dirty="0">
                 <a:solidFill>
                   <a:srgbClr val="0068B7"/>
                 </a:solidFill>
@@ -11941,20 +13031,20 @@
               </a:rPr>
               <a:t>Use this for</a:t>
             </a:r>
-            <a:endParaRPr lang="en-US" sz="950" dirty="0"/>
-          </a:p>
-        </p:txBody>
-      </p:sp>
-      <p:sp>
-        <p:nvSpPr>
-          <p:cNvPr id="16" name="Text 14"/>
-          <p:cNvSpPr/>
-          <p:nvPr/>
-        </p:nvSpPr>
-        <p:spPr>
-          <a:xfrm>
-            <a:off x="8074152" y="3959352"/>
-            <a:ext cx="2825496" cy="1170432"/>
+            <a:endParaRPr lang="en-US" sz="1300" dirty="0"/>
+          </a:p>
+        </p:txBody>
+      </p:sp>
+      <p:sp>
+        <p:nvSpPr>
+          <p:cNvPr id="17" name="Text 15"/>
+          <p:cNvSpPr/>
+          <p:nvPr/>
+        </p:nvSpPr>
+        <p:spPr>
+          <a:xfrm>
+            <a:off x="8074152" y="4023360"/>
+            <a:ext cx="2825496" cy="1097280"/>
           </a:xfrm>
           <a:prstGeom prst="rect">
             <a:avLst/>
@@ -11972,7 +13062,7 @@
               <a:buNone/>
             </a:pPr>
             <a:r>
-              <a:rPr lang="en-US" sz="1250" dirty="0">
+              <a:rPr lang="en-US" sz="1550" dirty="0">
                 <a:solidFill>
                   <a:srgbClr val="17364A"/>
                 </a:solidFill>
@@ -11982,7 +13072,7 @@
               </a:rPr>
               <a:t>Connect the concept to public health decisions, safeguards, documentation, or implementation work.</a:t>
             </a:r>
-            <a:endParaRPr lang="en-US" sz="1250" dirty="0"/>
+            <a:endParaRPr lang="en-US" sz="1550" dirty="0"/>
           </a:p>
         </p:txBody>
       </p:sp>
@@ -12179,7 +13269,7 @@
                 <a:ea typeface="Aptos" pitchFamily="34" charset="-122"/>
                 <a:cs typeface="Aptos" pitchFamily="34" charset="-120"/>
               </a:rPr>
-              <a:t>© Paula Soper</a:t>
+              <a:t>Â© Paula Soper</a:t>
             </a:r>
             <a:endParaRPr lang="en-US" sz="800" dirty="0"/>
           </a:p>
@@ -12187,7 +13277,46 @@
       </p:sp>
       <p:sp>
         <p:nvSpPr>
-          <p:cNvPr id="7" name="Shape 5"/>
+          <p:cNvPr id="7" name="Text 5"/>
+          <p:cNvSpPr/>
+          <p:nvPr/>
+        </p:nvSpPr>
+        <p:spPr>
+          <a:xfrm>
+            <a:off x="11137392" y="6510528"/>
+            <a:ext cx="411480" cy="201168"/>
+          </a:xfrm>
+          <a:prstGeom prst="rect">
+            <a:avLst/>
+          </a:prstGeom>
+          <a:noFill/>
+          <a:ln/>
+        </p:spPr>
+        <p:txBody>
+          <a:bodyPr wrap="square" lIns="0" tIns="0" rIns="0" bIns="0" rtlCol="0" anchor="ctr"/>
+          <a:lstStyle/>
+          <a:p>
+            <a:pPr algn="r" indent="0" marL="0">
+              <a:buNone/>
+            </a:pPr>
+            <a:r>
+              <a:rPr lang="en-US" sz="900" dirty="0">
+                <a:solidFill>
+                  <a:srgbClr val="5F7181"/>
+                </a:solidFill>
+                <a:latin typeface="Aptos" pitchFamily="34" charset="0"/>
+                <a:ea typeface="Aptos" pitchFamily="34" charset="-122"/>
+                <a:cs typeface="Aptos" pitchFamily="34" charset="-120"/>
+              </a:rPr>
+              <a:t>6</a:t>
+            </a:r>
+            <a:endParaRPr lang="en-US" sz="900" dirty="0"/>
+          </a:p>
+        </p:txBody>
+      </p:sp>
+      <p:sp>
+        <p:nvSpPr>
+          <p:cNvPr id="8" name="Shape 6"/>
           <p:cNvSpPr/>
           <p:nvPr/>
         </p:nvSpPr>
@@ -12212,7 +13341,7 @@
       </p:sp>
       <p:sp>
         <p:nvSpPr>
-          <p:cNvPr id="8" name="Text 6"/>
+          <p:cNvPr id="9" name="Text 7"/>
           <p:cNvSpPr/>
           <p:nvPr/>
         </p:nvSpPr>
@@ -12251,14 +13380,14 @@
       </p:sp>
       <p:sp>
         <p:nvSpPr>
-          <p:cNvPr id="9" name="Text 7"/>
+          <p:cNvPr id="10" name="Text 8"/>
           <p:cNvSpPr/>
           <p:nvPr/>
         </p:nvSpPr>
         <p:spPr>
           <a:xfrm>
             <a:off x="640080" y="621792"/>
-            <a:ext cx="10881360" cy="566928"/>
+            <a:ext cx="10881360" cy="713232"/>
           </a:xfrm>
           <a:prstGeom prst="rect">
             <a:avLst/>
@@ -12276,7 +13405,7 @@
               <a:buNone/>
             </a:pPr>
             <a:r>
-              <a:rPr lang="en-US" sz="2700" b="1" dirty="0">
+              <a:rPr lang="en-US" sz="3400" b="1" dirty="0">
                 <a:solidFill>
                   <a:srgbClr val="003A63"/>
                 </a:solidFill>
@@ -12286,20 +13415,20 @@
               </a:rPr>
               <a:t>Module Overview</a:t>
             </a:r>
-            <a:endParaRPr lang="en-US" sz="2700" dirty="0"/>
-          </a:p>
-        </p:txBody>
-      </p:sp>
-      <p:sp>
-        <p:nvSpPr>
-          <p:cNvPr id="10" name="Text 8"/>
-          <p:cNvSpPr/>
-          <p:nvPr/>
-        </p:nvSpPr>
-        <p:spPr>
-          <a:xfrm>
-            <a:off x="868680" y="1417320"/>
-            <a:ext cx="6675120" cy="4434840"/>
+            <a:endParaRPr lang="en-US" sz="3400" dirty="0"/>
+          </a:p>
+        </p:txBody>
+      </p:sp>
+      <p:sp>
+        <p:nvSpPr>
+          <p:cNvPr id="11" name="Text 9"/>
+          <p:cNvSpPr/>
+          <p:nvPr/>
+        </p:nvSpPr>
+        <p:spPr>
+          <a:xfrm>
+            <a:off x="868680" y="1508760"/>
+            <a:ext cx="6537960" cy="4160520"/>
           </a:xfrm>
           <a:prstGeom prst="rect">
             <a:avLst/>
@@ -12314,7 +13443,7 @@
           <a:lstStyle/>
           <a:p>
             <a:r>
-              <a:rPr lang="en-US" sz="1700" dirty="0">
+              <a:rPr lang="en-US" sz="2100" dirty="0">
                 <a:solidFill>
                   <a:srgbClr val="17364A"/>
                 </a:solidFill>
@@ -12324,11 +13453,11 @@
               </a:rPr>
               <a:t>Public health AI governance should not be limited to internal agency review.</a:t>
             </a:r>
-            <a:endParaRPr lang="en-US" sz="1700" dirty="0"/>
-          </a:p>
-          <a:p>
-            <a:r>
-              <a:rPr lang="en-US" sz="1700" dirty="0">
+            <a:endParaRPr lang="en-US" sz="2100" dirty="0"/>
+          </a:p>
+          <a:p>
+            <a:r>
+              <a:rPr lang="en-US" sz="2100" dirty="0">
                 <a:solidFill>
                   <a:srgbClr val="17364A"/>
                 </a:solidFill>
@@ -12336,13 +13465,13 @@
                 <a:ea typeface="Aptos" pitchFamily="34" charset="-122"/>
                 <a:cs typeface="Aptos" pitchFamily="34" charset="-120"/>
               </a:rPr>
-              <a:t>When AI affects communities, services, surveillance, communication, prioritization, or resource allocation, agencies should.</a:t>
-            </a:r>
-            <a:endParaRPr lang="en-US" sz="1700" dirty="0"/>
-          </a:p>
-          <a:p>
-            <a:r>
-              <a:rPr lang="en-US" sz="1700" dirty="0">
+              <a:t>When AI affects communities, services, surveillance, communication, prioritization, or resource.</a:t>
+            </a:r>
+            <a:endParaRPr lang="en-US" sz="2100" dirty="0"/>
+          </a:p>
+          <a:p>
+            <a:r>
+              <a:rPr lang="en-US" sz="2100" dirty="0">
                 <a:solidFill>
                   <a:srgbClr val="17364A"/>
                 </a:solidFill>
@@ -12350,29 +13479,15 @@
                 <a:ea typeface="Aptos" pitchFamily="34" charset="-122"/>
                 <a:cs typeface="Aptos" pitchFamily="34" charset="-120"/>
               </a:rPr>
-              <a:t>Participatory governance creates structured ways for affected people and community partners to shape AI use.</a:t>
-            </a:r>
-            <a:endParaRPr lang="en-US" sz="1700" dirty="0"/>
-          </a:p>
-          <a:p>
-            <a:r>
-              <a:rPr lang="en-US" sz="1700" dirty="0">
-                <a:solidFill>
-                  <a:srgbClr val="17364A"/>
-                </a:solidFill>
-                <a:latin typeface="Aptos" pitchFamily="34" charset="0"/>
-                <a:ea typeface="Aptos" pitchFamily="34" charset="-122"/>
-                <a:cs typeface="Aptos" pitchFamily="34" charset="-120"/>
-              </a:rPr>
-              <a:t>This module helps leaders distinguish between informing the public, consulting communities, involving partners, and sharing.</a:t>
-            </a:r>
-            <a:endParaRPr lang="en-US" sz="1700" dirty="0"/>
-          </a:p>
-        </p:txBody>
-      </p:sp>
-      <p:sp>
-        <p:nvSpPr>
-          <p:cNvPr id="11" name="Shape 9"/>
+              <a:t>Participatory governance creates structured ways for affected people and community partners to shape AI.</a:t>
+            </a:r>
+            <a:endParaRPr lang="en-US" sz="2100" dirty="0"/>
+          </a:p>
+        </p:txBody>
+      </p:sp>
+      <p:sp>
+        <p:nvSpPr>
+          <p:cNvPr id="12" name="Shape 10"/>
           <p:cNvSpPr/>
           <p:nvPr/>
         </p:nvSpPr>
@@ -12399,14 +13514,14 @@
       </p:sp>
       <p:sp>
         <p:nvSpPr>
-          <p:cNvPr id="12" name="Text 10"/>
+          <p:cNvPr id="13" name="Text 11"/>
           <p:cNvSpPr/>
           <p:nvPr/>
         </p:nvSpPr>
         <p:spPr>
           <a:xfrm>
             <a:off x="8074152" y="1563624"/>
-            <a:ext cx="2825496" cy="201168"/>
+            <a:ext cx="2825496" cy="256032"/>
           </a:xfrm>
           <a:prstGeom prst="rect">
             <a:avLst/>
@@ -12422,7 +13537,7 @@
               <a:buNone/>
             </a:pPr>
             <a:r>
-              <a:rPr lang="en-US" sz="950" b="1" dirty="0">
+              <a:rPr lang="en-US" sz="1300" b="1" dirty="0">
                 <a:solidFill>
                   <a:srgbClr val="0068B7"/>
                 </a:solidFill>
@@ -12432,20 +13547,20 @@
               </a:rPr>
               <a:t>Key idea</a:t>
             </a:r>
-            <a:endParaRPr lang="en-US" sz="950" dirty="0"/>
-          </a:p>
-        </p:txBody>
-      </p:sp>
-      <p:sp>
-        <p:nvSpPr>
-          <p:cNvPr id="13" name="Text 11"/>
-          <p:cNvSpPr/>
-          <p:nvPr/>
-        </p:nvSpPr>
-        <p:spPr>
-          <a:xfrm>
-            <a:off x="8074152" y="1856232"/>
-            <a:ext cx="2825496" cy="1261872"/>
+            <a:endParaRPr lang="en-US" sz="1300" dirty="0"/>
+          </a:p>
+        </p:txBody>
+      </p:sp>
+      <p:sp>
+        <p:nvSpPr>
+          <p:cNvPr id="14" name="Text 12"/>
+          <p:cNvSpPr/>
+          <p:nvPr/>
+        </p:nvSpPr>
+        <p:spPr>
+          <a:xfrm>
+            <a:off x="8074152" y="1920240"/>
+            <a:ext cx="2825496" cy="1188720"/>
           </a:xfrm>
           <a:prstGeom prst="rect">
             <a:avLst/>
@@ -12463,7 +13578,7 @@
               <a:buNone/>
             </a:pPr>
             <a:r>
-              <a:rPr lang="en-US" sz="1250" dirty="0">
+              <a:rPr lang="en-US" sz="1550" dirty="0">
                 <a:solidFill>
                   <a:srgbClr val="17364A"/>
                 </a:solidFill>
@@ -12473,13 +13588,13 @@
               </a:rPr>
               <a:t>Public health AI governance should not be limited to internal agency review.</a:t>
             </a:r>
-            <a:endParaRPr lang="en-US" sz="1250" dirty="0"/>
-          </a:p>
-        </p:txBody>
-      </p:sp>
-      <p:sp>
-        <p:nvSpPr>
-          <p:cNvPr id="14" name="Shape 12"/>
+            <a:endParaRPr lang="en-US" sz="1550" dirty="0"/>
+          </a:p>
+        </p:txBody>
+      </p:sp>
+      <p:sp>
+        <p:nvSpPr>
+          <p:cNvPr id="15" name="Shape 13"/>
           <p:cNvSpPr/>
           <p:nvPr/>
         </p:nvSpPr>
@@ -12506,14 +13621,14 @@
       </p:sp>
       <p:sp>
         <p:nvSpPr>
-          <p:cNvPr id="15" name="Text 13"/>
+          <p:cNvPr id="16" name="Text 14"/>
           <p:cNvSpPr/>
           <p:nvPr/>
         </p:nvSpPr>
         <p:spPr>
           <a:xfrm>
             <a:off x="8074152" y="3666744"/>
-            <a:ext cx="2825496" cy="201168"/>
+            <a:ext cx="2825496" cy="256032"/>
           </a:xfrm>
           <a:prstGeom prst="rect">
             <a:avLst/>
@@ -12529,7 +13644,7 @@
               <a:buNone/>
             </a:pPr>
             <a:r>
-              <a:rPr lang="en-US" sz="950" b="1" dirty="0">
+              <a:rPr lang="en-US" sz="1300" b="1" dirty="0">
                 <a:solidFill>
                   <a:srgbClr val="0068B7"/>
                 </a:solidFill>
@@ -12539,20 +13654,20 @@
               </a:rPr>
               <a:t>Use this for</a:t>
             </a:r>
-            <a:endParaRPr lang="en-US" sz="950" dirty="0"/>
-          </a:p>
-        </p:txBody>
-      </p:sp>
-      <p:sp>
-        <p:nvSpPr>
-          <p:cNvPr id="16" name="Text 14"/>
-          <p:cNvSpPr/>
-          <p:nvPr/>
-        </p:nvSpPr>
-        <p:spPr>
-          <a:xfrm>
-            <a:off x="8074152" y="3959352"/>
-            <a:ext cx="2825496" cy="1170432"/>
+            <a:endParaRPr lang="en-US" sz="1300" dirty="0"/>
+          </a:p>
+        </p:txBody>
+      </p:sp>
+      <p:sp>
+        <p:nvSpPr>
+          <p:cNvPr id="17" name="Text 15"/>
+          <p:cNvSpPr/>
+          <p:nvPr/>
+        </p:nvSpPr>
+        <p:spPr>
+          <a:xfrm>
+            <a:off x="8074152" y="4023360"/>
+            <a:ext cx="2825496" cy="1097280"/>
           </a:xfrm>
           <a:prstGeom prst="rect">
             <a:avLst/>
@@ -12570,7 +13685,7 @@
               <a:buNone/>
             </a:pPr>
             <a:r>
-              <a:rPr lang="en-US" sz="1250" dirty="0">
+              <a:rPr lang="en-US" sz="1550" dirty="0">
                 <a:solidFill>
                   <a:srgbClr val="17364A"/>
                 </a:solidFill>
@@ -12580,7 +13695,7 @@
               </a:rPr>
               <a:t>Connect the concept to public health decisions, safeguards, documentation, or implementation work.</a:t>
             </a:r>
-            <a:endParaRPr lang="en-US" sz="1250" dirty="0"/>
+            <a:endParaRPr lang="en-US" sz="1550" dirty="0"/>
           </a:p>
         </p:txBody>
       </p:sp>
@@ -12777,7 +13892,7 @@
                 <a:ea typeface="Aptos" pitchFamily="34" charset="-122"/>
                 <a:cs typeface="Aptos" pitchFamily="34" charset="-120"/>
               </a:rPr>
-              <a:t>© Paula Soper</a:t>
+              <a:t>Â© Paula Soper</a:t>
             </a:r>
             <a:endParaRPr lang="en-US" sz="800" dirty="0"/>
           </a:p>
@@ -12785,7 +13900,46 @@
       </p:sp>
       <p:sp>
         <p:nvSpPr>
-          <p:cNvPr id="7" name="Shape 5"/>
+          <p:cNvPr id="7" name="Text 5"/>
+          <p:cNvSpPr/>
+          <p:nvPr/>
+        </p:nvSpPr>
+        <p:spPr>
+          <a:xfrm>
+            <a:off x="11137392" y="6510528"/>
+            <a:ext cx="411480" cy="201168"/>
+          </a:xfrm>
+          <a:prstGeom prst="rect">
+            <a:avLst/>
+          </a:prstGeom>
+          <a:noFill/>
+          <a:ln/>
+        </p:spPr>
+        <p:txBody>
+          <a:bodyPr wrap="square" lIns="0" tIns="0" rIns="0" bIns="0" rtlCol="0" anchor="ctr"/>
+          <a:lstStyle/>
+          <a:p>
+            <a:pPr algn="r" indent="0" marL="0">
+              <a:buNone/>
+            </a:pPr>
+            <a:r>
+              <a:rPr lang="en-US" sz="900" dirty="0">
+                <a:solidFill>
+                  <a:srgbClr val="5F7181"/>
+                </a:solidFill>
+                <a:latin typeface="Aptos" pitchFamily="34" charset="0"/>
+                <a:ea typeface="Aptos" pitchFamily="34" charset="-122"/>
+                <a:cs typeface="Aptos" pitchFamily="34" charset="-120"/>
+              </a:rPr>
+              <a:t>7</a:t>
+            </a:r>
+            <a:endParaRPr lang="en-US" sz="900" dirty="0"/>
+          </a:p>
+        </p:txBody>
+      </p:sp>
+      <p:sp>
+        <p:nvSpPr>
+          <p:cNvPr id="8" name="Shape 6"/>
           <p:cNvSpPr/>
           <p:nvPr/>
         </p:nvSpPr>
@@ -12810,7 +13964,7 @@
       </p:sp>
       <p:sp>
         <p:nvSpPr>
-          <p:cNvPr id="8" name="Text 6"/>
+          <p:cNvPr id="9" name="Text 7"/>
           <p:cNvSpPr/>
           <p:nvPr/>
         </p:nvSpPr>
@@ -12849,14 +14003,14 @@
       </p:sp>
       <p:sp>
         <p:nvSpPr>
-          <p:cNvPr id="9" name="Text 7"/>
+          <p:cNvPr id="10" name="Text 8"/>
           <p:cNvSpPr/>
           <p:nvPr/>
         </p:nvSpPr>
         <p:spPr>
           <a:xfrm>
             <a:off x="640080" y="621792"/>
-            <a:ext cx="10881360" cy="566928"/>
+            <a:ext cx="10881360" cy="713232"/>
           </a:xfrm>
           <a:prstGeom prst="rect">
             <a:avLst/>
@@ -12874,7 +14028,7 @@
               <a:buNone/>
             </a:pPr>
             <a:r>
-              <a:rPr lang="en-US" sz="2700" b="1" dirty="0">
+              <a:rPr lang="en-US" sz="3400" b="1" dirty="0">
                 <a:solidFill>
                   <a:srgbClr val="003A63"/>
                 </a:solidFill>
@@ -12884,20 +14038,20 @@
               </a:rPr>
               <a:t>Jurisdiction and Agency Policy Note</a:t>
             </a:r>
-            <a:endParaRPr lang="en-US" sz="2700" dirty="0"/>
-          </a:p>
-        </p:txBody>
-      </p:sp>
-      <p:sp>
-        <p:nvSpPr>
-          <p:cNvPr id="10" name="Text 8"/>
-          <p:cNvSpPr/>
-          <p:nvPr/>
-        </p:nvSpPr>
-        <p:spPr>
-          <a:xfrm>
-            <a:off x="868680" y="1417320"/>
-            <a:ext cx="6675120" cy="4434840"/>
+            <a:endParaRPr lang="en-US" sz="3400" dirty="0"/>
+          </a:p>
+        </p:txBody>
+      </p:sp>
+      <p:sp>
+        <p:nvSpPr>
+          <p:cNvPr id="11" name="Text 9"/>
+          <p:cNvSpPr/>
+          <p:nvPr/>
+        </p:nvSpPr>
+        <p:spPr>
+          <a:xfrm>
+            <a:off x="868680" y="1508760"/>
+            <a:ext cx="6537960" cy="4160520"/>
           </a:xfrm>
           <a:prstGeom prst="rect">
             <a:avLst/>
@@ -12912,7 +14066,7 @@
           <a:lstStyle/>
           <a:p>
             <a:r>
-              <a:rPr lang="en-US" sz="1700" dirty="0">
+              <a:rPr lang="en-US" sz="2100" dirty="0">
                 <a:solidFill>
                   <a:srgbClr val="17364A"/>
                 </a:solidFill>
@@ -12922,11 +14076,11 @@
               </a:rPr>
               <a:t>This module provides national-level training guidance for public health agencies and partners.</a:t>
             </a:r>
-            <a:endParaRPr lang="en-US" sz="1700" dirty="0"/>
-          </a:p>
-          <a:p>
-            <a:r>
-              <a:rPr lang="en-US" sz="1700" dirty="0">
+            <a:endParaRPr lang="en-US" sz="2100" dirty="0"/>
+          </a:p>
+          <a:p>
+            <a:r>
+              <a:rPr lang="en-US" sz="2100" dirty="0">
                 <a:solidFill>
                   <a:srgbClr val="17364A"/>
                 </a:solidFill>
@@ -12934,13 +14088,13 @@
                 <a:ea typeface="Aptos" pitchFamily="34" charset="-122"/>
                 <a:cs typeface="Aptos" pitchFamily="34" charset="-120"/>
               </a:rPr>
-              <a:t>It is not legal advice and does not replace review by agency legal counsel, privacy officers, procurement officials, civil.</a:t>
-            </a:r>
-            <a:endParaRPr lang="en-US" sz="1700" dirty="0"/>
-          </a:p>
-          <a:p>
-            <a:r>
-              <a:rPr lang="en-US" sz="1700" dirty="0">
+              <a:t>It is not legal advice and does not replace review by agency legal counsel, privacy officers,.</a:t>
+            </a:r>
+            <a:endParaRPr lang="en-US" sz="2100" dirty="0"/>
+          </a:p>
+          <a:p>
+            <a:r>
+              <a:rPr lang="en-US" sz="2100" dirty="0">
                 <a:solidFill>
                   <a:srgbClr val="17364A"/>
                 </a:solidFill>
@@ -12948,29 +14102,15 @@
                 <a:ea typeface="Aptos" pitchFamily="34" charset="-122"/>
                 <a:cs typeface="Aptos" pitchFamily="34" charset="-120"/>
               </a:rPr>
-              <a:t>Requirements may vary by state, locality, territory, Tribe, agency, funding source, data-sharing agreement, emergency.</a:t>
-            </a:r>
-            <a:endParaRPr lang="en-US" sz="1700" dirty="0"/>
-          </a:p>
-          <a:p>
-            <a:r>
-              <a:rPr lang="en-US" sz="1700" dirty="0">
-                <a:solidFill>
-                  <a:srgbClr val="17364A"/>
-                </a:solidFill>
-                <a:latin typeface="Aptos" pitchFamily="34" charset="0"/>
-                <a:ea typeface="Aptos" pitchFamily="34" charset="-122"/>
-                <a:cs typeface="Aptos" pitchFamily="34" charset="-120"/>
-              </a:rPr>
-              <a:t>Learners should use this module to identify the issues that require review and should confirm applicable requirements.</a:t>
-            </a:r>
-            <a:endParaRPr lang="en-US" sz="1700" dirty="0"/>
-          </a:p>
-        </p:txBody>
-      </p:sp>
-      <p:sp>
-        <p:nvSpPr>
-          <p:cNvPr id="11" name="Shape 9"/>
+              <a:t>Requirements may vary by state, locality, territory, Tribe, agency, funding source, data-sharing.</a:t>
+            </a:r>
+            <a:endParaRPr lang="en-US" sz="2100" dirty="0"/>
+          </a:p>
+        </p:txBody>
+      </p:sp>
+      <p:sp>
+        <p:nvSpPr>
+          <p:cNvPr id="12" name="Shape 10"/>
           <p:cNvSpPr/>
           <p:nvPr/>
         </p:nvSpPr>
@@ -12997,14 +14137,14 @@
       </p:sp>
       <p:sp>
         <p:nvSpPr>
-          <p:cNvPr id="12" name="Text 10"/>
+          <p:cNvPr id="13" name="Text 11"/>
           <p:cNvSpPr/>
           <p:nvPr/>
         </p:nvSpPr>
         <p:spPr>
           <a:xfrm>
             <a:off x="8074152" y="1563624"/>
-            <a:ext cx="2825496" cy="201168"/>
+            <a:ext cx="2825496" cy="256032"/>
           </a:xfrm>
           <a:prstGeom prst="rect">
             <a:avLst/>
@@ -13020,7 +14160,7 @@
               <a:buNone/>
             </a:pPr>
             <a:r>
-              <a:rPr lang="en-US" sz="950" b="1" dirty="0">
+              <a:rPr lang="en-US" sz="1300" b="1" dirty="0">
                 <a:solidFill>
                   <a:srgbClr val="0068B7"/>
                 </a:solidFill>
@@ -13030,20 +14170,20 @@
               </a:rPr>
               <a:t>Key idea</a:t>
             </a:r>
-            <a:endParaRPr lang="en-US" sz="950" dirty="0"/>
-          </a:p>
-        </p:txBody>
-      </p:sp>
-      <p:sp>
-        <p:nvSpPr>
-          <p:cNvPr id="13" name="Text 11"/>
-          <p:cNvSpPr/>
-          <p:nvPr/>
-        </p:nvSpPr>
-        <p:spPr>
-          <a:xfrm>
-            <a:off x="8074152" y="1856232"/>
-            <a:ext cx="2825496" cy="1261872"/>
+            <a:endParaRPr lang="en-US" sz="1300" dirty="0"/>
+          </a:p>
+        </p:txBody>
+      </p:sp>
+      <p:sp>
+        <p:nvSpPr>
+          <p:cNvPr id="14" name="Text 12"/>
+          <p:cNvSpPr/>
+          <p:nvPr/>
+        </p:nvSpPr>
+        <p:spPr>
+          <a:xfrm>
+            <a:off x="8074152" y="1920240"/>
+            <a:ext cx="2825496" cy="1188720"/>
           </a:xfrm>
           <a:prstGeom prst="rect">
             <a:avLst/>
@@ -13061,7 +14201,7 @@
               <a:buNone/>
             </a:pPr>
             <a:r>
-              <a:rPr lang="en-US" sz="1250" dirty="0">
+              <a:rPr lang="en-US" sz="1550" dirty="0">
                 <a:solidFill>
                   <a:srgbClr val="17364A"/>
                 </a:solidFill>
@@ -13071,13 +14211,13 @@
               </a:rPr>
               <a:t>This module provides national-level training guidance for public health agencies and partners.</a:t>
             </a:r>
-            <a:endParaRPr lang="en-US" sz="1250" dirty="0"/>
-          </a:p>
-        </p:txBody>
-      </p:sp>
-      <p:sp>
-        <p:nvSpPr>
-          <p:cNvPr id="14" name="Shape 12"/>
+            <a:endParaRPr lang="en-US" sz="1550" dirty="0"/>
+          </a:p>
+        </p:txBody>
+      </p:sp>
+      <p:sp>
+        <p:nvSpPr>
+          <p:cNvPr id="15" name="Shape 13"/>
           <p:cNvSpPr/>
           <p:nvPr/>
         </p:nvSpPr>
@@ -13104,14 +14244,14 @@
       </p:sp>
       <p:sp>
         <p:nvSpPr>
-          <p:cNvPr id="15" name="Text 13"/>
+          <p:cNvPr id="16" name="Text 14"/>
           <p:cNvSpPr/>
           <p:nvPr/>
         </p:nvSpPr>
         <p:spPr>
           <a:xfrm>
             <a:off x="8074152" y="3666744"/>
-            <a:ext cx="2825496" cy="201168"/>
+            <a:ext cx="2825496" cy="256032"/>
           </a:xfrm>
           <a:prstGeom prst="rect">
             <a:avLst/>
@@ -13127,7 +14267,7 @@
               <a:buNone/>
             </a:pPr>
             <a:r>
-              <a:rPr lang="en-US" sz="950" b="1" dirty="0">
+              <a:rPr lang="en-US" sz="1300" b="1" dirty="0">
                 <a:solidFill>
                   <a:srgbClr val="0068B7"/>
                 </a:solidFill>
@@ -13137,20 +14277,20 @@
               </a:rPr>
               <a:t>Use this for</a:t>
             </a:r>
-            <a:endParaRPr lang="en-US" sz="950" dirty="0"/>
-          </a:p>
-        </p:txBody>
-      </p:sp>
-      <p:sp>
-        <p:nvSpPr>
-          <p:cNvPr id="16" name="Text 14"/>
-          <p:cNvSpPr/>
-          <p:nvPr/>
-        </p:nvSpPr>
-        <p:spPr>
-          <a:xfrm>
-            <a:off x="8074152" y="3959352"/>
-            <a:ext cx="2825496" cy="1170432"/>
+            <a:endParaRPr lang="en-US" sz="1300" dirty="0"/>
+          </a:p>
+        </p:txBody>
+      </p:sp>
+      <p:sp>
+        <p:nvSpPr>
+          <p:cNvPr id="17" name="Text 15"/>
+          <p:cNvSpPr/>
+          <p:nvPr/>
+        </p:nvSpPr>
+        <p:spPr>
+          <a:xfrm>
+            <a:off x="8074152" y="4023360"/>
+            <a:ext cx="2825496" cy="1097280"/>
           </a:xfrm>
           <a:prstGeom prst="rect">
             <a:avLst/>
@@ -13168,7 +14308,7 @@
               <a:buNone/>
             </a:pPr>
             <a:r>
-              <a:rPr lang="en-US" sz="1250" dirty="0">
+              <a:rPr lang="en-US" sz="1550" dirty="0">
                 <a:solidFill>
                   <a:srgbClr val="17364A"/>
                 </a:solidFill>
@@ -13178,7 +14318,7 @@
               </a:rPr>
               <a:t>Connect the concept to public health decisions, safeguards, documentation, or implementation work.</a:t>
             </a:r>
-            <a:endParaRPr lang="en-US" sz="1250" dirty="0"/>
+            <a:endParaRPr lang="en-US" sz="1550" dirty="0"/>
           </a:p>
         </p:txBody>
       </p:sp>
@@ -13375,7 +14515,7 @@
                 <a:ea typeface="Aptos" pitchFamily="34" charset="-122"/>
                 <a:cs typeface="Aptos" pitchFamily="34" charset="-120"/>
               </a:rPr>
-              <a:t>© Paula Soper</a:t>
+              <a:t>Â© Paula Soper</a:t>
             </a:r>
             <a:endParaRPr lang="en-US" sz="800" dirty="0"/>
           </a:p>
@@ -13383,7 +14523,46 @@
       </p:sp>
       <p:sp>
         <p:nvSpPr>
-          <p:cNvPr id="7" name="Shape 5"/>
+          <p:cNvPr id="7" name="Text 5"/>
+          <p:cNvSpPr/>
+          <p:nvPr/>
+        </p:nvSpPr>
+        <p:spPr>
+          <a:xfrm>
+            <a:off x="11137392" y="6510528"/>
+            <a:ext cx="411480" cy="201168"/>
+          </a:xfrm>
+          <a:prstGeom prst="rect">
+            <a:avLst/>
+          </a:prstGeom>
+          <a:noFill/>
+          <a:ln/>
+        </p:spPr>
+        <p:txBody>
+          <a:bodyPr wrap="square" lIns="0" tIns="0" rIns="0" bIns="0" rtlCol="0" anchor="ctr"/>
+          <a:lstStyle/>
+          <a:p>
+            <a:pPr algn="r" indent="0" marL="0">
+              <a:buNone/>
+            </a:pPr>
+            <a:r>
+              <a:rPr lang="en-US" sz="900" dirty="0">
+                <a:solidFill>
+                  <a:srgbClr val="5F7181"/>
+                </a:solidFill>
+                <a:latin typeface="Aptos" pitchFamily="34" charset="0"/>
+                <a:ea typeface="Aptos" pitchFamily="34" charset="-122"/>
+                <a:cs typeface="Aptos" pitchFamily="34" charset="-120"/>
+              </a:rPr>
+              <a:t>8</a:t>
+            </a:r>
+            <a:endParaRPr lang="en-US" sz="900" dirty="0"/>
+          </a:p>
+        </p:txBody>
+      </p:sp>
+      <p:sp>
+        <p:nvSpPr>
+          <p:cNvPr id="8" name="Shape 6"/>
           <p:cNvSpPr/>
           <p:nvPr/>
         </p:nvSpPr>
@@ -13408,7 +14587,7 @@
       </p:sp>
       <p:sp>
         <p:nvSpPr>
-          <p:cNvPr id="8" name="Text 6"/>
+          <p:cNvPr id="9" name="Text 7"/>
           <p:cNvSpPr/>
           <p:nvPr/>
         </p:nvSpPr>
@@ -13447,14 +14626,14 @@
       </p:sp>
       <p:sp>
         <p:nvSpPr>
-          <p:cNvPr id="9" name="Text 7"/>
+          <p:cNvPr id="10" name="Text 8"/>
           <p:cNvSpPr/>
           <p:nvPr/>
         </p:nvSpPr>
         <p:spPr>
           <a:xfrm>
             <a:off x="640080" y="621792"/>
-            <a:ext cx="10881360" cy="566928"/>
+            <a:ext cx="10881360" cy="713232"/>
           </a:xfrm>
           <a:prstGeom prst="rect">
             <a:avLst/>
@@ -13472,7 +14651,7 @@
               <a:buNone/>
             </a:pPr>
             <a:r>
-              <a:rPr lang="en-US" sz="2700" b="1" dirty="0">
+              <a:rPr lang="en-US" sz="3400" b="1" dirty="0">
                 <a:solidFill>
                   <a:srgbClr val="003A63"/>
                 </a:solidFill>
@@ -13482,20 +14661,20 @@
               </a:rPr>
               <a:t>Why This Topic Matters for Public Health AI</a:t>
             </a:r>
-            <a:endParaRPr lang="en-US" sz="2700" dirty="0"/>
-          </a:p>
-        </p:txBody>
-      </p:sp>
-      <p:sp>
-        <p:nvSpPr>
-          <p:cNvPr id="10" name="Text 8"/>
-          <p:cNvSpPr/>
-          <p:nvPr/>
-        </p:nvSpPr>
-        <p:spPr>
-          <a:xfrm>
-            <a:off x="868680" y="1417320"/>
-            <a:ext cx="6675120" cy="4434840"/>
+            <a:endParaRPr lang="en-US" sz="3400" dirty="0"/>
+          </a:p>
+        </p:txBody>
+      </p:sp>
+      <p:sp>
+        <p:nvSpPr>
+          <p:cNvPr id="11" name="Text 9"/>
+          <p:cNvSpPr/>
+          <p:nvPr/>
+        </p:nvSpPr>
+        <p:spPr>
+          <a:xfrm>
+            <a:off x="868680" y="1508760"/>
+            <a:ext cx="6537960" cy="4160520"/>
           </a:xfrm>
           <a:prstGeom prst="rect">
             <a:avLst/>
@@ -13510,7 +14689,7 @@
           <a:lstStyle/>
           <a:p>
             <a:r>
-              <a:rPr lang="en-US" sz="1700" dirty="0">
+              <a:rPr lang="en-US" sz="2100" dirty="0">
                 <a:solidFill>
                   <a:srgbClr val="17364A"/>
                 </a:solidFill>
@@ -13518,13 +14697,13 @@
                 <a:ea typeface="Aptos" pitchFamily="34" charset="-122"/>
                 <a:cs typeface="Aptos" pitchFamily="34" charset="-120"/>
               </a:rPr>
-              <a:t>Public health agencies make decisions that affect communities, often using data collected through clinical care,.</a:t>
-            </a:r>
-            <a:endParaRPr lang="en-US" sz="1700" dirty="0"/>
-          </a:p>
-          <a:p>
-            <a:r>
-              <a:rPr lang="en-US" sz="1700" dirty="0">
+              <a:t>Public health agencies make decisions that affect communities, often using data collected through.</a:t>
+            </a:r>
+            <a:endParaRPr lang="en-US" sz="2100" dirty="0"/>
+          </a:p>
+          <a:p>
+            <a:r>
+              <a:rPr lang="en-US" sz="2100" dirty="0">
                 <a:solidFill>
                   <a:srgbClr val="17364A"/>
                 </a:solidFill>
@@ -13532,13 +14711,13 @@
                 <a:ea typeface="Aptos" pitchFamily="34" charset="-122"/>
                 <a:cs typeface="Aptos" pitchFamily="34" charset="-120"/>
               </a:rPr>
-              <a:t>AI can intensify concerns about surveillance, bias, exclusion, language access, disability access, and government trust.</a:t>
-            </a:r>
-            <a:endParaRPr lang="en-US" sz="1700" dirty="0"/>
-          </a:p>
-          <a:p>
-            <a:r>
-              <a:rPr lang="en-US" sz="1700" dirty="0">
+              <a:t>AI can intensify concerns about surveillance, bias, exclusion, language access, disability access, and.</a:t>
+            </a:r>
+            <a:endParaRPr lang="en-US" sz="2100" dirty="0"/>
+          </a:p>
+          <a:p>
+            <a:r>
+              <a:rPr lang="en-US" sz="2100" dirty="0">
                 <a:solidFill>
                   <a:srgbClr val="17364A"/>
                 </a:solidFill>
@@ -13546,29 +14725,15 @@
                 <a:ea typeface="Aptos" pitchFamily="34" charset="-122"/>
                 <a:cs typeface="Aptos" pitchFamily="34" charset="-120"/>
               </a:rPr>
-              <a:t>Community oversight helps agencies identify concerns that may not be visible through technical review alone.</a:t>
-            </a:r>
-            <a:endParaRPr lang="en-US" sz="1700" dirty="0"/>
-          </a:p>
-          <a:p>
-            <a:r>
-              <a:rPr lang="en-US" sz="1700" dirty="0">
-                <a:solidFill>
-                  <a:srgbClr val="17364A"/>
-                </a:solidFill>
-                <a:latin typeface="Aptos" pitchFamily="34" charset="0"/>
-                <a:ea typeface="Aptos" pitchFamily="34" charset="-122"/>
-                <a:cs typeface="Aptos" pitchFamily="34" charset="-120"/>
-              </a:rPr>
-              <a:t>Participatory governance can also improve AI quality and usefulness.</a:t>
-            </a:r>
-            <a:endParaRPr lang="en-US" sz="1700" dirty="0"/>
-          </a:p>
-        </p:txBody>
-      </p:sp>
-      <p:sp>
-        <p:nvSpPr>
-          <p:cNvPr id="11" name="Shape 9"/>
+              <a:t>Community oversight helps agencies identify concerns that may not be visible through technical review.</a:t>
+            </a:r>
+            <a:endParaRPr lang="en-US" sz="2100" dirty="0"/>
+          </a:p>
+        </p:txBody>
+      </p:sp>
+      <p:sp>
+        <p:nvSpPr>
+          <p:cNvPr id="12" name="Shape 10"/>
           <p:cNvSpPr/>
           <p:nvPr/>
         </p:nvSpPr>
@@ -13595,14 +14760,14 @@
       </p:sp>
       <p:sp>
         <p:nvSpPr>
-          <p:cNvPr id="12" name="Text 10"/>
+          <p:cNvPr id="13" name="Text 11"/>
           <p:cNvSpPr/>
           <p:nvPr/>
         </p:nvSpPr>
         <p:spPr>
           <a:xfrm>
             <a:off x="8074152" y="1563624"/>
-            <a:ext cx="2825496" cy="201168"/>
+            <a:ext cx="2825496" cy="256032"/>
           </a:xfrm>
           <a:prstGeom prst="rect">
             <a:avLst/>
@@ -13618,7 +14783,7 @@
               <a:buNone/>
             </a:pPr>
             <a:r>
-              <a:rPr lang="en-US" sz="950" b="1" dirty="0">
+              <a:rPr lang="en-US" sz="1300" b="1" dirty="0">
                 <a:solidFill>
                   <a:srgbClr val="0068B7"/>
                 </a:solidFill>
@@ -13628,20 +14793,20 @@
               </a:rPr>
               <a:t>Key idea</a:t>
             </a:r>
-            <a:endParaRPr lang="en-US" sz="950" dirty="0"/>
-          </a:p>
-        </p:txBody>
-      </p:sp>
-      <p:sp>
-        <p:nvSpPr>
-          <p:cNvPr id="13" name="Text 11"/>
-          <p:cNvSpPr/>
-          <p:nvPr/>
-        </p:nvSpPr>
-        <p:spPr>
-          <a:xfrm>
-            <a:off x="8074152" y="1856232"/>
-            <a:ext cx="2825496" cy="1261872"/>
+            <a:endParaRPr lang="en-US" sz="1300" dirty="0"/>
+          </a:p>
+        </p:txBody>
+      </p:sp>
+      <p:sp>
+        <p:nvSpPr>
+          <p:cNvPr id="14" name="Text 12"/>
+          <p:cNvSpPr/>
+          <p:nvPr/>
+        </p:nvSpPr>
+        <p:spPr>
+          <a:xfrm>
+            <a:off x="8074152" y="1920240"/>
+            <a:ext cx="2825496" cy="1188720"/>
           </a:xfrm>
           <a:prstGeom prst="rect">
             <a:avLst/>
@@ -13659,7 +14824,7 @@
               <a:buNone/>
             </a:pPr>
             <a:r>
-              <a:rPr lang="en-US" sz="1250" dirty="0">
+              <a:rPr lang="en-US" sz="1550" dirty="0">
                 <a:solidFill>
                   <a:srgbClr val="17364A"/>
                 </a:solidFill>
@@ -13667,15 +14832,15 @@
                 <a:ea typeface="Aptos" pitchFamily="34" charset="-122"/>
                 <a:cs typeface="Aptos" pitchFamily="34" charset="-120"/>
               </a:rPr>
-              <a:t>Public health agencies make decisions that affect communities, often using data collected through clinical care,.</a:t>
-            </a:r>
-            <a:endParaRPr lang="en-US" sz="1250" dirty="0"/>
-          </a:p>
-        </p:txBody>
-      </p:sp>
-      <p:sp>
-        <p:nvSpPr>
-          <p:cNvPr id="14" name="Shape 12"/>
+              <a:t>Public health agencies make decisions that affect communities, often using data collected through.</a:t>
+            </a:r>
+            <a:endParaRPr lang="en-US" sz="1550" dirty="0"/>
+          </a:p>
+        </p:txBody>
+      </p:sp>
+      <p:sp>
+        <p:nvSpPr>
+          <p:cNvPr id="15" name="Shape 13"/>
           <p:cNvSpPr/>
           <p:nvPr/>
         </p:nvSpPr>
@@ -13702,14 +14867,14 @@
       </p:sp>
       <p:sp>
         <p:nvSpPr>
-          <p:cNvPr id="15" name="Text 13"/>
+          <p:cNvPr id="16" name="Text 14"/>
           <p:cNvSpPr/>
           <p:nvPr/>
         </p:nvSpPr>
         <p:spPr>
           <a:xfrm>
             <a:off x="8074152" y="3666744"/>
-            <a:ext cx="2825496" cy="201168"/>
+            <a:ext cx="2825496" cy="256032"/>
           </a:xfrm>
           <a:prstGeom prst="rect">
             <a:avLst/>
@@ -13725,7 +14890,7 @@
               <a:buNone/>
             </a:pPr>
             <a:r>
-              <a:rPr lang="en-US" sz="950" b="1" dirty="0">
+              <a:rPr lang="en-US" sz="1300" b="1" dirty="0">
                 <a:solidFill>
                   <a:srgbClr val="0068B7"/>
                 </a:solidFill>
@@ -13735,20 +14900,20 @@
               </a:rPr>
               <a:t>Use this for</a:t>
             </a:r>
-            <a:endParaRPr lang="en-US" sz="950" dirty="0"/>
-          </a:p>
-        </p:txBody>
-      </p:sp>
-      <p:sp>
-        <p:nvSpPr>
-          <p:cNvPr id="16" name="Text 14"/>
-          <p:cNvSpPr/>
-          <p:nvPr/>
-        </p:nvSpPr>
-        <p:spPr>
-          <a:xfrm>
-            <a:off x="8074152" y="3959352"/>
-            <a:ext cx="2825496" cy="1170432"/>
+            <a:endParaRPr lang="en-US" sz="1300" dirty="0"/>
+          </a:p>
+        </p:txBody>
+      </p:sp>
+      <p:sp>
+        <p:nvSpPr>
+          <p:cNvPr id="17" name="Text 15"/>
+          <p:cNvSpPr/>
+          <p:nvPr/>
+        </p:nvSpPr>
+        <p:spPr>
+          <a:xfrm>
+            <a:off x="8074152" y="4023360"/>
+            <a:ext cx="2825496" cy="1097280"/>
           </a:xfrm>
           <a:prstGeom prst="rect">
             <a:avLst/>
@@ -13766,7 +14931,7 @@
               <a:buNone/>
             </a:pPr>
             <a:r>
-              <a:rPr lang="en-US" sz="1250" dirty="0">
+              <a:rPr lang="en-US" sz="1550" dirty="0">
                 <a:solidFill>
                   <a:srgbClr val="17364A"/>
                 </a:solidFill>
@@ -13776,7 +14941,7 @@
               </a:rPr>
               <a:t>Connect the concept to public health decisions, safeguards, documentation, or implementation work.</a:t>
             </a:r>
-            <a:endParaRPr lang="en-US" sz="1250" dirty="0"/>
+            <a:endParaRPr lang="en-US" sz="1550" dirty="0"/>
           </a:p>
         </p:txBody>
       </p:sp>
@@ -13973,7 +15138,7 @@
                 <a:ea typeface="Aptos" pitchFamily="34" charset="-122"/>
                 <a:cs typeface="Aptos" pitchFamily="34" charset="-120"/>
               </a:rPr>
-              <a:t>© Paula Soper</a:t>
+              <a:t>Â© Paula Soper</a:t>
             </a:r>
             <a:endParaRPr lang="en-US" sz="800" dirty="0"/>
           </a:p>
@@ -13981,7 +15146,46 @@
       </p:sp>
       <p:sp>
         <p:nvSpPr>
-          <p:cNvPr id="7" name="Shape 5"/>
+          <p:cNvPr id="7" name="Text 5"/>
+          <p:cNvSpPr/>
+          <p:nvPr/>
+        </p:nvSpPr>
+        <p:spPr>
+          <a:xfrm>
+            <a:off x="11137392" y="6510528"/>
+            <a:ext cx="411480" cy="201168"/>
+          </a:xfrm>
+          <a:prstGeom prst="rect">
+            <a:avLst/>
+          </a:prstGeom>
+          <a:noFill/>
+          <a:ln/>
+        </p:spPr>
+        <p:txBody>
+          <a:bodyPr wrap="square" lIns="0" tIns="0" rIns="0" bIns="0" rtlCol="0" anchor="ctr"/>
+          <a:lstStyle/>
+          <a:p>
+            <a:pPr algn="r" indent="0" marL="0">
+              <a:buNone/>
+            </a:pPr>
+            <a:r>
+              <a:rPr lang="en-US" sz="900" dirty="0">
+                <a:solidFill>
+                  <a:srgbClr val="5F7181"/>
+                </a:solidFill>
+                <a:latin typeface="Aptos" pitchFamily="34" charset="0"/>
+                <a:ea typeface="Aptos" pitchFamily="34" charset="-122"/>
+                <a:cs typeface="Aptos" pitchFamily="34" charset="-120"/>
+              </a:rPr>
+              <a:t>9</a:t>
+            </a:r>
+            <a:endParaRPr lang="en-US" sz="900" dirty="0"/>
+          </a:p>
+        </p:txBody>
+      </p:sp>
+      <p:sp>
+        <p:nvSpPr>
+          <p:cNvPr id="8" name="Shape 6"/>
           <p:cNvSpPr/>
           <p:nvPr/>
         </p:nvSpPr>
@@ -14006,7 +15210,7 @@
       </p:sp>
       <p:sp>
         <p:nvSpPr>
-          <p:cNvPr id="8" name="Text 6"/>
+          <p:cNvPr id="9" name="Text 7"/>
           <p:cNvSpPr/>
           <p:nvPr/>
         </p:nvSpPr>
@@ -14045,14 +15249,14 @@
       </p:sp>
       <p:sp>
         <p:nvSpPr>
-          <p:cNvPr id="9" name="Text 7"/>
+          <p:cNvPr id="10" name="Text 8"/>
           <p:cNvSpPr/>
           <p:nvPr/>
         </p:nvSpPr>
         <p:spPr>
           <a:xfrm>
             <a:off x="640080" y="621792"/>
-            <a:ext cx="10881360" cy="566928"/>
+            <a:ext cx="10881360" cy="713232"/>
           </a:xfrm>
           <a:prstGeom prst="rect">
             <a:avLst/>
@@ -14070,7 +15274,7 @@
               <a:buNone/>
             </a:pPr>
             <a:r>
-              <a:rPr lang="en-US" sz="2700" b="1" dirty="0">
+              <a:rPr lang="en-US" sz="3400" b="1" dirty="0">
                 <a:solidFill>
                   <a:srgbClr val="003A63"/>
                 </a:solidFill>
@@ -14080,20 +15284,20 @@
               </a:rPr>
               <a:t>Public Health Example</a:t>
             </a:r>
-            <a:endParaRPr lang="en-US" sz="2700" dirty="0"/>
-          </a:p>
-        </p:txBody>
-      </p:sp>
-      <p:sp>
-        <p:nvSpPr>
-          <p:cNvPr id="10" name="Text 8"/>
-          <p:cNvSpPr/>
-          <p:nvPr/>
-        </p:nvSpPr>
-        <p:spPr>
-          <a:xfrm>
-            <a:off x="868680" y="1417320"/>
-            <a:ext cx="6675120" cy="4434840"/>
+            <a:endParaRPr lang="en-US" sz="3400" dirty="0"/>
+          </a:p>
+        </p:txBody>
+      </p:sp>
+      <p:sp>
+        <p:nvSpPr>
+          <p:cNvPr id="11" name="Text 9"/>
+          <p:cNvSpPr/>
+          <p:nvPr/>
+        </p:nvSpPr>
+        <p:spPr>
+          <a:xfrm>
+            <a:off x="868680" y="1508760"/>
+            <a:ext cx="6537960" cy="4160520"/>
           </a:xfrm>
           <a:prstGeom prst="rect">
             <a:avLst/>
@@ -14108,7 +15312,7 @@
           <a:lstStyle/>
           <a:p>
             <a:r>
-              <a:rPr lang="en-US" sz="1700" dirty="0">
+              <a:rPr lang="en-US" sz="2100" dirty="0">
                 <a:solidFill>
                   <a:srgbClr val="17364A"/>
                 </a:solidFill>
@@ -14116,13 +15320,13 @@
                 <a:ea typeface="Aptos" pitchFamily="34" charset="-122"/>
                 <a:cs typeface="Aptos" pitchFamily="34" charset="-120"/>
               </a:rPr>
-              <a:t>A city health department considers using an AI tool to help prioritize outreach for maternal and child health services.</a:t>
-            </a:r>
-            <a:endParaRPr lang="en-US" sz="1700" dirty="0"/>
-          </a:p>
-          <a:p>
-            <a:r>
-              <a:rPr lang="en-US" sz="1700" dirty="0">
+              <a:t>A city health department considers using an AI tool to help prioritize outreach for maternal and child.</a:t>
+            </a:r>
+            <a:endParaRPr lang="en-US" sz="2100" dirty="0"/>
+          </a:p>
+          <a:p>
+            <a:r>
+              <a:rPr lang="en-US" sz="2100" dirty="0">
                 <a:solidFill>
                   <a:srgbClr val="17364A"/>
                 </a:solidFill>
@@ -14130,13 +15334,13 @@
                 <a:ea typeface="Aptos" pitchFamily="34" charset="-122"/>
                 <a:cs typeface="Aptos" pitchFamily="34" charset="-120"/>
               </a:rPr>
-              <a:t>The model would use program, demographic, and service utilization data to identify neighborhoods where outreach may be.</a:t>
-            </a:r>
-            <a:endParaRPr lang="en-US" sz="1700" dirty="0"/>
-          </a:p>
-          <a:p>
-            <a:r>
-              <a:rPr lang="en-US" sz="1700" dirty="0">
+              <a:t>The model would use program, demographic, and service utilization data to identify neighborhoods where.</a:t>
+            </a:r>
+            <a:endParaRPr lang="en-US" sz="2100" dirty="0"/>
+          </a:p>
+          <a:p>
+            <a:r>
+              <a:rPr lang="en-US" sz="2100" dirty="0">
                 <a:solidFill>
                   <a:srgbClr val="17364A"/>
                 </a:solidFill>
@@ -14144,29 +15348,15 @@
                 <a:ea typeface="Aptos" pitchFamily="34" charset="-122"/>
                 <a:cs typeface="Aptos" pitchFamily="34" charset="-120"/>
               </a:rPr>
-              <a:t>Although the goal is supportive, communities may worry that the tool could stigmatize neighborhoods, miss families not.</a:t>
-            </a:r>
-            <a:endParaRPr lang="en-US" sz="1700" dirty="0"/>
-          </a:p>
-          <a:p>
-            <a:r>
-              <a:rPr lang="en-US" sz="1700" dirty="0">
-                <a:solidFill>
-                  <a:srgbClr val="17364A"/>
-                </a:solidFill>
-                <a:latin typeface="Aptos" pitchFamily="34" charset="0"/>
-                <a:ea typeface="Aptos" pitchFamily="34" charset="-122"/>
-                <a:cs typeface="Aptos" pitchFamily="34" charset="-120"/>
-              </a:rPr>
-              <a:t>A participatory governance plan would involve community-based organizations, maternal health advocates, service users, and.</a:t>
-            </a:r>
-            <a:endParaRPr lang="en-US" sz="1700" dirty="0"/>
-          </a:p>
-        </p:txBody>
-      </p:sp>
-      <p:sp>
-        <p:nvSpPr>
-          <p:cNvPr id="11" name="Shape 9"/>
+              <a:t>Although the goal is supportive, communities may worry that the tool could stigmatize neighborhoods,.</a:t>
+            </a:r>
+            <a:endParaRPr lang="en-US" sz="2100" dirty="0"/>
+          </a:p>
+        </p:txBody>
+      </p:sp>
+      <p:sp>
+        <p:nvSpPr>
+          <p:cNvPr id="12" name="Shape 10"/>
           <p:cNvSpPr/>
           <p:nvPr/>
         </p:nvSpPr>
@@ -14193,14 +15383,14 @@
       </p:sp>
       <p:sp>
         <p:nvSpPr>
-          <p:cNvPr id="12" name="Text 10"/>
+          <p:cNvPr id="13" name="Text 11"/>
           <p:cNvSpPr/>
           <p:nvPr/>
         </p:nvSpPr>
         <p:spPr>
           <a:xfrm>
             <a:off x="8074152" y="1563624"/>
-            <a:ext cx="2825496" cy="201168"/>
+            <a:ext cx="2825496" cy="256032"/>
           </a:xfrm>
           <a:prstGeom prst="rect">
             <a:avLst/>
@@ -14216,7 +15406,7 @@
               <a:buNone/>
             </a:pPr>
             <a:r>
-              <a:rPr lang="en-US" sz="950" b="1" dirty="0">
+              <a:rPr lang="en-US" sz="1300" b="1" dirty="0">
                 <a:solidFill>
                   <a:srgbClr val="0068B7"/>
                 </a:solidFill>
@@ -14226,20 +15416,20 @@
               </a:rPr>
               <a:t>Key idea</a:t>
             </a:r>
-            <a:endParaRPr lang="en-US" sz="950" dirty="0"/>
-          </a:p>
-        </p:txBody>
-      </p:sp>
-      <p:sp>
-        <p:nvSpPr>
-          <p:cNvPr id="13" name="Text 11"/>
-          <p:cNvSpPr/>
-          <p:nvPr/>
-        </p:nvSpPr>
-        <p:spPr>
-          <a:xfrm>
-            <a:off x="8074152" y="1856232"/>
-            <a:ext cx="2825496" cy="1261872"/>
+            <a:endParaRPr lang="en-US" sz="1300" dirty="0"/>
+          </a:p>
+        </p:txBody>
+      </p:sp>
+      <p:sp>
+        <p:nvSpPr>
+          <p:cNvPr id="14" name="Text 12"/>
+          <p:cNvSpPr/>
+          <p:nvPr/>
+        </p:nvSpPr>
+        <p:spPr>
+          <a:xfrm>
+            <a:off x="8074152" y="1920240"/>
+            <a:ext cx="2825496" cy="1188720"/>
           </a:xfrm>
           <a:prstGeom prst="rect">
             <a:avLst/>
@@ -14257,7 +15447,7 @@
               <a:buNone/>
             </a:pPr>
             <a:r>
-              <a:rPr lang="en-US" sz="1250" dirty="0">
+              <a:rPr lang="en-US" sz="1550" dirty="0">
                 <a:solidFill>
                   <a:srgbClr val="17364A"/>
                 </a:solidFill>
@@ -14265,15 +15455,15 @@
                 <a:ea typeface="Aptos" pitchFamily="34" charset="-122"/>
                 <a:cs typeface="Aptos" pitchFamily="34" charset="-120"/>
               </a:rPr>
-              <a:t>A city health department considers using an AI tool to help prioritize outreach for maternal and child health services.</a:t>
-            </a:r>
-            <a:endParaRPr lang="en-US" sz="1250" dirty="0"/>
-          </a:p>
-        </p:txBody>
-      </p:sp>
-      <p:sp>
-        <p:nvSpPr>
-          <p:cNvPr id="14" name="Shape 12"/>
+              <a:t>A city health department considers using an AI tool to help prioritize outreach for maternal and child.</a:t>
+            </a:r>
+            <a:endParaRPr lang="en-US" sz="1550" dirty="0"/>
+          </a:p>
+        </p:txBody>
+      </p:sp>
+      <p:sp>
+        <p:nvSpPr>
+          <p:cNvPr id="15" name="Shape 13"/>
           <p:cNvSpPr/>
           <p:nvPr/>
         </p:nvSpPr>
@@ -14300,14 +15490,14 @@
       </p:sp>
       <p:sp>
         <p:nvSpPr>
-          <p:cNvPr id="15" name="Text 13"/>
+          <p:cNvPr id="16" name="Text 14"/>
           <p:cNvSpPr/>
           <p:nvPr/>
         </p:nvSpPr>
         <p:spPr>
           <a:xfrm>
             <a:off x="8074152" y="3666744"/>
-            <a:ext cx="2825496" cy="201168"/>
+            <a:ext cx="2825496" cy="256032"/>
           </a:xfrm>
           <a:prstGeom prst="rect">
             <a:avLst/>
@@ -14323,7 +15513,7 @@
               <a:buNone/>
             </a:pPr>
             <a:r>
-              <a:rPr lang="en-US" sz="950" b="1" dirty="0">
+              <a:rPr lang="en-US" sz="1300" b="1" dirty="0">
                 <a:solidFill>
                   <a:srgbClr val="0068B7"/>
                 </a:solidFill>
@@ -14333,20 +15523,20 @@
               </a:rPr>
               <a:t>Use this for</a:t>
             </a:r>
-            <a:endParaRPr lang="en-US" sz="950" dirty="0"/>
-          </a:p>
-        </p:txBody>
-      </p:sp>
-      <p:sp>
-        <p:nvSpPr>
-          <p:cNvPr id="16" name="Text 14"/>
-          <p:cNvSpPr/>
-          <p:nvPr/>
-        </p:nvSpPr>
-        <p:spPr>
-          <a:xfrm>
-            <a:off x="8074152" y="3959352"/>
-            <a:ext cx="2825496" cy="1170432"/>
+            <a:endParaRPr lang="en-US" sz="1300" dirty="0"/>
+          </a:p>
+        </p:txBody>
+      </p:sp>
+      <p:sp>
+        <p:nvSpPr>
+          <p:cNvPr id="17" name="Text 15"/>
+          <p:cNvSpPr/>
+          <p:nvPr/>
+        </p:nvSpPr>
+        <p:spPr>
+          <a:xfrm>
+            <a:off x="8074152" y="4023360"/>
+            <a:ext cx="2825496" cy="1097280"/>
           </a:xfrm>
           <a:prstGeom prst="rect">
             <a:avLst/>
@@ -14364,7 +15554,7 @@
               <a:buNone/>
             </a:pPr>
             <a:r>
-              <a:rPr lang="en-US" sz="1250" dirty="0">
+              <a:rPr lang="en-US" sz="1550" dirty="0">
                 <a:solidFill>
                   <a:srgbClr val="17364A"/>
                 </a:solidFill>
@@ -14374,7 +15564,7 @@
               </a:rPr>
               <a:t>Connect the concept to public health decisions, safeguards, documentation, or implementation work.</a:t>
             </a:r>
-            <a:endParaRPr lang="en-US" sz="1250" dirty="0"/>
+            <a:endParaRPr lang="en-US" sz="1550" dirty="0"/>
           </a:p>
         </p:txBody>
       </p:sp>
